--- a/presentation/Phoenix_Drone_Graphic_Variations.pptx
+++ b/presentation/Phoenix_Drone_Graphic_Variations.pptx
@@ -9,6 +9,9 @@
     <p:sldId id="257" r:id="rId8"/>
     <p:sldId id="258" r:id="rId9"/>
     <p:sldId id="259" r:id="rId10"/>
+    <p:sldId id="260" r:id="rId11"/>
+    <p:sldId id="261" r:id="rId12"/>
+    <p:sldId id="262" r:id="rId13"/>
   </p:sldIdLst>
   <p:sldSz cx="12191695" cy="6858000" type="screen4x3"/>
   <p:notesSz cx="6858000" cy="9144000"/>
@@ -3142,7 +3145,7 @@
         </p:nvSpPr>
         <p:spPr>
           <a:xfrm>
-            <a:off x="731520" y="640080"/>
+            <a:off x="731520" y="548640"/>
             <a:ext cx="9144000" cy="274320"/>
           </a:xfrm>
           <a:prstGeom prst="rect">
@@ -3162,7 +3165,7 @@
                   <a:srgbClr val="EA580C"/>
                 </a:solidFill>
               </a:rPr>
-              <a:t>PHOENIX X · HARDWARE PRESENTATION ASSET PACK</a:t>
+              <a:t>PHOENIX X · HARDWARE PRESENTATION GRAPHIC MASTER PACK</a:t>
             </a:r>
           </a:p>
         </p:txBody>
@@ -3175,8 +3178,8 @@
         </p:nvSpPr>
         <p:spPr>
           <a:xfrm>
-            <a:off x="731520" y="960120"/>
-            <a:ext cx="10058400" cy="731520"/>
+            <a:off x="731520" y="868680"/>
+            <a:ext cx="10515600" cy="731520"/>
           </a:xfrm>
           <a:prstGeom prst="rect">
             <a:avLst/>
@@ -3190,12 +3193,12 @@
           <a:lstStyle/>
           <a:p>
             <a:r>
-              <a:rPr b="1" sz="2800">
+              <a:rPr b="1" sz="2600">
                 <a:solidFill>
                   <a:srgbClr val="FFFFFF"/>
                 </a:solidFill>
               </a:rPr>
-              <a:t>High-Resolution Airframe Graphics &amp; Callouts</a:t>
+              <a:t>Self-Explanatory Aerospace Infographics &amp; Drone Renders</a:t>
             </a:r>
           </a:p>
         </p:txBody>
@@ -3208,8 +3211,8 @@
         </p:nvSpPr>
         <p:spPr>
           <a:xfrm>
-            <a:off x="731520" y="1691640"/>
-            <a:ext cx="10058400" cy="365760"/>
+            <a:off x="731520" y="1600200"/>
+            <a:ext cx="10515600" cy="365760"/>
           </a:xfrm>
           <a:prstGeom prst="rect">
             <a:avLst/>
@@ -3223,12 +3226,12 @@
           <a:lstStyle/>
           <a:p>
             <a:r>
-              <a:rPr sz="1300">
+              <a:rPr sz="1250">
                 <a:solidFill>
                   <a:srgbClr val="E2E8F0"/>
                 </a:solidFill>
               </a:rPr>
-              <a:t>Studio 3D tactical renders with interactive numbered beacons, aligned 1:1 with SIH26177 Deck v2.</a:t>
+              <a:t>A complete visual asset library for SIH26177: 3D product callouts, in-flight dual-beam perception, and NDRF tactical tablet routing.</a:t>
             </a:r>
           </a:p>
         </p:txBody>
@@ -3241,8 +3244,8 @@
         </p:nvSpPr>
         <p:spPr>
           <a:xfrm>
-            <a:off x="731520" y="2377440"/>
-            <a:ext cx="3337560" cy="3474720"/>
+            <a:off x="731520" y="2240280"/>
+            <a:ext cx="3364992" cy="2011680"/>
           </a:xfrm>
           <a:prstGeom prst="roundRect">
             <a:avLst/>
@@ -3250,7 +3253,7 @@
           <a:solidFill>
             <a:srgbClr val="1E293B"/>
           </a:solidFill>
-          <a:ln w="15240">
+          <a:ln w="12700">
             <a:solidFill>
               <a:srgbClr val="334155"/>
             </a:solidFill>
@@ -3271,23 +3274,23 @@
           </a:fontRef>
         </p:style>
         <p:txBody>
-          <a:bodyPr rtlCol="0" anchor="t" lIns="274320" rIns="274320" tIns="274320"/>
-          <a:lstStyle/>
-          <a:p>
-            <a:pPr algn="ctr"/>
-            <a:r>
-              <a:rPr b="1" sz="1200">
+          <a:bodyPr rtlCol="0" anchor="t" lIns="228600" rIns="228600" tIns="201168"/>
+          <a:lstStyle/>
+          <a:p>
+            <a:pPr algn="ctr"/>
+            <a:r>
+              <a:rPr b="1" sz="1050">
                 <a:solidFill>
                   <a:srgbClr val="0284C7"/>
                 </a:solidFill>
               </a:rPr>
-              <a:t>SLIDE 2: TECHNICAL APPROACH
+              <a:t>SLIDE 2: HARDWARE SCHEMATIC
 </a:t>
             </a:r>
           </a:p>
           <a:p>
             <a:r>
-              <a:rPr b="1" sz="1500">
+              <a:rPr b="1" sz="1250">
                 <a:solidFill>
                   <a:srgbClr val="FFFFFF"/>
                 </a:solidFill>
@@ -3298,12 +3301,12 @@
           </a:p>
           <a:p>
             <a:r>
-              <a:rPr sz="1100">
+              <a:rPr sz="950">
                 <a:solidFill>
                   <a:srgbClr val="E2E8F0"/>
                 </a:solidFill>
               </a:rPr>
-              <a:t>Dual-stream EO/IR, QRB2210 Linux MPU, STM32U5 Zephyr RTOS, 17-byte LoRa packet, ToF altimeter.</a:t>
+              <a:t>3D Studio render with 6 interactive numbered beacon pins.</a:t>
             </a:r>
           </a:p>
         </p:txBody>
@@ -3316,8 +3319,8 @@
         </p:nvSpPr>
         <p:spPr>
           <a:xfrm>
-            <a:off x="731520" y="2377440"/>
-            <a:ext cx="3337560" cy="73152"/>
+            <a:off x="731520" y="2240280"/>
+            <a:ext cx="3364992" cy="54864"/>
           </a:xfrm>
           <a:prstGeom prst="roundRect">
             <a:avLst/>
@@ -3359,8 +3362,8 @@
         </p:nvSpPr>
         <p:spPr>
           <a:xfrm>
-            <a:off x="4297680" y="2377440"/>
-            <a:ext cx="3337560" cy="3474720"/>
+            <a:off x="4315968" y="2240280"/>
+            <a:ext cx="3364992" cy="2011680"/>
           </a:xfrm>
           <a:prstGeom prst="roundRect">
             <a:avLst/>
@@ -3368,7 +3371,7 @@
           <a:solidFill>
             <a:srgbClr val="1E293B"/>
           </a:solidFill>
-          <a:ln w="15240">
+          <a:ln w="12700">
             <a:solidFill>
               <a:srgbClr val="334155"/>
             </a:solidFill>
@@ -3389,12 +3392,12 @@
           </a:fontRef>
         </p:style>
         <p:txBody>
-          <a:bodyPr rtlCol="0" anchor="t" lIns="274320" rIns="274320" tIns="274320"/>
-          <a:lstStyle/>
-          <a:p>
-            <a:pPr algn="ctr"/>
-            <a:r>
-              <a:rPr b="1" sz="1200">
+          <a:bodyPr rtlCol="0" anchor="t" lIns="228600" rIns="228600" tIns="201168"/>
+          <a:lstStyle/>
+          <a:p>
+            <a:pPr algn="ctr"/>
+            <a:r>
+              <a:rPr b="1" sz="1050">
                 <a:solidFill>
                   <a:srgbClr val="0D9488"/>
                 </a:solidFill>
@@ -3405,7 +3408,7 @@
           </a:p>
           <a:p>
             <a:r>
-              <a:rPr b="1" sz="1500">
+              <a:rPr b="1" sz="1250">
                 <a:solidFill>
                   <a:srgbClr val="FFFFFF"/>
                 </a:solidFill>
@@ -3416,12 +3419,12 @@
           </a:p>
           <a:p>
             <a:r>
-              <a:rPr sz="1100">
+              <a:rPr sz="950">
                 <a:solidFill>
                   <a:srgbClr val="E2E8F0"/>
                 </a:solidFill>
               </a:rPr>
-              <a:t>DGCA 1.58 kg AUW, Bouabdallah β ≥ 2.0 sizing laws, WPC 868 MHz compliance, sub-5W compute.</a:t>
+              <a:t>DGCA 1.58 kg AUW, Bouabdallah β ≥ 2.0 sizing, sub-5W compute.</a:t>
             </a:r>
           </a:p>
         </p:txBody>
@@ -3434,8 +3437,8 @@
         </p:nvSpPr>
         <p:spPr>
           <a:xfrm>
-            <a:off x="4297680" y="2377440"/>
-            <a:ext cx="3337560" cy="73152"/>
+            <a:off x="4315968" y="2240280"/>
+            <a:ext cx="3364992" cy="54864"/>
           </a:xfrm>
           <a:prstGeom prst="roundRect">
             <a:avLst/>
@@ -3477,8 +3480,8 @@
         </p:nvSpPr>
         <p:spPr>
           <a:xfrm>
-            <a:off x="7863840" y="2377440"/>
-            <a:ext cx="3337560" cy="3474720"/>
+            <a:off x="7900416" y="2240280"/>
+            <a:ext cx="3364992" cy="2011680"/>
           </a:xfrm>
           <a:prstGeom prst="roundRect">
             <a:avLst/>
@@ -3486,7 +3489,7 @@
           <a:solidFill>
             <a:srgbClr val="1E293B"/>
           </a:solidFill>
-          <a:ln w="15240">
+          <a:ln w="12700">
             <a:solidFill>
               <a:srgbClr val="334155"/>
             </a:solidFill>
@@ -3507,39 +3510,39 @@
           </a:fontRef>
         </p:style>
         <p:txBody>
-          <a:bodyPr rtlCol="0" anchor="t" lIns="274320" rIns="274320" tIns="274320"/>
-          <a:lstStyle/>
-          <a:p>
-            <a:pPr algn="ctr"/>
-            <a:r>
-              <a:rPr b="1" sz="1200">
+          <a:bodyPr rtlCol="0" anchor="t" lIns="228600" rIns="228600" tIns="201168"/>
+          <a:lstStyle/>
+          <a:p>
+            <a:pPr algn="ctr"/>
+            <a:r>
+              <a:rPr b="1" sz="1050">
                 <a:solidFill>
                   <a:srgbClr val="EA580C"/>
                 </a:solidFill>
               </a:rPr>
-              <a:t>SLIDE 4: MISSION IMPACT
+              <a:t>SLIDE 4: IN-FLIGHT DUAL-BEAM
 </a:t>
             </a:r>
           </a:p>
           <a:p>
             <a:r>
-              <a:rPr b="1" sz="1500">
+              <a:rPr b="1" sz="1250">
                 <a:solidFill>
                   <a:srgbClr val="FFFFFF"/>
                 </a:solidFill>
               </a:rPr>
-              <a:t>Golden 72h Search Deliverables
+              <a:t>Optical + Radiometric LWIR
 </a:t>
             </a:r>
           </a:p>
           <a:p>
             <a:r>
-              <a:rPr sz="1100">
+              <a:rPr sz="950">
                 <a:solidFill>
                   <a:srgbClr val="E2E8F0"/>
                 </a:solidFill>
               </a:rPr>
-              <a:t>Smoke penetration, Dijkstra safe pedestrian routing, WGS-84 ray-casting, sub-5 min response.</a:t>
+              <a:t>Hero in-action render: Cyan optical + orange 37°C thermal lock.</a:t>
             </a:r>
           </a:p>
         </p:txBody>
@@ -3552,14 +3555,368 @@
         </p:nvSpPr>
         <p:spPr>
           <a:xfrm>
-            <a:off x="7863840" y="2377440"/>
-            <a:ext cx="3337560" cy="73152"/>
+            <a:off x="7900416" y="2240280"/>
+            <a:ext cx="3364992" cy="54864"/>
           </a:xfrm>
           <a:prstGeom prst="roundRect">
             <a:avLst/>
           </a:prstGeom>
           <a:solidFill>
             <a:srgbClr val="EA580C"/>
+          </a:solidFill>
+          <a:ln>
+            <a:noFill/>
+          </a:ln>
+        </p:spPr>
+        <p:style>
+          <a:lnRef idx="1">
+            <a:schemeClr val="accent1"/>
+          </a:lnRef>
+          <a:fillRef idx="3">
+            <a:schemeClr val="accent1"/>
+          </a:fillRef>
+          <a:effectRef idx="2">
+            <a:schemeClr val="accent1"/>
+          </a:effectRef>
+          <a:fontRef idx="minor">
+            <a:schemeClr val="lt1"/>
+          </a:fontRef>
+        </p:style>
+        <p:txBody>
+          <a:bodyPr rtlCol="0" anchor="ctr"/>
+          <a:lstStyle/>
+          <a:p>
+            <a:pPr algn="ctr"/>
+          </a:p>
+        </p:txBody>
+      </p:sp>
+      <p:sp>
+        <p:nvSpPr>
+          <p:cNvPr id="12" name="Rounded Rectangle 11"/>
+          <p:cNvSpPr/>
+          <p:nvPr/>
+        </p:nvSpPr>
+        <p:spPr>
+          <a:xfrm>
+            <a:off x="731520" y="4434840"/>
+            <a:ext cx="3364992" cy="2011680"/>
+          </a:xfrm>
+          <a:prstGeom prst="roundRect">
+            <a:avLst/>
+          </a:prstGeom>
+          <a:solidFill>
+            <a:srgbClr val="1E293B"/>
+          </a:solidFill>
+          <a:ln w="12700">
+            <a:solidFill>
+              <a:srgbClr val="334155"/>
+            </a:solidFill>
+          </a:ln>
+        </p:spPr>
+        <p:style>
+          <a:lnRef idx="1">
+            <a:schemeClr val="accent1"/>
+          </a:lnRef>
+          <a:fillRef idx="3">
+            <a:schemeClr val="accent1"/>
+          </a:fillRef>
+          <a:effectRef idx="2">
+            <a:schemeClr val="accent1"/>
+          </a:effectRef>
+          <a:fontRef idx="minor">
+            <a:schemeClr val="lt1"/>
+          </a:fontRef>
+        </p:style>
+        <p:txBody>
+          <a:bodyPr rtlCol="0" anchor="t" lIns="228600" rIns="228600" tIns="201168"/>
+          <a:lstStyle/>
+          <a:p>
+            <a:pPr algn="ctr"/>
+            <a:r>
+              <a:rPr b="1" sz="1050">
+                <a:solidFill>
+                  <a:srgbClr val="7C3AED"/>
+                </a:solidFill>
+              </a:rPr>
+              <a:t>SLIDE 5: 5-MINUTE SORTIE PIPELINE
+</a:t>
+            </a:r>
+          </a:p>
+          <a:p>
+            <a:r>
+              <a:rPr b="1" sz="1250">
+                <a:solidFill>
+                  <a:srgbClr val="FFFFFF"/>
+                </a:solidFill>
+              </a:rPr>
+              <a:t>Autonomous Mission Flow
+</a:t>
+            </a:r>
+          </a:p>
+          <a:p>
+            <a:r>
+              <a:rPr sz="950">
+                <a:solidFill>
+                  <a:srgbClr val="E2E8F0"/>
+                </a:solidFill>
+              </a:rPr>
+              <a:t>Horizontal 5-step chevron from unboxing to safe route.</a:t>
+            </a:r>
+          </a:p>
+        </p:txBody>
+      </p:sp>
+      <p:sp>
+        <p:nvSpPr>
+          <p:cNvPr id="13" name="Rounded Rectangle 12"/>
+          <p:cNvSpPr/>
+          <p:nvPr/>
+        </p:nvSpPr>
+        <p:spPr>
+          <a:xfrm>
+            <a:off x="731520" y="4434840"/>
+            <a:ext cx="3364992" cy="54864"/>
+          </a:xfrm>
+          <a:prstGeom prst="roundRect">
+            <a:avLst/>
+          </a:prstGeom>
+          <a:solidFill>
+            <a:srgbClr val="7C3AED"/>
+          </a:solidFill>
+          <a:ln>
+            <a:noFill/>
+          </a:ln>
+        </p:spPr>
+        <p:style>
+          <a:lnRef idx="1">
+            <a:schemeClr val="accent1"/>
+          </a:lnRef>
+          <a:fillRef idx="3">
+            <a:schemeClr val="accent1"/>
+          </a:fillRef>
+          <a:effectRef idx="2">
+            <a:schemeClr val="accent1"/>
+          </a:effectRef>
+          <a:fontRef idx="minor">
+            <a:schemeClr val="lt1"/>
+          </a:fontRef>
+        </p:style>
+        <p:txBody>
+          <a:bodyPr rtlCol="0" anchor="ctr"/>
+          <a:lstStyle/>
+          <a:p>
+            <a:pPr algn="ctr"/>
+          </a:p>
+        </p:txBody>
+      </p:sp>
+      <p:sp>
+        <p:nvSpPr>
+          <p:cNvPr id="14" name="Rounded Rectangle 13"/>
+          <p:cNvSpPr/>
+          <p:nvPr/>
+        </p:nvSpPr>
+        <p:spPr>
+          <a:xfrm>
+            <a:off x="4315968" y="4434840"/>
+            <a:ext cx="3364992" cy="2011680"/>
+          </a:xfrm>
+          <a:prstGeom prst="roundRect">
+            <a:avLst/>
+          </a:prstGeom>
+          <a:solidFill>
+            <a:srgbClr val="1E293B"/>
+          </a:solidFill>
+          <a:ln w="12700">
+            <a:solidFill>
+              <a:srgbClr val="334155"/>
+            </a:solidFill>
+          </a:ln>
+        </p:spPr>
+        <p:style>
+          <a:lnRef idx="1">
+            <a:schemeClr val="accent1"/>
+          </a:lnRef>
+          <a:fillRef idx="3">
+            <a:schemeClr val="accent1"/>
+          </a:fillRef>
+          <a:effectRef idx="2">
+            <a:schemeClr val="accent1"/>
+          </a:effectRef>
+          <a:fontRef idx="minor">
+            <a:schemeClr val="lt1"/>
+          </a:fontRef>
+        </p:style>
+        <p:txBody>
+          <a:bodyPr rtlCol="0" anchor="t" lIns="228600" rIns="228600" tIns="201168"/>
+          <a:lstStyle/>
+          <a:p>
+            <a:pPr algn="ctr"/>
+            <a:r>
+              <a:rPr b="1" sz="1050">
+                <a:solidFill>
+                  <a:srgbClr val="0D9488"/>
+                </a:solidFill>
+              </a:rPr>
+              <a:t>SLIDE 6: FIRST RESPONDER GCS
+</a:t>
+            </a:r>
+          </a:p>
+          <a:p>
+            <a:r>
+              <a:rPr b="1" sz="1250">
+                <a:solidFill>
+                  <a:srgbClr val="FFFFFF"/>
+                </a:solidFill>
+              </a:rPr>
+              <a:t>NDRF Tactical Tablet Field Action
+</a:t>
+            </a:r>
+          </a:p>
+          <a:p>
+            <a:r>
+              <a:rPr sz="950">
+                <a:solidFill>
+                  <a:srgbClr val="E2E8F0"/>
+                </a:solidFill>
+              </a:rPr>
+              <a:t>Hazard-aware Dijkstra safe rescue route around 11kV wires.</a:t>
+            </a:r>
+          </a:p>
+        </p:txBody>
+      </p:sp>
+      <p:sp>
+        <p:nvSpPr>
+          <p:cNvPr id="15" name="Rounded Rectangle 14"/>
+          <p:cNvSpPr/>
+          <p:nvPr/>
+        </p:nvSpPr>
+        <p:spPr>
+          <a:xfrm>
+            <a:off x="4315968" y="4434840"/>
+            <a:ext cx="3364992" cy="54864"/>
+          </a:xfrm>
+          <a:prstGeom prst="roundRect">
+            <a:avLst/>
+          </a:prstGeom>
+          <a:solidFill>
+            <a:srgbClr val="0D9488"/>
+          </a:solidFill>
+          <a:ln>
+            <a:noFill/>
+          </a:ln>
+        </p:spPr>
+        <p:style>
+          <a:lnRef idx="1">
+            <a:schemeClr val="accent1"/>
+          </a:lnRef>
+          <a:fillRef idx="3">
+            <a:schemeClr val="accent1"/>
+          </a:fillRef>
+          <a:effectRef idx="2">
+            <a:schemeClr val="accent1"/>
+          </a:effectRef>
+          <a:fontRef idx="minor">
+            <a:schemeClr val="lt1"/>
+          </a:fontRef>
+        </p:style>
+        <p:txBody>
+          <a:bodyPr rtlCol="0" anchor="ctr"/>
+          <a:lstStyle/>
+          <a:p>
+            <a:pPr algn="ctr"/>
+          </a:p>
+        </p:txBody>
+      </p:sp>
+      <p:sp>
+        <p:nvSpPr>
+          <p:cNvPr id="16" name="Rounded Rectangle 15"/>
+          <p:cNvSpPr/>
+          <p:nvPr/>
+        </p:nvSpPr>
+        <p:spPr>
+          <a:xfrm>
+            <a:off x="7900416" y="4434840"/>
+            <a:ext cx="3364992" cy="2011680"/>
+          </a:xfrm>
+          <a:prstGeom prst="roundRect">
+            <a:avLst/>
+          </a:prstGeom>
+          <a:solidFill>
+            <a:srgbClr val="1E293B"/>
+          </a:solidFill>
+          <a:ln w="12700">
+            <a:solidFill>
+              <a:srgbClr val="334155"/>
+            </a:solidFill>
+          </a:ln>
+        </p:spPr>
+        <p:style>
+          <a:lnRef idx="1">
+            <a:schemeClr val="accent1"/>
+          </a:lnRef>
+          <a:fillRef idx="3">
+            <a:schemeClr val="accent1"/>
+          </a:fillRef>
+          <a:effectRef idx="2">
+            <a:schemeClr val="accent1"/>
+          </a:effectRef>
+          <a:fontRef idx="minor">
+            <a:schemeClr val="lt1"/>
+          </a:fontRef>
+        </p:style>
+        <p:txBody>
+          <a:bodyPr rtlCol="0" anchor="t" lIns="228600" rIns="228600" tIns="201168"/>
+          <a:lstStyle/>
+          <a:p>
+            <a:pPr algn="ctr"/>
+            <a:r>
+              <a:rPr b="1" sz="1050">
+                <a:solidFill>
+                  <a:srgbClr val="E11D48"/>
+                </a:solidFill>
+              </a:rPr>
+              <a:t>SLIDE 7: PARADIGM COMPARISON
+</a:t>
+            </a:r>
+          </a:p>
+          <a:p>
+            <a:r>
+              <a:rPr b="1" sz="1250">
+                <a:solidFill>
+                  <a:srgbClr val="FFFFFF"/>
+                </a:solidFill>
+              </a:rPr>
+              <a:t>Foot Search vs. Phoenix X
+</a:t>
+            </a:r>
+          </a:p>
+          <a:p>
+            <a:r>
+              <a:rPr sz="950">
+                <a:solidFill>
+                  <a:srgbClr val="E2E8F0"/>
+                </a:solidFill>
+              </a:rPr>
+              <a:t>High-contrast split comparison proving operational disruption.</a:t>
+            </a:r>
+          </a:p>
+        </p:txBody>
+      </p:sp>
+      <p:sp>
+        <p:nvSpPr>
+          <p:cNvPr id="17" name="Rounded Rectangle 16"/>
+          <p:cNvSpPr/>
+          <p:nvPr/>
+        </p:nvSpPr>
+        <p:spPr>
+          <a:xfrm>
+            <a:off x="7900416" y="4434840"/>
+            <a:ext cx="3364992" cy="54864"/>
+          </a:xfrm>
+          <a:prstGeom prst="roundRect">
+            <a:avLst/>
+          </a:prstGeom>
+          <a:solidFill>
+            <a:srgbClr val="E11D48"/>
           </a:solidFill>
           <a:ln>
             <a:noFill/>
@@ -3656,8 +4013,8 @@
         </p:nvSpPr>
         <p:spPr>
           <a:xfrm>
-            <a:off x="548640" y="292608"/>
-            <a:ext cx="1691640" cy="402336"/>
+            <a:off x="548640" y="274320"/>
+            <a:ext cx="1691640" cy="384048"/>
           </a:xfrm>
           <a:prstGeom prst="roundRect">
             <a:avLst/>
@@ -3686,12 +4043,12 @@
           </a:fontRef>
         </p:style>
         <p:txBody>
-          <a:bodyPr rtlCol="0" anchor="ctr" wrap="none"/>
-          <a:lstStyle/>
-          <a:p>
-            <a:pPr algn="ctr"/>
-            <a:r>
-              <a:rPr sz="1000" b="1">
+          <a:bodyPr rtlCol="0" anchor="ctr"/>
+          <a:lstStyle/>
+          <a:p>
+            <a:pPr algn="ctr"/>
+            <a:r>
+              <a:rPr sz="950" b="1">
                 <a:solidFill>
                   <a:srgbClr val="1E293B"/>
                 </a:solidFill>
@@ -3710,8 +4067,8 @@
         </p:nvSpPr>
         <p:spPr>
           <a:xfrm>
-            <a:off x="2377440" y="256032"/>
-            <a:ext cx="6858000" cy="219456"/>
+            <a:off x="2377440" y="219456"/>
+            <a:ext cx="6949440" cy="219456"/>
           </a:xfrm>
           <a:prstGeom prst="rect">
             <a:avLst/>
@@ -3725,7 +4082,7 @@
           <a:lstStyle/>
           <a:p>
             <a:r>
-              <a:rPr sz="1000" b="1">
+              <a:rPr sz="950" b="1">
                 <a:solidFill>
                   <a:srgbClr val="EA580C"/>
                 </a:solidFill>
@@ -3744,8 +4101,8 @@
         </p:nvSpPr>
         <p:spPr>
           <a:xfrm>
-            <a:off x="2377440" y="475488"/>
-            <a:ext cx="6858000" cy="438912"/>
+            <a:off x="2377440" y="438912"/>
+            <a:ext cx="6949440" cy="411480"/>
           </a:xfrm>
           <a:prstGeom prst="rect">
             <a:avLst/>
@@ -3759,7 +4116,7 @@
           <a:lstStyle/>
           <a:p>
             <a:r>
-              <a:rPr sz="1800" b="1">
+              <a:rPr sz="1700" b="1">
                 <a:solidFill>
                   <a:srgbClr val="0F172A"/>
                 </a:solidFill>
@@ -3778,7 +4135,7 @@
         </p:nvSpPr>
         <p:spPr>
           <a:xfrm>
-            <a:off x="9418320" y="320040"/>
+            <a:off x="9418320" y="274320"/>
             <a:ext cx="2194560" cy="384048"/>
           </a:xfrm>
           <a:prstGeom prst="roundRect">
@@ -3813,7 +4170,7 @@
           <a:p>
             <a:pPr algn="ctr"/>
             <a:r>
-              <a:rPr sz="1000" b="1">
+              <a:rPr sz="950" b="1">
                 <a:solidFill>
                   <a:srgbClr val="0284C7"/>
                 </a:solidFill>
@@ -3942,7 +4299,7 @@
           <a:lstStyle/>
           <a:p>
             <a:r>
-              <a:rPr b="1" sz="1050">
+              <a:rPr b="1" sz="1000">
                 <a:solidFill>
                   <a:srgbClr val="0F172A"/>
                 </a:solidFill>
@@ -3950,7 +4307,7 @@
               <a:t>TACTICAL RECONNAISSANCE AIRFRAME </a:t>
             </a:r>
             <a:r>
-              <a:rPr sz="1050">
+              <a:rPr sz="1000">
                 <a:solidFill>
                   <a:srgbClr val="64748B"/>
                 </a:solidFill>
@@ -4632,7 +4989,7 @@
           </a:p>
           <a:p>
             <a:r>
-              <a:rPr sz="1350" b="1">
+              <a:rPr sz="1300" b="1">
                 <a:solidFill>
                   <a:srgbClr val="0D9488"/>
                 </a:solidFill>
@@ -4707,7 +5064,7 @@
           </a:p>
           <a:p>
             <a:r>
-              <a:rPr sz="1350" b="1">
+              <a:rPr sz="1300" b="1">
                 <a:solidFill>
                   <a:srgbClr val="7C3AED"/>
                 </a:solidFill>
@@ -4782,7 +5139,7 @@
           </a:p>
           <a:p>
             <a:r>
-              <a:rPr sz="1350" b="1">
+              <a:rPr sz="1300" b="1">
                 <a:solidFill>
                   <a:srgbClr val="0284C7"/>
                 </a:solidFill>
@@ -5065,7 +5422,7 @@
                   <a:srgbClr val="334155"/>
                 </a:solidFill>
               </a:rPr>
-              <a:t>Fuses daylight contours with thermal core-emissivity (37.0°C biological lock). Rejects solar heat false positives.</a:t>
+              <a:t>Fuses visual contours with thermal emissivity (37.0°C biological lock). Rejects solar heat false positives.</a:t>
             </a:r>
           </a:p>
         </p:txBody>
@@ -6474,8 +6831,8 @@
         </p:nvSpPr>
         <p:spPr>
           <a:xfrm>
-            <a:off x="548640" y="292608"/>
-            <a:ext cx="1691640" cy="402336"/>
+            <a:off x="548640" y="274320"/>
+            <a:ext cx="1691640" cy="384048"/>
           </a:xfrm>
           <a:prstGeom prst="roundRect">
             <a:avLst/>
@@ -6504,12 +6861,12 @@
           </a:fontRef>
         </p:style>
         <p:txBody>
-          <a:bodyPr rtlCol="0" anchor="ctr" wrap="none"/>
-          <a:lstStyle/>
-          <a:p>
-            <a:pPr algn="ctr"/>
-            <a:r>
-              <a:rPr sz="1000" b="1">
+          <a:bodyPr rtlCol="0" anchor="ctr"/>
+          <a:lstStyle/>
+          <a:p>
+            <a:pPr algn="ctr"/>
+            <a:r>
+              <a:rPr sz="950" b="1">
                 <a:solidFill>
                   <a:srgbClr val="1E293B"/>
                 </a:solidFill>
@@ -6528,8 +6885,8 @@
         </p:nvSpPr>
         <p:spPr>
           <a:xfrm>
-            <a:off x="2377440" y="256032"/>
-            <a:ext cx="6858000" cy="219456"/>
+            <a:off x="2377440" y="219456"/>
+            <a:ext cx="6949440" cy="219456"/>
           </a:xfrm>
           <a:prstGeom prst="rect">
             <a:avLst/>
@@ -6543,7 +6900,7 @@
           <a:lstStyle/>
           <a:p>
             <a:r>
-              <a:rPr sz="1000" b="1">
+              <a:rPr sz="950" b="1">
                 <a:solidFill>
                   <a:srgbClr val="EA580C"/>
                 </a:solidFill>
@@ -6562,8 +6919,8 @@
         </p:nvSpPr>
         <p:spPr>
           <a:xfrm>
-            <a:off x="2377440" y="475488"/>
-            <a:ext cx="6858000" cy="438912"/>
+            <a:off x="2377440" y="438912"/>
+            <a:ext cx="6949440" cy="411480"/>
           </a:xfrm>
           <a:prstGeom prst="rect">
             <a:avLst/>
@@ -6577,7 +6934,7 @@
           <a:lstStyle/>
           <a:p>
             <a:r>
-              <a:rPr sz="1800" b="1">
+              <a:rPr sz="1700" b="1">
                 <a:solidFill>
                   <a:srgbClr val="0F172A"/>
                 </a:solidFill>
@@ -6596,7 +6953,7 @@
         </p:nvSpPr>
         <p:spPr>
           <a:xfrm>
-            <a:off x="9418320" y="320040"/>
+            <a:off x="9418320" y="274320"/>
             <a:ext cx="2194560" cy="384048"/>
           </a:xfrm>
           <a:prstGeom prst="roundRect">
@@ -6631,7 +6988,7 @@
           <a:p>
             <a:pPr algn="ctr"/>
             <a:r>
-              <a:rPr sz="1000" b="1">
+              <a:rPr sz="950" b="1">
                 <a:solidFill>
                   <a:srgbClr val="0D9488"/>
                 </a:solidFill>
@@ -6760,7 +7117,7 @@
           <a:lstStyle/>
           <a:p>
             <a:r>
-              <a:rPr b="1" sz="1050">
+              <a:rPr b="1" sz="1000">
                 <a:solidFill>
                   <a:srgbClr val="0F172A"/>
                 </a:solidFill>
@@ -6768,7 +7125,7 @@
               <a:t>TACTICAL RECONNAISSANCE AIRFRAME </a:t>
             </a:r>
             <a:r>
-              <a:rPr sz="1050">
+              <a:rPr sz="1000">
                 <a:solidFill>
                   <a:srgbClr val="64748B"/>
                 </a:solidFill>
@@ -7450,7 +7807,7 @@
           </a:p>
           <a:p>
             <a:r>
-              <a:rPr sz="1350" b="1">
+              <a:rPr sz="1300" b="1">
                 <a:solidFill>
                   <a:srgbClr val="0D9488"/>
                 </a:solidFill>
@@ -7525,7 +7882,7 @@
           </a:p>
           <a:p>
             <a:r>
-              <a:rPr sz="1350" b="1">
+              <a:rPr sz="1300" b="1">
                 <a:solidFill>
                   <a:srgbClr val="7C3AED"/>
                 </a:solidFill>
@@ -7600,7 +7957,7 @@
           </a:p>
           <a:p>
             <a:r>
-              <a:rPr sz="1350" b="1">
+              <a:rPr sz="1300" b="1">
                 <a:solidFill>
                   <a:srgbClr val="0284C7"/>
                 </a:solidFill>
@@ -9292,8 +9649,8 @@
         </p:nvSpPr>
         <p:spPr>
           <a:xfrm>
-            <a:off x="548640" y="292608"/>
-            <a:ext cx="1691640" cy="402336"/>
+            <a:off x="548640" y="274320"/>
+            <a:ext cx="1691640" cy="384048"/>
           </a:xfrm>
           <a:prstGeom prst="roundRect">
             <a:avLst/>
@@ -9322,12 +9679,12 @@
           </a:fontRef>
         </p:style>
         <p:txBody>
-          <a:bodyPr rtlCol="0" anchor="ctr" wrap="none"/>
-          <a:lstStyle/>
-          <a:p>
-            <a:pPr algn="ctr"/>
-            <a:r>
-              <a:rPr sz="1000" b="1">
+          <a:bodyPr rtlCol="0" anchor="ctr"/>
+          <a:lstStyle/>
+          <a:p>
+            <a:pPr algn="ctr"/>
+            <a:r>
+              <a:rPr sz="950" b="1">
                 <a:solidFill>
                   <a:srgbClr val="1E293B"/>
                 </a:solidFill>
@@ -9346,8 +9703,8 @@
         </p:nvSpPr>
         <p:spPr>
           <a:xfrm>
-            <a:off x="2377440" y="256032"/>
-            <a:ext cx="6858000" cy="219456"/>
+            <a:off x="2377440" y="219456"/>
+            <a:ext cx="6949440" cy="219456"/>
           </a:xfrm>
           <a:prstGeom prst="rect">
             <a:avLst/>
@@ -9361,13 +9718,13 @@
           <a:lstStyle/>
           <a:p>
             <a:r>
-              <a:rPr sz="1000" b="1">
+              <a:rPr sz="950" b="1">
                 <a:solidFill>
                   <a:srgbClr val="EA580C"/>
                 </a:solidFill>
                 <a:latin typeface="Calibri"/>
               </a:rPr>
-              <a:t>MISSION IMPACT · DISASTER TRIAGE &amp; EXTRACTION</a:t>
+              <a:t>MULTI-SPECTRAL PERCEPTION · REAL-TIME TARGET ACQUISITION</a:t>
             </a:r>
           </a:p>
         </p:txBody>
@@ -9380,8 +9737,8 @@
         </p:nvSpPr>
         <p:spPr>
           <a:xfrm>
-            <a:off x="2377440" y="475488"/>
-            <a:ext cx="6858000" cy="438912"/>
+            <a:off x="2377440" y="438912"/>
+            <a:ext cx="6949440" cy="411480"/>
           </a:xfrm>
           <a:prstGeom prst="rect">
             <a:avLst/>
@@ -9395,13 +9752,13 @@
           <a:lstStyle/>
           <a:p>
             <a:r>
-              <a:rPr sz="1800" b="1">
+              <a:rPr sz="1700" b="1">
                 <a:solidFill>
                   <a:srgbClr val="0F172A"/>
                 </a:solidFill>
                 <a:latin typeface="Calibri"/>
               </a:rPr>
-              <a:t>How Aerial Intelligence Compresses the Golden 72 Hours</a:t>
+              <a:t>How Phoenix X Detects Living Survivors Through Dense Smoke &amp; Debris</a:t>
             </a:r>
           </a:p>
         </p:txBody>
@@ -9414,7 +9771,7 @@
         </p:nvSpPr>
         <p:spPr>
           <a:xfrm>
-            <a:off x="9418320" y="320040"/>
+            <a:off x="9418320" y="274320"/>
             <a:ext cx="2194560" cy="384048"/>
           </a:xfrm>
           <a:prstGeom prst="roundRect">
@@ -9449,13 +9806,13 @@
           <a:p>
             <a:pPr algn="ctr"/>
             <a:r>
-              <a:rPr sz="1000" b="1">
+              <a:rPr sz="950" b="1">
                 <a:solidFill>
                   <a:srgbClr val="EA580C"/>
                 </a:solidFill>
                 <a:latin typeface="Calibri"/>
               </a:rPr>
-              <a:t>FIRST RESPONDER ADVANTAGE</a:t>
+              <a:t>DUAL-BEAM TACTICAL HUD</a:t>
             </a:r>
           </a:p>
         </p:txBody>
@@ -9469,7 +9826,7 @@
         <p:spPr>
           <a:xfrm>
             <a:off x="548640" y="1051560"/>
-            <a:ext cx="5943600" cy="5349240"/>
+            <a:ext cx="7132320" cy="5349240"/>
           </a:xfrm>
           <a:prstGeom prst="roundRect">
             <a:avLst/>
@@ -9512,93 +9869,9 @@
           </a:p>
         </p:txBody>
       </p:sp>
-      <p:sp>
-        <p:nvSpPr>
-          <p:cNvPr id="8" name="Rounded Rectangle 7"/>
-          <p:cNvSpPr/>
-          <p:nvPr/>
-        </p:nvSpPr>
-        <p:spPr>
-          <a:xfrm>
-            <a:off x="731520" y="1216152"/>
-            <a:ext cx="1463040" cy="54864"/>
-          </a:xfrm>
-          <a:prstGeom prst="roundRect">
-            <a:avLst/>
-          </a:prstGeom>
-          <a:solidFill>
-            <a:srgbClr val="EA580C"/>
-          </a:solidFill>
-          <a:ln>
-            <a:noFill/>
-          </a:ln>
-        </p:spPr>
-        <p:style>
-          <a:lnRef idx="1">
-            <a:schemeClr val="accent1"/>
-          </a:lnRef>
-          <a:fillRef idx="3">
-            <a:schemeClr val="accent1"/>
-          </a:fillRef>
-          <a:effectRef idx="2">
-            <a:schemeClr val="accent1"/>
-          </a:effectRef>
-          <a:fontRef idx="minor">
-            <a:schemeClr val="lt1"/>
-          </a:fontRef>
-        </p:style>
-        <p:txBody>
-          <a:bodyPr rtlCol="0" anchor="ctr"/>
-          <a:lstStyle/>
-          <a:p>
-            <a:pPr algn="ctr"/>
-          </a:p>
-        </p:txBody>
-      </p:sp>
-      <p:sp>
-        <p:nvSpPr>
-          <p:cNvPr id="9" name="TextBox 8"/>
-          <p:cNvSpPr txBox="1"/>
-          <p:nvPr/>
-        </p:nvSpPr>
-        <p:spPr>
-          <a:xfrm>
-            <a:off x="731520" y="1325880"/>
-            <a:ext cx="4114800" cy="274320"/>
-          </a:xfrm>
-          <a:prstGeom prst="rect">
-            <a:avLst/>
-          </a:prstGeom>
-          <a:noFill/>
-        </p:spPr>
-        <p:txBody>
-          <a:bodyPr wrap="none" lIns="0" rIns="0" tIns="0" bIns="0">
-            <a:spAutoFit/>
-          </a:bodyPr>
-          <a:lstStyle/>
-          <a:p>
-            <a:r>
-              <a:rPr b="1" sz="1050">
-                <a:solidFill>
-                  <a:srgbClr val="0F172A"/>
-                </a:solidFill>
-              </a:rPr>
-              <a:t>TACTICAL RECONNAISSANCE AIRFRAME </a:t>
-            </a:r>
-            <a:r>
-              <a:rPr sz="1050">
-                <a:solidFill>
-                  <a:srgbClr val="64748B"/>
-                </a:solidFill>
-              </a:rPr>
-              <a:t>· 3D PRODUCT SCHEMATIC</a:t>
-            </a:r>
-          </a:p>
-        </p:txBody>
-      </p:sp>
       <p:pic>
         <p:nvPicPr>
-          <p:cNvPr id="10" name="Picture 9" descr="phoenix_tactical_drone_render.jpg"/>
+          <p:cNvPr id="8" name="Picture 7" descr="phoenix_drone_dual_beam_action.jpg"/>
           <p:cNvPicPr>
             <a:picLocks noChangeAspect="1"/>
           </p:cNvPicPr>
@@ -9612,8 +9885,8 @@
         </p:blipFill>
         <p:spPr>
           <a:xfrm>
-            <a:off x="777240" y="1783080"/>
-            <a:ext cx="5486400" cy="3063240"/>
+            <a:off x="685800" y="1188720"/>
+            <a:ext cx="6858000" cy="5074920"/>
           </a:xfrm>
           <a:prstGeom prst="rect">
             <a:avLst/>
@@ -9622,833 +9895,14 @@
       </p:pic>
       <p:sp>
         <p:nvSpPr>
-          <p:cNvPr id="11" name="Oval 10"/>
-          <p:cNvSpPr/>
-          <p:nvPr/>
-        </p:nvSpPr>
-        <p:spPr>
-          <a:xfrm>
-            <a:off x="2529804" y="3695866"/>
-            <a:ext cx="402336" cy="402336"/>
-          </a:xfrm>
-          <a:prstGeom prst="ellipse">
-            <a:avLst/>
-          </a:prstGeom>
-          <a:solidFill>
-            <a:srgbClr val="EA580C">
-              <a:alpha val="35000"/>
-            </a:srgbClr>
-          </a:solidFill>
-          <a:ln>
-            <a:noFill/>
-          </a:ln>
-        </p:spPr>
-        <p:style>
-          <a:lnRef idx="1">
-            <a:schemeClr val="accent1"/>
-          </a:lnRef>
-          <a:fillRef idx="3">
-            <a:schemeClr val="accent1"/>
-          </a:fillRef>
-          <a:effectRef idx="2">
-            <a:schemeClr val="accent1"/>
-          </a:effectRef>
-          <a:fontRef idx="minor">
-            <a:schemeClr val="lt1"/>
-          </a:fontRef>
-        </p:style>
-        <p:txBody>
-          <a:bodyPr rtlCol="0" anchor="ctr"/>
-          <a:lstStyle/>
-          <a:p>
-            <a:pPr algn="ctr"/>
-          </a:p>
-        </p:txBody>
-      </p:sp>
-      <p:sp>
-        <p:nvSpPr>
-          <p:cNvPr id="12" name="Oval 11"/>
-          <p:cNvSpPr/>
-          <p:nvPr/>
-        </p:nvSpPr>
-        <p:spPr>
-          <a:xfrm>
-            <a:off x="2584668" y="3750730"/>
-            <a:ext cx="292608" cy="292608"/>
-          </a:xfrm>
-          <a:prstGeom prst="ellipse">
-            <a:avLst/>
-          </a:prstGeom>
-          <a:solidFill>
-            <a:srgbClr val="EA580C"/>
-          </a:solidFill>
-          <a:ln w="19050">
-            <a:solidFill>
-              <a:srgbClr val="FFFFFF"/>
-            </a:solidFill>
-          </a:ln>
-        </p:spPr>
-        <p:style>
-          <a:lnRef idx="1">
-            <a:schemeClr val="accent1"/>
-          </a:lnRef>
-          <a:fillRef idx="3">
-            <a:schemeClr val="accent1"/>
-          </a:fillRef>
-          <a:effectRef idx="2">
-            <a:schemeClr val="accent1"/>
-          </a:effectRef>
-          <a:fontRef idx="minor">
-            <a:schemeClr val="lt1"/>
-          </a:fontRef>
-        </p:style>
-        <p:txBody>
-          <a:bodyPr rtlCol="0" anchor="ctr"/>
-          <a:lstStyle/>
-          <a:p>
-            <a:pPr algn="ctr"/>
-            <a:r>
-              <a:rPr sz="1100" b="1">
-                <a:solidFill>
-                  <a:srgbClr val="FFFFFF"/>
-                </a:solidFill>
-                <a:latin typeface="Calibri"/>
-              </a:rPr>
-              <a:t>1</a:t>
-            </a:r>
-          </a:p>
-        </p:txBody>
-      </p:sp>
-      <p:sp>
-        <p:nvSpPr>
-          <p:cNvPr id="13" name="Oval 12"/>
-          <p:cNvSpPr/>
-          <p:nvPr/>
-        </p:nvSpPr>
-        <p:spPr>
-          <a:xfrm>
-            <a:off x="4284176" y="2140315"/>
-            <a:ext cx="402336" cy="402336"/>
-          </a:xfrm>
-          <a:prstGeom prst="ellipse">
-            <a:avLst/>
-          </a:prstGeom>
-          <a:solidFill>
-            <a:srgbClr val="0284C7">
-              <a:alpha val="35000"/>
-            </a:srgbClr>
-          </a:solidFill>
-          <a:ln>
-            <a:noFill/>
-          </a:ln>
-        </p:spPr>
-        <p:style>
-          <a:lnRef idx="1">
-            <a:schemeClr val="accent1"/>
-          </a:lnRef>
-          <a:fillRef idx="3">
-            <a:schemeClr val="accent1"/>
-          </a:fillRef>
-          <a:effectRef idx="2">
-            <a:schemeClr val="accent1"/>
-          </a:effectRef>
-          <a:fontRef idx="minor">
-            <a:schemeClr val="lt1"/>
-          </a:fontRef>
-        </p:style>
-        <p:txBody>
-          <a:bodyPr rtlCol="0" anchor="ctr"/>
-          <a:lstStyle/>
-          <a:p>
-            <a:pPr algn="ctr"/>
-          </a:p>
-        </p:txBody>
-      </p:sp>
-      <p:sp>
-        <p:nvSpPr>
-          <p:cNvPr id="14" name="Oval 13"/>
-          <p:cNvSpPr/>
-          <p:nvPr/>
-        </p:nvSpPr>
-        <p:spPr>
-          <a:xfrm>
-            <a:off x="4339040" y="2195179"/>
-            <a:ext cx="292608" cy="292608"/>
-          </a:xfrm>
-          <a:prstGeom prst="ellipse">
-            <a:avLst/>
-          </a:prstGeom>
-          <a:solidFill>
-            <a:srgbClr val="0284C7"/>
-          </a:solidFill>
-          <a:ln w="19050">
-            <a:solidFill>
-              <a:srgbClr val="FFFFFF"/>
-            </a:solidFill>
-          </a:ln>
-        </p:spPr>
-        <p:style>
-          <a:lnRef idx="1">
-            <a:schemeClr val="accent1"/>
-          </a:lnRef>
-          <a:fillRef idx="3">
-            <a:schemeClr val="accent1"/>
-          </a:fillRef>
-          <a:effectRef idx="2">
-            <a:schemeClr val="accent1"/>
-          </a:effectRef>
-          <a:fontRef idx="minor">
-            <a:schemeClr val="lt1"/>
-          </a:fontRef>
-        </p:style>
-        <p:txBody>
-          <a:bodyPr rtlCol="0" anchor="ctr"/>
-          <a:lstStyle/>
-          <a:p>
-            <a:pPr algn="ctr"/>
-            <a:r>
-              <a:rPr sz="1100" b="1">
-                <a:solidFill>
-                  <a:srgbClr val="FFFFFF"/>
-                </a:solidFill>
-                <a:latin typeface="Calibri"/>
-              </a:rPr>
-              <a:t>2</a:t>
-            </a:r>
-          </a:p>
-        </p:txBody>
-      </p:sp>
-      <p:sp>
-        <p:nvSpPr>
-          <p:cNvPr id="15" name="Oval 14"/>
-          <p:cNvSpPr/>
-          <p:nvPr/>
-        </p:nvSpPr>
-        <p:spPr>
-          <a:xfrm>
-            <a:off x="3127885" y="2898147"/>
-            <a:ext cx="402336" cy="402336"/>
-          </a:xfrm>
-          <a:prstGeom prst="ellipse">
-            <a:avLst/>
-          </a:prstGeom>
-          <a:solidFill>
-            <a:srgbClr val="0D9488">
-              <a:alpha val="35000"/>
-            </a:srgbClr>
-          </a:solidFill>
-          <a:ln>
-            <a:noFill/>
-          </a:ln>
-        </p:spPr>
-        <p:style>
-          <a:lnRef idx="1">
-            <a:schemeClr val="accent1"/>
-          </a:lnRef>
-          <a:fillRef idx="3">
-            <a:schemeClr val="accent1"/>
-          </a:fillRef>
-          <a:effectRef idx="2">
-            <a:schemeClr val="accent1"/>
-          </a:effectRef>
-          <a:fontRef idx="minor">
-            <a:schemeClr val="lt1"/>
-          </a:fontRef>
-        </p:style>
-        <p:txBody>
-          <a:bodyPr rtlCol="0" anchor="ctr"/>
-          <a:lstStyle/>
-          <a:p>
-            <a:pPr algn="ctr"/>
-          </a:p>
-        </p:txBody>
-      </p:sp>
-      <p:sp>
-        <p:nvSpPr>
-          <p:cNvPr id="16" name="Oval 15"/>
-          <p:cNvSpPr/>
-          <p:nvPr/>
-        </p:nvSpPr>
-        <p:spPr>
-          <a:xfrm>
-            <a:off x="3182749" y="2953011"/>
-            <a:ext cx="292608" cy="292608"/>
-          </a:xfrm>
-          <a:prstGeom prst="ellipse">
-            <a:avLst/>
-          </a:prstGeom>
-          <a:solidFill>
-            <a:srgbClr val="0D9488"/>
-          </a:solidFill>
-          <a:ln w="19050">
-            <a:solidFill>
-              <a:srgbClr val="FFFFFF"/>
-            </a:solidFill>
-          </a:ln>
-        </p:spPr>
-        <p:style>
-          <a:lnRef idx="1">
-            <a:schemeClr val="accent1"/>
-          </a:lnRef>
-          <a:fillRef idx="3">
-            <a:schemeClr val="accent1"/>
-          </a:fillRef>
-          <a:effectRef idx="2">
-            <a:schemeClr val="accent1"/>
-          </a:effectRef>
-          <a:fontRef idx="minor">
-            <a:schemeClr val="lt1"/>
-          </a:fontRef>
-        </p:style>
-        <p:txBody>
-          <a:bodyPr rtlCol="0" anchor="ctr"/>
-          <a:lstStyle/>
-          <a:p>
-            <a:pPr algn="ctr"/>
-            <a:r>
-              <a:rPr sz="1100" b="1">
-                <a:solidFill>
-                  <a:srgbClr val="FFFFFF"/>
-                </a:solidFill>
-                <a:latin typeface="Calibri"/>
-              </a:rPr>
-              <a:t>3</a:t>
-            </a:r>
-          </a:p>
-        </p:txBody>
-      </p:sp>
-      <p:sp>
-        <p:nvSpPr>
-          <p:cNvPr id="17" name="Oval 16"/>
-          <p:cNvSpPr/>
-          <p:nvPr/>
-        </p:nvSpPr>
-        <p:spPr>
-          <a:xfrm>
-            <a:off x="3686095" y="2539174"/>
-            <a:ext cx="402336" cy="402336"/>
-          </a:xfrm>
-          <a:prstGeom prst="ellipse">
-            <a:avLst/>
-          </a:prstGeom>
-          <a:solidFill>
-            <a:srgbClr val="7C3AED">
-              <a:alpha val="35000"/>
-            </a:srgbClr>
-          </a:solidFill>
-          <a:ln>
-            <a:noFill/>
-          </a:ln>
-        </p:spPr>
-        <p:style>
-          <a:lnRef idx="1">
-            <a:schemeClr val="accent1"/>
-          </a:lnRef>
-          <a:fillRef idx="3">
-            <a:schemeClr val="accent1"/>
-          </a:fillRef>
-          <a:effectRef idx="2">
-            <a:schemeClr val="accent1"/>
-          </a:effectRef>
-          <a:fontRef idx="minor">
-            <a:schemeClr val="lt1"/>
-          </a:fontRef>
-        </p:style>
-        <p:txBody>
-          <a:bodyPr rtlCol="0" anchor="ctr"/>
-          <a:lstStyle/>
-          <a:p>
-            <a:pPr algn="ctr"/>
-          </a:p>
-        </p:txBody>
-      </p:sp>
-      <p:sp>
-        <p:nvSpPr>
-          <p:cNvPr id="18" name="Oval 17"/>
-          <p:cNvSpPr/>
-          <p:nvPr/>
-        </p:nvSpPr>
-        <p:spPr>
-          <a:xfrm>
-            <a:off x="3740959" y="2594038"/>
-            <a:ext cx="292608" cy="292608"/>
-          </a:xfrm>
-          <a:prstGeom prst="ellipse">
-            <a:avLst/>
-          </a:prstGeom>
-          <a:solidFill>
-            <a:srgbClr val="7C3AED"/>
-          </a:solidFill>
-          <a:ln w="19050">
-            <a:solidFill>
-              <a:srgbClr val="FFFFFF"/>
-            </a:solidFill>
-          </a:ln>
-        </p:spPr>
-        <p:style>
-          <a:lnRef idx="1">
-            <a:schemeClr val="accent1"/>
-          </a:lnRef>
-          <a:fillRef idx="3">
-            <a:schemeClr val="accent1"/>
-          </a:fillRef>
-          <a:effectRef idx="2">
-            <a:schemeClr val="accent1"/>
-          </a:effectRef>
-          <a:fontRef idx="minor">
-            <a:schemeClr val="lt1"/>
-          </a:fontRef>
-        </p:style>
-        <p:txBody>
-          <a:bodyPr rtlCol="0" anchor="ctr"/>
-          <a:lstStyle/>
-          <a:p>
-            <a:pPr algn="ctr"/>
-            <a:r>
-              <a:rPr sz="1100" b="1">
-                <a:solidFill>
-                  <a:srgbClr val="FFFFFF"/>
-                </a:solidFill>
-                <a:latin typeface="Calibri"/>
-              </a:rPr>
-              <a:t>4</a:t>
-            </a:r>
-          </a:p>
-        </p:txBody>
-      </p:sp>
-      <p:sp>
-        <p:nvSpPr>
-          <p:cNvPr id="19" name="Oval 18"/>
-          <p:cNvSpPr/>
-          <p:nvPr/>
-        </p:nvSpPr>
-        <p:spPr>
-          <a:xfrm>
-            <a:off x="3526606" y="3416665"/>
-            <a:ext cx="402336" cy="402336"/>
-          </a:xfrm>
-          <a:prstGeom prst="ellipse">
-            <a:avLst/>
-          </a:prstGeom>
-          <a:solidFill>
-            <a:srgbClr val="EA580C">
-              <a:alpha val="35000"/>
-            </a:srgbClr>
-          </a:solidFill>
-          <a:ln>
-            <a:noFill/>
-          </a:ln>
-        </p:spPr>
-        <p:style>
-          <a:lnRef idx="1">
-            <a:schemeClr val="accent1"/>
-          </a:lnRef>
-          <a:fillRef idx="3">
-            <a:schemeClr val="accent1"/>
-          </a:fillRef>
-          <a:effectRef idx="2">
-            <a:schemeClr val="accent1"/>
-          </a:effectRef>
-          <a:fontRef idx="minor">
-            <a:schemeClr val="lt1"/>
-          </a:fontRef>
-        </p:style>
-        <p:txBody>
-          <a:bodyPr rtlCol="0" anchor="ctr"/>
-          <a:lstStyle/>
-          <a:p>
-            <a:pPr algn="ctr"/>
-          </a:p>
-        </p:txBody>
-      </p:sp>
-      <p:sp>
-        <p:nvSpPr>
-          <p:cNvPr id="20" name="Oval 19"/>
-          <p:cNvSpPr/>
-          <p:nvPr/>
-        </p:nvSpPr>
-        <p:spPr>
-          <a:xfrm>
-            <a:off x="3581470" y="3471529"/>
-            <a:ext cx="292608" cy="292608"/>
-          </a:xfrm>
-          <a:prstGeom prst="ellipse">
-            <a:avLst/>
-          </a:prstGeom>
-          <a:solidFill>
-            <a:srgbClr val="EA580C"/>
-          </a:solidFill>
-          <a:ln w="19050">
-            <a:solidFill>
-              <a:srgbClr val="FFFFFF"/>
-            </a:solidFill>
-          </a:ln>
-        </p:spPr>
-        <p:style>
-          <a:lnRef idx="1">
-            <a:schemeClr val="accent1"/>
-          </a:lnRef>
-          <a:fillRef idx="3">
-            <a:schemeClr val="accent1"/>
-          </a:fillRef>
-          <a:effectRef idx="2">
-            <a:schemeClr val="accent1"/>
-          </a:effectRef>
-          <a:fontRef idx="minor">
-            <a:schemeClr val="lt1"/>
-          </a:fontRef>
-        </p:style>
-        <p:txBody>
-          <a:bodyPr rtlCol="0" anchor="ctr"/>
-          <a:lstStyle/>
-          <a:p>
-            <a:pPr algn="ctr"/>
-            <a:r>
-              <a:rPr sz="1100" b="1">
-                <a:solidFill>
-                  <a:srgbClr val="FFFFFF"/>
-                </a:solidFill>
-                <a:latin typeface="Calibri"/>
-              </a:rPr>
-              <a:t>5</a:t>
-            </a:r>
-          </a:p>
-        </p:txBody>
-      </p:sp>
-      <p:sp>
-        <p:nvSpPr>
-          <p:cNvPr id="21" name="Oval 20"/>
-          <p:cNvSpPr/>
-          <p:nvPr/>
-        </p:nvSpPr>
-        <p:spPr>
-          <a:xfrm>
-            <a:off x="4124688" y="3735752"/>
-            <a:ext cx="402336" cy="402336"/>
-          </a:xfrm>
-          <a:prstGeom prst="ellipse">
-            <a:avLst/>
-          </a:prstGeom>
-          <a:solidFill>
-            <a:srgbClr val="0284C7">
-              <a:alpha val="35000"/>
-            </a:srgbClr>
-          </a:solidFill>
-          <a:ln>
-            <a:noFill/>
-          </a:ln>
-        </p:spPr>
-        <p:style>
-          <a:lnRef idx="1">
-            <a:schemeClr val="accent1"/>
-          </a:lnRef>
-          <a:fillRef idx="3">
-            <a:schemeClr val="accent1"/>
-          </a:fillRef>
-          <a:effectRef idx="2">
-            <a:schemeClr val="accent1"/>
-          </a:effectRef>
-          <a:fontRef idx="minor">
-            <a:schemeClr val="lt1"/>
-          </a:fontRef>
-        </p:style>
-        <p:txBody>
-          <a:bodyPr rtlCol="0" anchor="ctr"/>
-          <a:lstStyle/>
-          <a:p>
-            <a:pPr algn="ctr"/>
-          </a:p>
-        </p:txBody>
-      </p:sp>
-      <p:sp>
-        <p:nvSpPr>
-          <p:cNvPr id="22" name="Oval 21"/>
-          <p:cNvSpPr/>
-          <p:nvPr/>
-        </p:nvSpPr>
-        <p:spPr>
-          <a:xfrm>
-            <a:off x="4179552" y="3790616"/>
-            <a:ext cx="292608" cy="292608"/>
-          </a:xfrm>
-          <a:prstGeom prst="ellipse">
-            <a:avLst/>
-          </a:prstGeom>
-          <a:solidFill>
-            <a:srgbClr val="0284C7"/>
-          </a:solidFill>
-          <a:ln w="19050">
-            <a:solidFill>
-              <a:srgbClr val="FFFFFF"/>
-            </a:solidFill>
-          </a:ln>
-        </p:spPr>
-        <p:style>
-          <a:lnRef idx="1">
-            <a:schemeClr val="accent1"/>
-          </a:lnRef>
-          <a:fillRef idx="3">
-            <a:schemeClr val="accent1"/>
-          </a:fillRef>
-          <a:effectRef idx="2">
-            <a:schemeClr val="accent1"/>
-          </a:effectRef>
-          <a:fontRef idx="minor">
-            <a:schemeClr val="lt1"/>
-          </a:fontRef>
-        </p:style>
-        <p:txBody>
-          <a:bodyPr rtlCol="0" anchor="ctr"/>
-          <a:lstStyle/>
-          <a:p>
-            <a:pPr algn="ctr"/>
-            <a:r>
-              <a:rPr sz="1100" b="1">
-                <a:solidFill>
-                  <a:srgbClr val="FFFFFF"/>
-                </a:solidFill>
-                <a:latin typeface="Calibri"/>
-              </a:rPr>
-              <a:t>6</a:t>
-            </a:r>
-          </a:p>
-        </p:txBody>
-      </p:sp>
-      <p:sp>
-        <p:nvSpPr>
-          <p:cNvPr id="23" name="Rounded Rectangle 22"/>
-          <p:cNvSpPr/>
-          <p:nvPr/>
-        </p:nvSpPr>
-        <p:spPr>
-          <a:xfrm>
-            <a:off x="749808" y="5029199"/>
-            <a:ext cx="1737360" cy="1143000"/>
-          </a:xfrm>
-          <a:prstGeom prst="roundRect">
-            <a:avLst/>
-          </a:prstGeom>
-          <a:solidFill>
-            <a:srgbClr val="F0FDFA"/>
-          </a:solidFill>
-          <a:ln w="9525">
-            <a:solidFill>
-              <a:srgbClr val="E2E8F0"/>
-            </a:solidFill>
-          </a:ln>
-        </p:spPr>
-        <p:style>
-          <a:lnRef idx="1">
-            <a:schemeClr val="accent1"/>
-          </a:lnRef>
-          <a:fillRef idx="3">
-            <a:schemeClr val="accent1"/>
-          </a:fillRef>
-          <a:effectRef idx="2">
-            <a:schemeClr val="accent1"/>
-          </a:effectRef>
-          <a:fontRef idx="minor">
-            <a:schemeClr val="lt1"/>
-          </a:fontRef>
-        </p:style>
-        <p:txBody>
-          <a:bodyPr rtlCol="0" anchor="t" lIns="109728" rIns="109728" tIns="109728"/>
-          <a:lstStyle/>
-          <a:p>
-            <a:pPr algn="ctr"/>
-            <a:r>
-              <a:rPr sz="850" b="1">
-                <a:solidFill>
-                  <a:srgbClr val="64748B"/>
-                </a:solidFill>
-              </a:rPr>
-              <a:t>AUW MASS BUDGET
-</a:t>
-            </a:r>
-          </a:p>
-          <a:p>
-            <a:r>
-              <a:rPr sz="1350" b="1">
-                <a:solidFill>
-                  <a:srgbClr val="0D9488"/>
-                </a:solidFill>
-              </a:rPr>
-              <a:t>1.58 kg
-</a:t>
-            </a:r>
-          </a:p>
-          <a:p>
-            <a:r>
-              <a:rPr sz="850">
-                <a:solidFill>
-                  <a:srgbClr val="334155"/>
-                </a:solidFill>
-              </a:rPr>
-              <a:t>DGCA Micro Category</a:t>
-            </a:r>
-          </a:p>
-        </p:txBody>
-      </p:sp>
-      <p:sp>
-        <p:nvSpPr>
-          <p:cNvPr id="24" name="Rounded Rectangle 23"/>
-          <p:cNvSpPr/>
-          <p:nvPr/>
-        </p:nvSpPr>
-        <p:spPr>
-          <a:xfrm>
-            <a:off x="2615184" y="5029199"/>
-            <a:ext cx="1737360" cy="1143000"/>
-          </a:xfrm>
-          <a:prstGeom prst="roundRect">
-            <a:avLst/>
-          </a:prstGeom>
-          <a:solidFill>
-            <a:srgbClr val="F5F3FF"/>
-          </a:solidFill>
-          <a:ln w="9525">
-            <a:solidFill>
-              <a:srgbClr val="E2E8F0"/>
-            </a:solidFill>
-          </a:ln>
-        </p:spPr>
-        <p:style>
-          <a:lnRef idx="1">
-            <a:schemeClr val="accent1"/>
-          </a:lnRef>
-          <a:fillRef idx="3">
-            <a:schemeClr val="accent1"/>
-          </a:fillRef>
-          <a:effectRef idx="2">
-            <a:schemeClr val="accent1"/>
-          </a:effectRef>
-          <a:fontRef idx="minor">
-            <a:schemeClr val="lt1"/>
-          </a:fontRef>
-        </p:style>
-        <p:txBody>
-          <a:bodyPr rtlCol="0" anchor="t" lIns="109728" rIns="109728" tIns="109728"/>
-          <a:lstStyle/>
-          <a:p>
-            <a:pPr algn="ctr"/>
-            <a:r>
-              <a:rPr sz="850" b="1">
-                <a:solidFill>
-                  <a:srgbClr val="64748B"/>
-                </a:solidFill>
-              </a:rPr>
-              <a:t>DUAL-BRAIN CHIPS
-</a:t>
-            </a:r>
-          </a:p>
-          <a:p>
-            <a:r>
-              <a:rPr sz="1350" b="1">
-                <a:solidFill>
-                  <a:srgbClr val="7C3AED"/>
-                </a:solidFill>
-              </a:rPr>
-              <a:t>QRB2210 + STM32
-</a:t>
-            </a:r>
-          </a:p>
-          <a:p>
-            <a:r>
-              <a:rPr sz="850">
-                <a:solidFill>
-                  <a:srgbClr val="334155"/>
-                </a:solidFill>
-              </a:rPr>
-              <a:t>Linux NPU + Zephyr RTOS</a:t>
-            </a:r>
-          </a:p>
-        </p:txBody>
-      </p:sp>
-      <p:sp>
-        <p:nvSpPr>
-          <p:cNvPr id="25" name="Rounded Rectangle 24"/>
-          <p:cNvSpPr/>
-          <p:nvPr/>
-        </p:nvSpPr>
-        <p:spPr>
-          <a:xfrm>
-            <a:off x="4480560" y="5029199"/>
-            <a:ext cx="1737360" cy="1143000"/>
-          </a:xfrm>
-          <a:prstGeom prst="roundRect">
-            <a:avLst/>
-          </a:prstGeom>
-          <a:solidFill>
-            <a:srgbClr val="F0F9FF"/>
-          </a:solidFill>
-          <a:ln w="9525">
-            <a:solidFill>
-              <a:srgbClr val="E2E8F0"/>
-            </a:solidFill>
-          </a:ln>
-        </p:spPr>
-        <p:style>
-          <a:lnRef idx="1">
-            <a:schemeClr val="accent1"/>
-          </a:lnRef>
-          <a:fillRef idx="3">
-            <a:schemeClr val="accent1"/>
-          </a:fillRef>
-          <a:effectRef idx="2">
-            <a:schemeClr val="accent1"/>
-          </a:effectRef>
-          <a:fontRef idx="minor">
-            <a:schemeClr val="lt1"/>
-          </a:fontRef>
-        </p:style>
-        <p:txBody>
-          <a:bodyPr rtlCol="0" anchor="t" lIns="109728" rIns="109728" tIns="109728"/>
-          <a:lstStyle/>
-          <a:p>
-            <a:pPr algn="ctr"/>
-            <a:r>
-              <a:rPr sz="850" b="1">
-                <a:solidFill>
-                  <a:srgbClr val="64748B"/>
-                </a:solidFill>
-              </a:rPr>
-              <a:t>OFF-GRID TELEMETRY
-</a:t>
-            </a:r>
-          </a:p>
-          <a:p>
-            <a:r>
-              <a:rPr sz="1350" b="1">
-                <a:solidFill>
-                  <a:srgbClr val="0284C7"/>
-                </a:solidFill>
-              </a:rPr>
-              <a:t>868 MHz LoRa
-</a:t>
-            </a:r>
-          </a:p>
-          <a:p>
-            <a:r>
-              <a:rPr sz="850">
-                <a:solidFill>
-                  <a:srgbClr val="334155"/>
-                </a:solidFill>
-              </a:rPr>
-              <a:t>17-byte P2P (3–5 km)</a:t>
-            </a:r>
-          </a:p>
-        </p:txBody>
-      </p:sp>
-      <p:sp>
-        <p:nvSpPr>
-          <p:cNvPr id="26" name="Rounded Rectangle 25"/>
-          <p:cNvSpPr/>
-          <p:nvPr/>
-        </p:nvSpPr>
-        <p:spPr>
-          <a:xfrm>
-            <a:off x="6720840" y="1051560"/>
-            <a:ext cx="2423160" cy="1664208"/>
+          <p:cNvPr id="9" name="Rounded Rectangle 8"/>
+          <p:cNvSpPr/>
+          <p:nvPr/>
+        </p:nvSpPr>
+        <p:spPr>
+          <a:xfrm>
+            <a:off x="7909560" y="1051560"/>
+            <a:ext cx="3730752" cy="1664208"/>
           </a:xfrm>
           <a:prstGeom prst="roundRect">
             <a:avLst/>
@@ -10484,29 +9938,60 @@
           </a:fontRef>
         </p:style>
         <p:txBody>
-          <a:bodyPr rtlCol="0" anchor="ctr"/>
-          <a:lstStyle/>
-          <a:p>
-            <a:pPr algn="ctr"/>
-          </a:p>
-        </p:txBody>
-      </p:sp>
-      <p:sp>
-        <p:nvSpPr>
-          <p:cNvPr id="27" name="Rounded Rectangle 26"/>
-          <p:cNvSpPr/>
-          <p:nvPr/>
-        </p:nvSpPr>
-        <p:spPr>
-          <a:xfrm>
-            <a:off x="6720840" y="1051560"/>
+          <a:bodyPr rtlCol="0" anchor="t" lIns="201168" rIns="182880" tIns="128016"/>
+          <a:lstStyle/>
+          <a:p>
+            <a:pPr algn="ctr"/>
+            <a:r>
+              <a:rPr b="1" sz="1100">
+                <a:solidFill>
+                  <a:srgbClr val="0F172A"/>
+                </a:solidFill>
+              </a:rPr>
+              <a:t>1. DUAL-SPECTRAL CONICAL SENSING
+</a:t>
+            </a:r>
+          </a:p>
+          <a:p>
+            <a:r>
+              <a:rPr b="1" sz="850">
+                <a:solidFill>
+                  <a:srgbClr val="0284C7"/>
+                </a:solidFill>
+              </a:rPr>
+              <a:t>Cyan Beam: 1080p Optical Geometry
+Orange Beam: 8–14μm Radiometric LWIR
+</a:t>
+            </a:r>
+          </a:p>
+          <a:p>
+            <a:r>
+              <a:rPr sz="950">
+                <a:solidFill>
+                  <a:srgbClr val="475569"/>
+                </a:solidFill>
+              </a:rPr>
+              <a:t>Standard RGB cameras blind at dusk and in smoke plumes. Phoenix X projects co-registered optical and thermal fields-of-view, continuously scanning rubble crevices for human infrared emissions.</a:t>
+            </a:r>
+          </a:p>
+        </p:txBody>
+      </p:sp>
+      <p:sp>
+        <p:nvSpPr>
+          <p:cNvPr id="10" name="Rounded Rectangle 9"/>
+          <p:cNvSpPr/>
+          <p:nvPr/>
+        </p:nvSpPr>
+        <p:spPr>
+          <a:xfrm>
+            <a:off x="7909560" y="1051560"/>
             <a:ext cx="73152" cy="1664208"/>
           </a:xfrm>
           <a:prstGeom prst="roundRect">
             <a:avLst/>
           </a:prstGeom>
           <a:solidFill>
-            <a:srgbClr val="EA580C"/>
+            <a:srgbClr val="0284C7"/>
           </a:solidFill>
           <a:ln>
             <a:noFill/>
@@ -10536,186 +10021,14 @@
       </p:sp>
       <p:sp>
         <p:nvSpPr>
-          <p:cNvPr id="28" name="Oval 27"/>
-          <p:cNvSpPr/>
-          <p:nvPr/>
-        </p:nvSpPr>
-        <p:spPr>
-          <a:xfrm>
-            <a:off x="6867144" y="1179576"/>
-            <a:ext cx="310896" cy="310896"/>
-          </a:xfrm>
-          <a:prstGeom prst="ellipse">
-            <a:avLst/>
-          </a:prstGeom>
-          <a:solidFill>
-            <a:srgbClr val="EA580C"/>
-          </a:solidFill>
-          <a:ln w="12700">
-            <a:solidFill>
-              <a:srgbClr val="FFFFFF"/>
-            </a:solidFill>
-          </a:ln>
-        </p:spPr>
-        <p:style>
-          <a:lnRef idx="1">
-            <a:schemeClr val="accent1"/>
-          </a:lnRef>
-          <a:fillRef idx="3">
-            <a:schemeClr val="accent1"/>
-          </a:fillRef>
-          <a:effectRef idx="2">
-            <a:schemeClr val="accent1"/>
-          </a:effectRef>
-          <a:fontRef idx="minor">
-            <a:schemeClr val="lt1"/>
-          </a:fontRef>
-        </p:style>
-        <p:txBody>
-          <a:bodyPr rtlCol="0" anchor="ctr"/>
-          <a:lstStyle/>
-          <a:p>
-            <a:pPr algn="ctr"/>
-            <a:r>
-              <a:rPr b="1" sz="1100">
-                <a:solidFill>
-                  <a:srgbClr val="FFFFFF"/>
-                </a:solidFill>
-              </a:rPr>
-              <a:t>1</a:t>
-            </a:r>
-          </a:p>
-        </p:txBody>
-      </p:sp>
-      <p:sp>
-        <p:nvSpPr>
-          <p:cNvPr id="29" name="TextBox 28"/>
-          <p:cNvSpPr txBox="1"/>
-          <p:nvPr/>
-        </p:nvSpPr>
-        <p:spPr>
-          <a:xfrm>
-            <a:off x="7251192" y="1161288"/>
-            <a:ext cx="1801368" cy="347472"/>
-          </a:xfrm>
-          <a:prstGeom prst="rect">
-            <a:avLst/>
-          </a:prstGeom>
-          <a:noFill/>
-        </p:spPr>
-        <p:txBody>
-          <a:bodyPr wrap="none" lIns="0" rIns="0" tIns="0" bIns="0">
-            <a:spAutoFit/>
-          </a:bodyPr>
-          <a:lstStyle/>
-          <a:p>
-            <a:r>
-              <a:rPr b="1" sz="1100">
-                <a:solidFill>
-                  <a:srgbClr val="0F172A"/>
-                </a:solidFill>
-              </a:rPr>
-              <a:t>Zero-Visibility Human Lock</a:t>
-            </a:r>
-          </a:p>
-        </p:txBody>
-      </p:sp>
-      <p:sp>
-        <p:nvSpPr>
-          <p:cNvPr id="30" name="Rounded Rectangle 29"/>
-          <p:cNvSpPr/>
-          <p:nvPr/>
-        </p:nvSpPr>
-        <p:spPr>
-          <a:xfrm>
-            <a:off x="6867144" y="1554480"/>
-            <a:ext cx="2130552" cy="237744"/>
-          </a:xfrm>
-          <a:prstGeom prst="roundRect">
-            <a:avLst/>
-          </a:prstGeom>
-          <a:solidFill>
-            <a:srgbClr val="F1F5F9"/>
-          </a:solidFill>
-          <a:ln w="6350">
-            <a:solidFill>
-              <a:srgbClr val="E2E8F0"/>
-            </a:solidFill>
-          </a:ln>
-        </p:spPr>
-        <p:style>
-          <a:lnRef idx="1">
-            <a:schemeClr val="accent1"/>
-          </a:lnRef>
-          <a:fillRef idx="3">
-            <a:schemeClr val="accent1"/>
-          </a:fillRef>
-          <a:effectRef idx="2">
-            <a:schemeClr val="accent1"/>
-          </a:effectRef>
-          <a:fontRef idx="minor">
-            <a:schemeClr val="lt1"/>
-          </a:fontRef>
-        </p:style>
-        <p:txBody>
-          <a:bodyPr rtlCol="0" anchor="ctr" lIns="73152"/>
-          <a:lstStyle/>
-          <a:p>
-            <a:pPr algn="ctr"/>
-            <a:r>
-              <a:rPr b="1" sz="850">
-                <a:solidFill>
-                  <a:srgbClr val="334155"/>
-                </a:solidFill>
-              </a:rPr>
-              <a:t>Penetrates Smoke, Fog &amp; Dust Plumes</a:t>
-            </a:r>
-          </a:p>
-        </p:txBody>
-      </p:sp>
-      <p:sp>
-        <p:nvSpPr>
-          <p:cNvPr id="31" name="TextBox 30"/>
-          <p:cNvSpPr txBox="1"/>
-          <p:nvPr/>
-        </p:nvSpPr>
-        <p:spPr>
-          <a:xfrm>
-            <a:off x="6867144" y="1856232"/>
-            <a:ext cx="2130552" cy="795528"/>
-          </a:xfrm>
-          <a:prstGeom prst="rect">
-            <a:avLst/>
-          </a:prstGeom>
-          <a:noFill/>
-        </p:spPr>
-        <p:txBody>
-          <a:bodyPr wrap="square" lIns="0" rIns="0" tIns="0" bIns="0">
-            <a:spAutoFit/>
-          </a:bodyPr>
-          <a:lstStyle/>
-          <a:p>
-            <a:r>
-              <a:rPr sz="950">
-                <a:solidFill>
-                  <a:srgbClr val="334155"/>
-                </a:solidFill>
-              </a:rPr>
-              <a:t>Spots living survivors obscured under tree canopies and light sheet rubble where RGB cameras fail completely.</a:t>
-            </a:r>
-          </a:p>
-        </p:txBody>
-      </p:sp>
-      <p:sp>
-        <p:nvSpPr>
-          <p:cNvPr id="32" name="Rounded Rectangle 31"/>
-          <p:cNvSpPr/>
-          <p:nvPr/>
-        </p:nvSpPr>
-        <p:spPr>
-          <a:xfrm>
-            <a:off x="9326880" y="1051560"/>
-            <a:ext cx="2423160" cy="1664208"/>
+          <p:cNvPr id="11" name="Rounded Rectangle 10"/>
+          <p:cNvSpPr/>
+          <p:nvPr/>
+        </p:nvSpPr>
+        <p:spPr>
+          <a:xfrm>
+            <a:off x="7909560" y="2889504"/>
+            <a:ext cx="3730752" cy="1664208"/>
           </a:xfrm>
           <a:prstGeom prst="roundRect">
             <a:avLst/>
@@ -10751,29 +10064,60 @@
           </a:fontRef>
         </p:style>
         <p:txBody>
-          <a:bodyPr rtlCol="0" anchor="ctr"/>
-          <a:lstStyle/>
-          <a:p>
-            <a:pPr algn="ctr"/>
-          </a:p>
-        </p:txBody>
-      </p:sp>
-      <p:sp>
-        <p:nvSpPr>
-          <p:cNvPr id="33" name="Rounded Rectangle 32"/>
-          <p:cNvSpPr/>
-          <p:nvPr/>
-        </p:nvSpPr>
-        <p:spPr>
-          <a:xfrm>
-            <a:off x="9326880" y="1051560"/>
+          <a:bodyPr rtlCol="0" anchor="t" lIns="201168" rIns="182880" tIns="128016"/>
+          <a:lstStyle/>
+          <a:p>
+            <a:pPr algn="ctr"/>
+            <a:r>
+              <a:rPr b="1" sz="1100">
+                <a:solidFill>
+                  <a:srgbClr val="0F172A"/>
+                </a:solidFill>
+              </a:rPr>
+              <a:t>2. RADIOMETRIC CORE HEAT FILTER
+</a:t>
+            </a:r>
+          </a:p>
+          <a:p>
+            <a:r>
+              <a:rPr b="1" sz="850">
+                <a:solidFill>
+                  <a:srgbClr val="EA580C"/>
+                </a:solidFill>
+              </a:rPr>
+              <a:t>Gated Detection: 36.5°C to 37.5°C
+Noise Equivalent Temp Diff: NETD &lt; 50 mK
+</a:t>
+            </a:r>
+          </a:p>
+          <a:p>
+            <a:r>
+              <a:rPr sz="950">
+                <a:solidFill>
+                  <a:srgbClr val="475569"/>
+                </a:solidFill>
+              </a:rPr>
+              <a:t>Solar radiation heats tin roofs, wet mud, and rocks to over 45°C. Phoenix X isolates true biological core temperature profiles, instantly discarding thermal false alarms before passing tensors to the NPU.</a:t>
+            </a:r>
+          </a:p>
+        </p:txBody>
+      </p:sp>
+      <p:sp>
+        <p:nvSpPr>
+          <p:cNvPr id="12" name="Rounded Rectangle 11"/>
+          <p:cNvSpPr/>
+          <p:nvPr/>
+        </p:nvSpPr>
+        <p:spPr>
+          <a:xfrm>
+            <a:off x="7909560" y="2889504"/>
             <a:ext cx="73152" cy="1664208"/>
           </a:xfrm>
           <a:prstGeom prst="roundRect">
             <a:avLst/>
           </a:prstGeom>
           <a:solidFill>
-            <a:srgbClr val="0284C7"/>
+            <a:srgbClr val="EA580C"/>
           </a:solidFill>
           <a:ln>
             <a:noFill/>
@@ -10803,186 +10147,14 @@
       </p:sp>
       <p:sp>
         <p:nvSpPr>
-          <p:cNvPr id="34" name="Oval 33"/>
-          <p:cNvSpPr/>
-          <p:nvPr/>
-        </p:nvSpPr>
-        <p:spPr>
-          <a:xfrm>
-            <a:off x="9473184" y="1179576"/>
-            <a:ext cx="310896" cy="310896"/>
-          </a:xfrm>
-          <a:prstGeom prst="ellipse">
-            <a:avLst/>
-          </a:prstGeom>
-          <a:solidFill>
-            <a:srgbClr val="0284C7"/>
-          </a:solidFill>
-          <a:ln w="12700">
-            <a:solidFill>
-              <a:srgbClr val="FFFFFF"/>
-            </a:solidFill>
-          </a:ln>
-        </p:spPr>
-        <p:style>
-          <a:lnRef idx="1">
-            <a:schemeClr val="accent1"/>
-          </a:lnRef>
-          <a:fillRef idx="3">
-            <a:schemeClr val="accent1"/>
-          </a:fillRef>
-          <a:effectRef idx="2">
-            <a:schemeClr val="accent1"/>
-          </a:effectRef>
-          <a:fontRef idx="minor">
-            <a:schemeClr val="lt1"/>
-          </a:fontRef>
-        </p:style>
-        <p:txBody>
-          <a:bodyPr rtlCol="0" anchor="ctr"/>
-          <a:lstStyle/>
-          <a:p>
-            <a:pPr algn="ctr"/>
-            <a:r>
-              <a:rPr b="1" sz="1100">
-                <a:solidFill>
-                  <a:srgbClr val="FFFFFF"/>
-                </a:solidFill>
-              </a:rPr>
-              <a:t>2</a:t>
-            </a:r>
-          </a:p>
-        </p:txBody>
-      </p:sp>
-      <p:sp>
-        <p:nvSpPr>
-          <p:cNvPr id="35" name="TextBox 34"/>
-          <p:cNvSpPr txBox="1"/>
-          <p:nvPr/>
-        </p:nvSpPr>
-        <p:spPr>
-          <a:xfrm>
-            <a:off x="9857232" y="1161288"/>
-            <a:ext cx="1801368" cy="347472"/>
-          </a:xfrm>
-          <a:prstGeom prst="rect">
-            <a:avLst/>
-          </a:prstGeom>
-          <a:noFill/>
-        </p:spPr>
-        <p:txBody>
-          <a:bodyPr wrap="none" lIns="0" rIns="0" tIns="0" bIns="0">
-            <a:spAutoFit/>
-          </a:bodyPr>
-          <a:lstStyle/>
-          <a:p>
-            <a:r>
-              <a:rPr b="1" sz="1100">
-                <a:solidFill>
-                  <a:srgbClr val="0F172A"/>
-                </a:solidFill>
-              </a:rPr>
-              <a:t>Instant Ground Command Sync</a:t>
-            </a:r>
-          </a:p>
-        </p:txBody>
-      </p:sp>
-      <p:sp>
-        <p:nvSpPr>
-          <p:cNvPr id="36" name="Rounded Rectangle 35"/>
-          <p:cNvSpPr/>
-          <p:nvPr/>
-        </p:nvSpPr>
-        <p:spPr>
-          <a:xfrm>
-            <a:off x="9473184" y="1554480"/>
-            <a:ext cx="2130552" cy="237744"/>
-          </a:xfrm>
-          <a:prstGeom prst="roundRect">
-            <a:avLst/>
-          </a:prstGeom>
-          <a:solidFill>
-            <a:srgbClr val="F1F5F9"/>
-          </a:solidFill>
-          <a:ln w="6350">
-            <a:solidFill>
-              <a:srgbClr val="E2E8F0"/>
-            </a:solidFill>
-          </a:ln>
-        </p:spPr>
-        <p:style>
-          <a:lnRef idx="1">
-            <a:schemeClr val="accent1"/>
-          </a:lnRef>
-          <a:fillRef idx="3">
-            <a:schemeClr val="accent1"/>
-          </a:fillRef>
-          <a:effectRef idx="2">
-            <a:schemeClr val="accent1"/>
-          </a:effectRef>
-          <a:fontRef idx="minor">
-            <a:schemeClr val="lt1"/>
-          </a:fontRef>
-        </p:style>
-        <p:txBody>
-          <a:bodyPr rtlCol="0" anchor="ctr" lIns="73152"/>
-          <a:lstStyle/>
-          <a:p>
-            <a:pPr algn="ctr"/>
-            <a:r>
-              <a:rPr b="1" sz="850">
-                <a:solidFill>
-                  <a:srgbClr val="334155"/>
-                </a:solidFill>
-              </a:rPr>
-              <a:t>Zero-Drop Telemetry Broadcast</a:t>
-            </a:r>
-          </a:p>
-        </p:txBody>
-      </p:sp>
-      <p:sp>
-        <p:nvSpPr>
-          <p:cNvPr id="37" name="TextBox 36"/>
-          <p:cNvSpPr txBox="1"/>
-          <p:nvPr/>
-        </p:nvSpPr>
-        <p:spPr>
-          <a:xfrm>
-            <a:off x="9473184" y="1856232"/>
-            <a:ext cx="2130552" cy="795528"/>
-          </a:xfrm>
-          <a:prstGeom prst="rect">
-            <a:avLst/>
-          </a:prstGeom>
-          <a:noFill/>
-        </p:spPr>
-        <p:txBody>
-          <a:bodyPr wrap="square" lIns="0" rIns="0" tIns="0" bIns="0">
-            <a:spAutoFit/>
-          </a:bodyPr>
-          <a:lstStyle/>
-          <a:p>
-            <a:r>
-              <a:rPr sz="950">
-                <a:solidFill>
-                  <a:srgbClr val="334155"/>
-                </a:solidFill>
-              </a:rPr>
-              <a:t>Instantly beams casualty coordinates to portable tactical tablets up to 5 km away across debris hills.</a:t>
-            </a:r>
-          </a:p>
-        </p:txBody>
-      </p:sp>
-      <p:sp>
-        <p:nvSpPr>
-          <p:cNvPr id="38" name="Rounded Rectangle 37"/>
-          <p:cNvSpPr/>
-          <p:nvPr/>
-        </p:nvSpPr>
-        <p:spPr>
-          <a:xfrm>
-            <a:off x="6720840" y="2880360"/>
-            <a:ext cx="2423160" cy="1664208"/>
+          <p:cNvPr id="13" name="Rounded Rectangle 12"/>
+          <p:cNvSpPr/>
+          <p:nvPr/>
+        </p:nvSpPr>
+        <p:spPr>
+          <a:xfrm>
+            <a:off x="7909560" y="4727448"/>
+            <a:ext cx="3730752" cy="1664208"/>
           </a:xfrm>
           <a:prstGeom prst="roundRect">
             <a:avLst/>
@@ -11018,22 +10190,53 @@
           </a:fontRef>
         </p:style>
         <p:txBody>
-          <a:bodyPr rtlCol="0" anchor="ctr"/>
-          <a:lstStyle/>
-          <a:p>
-            <a:pPr algn="ctr"/>
-          </a:p>
-        </p:txBody>
-      </p:sp>
-      <p:sp>
-        <p:nvSpPr>
-          <p:cNvPr id="39" name="Rounded Rectangle 38"/>
-          <p:cNvSpPr/>
-          <p:nvPr/>
-        </p:nvSpPr>
-        <p:spPr>
-          <a:xfrm>
-            <a:off x="6720840" y="2880360"/>
+          <a:bodyPr rtlCol="0" anchor="t" lIns="201168" rIns="182880" tIns="128016"/>
+          <a:lstStyle/>
+          <a:p>
+            <a:pPr algn="ctr"/>
+            <a:r>
+              <a:rPr b="1" sz="1100">
+                <a:solidFill>
+                  <a:srgbClr val="0F172A"/>
+                </a:solidFill>
+              </a:rPr>
+              <a:t>3. 6-DOF TAIT-BRYAN RAY-CASTING
+</a:t>
+            </a:r>
+          </a:p>
+          <a:p>
+            <a:r>
+              <a:rPr b="1" sz="850">
+                <a:solidFill>
+                  <a:srgbClr val="0D9488"/>
+                </a:solidFill>
+              </a:rPr>
+              <a:t>Optical-to-Ground Vector Projection
+Accuracy: WGS-84 within ±2.1m SEP
+</a:t>
+            </a:r>
+          </a:p>
+          <a:p>
+            <a:r>
+              <a:rPr sz="950">
+                <a:solidFill>
+                  <a:srgbClr val="475569"/>
+                </a:solidFill>
+              </a:rPr>
+              <a:t>Hovering overhead puts drones at risk of collision. The drone flies at an oblique standoff angle; its onboard NPU projects camera bounding-box pixels directly onto a local DEM elevation grid in &lt; 60 ms.</a:t>
+            </a:r>
+          </a:p>
+        </p:txBody>
+      </p:sp>
+      <p:sp>
+        <p:nvSpPr>
+          <p:cNvPr id="14" name="Rounded Rectangle 13"/>
+          <p:cNvSpPr/>
+          <p:nvPr/>
+        </p:nvSpPr>
+        <p:spPr>
+          <a:xfrm>
+            <a:off x="7909560" y="4727448"/>
             <a:ext cx="73152" cy="1664208"/>
           </a:xfrm>
           <a:prstGeom prst="roundRect">
@@ -11068,26 +10271,87 @@
           </a:p>
         </p:txBody>
       </p:sp>
-      <p:sp>
-        <p:nvSpPr>
-          <p:cNvPr id="40" name="Oval 39"/>
-          <p:cNvSpPr/>
-          <p:nvPr/>
-        </p:nvSpPr>
-        <p:spPr>
-          <a:xfrm>
-            <a:off x="6867144" y="3008376"/>
-            <a:ext cx="310896" cy="310896"/>
-          </a:xfrm>
-          <a:prstGeom prst="ellipse">
-            <a:avLst/>
-          </a:prstGeom>
-          <a:solidFill>
-            <a:srgbClr val="0D9488"/>
+    </p:spTree>
+  </p:cSld>
+  <p:clrMapOvr>
+    <a:masterClrMapping/>
+  </p:clrMapOvr>
+</p:sld>
+</file>
+
+<file path=ppt/slides/slide5.xml><?xml version="1.0" encoding="utf-8"?>
+<p:sld xmlns:a="http://schemas.openxmlformats.org/drawingml/2006/main" xmlns:p="http://schemas.openxmlformats.org/presentationml/2006/main" xmlns:r="http://schemas.openxmlformats.org/officeDocument/2006/relationships">
+  <p:cSld>
+    <p:spTree>
+      <p:nvGrpSpPr>
+        <p:cNvPr id="1" name=""/>
+        <p:cNvGrpSpPr/>
+        <p:nvPr/>
+      </p:nvGrpSpPr>
+      <p:grpSpPr/>
+      <p:sp>
+        <p:nvSpPr>
+          <p:cNvPr id="2" name="Rectangle 1"/>
+          <p:cNvSpPr/>
+          <p:nvPr/>
+        </p:nvSpPr>
+        <p:spPr>
+          <a:xfrm>
+            <a:off x="0" y="0"/>
+            <a:ext cx="12191695" cy="6858000"/>
+          </a:xfrm>
+          <a:prstGeom prst="rect">
+            <a:avLst/>
+          </a:prstGeom>
+          <a:solidFill>
+            <a:srgbClr val="F8FAFC"/>
+          </a:solidFill>
+          <a:ln>
+            <a:noFill/>
+          </a:ln>
+        </p:spPr>
+        <p:style>
+          <a:lnRef idx="1">
+            <a:schemeClr val="accent1"/>
+          </a:lnRef>
+          <a:fillRef idx="3">
+            <a:schemeClr val="accent1"/>
+          </a:fillRef>
+          <a:effectRef idx="2">
+            <a:schemeClr val="accent1"/>
+          </a:effectRef>
+          <a:fontRef idx="minor">
+            <a:schemeClr val="lt1"/>
+          </a:fontRef>
+        </p:style>
+        <p:txBody>
+          <a:bodyPr rtlCol="0" anchor="ctr"/>
+          <a:lstStyle/>
+          <a:p>
+            <a:pPr algn="ctr"/>
+          </a:p>
+        </p:txBody>
+      </p:sp>
+      <p:sp>
+        <p:nvSpPr>
+          <p:cNvPr id="3" name="Rounded Rectangle 2"/>
+          <p:cNvSpPr/>
+          <p:nvPr/>
+        </p:nvSpPr>
+        <p:spPr>
+          <a:xfrm>
+            <a:off x="548640" y="274320"/>
+            <a:ext cx="1691640" cy="384048"/>
+          </a:xfrm>
+          <a:prstGeom prst="roundRect">
+            <a:avLst/>
+          </a:prstGeom>
+          <a:solidFill>
+            <a:srgbClr val="FFFFFF"/>
           </a:solidFill>
           <a:ln w="12700">
             <a:solidFill>
-              <a:srgbClr val="FFFFFF"/>
+              <a:srgbClr val="E2E8F0"/>
             </a:solidFill>
           </a:ln>
         </p:spPr>
@@ -11111,26 +10375,27 @@
           <a:p>
             <a:pPr algn="ctr"/>
             <a:r>
-              <a:rPr b="1" sz="1100">
-                <a:solidFill>
-                  <a:srgbClr val="FFFFFF"/>
-                </a:solidFill>
-              </a:rPr>
-              <a:t>3</a:t>
-            </a:r>
-          </a:p>
-        </p:txBody>
-      </p:sp>
-      <p:sp>
-        <p:nvSpPr>
-          <p:cNvPr id="41" name="TextBox 40"/>
+              <a:rPr sz="950" b="1">
+                <a:solidFill>
+                  <a:srgbClr val="1E293B"/>
+                </a:solidFill>
+                <a:latin typeface="Calibri"/>
+              </a:rPr>
+              <a:t>PHOENIX X · SIH26177</a:t>
+            </a:r>
+          </a:p>
+        </p:txBody>
+      </p:sp>
+      <p:sp>
+        <p:nvSpPr>
+          <p:cNvPr id="4" name="TextBox 3"/>
           <p:cNvSpPr txBox="1"/>
           <p:nvPr/>
         </p:nvSpPr>
         <p:spPr>
           <a:xfrm>
-            <a:off x="7251192" y="2990088"/>
-            <a:ext cx="1801368" cy="347472"/>
+            <a:off x="2377440" y="219456"/>
+            <a:ext cx="6949440" cy="219456"/>
           </a:xfrm>
           <a:prstGeom prst="rect">
             <a:avLst/>
@@ -11144,79 +10409,27 @@
           <a:lstStyle/>
           <a:p>
             <a:r>
-              <a:rPr b="1" sz="1100">
-                <a:solidFill>
-                  <a:srgbClr val="0F172A"/>
-                </a:solidFill>
-              </a:rPr>
-              <a:t>Autonomous Boustrophedon Sweep</a:t>
-            </a:r>
-          </a:p>
-        </p:txBody>
-      </p:sp>
-      <p:sp>
-        <p:nvSpPr>
-          <p:cNvPr id="42" name="Rounded Rectangle 41"/>
-          <p:cNvSpPr/>
-          <p:nvPr/>
-        </p:nvSpPr>
-        <p:spPr>
-          <a:xfrm>
-            <a:off x="6867144" y="3383280"/>
-            <a:ext cx="2130552" cy="237744"/>
-          </a:xfrm>
-          <a:prstGeom prst="roundRect">
-            <a:avLst/>
-          </a:prstGeom>
-          <a:solidFill>
-            <a:srgbClr val="F1F5F9"/>
-          </a:solidFill>
-          <a:ln w="6350">
-            <a:solidFill>
-              <a:srgbClr val="E2E8F0"/>
-            </a:solidFill>
-          </a:ln>
-        </p:spPr>
-        <p:style>
-          <a:lnRef idx="1">
-            <a:schemeClr val="accent1"/>
-          </a:lnRef>
-          <a:fillRef idx="3">
-            <a:schemeClr val="accent1"/>
-          </a:fillRef>
-          <a:effectRef idx="2">
-            <a:schemeClr val="accent1"/>
-          </a:effectRef>
-          <a:fontRef idx="minor">
-            <a:schemeClr val="lt1"/>
-          </a:fontRef>
-        </p:style>
-        <p:txBody>
-          <a:bodyPr rtlCol="0" anchor="ctr" lIns="73152"/>
-          <a:lstStyle/>
-          <a:p>
-            <a:pPr algn="ctr"/>
-            <a:r>
-              <a:rPr b="1" sz="850">
-                <a:solidFill>
-                  <a:srgbClr val="334155"/>
-                </a:solidFill>
-              </a:rPr>
-              <a:t>2.0 km² Coverage in &lt; 15 Minutes</a:t>
-            </a:r>
-          </a:p>
-        </p:txBody>
-      </p:sp>
-      <p:sp>
-        <p:nvSpPr>
-          <p:cNvPr id="43" name="TextBox 42"/>
+              <a:rPr sz="950" b="1">
+                <a:solidFill>
+                  <a:srgbClr val="EA580C"/>
+                </a:solidFill>
+                <a:latin typeface="Calibri"/>
+              </a:rPr>
+              <a:t>OPERATIONAL PIPELINE · ZERO-CONNECTIVITY RECONNAISSANCE</a:t>
+            </a:r>
+          </a:p>
+        </p:txBody>
+      </p:sp>
+      <p:sp>
+        <p:nvSpPr>
+          <p:cNvPr id="5" name="TextBox 4"/>
           <p:cNvSpPr txBox="1"/>
           <p:nvPr/>
         </p:nvSpPr>
         <p:spPr>
           <a:xfrm>
-            <a:off x="6867144" y="3685032"/>
-            <a:ext cx="2130552" cy="795528"/>
+            <a:off x="2377440" y="438912"/>
+            <a:ext cx="6949440" cy="411480"/>
           </a:xfrm>
           <a:prstGeom prst="rect">
             <a:avLst/>
@@ -11224,40 +10437,95 @@
           <a:noFill/>
         </p:spPr>
         <p:txBody>
-          <a:bodyPr wrap="square" lIns="0" rIns="0" tIns="0" bIns="0">
+          <a:bodyPr wrap="none" lIns="0" rIns="0" tIns="0" bIns="0">
             <a:spAutoFit/>
           </a:bodyPr>
           <a:lstStyle/>
           <a:p>
             <a:r>
-              <a:rPr sz="950">
-                <a:solidFill>
-                  <a:srgbClr val="334155"/>
-                </a:solidFill>
-              </a:rPr>
-              <a:t>Replaces exhausting, hazardous foot search patrols with systematic, automated aerial lawnmower sweep grids.</a:t>
-            </a:r>
-          </a:p>
-        </p:txBody>
-      </p:sp>
-      <p:sp>
-        <p:nvSpPr>
-          <p:cNvPr id="44" name="Rounded Rectangle 43"/>
-          <p:cNvSpPr/>
-          <p:nvPr/>
-        </p:nvSpPr>
-        <p:spPr>
-          <a:xfrm>
-            <a:off x="9326880" y="2880360"/>
-            <a:ext cx="2423160" cy="1664208"/>
+              <a:rPr sz="1700" b="1">
+                <a:solidFill>
+                  <a:srgbClr val="0F172A"/>
+                </a:solidFill>
+                <a:latin typeface="Calibri"/>
+              </a:rPr>
+              <a:t>End-to-End Autonomous Reconnaissance &amp; Survivor Extraction Flow</a:t>
+            </a:r>
+          </a:p>
+        </p:txBody>
+      </p:sp>
+      <p:sp>
+        <p:nvSpPr>
+          <p:cNvPr id="6" name="Rounded Rectangle 5"/>
+          <p:cNvSpPr/>
+          <p:nvPr/>
+        </p:nvSpPr>
+        <p:spPr>
+          <a:xfrm>
+            <a:off x="9418320" y="274320"/>
+            <a:ext cx="2194560" cy="384048"/>
           </a:xfrm>
           <a:prstGeom prst="roundRect">
             <a:avLst/>
           </a:prstGeom>
           <a:solidFill>
+            <a:srgbClr val="FFF7ED"/>
+          </a:solidFill>
+          <a:ln w="12700">
+            <a:solidFill>
+              <a:srgbClr val="FED7AA"/>
+            </a:solidFill>
+          </a:ln>
+        </p:spPr>
+        <p:style>
+          <a:lnRef idx="1">
+            <a:schemeClr val="accent1"/>
+          </a:lnRef>
+          <a:fillRef idx="3">
+            <a:schemeClr val="accent1"/>
+          </a:fillRef>
+          <a:effectRef idx="2">
+            <a:schemeClr val="accent1"/>
+          </a:effectRef>
+          <a:fontRef idx="minor">
+            <a:schemeClr val="lt1"/>
+          </a:fontRef>
+        </p:style>
+        <p:txBody>
+          <a:bodyPr rtlCol="0" anchor="ctr"/>
+          <a:lstStyle/>
+          <a:p>
+            <a:pPr algn="ctr"/>
+            <a:r>
+              <a:rPr sz="950" b="1">
+                <a:solidFill>
+                  <a:srgbClr val="EA580C"/>
+                </a:solidFill>
+                <a:latin typeface="Calibri"/>
+              </a:rPr>
+              <a:t>RAPID SORTIE PIPELINE</a:t>
+            </a:r>
+          </a:p>
+        </p:txBody>
+      </p:sp>
+      <p:sp>
+        <p:nvSpPr>
+          <p:cNvPr id="7" name="Rounded Rectangle 6"/>
+          <p:cNvSpPr/>
+          <p:nvPr/>
+        </p:nvSpPr>
+        <p:spPr>
+          <a:xfrm>
+            <a:off x="548640" y="1143000"/>
+            <a:ext cx="2084831" cy="5120640"/>
+          </a:xfrm>
+          <a:prstGeom prst="roundRect">
+            <a:avLst/>
+          </a:prstGeom>
+          <a:solidFill>
             <a:srgbClr val="FFFFFF"/>
           </a:solidFill>
-          <a:ln w="12700">
+          <a:ln w="15240">
             <a:solidFill>
               <a:srgbClr val="E2E8F0"/>
             </a:solidFill>
@@ -11285,29 +10553,59 @@
           </a:fontRef>
         </p:style>
         <p:txBody>
-          <a:bodyPr rtlCol="0" anchor="ctr"/>
-          <a:lstStyle/>
-          <a:p>
-            <a:pPr algn="ctr"/>
-          </a:p>
-        </p:txBody>
-      </p:sp>
-      <p:sp>
-        <p:nvSpPr>
-          <p:cNvPr id="45" name="Rounded Rectangle 44"/>
-          <p:cNvSpPr/>
-          <p:nvPr/>
-        </p:nvSpPr>
-        <p:spPr>
-          <a:xfrm>
-            <a:off x="9326880" y="2880360"/>
-            <a:ext cx="73152" cy="1664208"/>
+          <a:bodyPr rtlCol="0" anchor="t" lIns="182880" rIns="182880" tIns="868680"/>
+          <a:lstStyle/>
+          <a:p>
+            <a:pPr algn="ctr"/>
+            <a:r>
+              <a:rPr b="1" sz="1100">
+                <a:solidFill>
+                  <a:srgbClr val="0F172A"/>
+                </a:solidFill>
+              </a:rPr>
+              <a:t>1. RAPID SORTIE LAUNCH
+</a:t>
+            </a:r>
+          </a:p>
+          <a:p>
+            <a:r>
+              <a:rPr b="1" sz="950">
+                <a:solidFill>
+                  <a:srgbClr val="EA580C"/>
+                </a:solidFill>
+              </a:rPr>
+              <a:t>&lt; 3 Minutes Deployment
+</a:t>
+            </a:r>
+          </a:p>
+          <a:p>
+            <a:r>
+              <a:rPr sz="950">
+                <a:solidFill>
+                  <a:srgbClr val="475569"/>
+                </a:solidFill>
+              </a:rPr>
+              <a:t>Operator outlines 2 km² search polygon on offline tablet. UAV unboxes from rugged backpack and auto-launches.</a:t>
+            </a:r>
+          </a:p>
+        </p:txBody>
+      </p:sp>
+      <p:sp>
+        <p:nvSpPr>
+          <p:cNvPr id="8" name="Rounded Rectangle 7"/>
+          <p:cNvSpPr/>
+          <p:nvPr/>
+        </p:nvSpPr>
+        <p:spPr>
+          <a:xfrm>
+            <a:off x="548640" y="1143000"/>
+            <a:ext cx="2084831" cy="73152"/>
           </a:xfrm>
           <a:prstGeom prst="roundRect">
             <a:avLst/>
           </a:prstGeom>
           <a:solidFill>
-            <a:srgbClr val="7C3AED"/>
+            <a:srgbClr val="EA580C"/>
           </a:solidFill>
           <a:ln>
             <a:noFill/>
@@ -11337,22 +10635,22 @@
       </p:sp>
       <p:sp>
         <p:nvSpPr>
-          <p:cNvPr id="46" name="Oval 45"/>
-          <p:cNvSpPr/>
-          <p:nvPr/>
-        </p:nvSpPr>
-        <p:spPr>
-          <a:xfrm>
-            <a:off x="9473184" y="3008376"/>
-            <a:ext cx="310896" cy="310896"/>
+          <p:cNvPr id="9" name="Oval 8"/>
+          <p:cNvSpPr/>
+          <p:nvPr/>
+        </p:nvSpPr>
+        <p:spPr>
+          <a:xfrm>
+            <a:off x="731520" y="1371600"/>
+            <a:ext cx="475488" cy="475488"/>
           </a:xfrm>
           <a:prstGeom prst="ellipse">
             <a:avLst/>
           </a:prstGeom>
           <a:solidFill>
-            <a:srgbClr val="7C3AED"/>
-          </a:solidFill>
-          <a:ln w="12700">
+            <a:srgbClr val="EA580C"/>
+          </a:solidFill>
+          <a:ln w="19050">
             <a:solidFill>
               <a:srgbClr val="FFFFFF"/>
             </a:solidFill>
@@ -11378,153 +10676,34 @@
           <a:p>
             <a:pPr algn="ctr"/>
             <a:r>
-              <a:rPr b="1" sz="1100">
+              <a:rPr b="1" sz="1300">
                 <a:solidFill>
                   <a:srgbClr val="FFFFFF"/>
                 </a:solidFill>
               </a:rPr>
-              <a:t>4</a:t>
-            </a:r>
-          </a:p>
-        </p:txBody>
-      </p:sp>
-      <p:sp>
-        <p:nvSpPr>
-          <p:cNvPr id="47" name="TextBox 46"/>
-          <p:cNvSpPr txBox="1"/>
-          <p:nvPr/>
-        </p:nvSpPr>
-        <p:spPr>
-          <a:xfrm>
-            <a:off x="9857232" y="2990088"/>
-            <a:ext cx="1801368" cy="347472"/>
-          </a:xfrm>
-          <a:prstGeom prst="rect">
-            <a:avLst/>
-          </a:prstGeom>
-          <a:noFill/>
-        </p:spPr>
-        <p:txBody>
-          <a:bodyPr wrap="none" lIns="0" rIns="0" tIns="0" bIns="0">
-            <a:spAutoFit/>
-          </a:bodyPr>
-          <a:lstStyle/>
-          <a:p>
-            <a:r>
-              <a:rPr b="1" sz="1100">
-                <a:solidFill>
-                  <a:srgbClr val="0F172A"/>
-                </a:solidFill>
-              </a:rPr>
-              <a:t>Millimeter Ray-Casting Geodetics</a:t>
-            </a:r>
-          </a:p>
-        </p:txBody>
-      </p:sp>
-      <p:sp>
-        <p:nvSpPr>
-          <p:cNvPr id="48" name="Rounded Rectangle 47"/>
-          <p:cNvSpPr/>
-          <p:nvPr/>
-        </p:nvSpPr>
-        <p:spPr>
-          <a:xfrm>
-            <a:off x="9473184" y="3383280"/>
-            <a:ext cx="2130552" cy="237744"/>
+              <a:t>01</a:t>
+            </a:r>
+          </a:p>
+        </p:txBody>
+      </p:sp>
+      <p:sp>
+        <p:nvSpPr>
+          <p:cNvPr id="10" name="Rounded Rectangle 9"/>
+          <p:cNvSpPr/>
+          <p:nvPr/>
+        </p:nvSpPr>
+        <p:spPr>
+          <a:xfrm>
+            <a:off x="2798063" y="1143000"/>
+            <a:ext cx="2084831" cy="5120640"/>
           </a:xfrm>
           <a:prstGeom prst="roundRect">
             <a:avLst/>
           </a:prstGeom>
           <a:solidFill>
-            <a:srgbClr val="F1F5F9"/>
-          </a:solidFill>
-          <a:ln w="6350">
-            <a:solidFill>
-              <a:srgbClr val="E2E8F0"/>
-            </a:solidFill>
-          </a:ln>
-        </p:spPr>
-        <p:style>
-          <a:lnRef idx="1">
-            <a:schemeClr val="accent1"/>
-          </a:lnRef>
-          <a:fillRef idx="3">
-            <a:schemeClr val="accent1"/>
-          </a:fillRef>
-          <a:effectRef idx="2">
-            <a:schemeClr val="accent1"/>
-          </a:effectRef>
-          <a:fontRef idx="minor">
-            <a:schemeClr val="lt1"/>
-          </a:fontRef>
-        </p:style>
-        <p:txBody>
-          <a:bodyPr rtlCol="0" anchor="ctr" lIns="73152"/>
-          <a:lstStyle/>
-          <a:p>
-            <a:pPr algn="ctr"/>
-            <a:r>
-              <a:rPr b="1" sz="850">
-                <a:solidFill>
-                  <a:srgbClr val="334155"/>
-                </a:solidFill>
-              </a:rPr>
-              <a:t>WGS-84 Coordinate Output (SEP ±2.1m)</a:t>
-            </a:r>
-          </a:p>
-        </p:txBody>
-      </p:sp>
-      <p:sp>
-        <p:nvSpPr>
-          <p:cNvPr id="49" name="TextBox 48"/>
-          <p:cNvSpPr txBox="1"/>
-          <p:nvPr/>
-        </p:nvSpPr>
-        <p:spPr>
-          <a:xfrm>
-            <a:off x="9473184" y="3685032"/>
-            <a:ext cx="2130552" cy="795528"/>
-          </a:xfrm>
-          <a:prstGeom prst="rect">
-            <a:avLst/>
-          </a:prstGeom>
-          <a:noFill/>
-        </p:spPr>
-        <p:txBody>
-          <a:bodyPr wrap="square" lIns="0" rIns="0" tIns="0" bIns="0">
-            <a:spAutoFit/>
-          </a:bodyPr>
-          <a:lstStyle/>
-          <a:p>
-            <a:r>
-              <a:rPr sz="950">
-                <a:solidFill>
-                  <a:srgbClr val="334155"/>
-                </a:solidFill>
-              </a:rPr>
-              <a:t>Eliminates dangerous overhead hovering. Converts oblique camera pixels into exact GPS coordinates in real time.</a:t>
-            </a:r>
-          </a:p>
-        </p:txBody>
-      </p:sp>
-      <p:sp>
-        <p:nvSpPr>
-          <p:cNvPr id="50" name="Rounded Rectangle 49"/>
-          <p:cNvSpPr/>
-          <p:nvPr/>
-        </p:nvSpPr>
-        <p:spPr>
-          <a:xfrm>
-            <a:off x="6720840" y="4709160"/>
-            <a:ext cx="2423160" cy="1664208"/>
-          </a:xfrm>
-          <a:prstGeom prst="roundRect">
-            <a:avLst/>
-          </a:prstGeom>
-          <a:solidFill>
             <a:srgbClr val="FFFFFF"/>
           </a:solidFill>
-          <a:ln w="12700">
+          <a:ln w="15240">
             <a:solidFill>
               <a:srgbClr val="E2E8F0"/>
             </a:solidFill>
@@ -11552,29 +10731,59 @@
           </a:fontRef>
         </p:style>
         <p:txBody>
-          <a:bodyPr rtlCol="0" anchor="ctr"/>
-          <a:lstStyle/>
-          <a:p>
-            <a:pPr algn="ctr"/>
-          </a:p>
-        </p:txBody>
-      </p:sp>
-      <p:sp>
-        <p:nvSpPr>
-          <p:cNvPr id="51" name="Rounded Rectangle 50"/>
-          <p:cNvSpPr/>
-          <p:nvPr/>
-        </p:nvSpPr>
-        <p:spPr>
-          <a:xfrm>
-            <a:off x="6720840" y="4709160"/>
-            <a:ext cx="73152" cy="1664208"/>
+          <a:bodyPr rtlCol="0" anchor="t" lIns="182880" rIns="182880" tIns="868680"/>
+          <a:lstStyle/>
+          <a:p>
+            <a:pPr algn="ctr"/>
+            <a:r>
+              <a:rPr b="1" sz="1100">
+                <a:solidFill>
+                  <a:srgbClr val="0F172A"/>
+                </a:solidFill>
+              </a:rPr>
+              <a:t>2. BOUSTROPHEDON SWEEP
+</a:t>
+            </a:r>
+          </a:p>
+          <a:p>
+            <a:r>
+              <a:rPr b="1" sz="950">
+                <a:solidFill>
+                  <a:srgbClr val="0284C7"/>
+                </a:solidFill>
+              </a:rPr>
+              <a:t>STM32U5 @ 250 Hz Loop
+</a:t>
+            </a:r>
+          </a:p>
+          <a:p>
+            <a:r>
+              <a:rPr sz="950">
+                <a:solidFill>
+                  <a:srgbClr val="475569"/>
+                </a:solidFill>
+              </a:rPr>
+              <a:t>Autonomous lawnmower search trajectory at 25-30m AGL. 1D ToF laser altimeter maintains terrain contour following.</a:t>
+            </a:r>
+          </a:p>
+        </p:txBody>
+      </p:sp>
+      <p:sp>
+        <p:nvSpPr>
+          <p:cNvPr id="11" name="Rounded Rectangle 10"/>
+          <p:cNvSpPr/>
+          <p:nvPr/>
+        </p:nvSpPr>
+        <p:spPr>
+          <a:xfrm>
+            <a:off x="2798063" y="1143000"/>
+            <a:ext cx="2084831" cy="73152"/>
           </a:xfrm>
           <a:prstGeom prst="roundRect">
             <a:avLst/>
           </a:prstGeom>
           <a:solidFill>
-            <a:srgbClr val="EA580C"/>
+            <a:srgbClr val="0284C7"/>
           </a:solidFill>
           <a:ln>
             <a:noFill/>
@@ -11604,22 +10813,22 @@
       </p:sp>
       <p:sp>
         <p:nvSpPr>
-          <p:cNvPr id="52" name="Oval 51"/>
-          <p:cNvSpPr/>
-          <p:nvPr/>
-        </p:nvSpPr>
-        <p:spPr>
-          <a:xfrm>
-            <a:off x="6867144" y="4837176"/>
-            <a:ext cx="310896" cy="310896"/>
+          <p:cNvPr id="12" name="Oval 11"/>
+          <p:cNvSpPr/>
+          <p:nvPr/>
+        </p:nvSpPr>
+        <p:spPr>
+          <a:xfrm>
+            <a:off x="2980943" y="1371600"/>
+            <a:ext cx="475488" cy="475488"/>
           </a:xfrm>
           <a:prstGeom prst="ellipse">
             <a:avLst/>
           </a:prstGeom>
           <a:solidFill>
-            <a:srgbClr val="EA580C"/>
-          </a:solidFill>
-          <a:ln w="12700">
+            <a:srgbClr val="0284C7"/>
+          </a:solidFill>
+          <a:ln w="19050">
             <a:solidFill>
               <a:srgbClr val="FFFFFF"/>
             </a:solidFill>
@@ -11645,153 +10854,34 @@
           <a:p>
             <a:pPr algn="ctr"/>
             <a:r>
-              <a:rPr b="1" sz="1100">
+              <a:rPr b="1" sz="1300">
                 <a:solidFill>
                   <a:srgbClr val="FFFFFF"/>
                 </a:solidFill>
               </a:rPr>
-              <a:t>5</a:t>
-            </a:r>
-          </a:p>
-        </p:txBody>
-      </p:sp>
-      <p:sp>
-        <p:nvSpPr>
-          <p:cNvPr id="53" name="TextBox 52"/>
-          <p:cNvSpPr txBox="1"/>
-          <p:nvPr/>
-        </p:nvSpPr>
-        <p:spPr>
-          <a:xfrm>
-            <a:off x="7251192" y="4818888"/>
-            <a:ext cx="1801368" cy="347472"/>
-          </a:xfrm>
-          <a:prstGeom prst="rect">
-            <a:avLst/>
-          </a:prstGeom>
-          <a:noFill/>
-        </p:spPr>
-        <p:txBody>
-          <a:bodyPr wrap="none" lIns="0" rIns="0" tIns="0" bIns="0">
-            <a:spAutoFit/>
-          </a:bodyPr>
-          <a:lstStyle/>
-          <a:p>
-            <a:r>
-              <a:rPr b="1" sz="1100">
-                <a:solidFill>
-                  <a:srgbClr val="0F172A"/>
-                </a:solidFill>
-              </a:rPr>
-              <a:t>Hazard-Aware Dijkstra Routing</a:t>
-            </a:r>
-          </a:p>
-        </p:txBody>
-      </p:sp>
-      <p:sp>
-        <p:nvSpPr>
-          <p:cNvPr id="54" name="Rounded Rectangle 53"/>
-          <p:cNvSpPr/>
-          <p:nvPr/>
-        </p:nvSpPr>
-        <p:spPr>
-          <a:xfrm>
-            <a:off x="6867144" y="5212080"/>
-            <a:ext cx="2130552" cy="237744"/>
+              <a:t>02</a:t>
+            </a:r>
+          </a:p>
+        </p:txBody>
+      </p:sp>
+      <p:sp>
+        <p:nvSpPr>
+          <p:cNvPr id="13" name="Rounded Rectangle 12"/>
+          <p:cNvSpPr/>
+          <p:nvPr/>
+        </p:nvSpPr>
+        <p:spPr>
+          <a:xfrm>
+            <a:off x="5047486" y="1143000"/>
+            <a:ext cx="2084831" cy="5120640"/>
           </a:xfrm>
           <a:prstGeom prst="roundRect">
             <a:avLst/>
           </a:prstGeom>
           <a:solidFill>
-            <a:srgbClr val="F1F5F9"/>
-          </a:solidFill>
-          <a:ln w="6350">
-            <a:solidFill>
-              <a:srgbClr val="E2E8F0"/>
-            </a:solidFill>
-          </a:ln>
-        </p:spPr>
-        <p:style>
-          <a:lnRef idx="1">
-            <a:schemeClr val="accent1"/>
-          </a:lnRef>
-          <a:fillRef idx="3">
-            <a:schemeClr val="accent1"/>
-          </a:fillRef>
-          <a:effectRef idx="2">
-            <a:schemeClr val="accent1"/>
-          </a:effectRef>
-          <a:fontRef idx="minor">
-            <a:schemeClr val="lt1"/>
-          </a:fontRef>
-        </p:style>
-        <p:txBody>
-          <a:bodyPr rtlCol="0" anchor="ctr" lIns="73152"/>
-          <a:lstStyle/>
-          <a:p>
-            <a:pPr algn="ctr"/>
-            <a:r>
-              <a:rPr b="1" sz="850">
-                <a:solidFill>
-                  <a:srgbClr val="334155"/>
-                </a:solidFill>
-              </a:rPr>
-              <a:t>Safe Pedestrian Rescue Corridors</a:t>
-            </a:r>
-          </a:p>
-        </p:txBody>
-      </p:sp>
-      <p:sp>
-        <p:nvSpPr>
-          <p:cNvPr id="55" name="TextBox 54"/>
-          <p:cNvSpPr txBox="1"/>
-          <p:nvPr/>
-        </p:nvSpPr>
-        <p:spPr>
-          <a:xfrm>
-            <a:off x="6867144" y="5513832"/>
-            <a:ext cx="2130552" cy="795528"/>
-          </a:xfrm>
-          <a:prstGeom prst="rect">
-            <a:avLst/>
-          </a:prstGeom>
-          <a:noFill/>
-        </p:spPr>
-        <p:txBody>
-          <a:bodyPr wrap="square" lIns="0" rIns="0" tIns="0" bIns="0">
-            <a:spAutoFit/>
-          </a:bodyPr>
-          <a:lstStyle/>
-          <a:p>
-            <a:r>
-              <a:rPr sz="950">
-                <a:solidFill>
-                  <a:srgbClr val="334155"/>
-                </a:solidFill>
-              </a:rPr>
-              <a:t>Charts safe walking paths for NDRF teams that actively route around live 11kV wires, landslides, and fire lines.</a:t>
-            </a:r>
-          </a:p>
-        </p:txBody>
-      </p:sp>
-      <p:sp>
-        <p:nvSpPr>
-          <p:cNvPr id="56" name="Rounded Rectangle 55"/>
-          <p:cNvSpPr/>
-          <p:nvPr/>
-        </p:nvSpPr>
-        <p:spPr>
-          <a:xfrm>
-            <a:off x="9326880" y="4709160"/>
-            <a:ext cx="2423160" cy="1664208"/>
-          </a:xfrm>
-          <a:prstGeom prst="roundRect">
-            <a:avLst/>
-          </a:prstGeom>
-          <a:solidFill>
             <a:srgbClr val="FFFFFF"/>
           </a:solidFill>
-          <a:ln w="12700">
+          <a:ln w="15240">
             <a:solidFill>
               <a:srgbClr val="E2E8F0"/>
             </a:solidFill>
@@ -11819,29 +10909,59 @@
           </a:fontRef>
         </p:style>
         <p:txBody>
-          <a:bodyPr rtlCol="0" anchor="ctr"/>
-          <a:lstStyle/>
-          <a:p>
-            <a:pPr algn="ctr"/>
-          </a:p>
-        </p:txBody>
-      </p:sp>
-      <p:sp>
-        <p:nvSpPr>
-          <p:cNvPr id="57" name="Rounded Rectangle 56"/>
-          <p:cNvSpPr/>
-          <p:nvPr/>
-        </p:nvSpPr>
-        <p:spPr>
-          <a:xfrm>
-            <a:off x="9326880" y="4709160"/>
-            <a:ext cx="73152" cy="1664208"/>
+          <a:bodyPr rtlCol="0" anchor="t" lIns="182880" rIns="182880" tIns="868680"/>
+          <a:lstStyle/>
+          <a:p>
+            <a:pPr algn="ctr"/>
+            <a:r>
+              <a:rPr b="1" sz="1100">
+                <a:solidFill>
+                  <a:srgbClr val="0F172A"/>
+                </a:solidFill>
+              </a:rPr>
+              <a:t>3. 37°C THERMAL LOCK
+</a:t>
+            </a:r>
+          </a:p>
+          <a:p>
+            <a:r>
+              <a:rPr b="1" sz="950">
+                <a:solidFill>
+                  <a:srgbClr val="7C3AED"/>
+                </a:solidFill>
+              </a:rPr>
+              <a:t>Qualcomm NPU (&lt; 5W)
+</a:t>
+            </a:r>
+          </a:p>
+          <a:p>
+            <a:r>
+              <a:rPr sz="950">
+                <a:solidFill>
+                  <a:srgbClr val="475569"/>
+                </a:solidFill>
+              </a:rPr>
+              <a:t>Quantized INT8 YOLO model fuses daylight contours with radiometric 8-14μm body heat, spotting trapped survivors.</a:t>
+            </a:r>
+          </a:p>
+        </p:txBody>
+      </p:sp>
+      <p:sp>
+        <p:nvSpPr>
+          <p:cNvPr id="14" name="Rounded Rectangle 13"/>
+          <p:cNvSpPr/>
+          <p:nvPr/>
+        </p:nvSpPr>
+        <p:spPr>
+          <a:xfrm>
+            <a:off x="5047486" y="1143000"/>
+            <a:ext cx="2084831" cy="73152"/>
           </a:xfrm>
           <a:prstGeom prst="roundRect">
             <a:avLst/>
           </a:prstGeom>
           <a:solidFill>
-            <a:srgbClr val="0284C7"/>
+            <a:srgbClr val="7C3AED"/>
           </a:solidFill>
           <a:ln>
             <a:noFill/>
@@ -11871,22 +10991,22 @@
       </p:sp>
       <p:sp>
         <p:nvSpPr>
-          <p:cNvPr id="58" name="Oval 57"/>
-          <p:cNvSpPr/>
-          <p:nvPr/>
-        </p:nvSpPr>
-        <p:spPr>
-          <a:xfrm>
-            <a:off x="9473184" y="4837176"/>
-            <a:ext cx="310896" cy="310896"/>
+          <p:cNvPr id="15" name="Oval 14"/>
+          <p:cNvSpPr/>
+          <p:nvPr/>
+        </p:nvSpPr>
+        <p:spPr>
+          <a:xfrm>
+            <a:off x="5230366" y="1371600"/>
+            <a:ext cx="475488" cy="475488"/>
           </a:xfrm>
           <a:prstGeom prst="ellipse">
             <a:avLst/>
           </a:prstGeom>
           <a:solidFill>
-            <a:srgbClr val="0284C7"/>
-          </a:solidFill>
-          <a:ln w="12700">
+            <a:srgbClr val="7C3AED"/>
+          </a:solidFill>
+          <a:ln w="19050">
             <a:solidFill>
               <a:srgbClr val="FFFFFF"/>
             </a:solidFill>
@@ -11912,26 +11032,497 @@
           <a:p>
             <a:pPr algn="ctr"/>
             <a:r>
+              <a:rPr b="1" sz="1300">
+                <a:solidFill>
+                  <a:srgbClr val="FFFFFF"/>
+                </a:solidFill>
+              </a:rPr>
+              <a:t>03</a:t>
+            </a:r>
+          </a:p>
+        </p:txBody>
+      </p:sp>
+      <p:sp>
+        <p:nvSpPr>
+          <p:cNvPr id="16" name="Rounded Rectangle 15"/>
+          <p:cNvSpPr/>
+          <p:nvPr/>
+        </p:nvSpPr>
+        <p:spPr>
+          <a:xfrm>
+            <a:off x="7296909" y="1143000"/>
+            <a:ext cx="2084831" cy="5120640"/>
+          </a:xfrm>
+          <a:prstGeom prst="roundRect">
+            <a:avLst/>
+          </a:prstGeom>
+          <a:solidFill>
+            <a:srgbClr val="FFFFFF"/>
+          </a:solidFill>
+          <a:ln w="15240">
+            <a:solidFill>
+              <a:srgbClr val="E2E8F0"/>
+            </a:solidFill>
+          </a:ln>
+          <a:effectLst>
+            <a:outerShdw blurRad="101600" dist="25400" dir="5400000" algn="t" rotWithShape="0">
+              <a:srgbClr val="0F172A">
+                <a:alpha val="10000"/>
+              </a:srgbClr>
+            </a:outerShdw>
+          </a:effectLst>
+        </p:spPr>
+        <p:style>
+          <a:lnRef idx="1">
+            <a:schemeClr val="accent1"/>
+          </a:lnRef>
+          <a:fillRef idx="3">
+            <a:schemeClr val="accent1"/>
+          </a:fillRef>
+          <a:effectRef idx="2">
+            <a:schemeClr val="accent1"/>
+          </a:effectRef>
+          <a:fontRef idx="minor">
+            <a:schemeClr val="lt1"/>
+          </a:fontRef>
+        </p:style>
+        <p:txBody>
+          <a:bodyPr rtlCol="0" anchor="t" lIns="182880" rIns="182880" tIns="868680"/>
+          <a:lstStyle/>
+          <a:p>
+            <a:pPr algn="ctr"/>
+            <a:r>
               <a:rPr b="1" sz="1100">
                 <a:solidFill>
+                  <a:srgbClr val="0F172A"/>
+                </a:solidFill>
+              </a:rPr>
+              <a:t>4. 17-BYTE LORA BURST
+</a:t>
+            </a:r>
+          </a:p>
+          <a:p>
+            <a:r>
+              <a:rPr b="1" sz="950">
+                <a:solidFill>
+                  <a:srgbClr val="0284C7"/>
+                </a:solidFill>
+              </a:rPr>
+              <a:t>Souli et al. (Elsevier 2024)
+</a:t>
+            </a:r>
+          </a:p>
+          <a:p>
+            <a:r>
+              <a:rPr sz="950">
+                <a:solidFill>
+                  <a:srgbClr val="475569"/>
+                </a:solidFill>
+              </a:rPr>
+              <a:t>Tait-Bryan ray-caster projects pixel to WGS-84 pin. Lat/Long/Temp compressed into 17-byte HMAC-SHA256 packet.</a:t>
+            </a:r>
+          </a:p>
+        </p:txBody>
+      </p:sp>
+      <p:sp>
+        <p:nvSpPr>
+          <p:cNvPr id="17" name="Rounded Rectangle 16"/>
+          <p:cNvSpPr/>
+          <p:nvPr/>
+        </p:nvSpPr>
+        <p:spPr>
+          <a:xfrm>
+            <a:off x="7296909" y="1143000"/>
+            <a:ext cx="2084831" cy="73152"/>
+          </a:xfrm>
+          <a:prstGeom prst="roundRect">
+            <a:avLst/>
+          </a:prstGeom>
+          <a:solidFill>
+            <a:srgbClr val="0284C7"/>
+          </a:solidFill>
+          <a:ln>
+            <a:noFill/>
+          </a:ln>
+        </p:spPr>
+        <p:style>
+          <a:lnRef idx="1">
+            <a:schemeClr val="accent1"/>
+          </a:lnRef>
+          <a:fillRef idx="3">
+            <a:schemeClr val="accent1"/>
+          </a:fillRef>
+          <a:effectRef idx="2">
+            <a:schemeClr val="accent1"/>
+          </a:effectRef>
+          <a:fontRef idx="minor">
+            <a:schemeClr val="lt1"/>
+          </a:fontRef>
+        </p:style>
+        <p:txBody>
+          <a:bodyPr rtlCol="0" anchor="ctr"/>
+          <a:lstStyle/>
+          <a:p>
+            <a:pPr algn="ctr"/>
+          </a:p>
+        </p:txBody>
+      </p:sp>
+      <p:sp>
+        <p:nvSpPr>
+          <p:cNvPr id="18" name="Oval 17"/>
+          <p:cNvSpPr/>
+          <p:nvPr/>
+        </p:nvSpPr>
+        <p:spPr>
+          <a:xfrm>
+            <a:off x="7479789" y="1371600"/>
+            <a:ext cx="475488" cy="475488"/>
+          </a:xfrm>
+          <a:prstGeom prst="ellipse">
+            <a:avLst/>
+          </a:prstGeom>
+          <a:solidFill>
+            <a:srgbClr val="0284C7"/>
+          </a:solidFill>
+          <a:ln w="19050">
+            <a:solidFill>
+              <a:srgbClr val="FFFFFF"/>
+            </a:solidFill>
+          </a:ln>
+        </p:spPr>
+        <p:style>
+          <a:lnRef idx="1">
+            <a:schemeClr val="accent1"/>
+          </a:lnRef>
+          <a:fillRef idx="3">
+            <a:schemeClr val="accent1"/>
+          </a:fillRef>
+          <a:effectRef idx="2">
+            <a:schemeClr val="accent1"/>
+          </a:effectRef>
+          <a:fontRef idx="minor">
+            <a:schemeClr val="lt1"/>
+          </a:fontRef>
+        </p:style>
+        <p:txBody>
+          <a:bodyPr rtlCol="0" anchor="ctr"/>
+          <a:lstStyle/>
+          <a:p>
+            <a:pPr algn="ctr"/>
+            <a:r>
+              <a:rPr b="1" sz="1300">
+                <a:solidFill>
                   <a:srgbClr val="FFFFFF"/>
                 </a:solidFill>
               </a:rPr>
-              <a:t>6</a:t>
-            </a:r>
-          </a:p>
-        </p:txBody>
-      </p:sp>
-      <p:sp>
-        <p:nvSpPr>
-          <p:cNvPr id="59" name="TextBox 58"/>
+              <a:t>04</a:t>
+            </a:r>
+          </a:p>
+        </p:txBody>
+      </p:sp>
+      <p:sp>
+        <p:nvSpPr>
+          <p:cNvPr id="19" name="Rounded Rectangle 18"/>
+          <p:cNvSpPr/>
+          <p:nvPr/>
+        </p:nvSpPr>
+        <p:spPr>
+          <a:xfrm>
+            <a:off x="9546332" y="1143000"/>
+            <a:ext cx="2084831" cy="5120640"/>
+          </a:xfrm>
+          <a:prstGeom prst="roundRect">
+            <a:avLst/>
+          </a:prstGeom>
+          <a:solidFill>
+            <a:srgbClr val="FFFFFF"/>
+          </a:solidFill>
+          <a:ln w="15240">
+            <a:solidFill>
+              <a:srgbClr val="E2E8F0"/>
+            </a:solidFill>
+          </a:ln>
+          <a:effectLst>
+            <a:outerShdw blurRad="101600" dist="25400" dir="5400000" algn="t" rotWithShape="0">
+              <a:srgbClr val="0F172A">
+                <a:alpha val="10000"/>
+              </a:srgbClr>
+            </a:outerShdw>
+          </a:effectLst>
+        </p:spPr>
+        <p:style>
+          <a:lnRef idx="1">
+            <a:schemeClr val="accent1"/>
+          </a:lnRef>
+          <a:fillRef idx="3">
+            <a:schemeClr val="accent1"/>
+          </a:fillRef>
+          <a:effectRef idx="2">
+            <a:schemeClr val="accent1"/>
+          </a:effectRef>
+          <a:fontRef idx="minor">
+            <a:schemeClr val="lt1"/>
+          </a:fontRef>
+        </p:style>
+        <p:txBody>
+          <a:bodyPr rtlCol="0" anchor="t" lIns="182880" rIns="182880" tIns="868680"/>
+          <a:lstStyle/>
+          <a:p>
+            <a:pPr algn="ctr"/>
+            <a:r>
+              <a:rPr b="1" sz="1100">
+                <a:solidFill>
+                  <a:srgbClr val="0F172A"/>
+                </a:solidFill>
+              </a:rPr>
+              <a:t>5. SAFE ROUTE EXTRACTION
+</a:t>
+            </a:r>
+          </a:p>
+          <a:p>
+            <a:r>
+              <a:rPr b="1" sz="950">
+                <a:solidFill>
+                  <a:srgbClr val="0D9488"/>
+                </a:solidFill>
+              </a:rPr>
+              <a:t>Hazard-Aware Dijkstra
+</a:t>
+            </a:r>
+          </a:p>
+          <a:p>
+            <a:r>
+              <a:rPr sz="950">
+                <a:solidFill>
+                  <a:srgbClr val="475569"/>
+                </a:solidFill>
+              </a:rPr>
+              <a:t>Offline Ground Station instantly charts safe walking corridor bypassing 11kV wires directly to casualty.</a:t>
+            </a:r>
+          </a:p>
+        </p:txBody>
+      </p:sp>
+      <p:sp>
+        <p:nvSpPr>
+          <p:cNvPr id="20" name="Rounded Rectangle 19"/>
+          <p:cNvSpPr/>
+          <p:nvPr/>
+        </p:nvSpPr>
+        <p:spPr>
+          <a:xfrm>
+            <a:off x="9546332" y="1143000"/>
+            <a:ext cx="2084831" cy="73152"/>
+          </a:xfrm>
+          <a:prstGeom prst="roundRect">
+            <a:avLst/>
+          </a:prstGeom>
+          <a:solidFill>
+            <a:srgbClr val="0D9488"/>
+          </a:solidFill>
+          <a:ln>
+            <a:noFill/>
+          </a:ln>
+        </p:spPr>
+        <p:style>
+          <a:lnRef idx="1">
+            <a:schemeClr val="accent1"/>
+          </a:lnRef>
+          <a:fillRef idx="3">
+            <a:schemeClr val="accent1"/>
+          </a:fillRef>
+          <a:effectRef idx="2">
+            <a:schemeClr val="accent1"/>
+          </a:effectRef>
+          <a:fontRef idx="minor">
+            <a:schemeClr val="lt1"/>
+          </a:fontRef>
+        </p:style>
+        <p:txBody>
+          <a:bodyPr rtlCol="0" anchor="ctr"/>
+          <a:lstStyle/>
+          <a:p>
+            <a:pPr algn="ctr"/>
+          </a:p>
+        </p:txBody>
+      </p:sp>
+      <p:sp>
+        <p:nvSpPr>
+          <p:cNvPr id="21" name="Oval 20"/>
+          <p:cNvSpPr/>
+          <p:nvPr/>
+        </p:nvSpPr>
+        <p:spPr>
+          <a:xfrm>
+            <a:off x="9729212" y="1371600"/>
+            <a:ext cx="475488" cy="475488"/>
+          </a:xfrm>
+          <a:prstGeom prst="ellipse">
+            <a:avLst/>
+          </a:prstGeom>
+          <a:solidFill>
+            <a:srgbClr val="0D9488"/>
+          </a:solidFill>
+          <a:ln w="19050">
+            <a:solidFill>
+              <a:srgbClr val="FFFFFF"/>
+            </a:solidFill>
+          </a:ln>
+        </p:spPr>
+        <p:style>
+          <a:lnRef idx="1">
+            <a:schemeClr val="accent1"/>
+          </a:lnRef>
+          <a:fillRef idx="3">
+            <a:schemeClr val="accent1"/>
+          </a:fillRef>
+          <a:effectRef idx="2">
+            <a:schemeClr val="accent1"/>
+          </a:effectRef>
+          <a:fontRef idx="minor">
+            <a:schemeClr val="lt1"/>
+          </a:fontRef>
+        </p:style>
+        <p:txBody>
+          <a:bodyPr rtlCol="0" anchor="ctr"/>
+          <a:lstStyle/>
+          <a:p>
+            <a:pPr algn="ctr"/>
+            <a:r>
+              <a:rPr b="1" sz="1300">
+                <a:solidFill>
+                  <a:srgbClr val="FFFFFF"/>
+                </a:solidFill>
+              </a:rPr>
+              <a:t>05</a:t>
+            </a:r>
+          </a:p>
+        </p:txBody>
+      </p:sp>
+    </p:spTree>
+  </p:cSld>
+  <p:clrMapOvr>
+    <a:masterClrMapping/>
+  </p:clrMapOvr>
+</p:sld>
+</file>
+
+<file path=ppt/slides/slide6.xml><?xml version="1.0" encoding="utf-8"?>
+<p:sld xmlns:a="http://schemas.openxmlformats.org/drawingml/2006/main" xmlns:p="http://schemas.openxmlformats.org/presentationml/2006/main" xmlns:r="http://schemas.openxmlformats.org/officeDocument/2006/relationships">
+  <p:cSld>
+    <p:spTree>
+      <p:nvGrpSpPr>
+        <p:cNvPr id="1" name=""/>
+        <p:cNvGrpSpPr/>
+        <p:nvPr/>
+      </p:nvGrpSpPr>
+      <p:grpSpPr/>
+      <p:sp>
+        <p:nvSpPr>
+          <p:cNvPr id="2" name="Rectangle 1"/>
+          <p:cNvSpPr/>
+          <p:nvPr/>
+        </p:nvSpPr>
+        <p:spPr>
+          <a:xfrm>
+            <a:off x="0" y="0"/>
+            <a:ext cx="12191695" cy="6858000"/>
+          </a:xfrm>
+          <a:prstGeom prst="rect">
+            <a:avLst/>
+          </a:prstGeom>
+          <a:solidFill>
+            <a:srgbClr val="F8FAFC"/>
+          </a:solidFill>
+          <a:ln>
+            <a:noFill/>
+          </a:ln>
+        </p:spPr>
+        <p:style>
+          <a:lnRef idx="1">
+            <a:schemeClr val="accent1"/>
+          </a:lnRef>
+          <a:fillRef idx="3">
+            <a:schemeClr val="accent1"/>
+          </a:fillRef>
+          <a:effectRef idx="2">
+            <a:schemeClr val="accent1"/>
+          </a:effectRef>
+          <a:fontRef idx="minor">
+            <a:schemeClr val="lt1"/>
+          </a:fontRef>
+        </p:style>
+        <p:txBody>
+          <a:bodyPr rtlCol="0" anchor="ctr"/>
+          <a:lstStyle/>
+          <a:p>
+            <a:pPr algn="ctr"/>
+          </a:p>
+        </p:txBody>
+      </p:sp>
+      <p:sp>
+        <p:nvSpPr>
+          <p:cNvPr id="3" name="Rounded Rectangle 2"/>
+          <p:cNvSpPr/>
+          <p:nvPr/>
+        </p:nvSpPr>
+        <p:spPr>
+          <a:xfrm>
+            <a:off x="548640" y="274320"/>
+            <a:ext cx="1691640" cy="384048"/>
+          </a:xfrm>
+          <a:prstGeom prst="roundRect">
+            <a:avLst/>
+          </a:prstGeom>
+          <a:solidFill>
+            <a:srgbClr val="FFFFFF"/>
+          </a:solidFill>
+          <a:ln w="12700">
+            <a:solidFill>
+              <a:srgbClr val="E2E8F0"/>
+            </a:solidFill>
+          </a:ln>
+        </p:spPr>
+        <p:style>
+          <a:lnRef idx="1">
+            <a:schemeClr val="accent1"/>
+          </a:lnRef>
+          <a:fillRef idx="3">
+            <a:schemeClr val="accent1"/>
+          </a:fillRef>
+          <a:effectRef idx="2">
+            <a:schemeClr val="accent1"/>
+          </a:effectRef>
+          <a:fontRef idx="minor">
+            <a:schemeClr val="lt1"/>
+          </a:fontRef>
+        </p:style>
+        <p:txBody>
+          <a:bodyPr rtlCol="0" anchor="ctr"/>
+          <a:lstStyle/>
+          <a:p>
+            <a:pPr algn="ctr"/>
+            <a:r>
+              <a:rPr sz="950" b="1">
+                <a:solidFill>
+                  <a:srgbClr val="1E293B"/>
+                </a:solidFill>
+                <a:latin typeface="Calibri"/>
+              </a:rPr>
+              <a:t>PHOENIX X · SIH26177</a:t>
+            </a:r>
+          </a:p>
+        </p:txBody>
+      </p:sp>
+      <p:sp>
+        <p:nvSpPr>
+          <p:cNvPr id="4" name="TextBox 3"/>
           <p:cNvSpPr txBox="1"/>
           <p:nvPr/>
         </p:nvSpPr>
         <p:spPr>
           <a:xfrm>
-            <a:off x="9857232" y="4818888"/>
-            <a:ext cx="1801368" cy="347472"/>
+            <a:off x="2377440" y="219456"/>
+            <a:ext cx="6949440" cy="219456"/>
           </a:xfrm>
           <a:prstGeom prst="rect">
             <a:avLst/>
@@ -11945,79 +11536,684 @@
           <a:lstStyle/>
           <a:p>
             <a:r>
-              <a:rPr b="1" sz="1100">
+              <a:rPr sz="950" b="1">
+                <a:solidFill>
+                  <a:srgbClr val="EA580C"/>
+                </a:solidFill>
+                <a:latin typeface="Calibri"/>
+              </a:rPr>
+              <a:t>INCIDENT COMMAND &amp; GIS ROUTING · FIRST RESPONDER INTEGRATION</a:t>
+            </a:r>
+          </a:p>
+        </p:txBody>
+      </p:sp>
+      <p:sp>
+        <p:nvSpPr>
+          <p:cNvPr id="5" name="TextBox 4"/>
+          <p:cNvSpPr txBox="1"/>
+          <p:nvPr/>
+        </p:nvSpPr>
+        <p:spPr>
+          <a:xfrm>
+            <a:off x="2377440" y="438912"/>
+            <a:ext cx="6949440" cy="411480"/>
+          </a:xfrm>
+          <a:prstGeom prst="rect">
+            <a:avLst/>
+          </a:prstGeom>
+          <a:noFill/>
+        </p:spPr>
+        <p:txBody>
+          <a:bodyPr wrap="none" lIns="0" rIns="0" tIns="0" bIns="0">
+            <a:spAutoFit/>
+          </a:bodyPr>
+          <a:lstStyle/>
+          <a:p>
+            <a:r>
+              <a:rPr sz="1700" b="1">
                 <a:solidFill>
                   <a:srgbClr val="0F172A"/>
                 </a:solidFill>
-              </a:rPr>
-              <a:t>Sub-5-Minute Response Cycle</a:t>
-            </a:r>
-          </a:p>
-        </p:txBody>
-      </p:sp>
-      <p:sp>
-        <p:nvSpPr>
-          <p:cNvPr id="60" name="Rounded Rectangle 59"/>
-          <p:cNvSpPr/>
-          <p:nvPr/>
-        </p:nvSpPr>
-        <p:spPr>
-          <a:xfrm>
-            <a:off x="9473184" y="5212080"/>
-            <a:ext cx="2130552" cy="237744"/>
+                <a:latin typeface="Calibri"/>
+              </a:rPr>
+              <a:t>From Airborne Detection to Boots-on-Ground Extraction in &lt; 5 Minutes</a:t>
+            </a:r>
+          </a:p>
+        </p:txBody>
+      </p:sp>
+      <p:sp>
+        <p:nvSpPr>
+          <p:cNvPr id="6" name="Rounded Rectangle 5"/>
+          <p:cNvSpPr/>
+          <p:nvPr/>
+        </p:nvSpPr>
+        <p:spPr>
+          <a:xfrm>
+            <a:off x="9418320" y="274320"/>
+            <a:ext cx="2194560" cy="384048"/>
           </a:xfrm>
           <a:prstGeom prst="roundRect">
             <a:avLst/>
           </a:prstGeom>
           <a:solidFill>
-            <a:srgbClr val="F1F5F9"/>
-          </a:solidFill>
-          <a:ln w="6350">
+            <a:srgbClr val="F0FDFA"/>
+          </a:solidFill>
+          <a:ln w="12700">
+            <a:solidFill>
+              <a:srgbClr val="0D9488"/>
+            </a:solidFill>
+          </a:ln>
+        </p:spPr>
+        <p:style>
+          <a:lnRef idx="1">
+            <a:schemeClr val="accent1"/>
+          </a:lnRef>
+          <a:fillRef idx="3">
+            <a:schemeClr val="accent1"/>
+          </a:fillRef>
+          <a:effectRef idx="2">
+            <a:schemeClr val="accent1"/>
+          </a:effectRef>
+          <a:fontRef idx="minor">
+            <a:schemeClr val="lt1"/>
+          </a:fontRef>
+        </p:style>
+        <p:txBody>
+          <a:bodyPr rtlCol="0" anchor="ctr"/>
+          <a:lstStyle/>
+          <a:p>
+            <a:pPr algn="ctr"/>
+            <a:r>
+              <a:rPr sz="950" b="1">
+                <a:solidFill>
+                  <a:srgbClr val="0D9488"/>
+                </a:solidFill>
+                <a:latin typeface="Calibri"/>
+              </a:rPr>
+              <a:t>TACTICAL RESCUE GCS</a:t>
+            </a:r>
+          </a:p>
+        </p:txBody>
+      </p:sp>
+      <p:sp>
+        <p:nvSpPr>
+          <p:cNvPr id="7" name="Rounded Rectangle 6"/>
+          <p:cNvSpPr/>
+          <p:nvPr/>
+        </p:nvSpPr>
+        <p:spPr>
+          <a:xfrm>
+            <a:off x="548640" y="1051560"/>
+            <a:ext cx="7132320" cy="5349240"/>
+          </a:xfrm>
+          <a:prstGeom prst="roundRect">
+            <a:avLst/>
+          </a:prstGeom>
+          <a:solidFill>
+            <a:srgbClr val="FFFFFF"/>
+          </a:solidFill>
+          <a:ln w="15240">
             <a:solidFill>
               <a:srgbClr val="E2E8F0"/>
             </a:solidFill>
           </a:ln>
-        </p:spPr>
-        <p:style>
-          <a:lnRef idx="1">
-            <a:schemeClr val="accent1"/>
-          </a:lnRef>
-          <a:fillRef idx="3">
-            <a:schemeClr val="accent1"/>
-          </a:fillRef>
-          <a:effectRef idx="2">
-            <a:schemeClr val="accent1"/>
-          </a:effectRef>
-          <a:fontRef idx="minor">
-            <a:schemeClr val="lt1"/>
-          </a:fontRef>
-        </p:style>
-        <p:txBody>
-          <a:bodyPr rtlCol="0" anchor="ctr" lIns="73152"/>
-          <a:lstStyle/>
-          <a:p>
-            <a:pPr algn="ctr"/>
+          <a:effectLst>
+            <a:outerShdw blurRad="101600" dist="25400" dir="5400000" algn="t" rotWithShape="0">
+              <a:srgbClr val="0F172A">
+                <a:alpha val="10000"/>
+              </a:srgbClr>
+            </a:outerShdw>
+          </a:effectLst>
+        </p:spPr>
+        <p:style>
+          <a:lnRef idx="1">
+            <a:schemeClr val="accent1"/>
+          </a:lnRef>
+          <a:fillRef idx="3">
+            <a:schemeClr val="accent1"/>
+          </a:fillRef>
+          <a:effectRef idx="2">
+            <a:schemeClr val="accent1"/>
+          </a:effectRef>
+          <a:fontRef idx="minor">
+            <a:schemeClr val="lt1"/>
+          </a:fontRef>
+        </p:style>
+        <p:txBody>
+          <a:bodyPr rtlCol="0" anchor="ctr"/>
+          <a:lstStyle/>
+          <a:p>
+            <a:pPr algn="ctr"/>
+          </a:p>
+        </p:txBody>
+      </p:sp>
+      <p:pic>
+        <p:nvPicPr>
+          <p:cNvPr id="8" name="Picture 7" descr="tactical_gcs_safe_route_tablet.jpg"/>
+          <p:cNvPicPr>
+            <a:picLocks noChangeAspect="1"/>
+          </p:cNvPicPr>
+          <p:nvPr/>
+        </p:nvPicPr>
+        <p:blipFill>
+          <a:blip r:embed="rId2"/>
+          <a:stretch>
+            <a:fillRect/>
+          </a:stretch>
+        </p:blipFill>
+        <p:spPr>
+          <a:xfrm>
+            <a:off x="685800" y="1188720"/>
+            <a:ext cx="6858000" cy="5074920"/>
+          </a:xfrm>
+          <a:prstGeom prst="rect">
+            <a:avLst/>
+          </a:prstGeom>
+        </p:spPr>
+      </p:pic>
+      <p:sp>
+        <p:nvSpPr>
+          <p:cNvPr id="9" name="Rounded Rectangle 8"/>
+          <p:cNvSpPr/>
+          <p:nvPr/>
+        </p:nvSpPr>
+        <p:spPr>
+          <a:xfrm>
+            <a:off x="7909560" y="1051560"/>
+            <a:ext cx="3730752" cy="1664208"/>
+          </a:xfrm>
+          <a:prstGeom prst="roundRect">
+            <a:avLst/>
+          </a:prstGeom>
+          <a:solidFill>
+            <a:srgbClr val="FFFFFF"/>
+          </a:solidFill>
+          <a:ln w="12700">
+            <a:solidFill>
+              <a:srgbClr val="E2E8F0"/>
+            </a:solidFill>
+          </a:ln>
+          <a:effectLst>
+            <a:outerShdw blurRad="101600" dist="25400" dir="5400000" algn="t" rotWithShape="0">
+              <a:srgbClr val="0F172A">
+                <a:alpha val="10000"/>
+              </a:srgbClr>
+            </a:outerShdw>
+          </a:effectLst>
+        </p:spPr>
+        <p:style>
+          <a:lnRef idx="1">
+            <a:schemeClr val="accent1"/>
+          </a:lnRef>
+          <a:fillRef idx="3">
+            <a:schemeClr val="accent1"/>
+          </a:fillRef>
+          <a:effectRef idx="2">
+            <a:schemeClr val="accent1"/>
+          </a:effectRef>
+          <a:fontRef idx="minor">
+            <a:schemeClr val="lt1"/>
+          </a:fontRef>
+        </p:style>
+        <p:txBody>
+          <a:bodyPr rtlCol="0" anchor="t" lIns="201168" rIns="182880" tIns="128016"/>
+          <a:lstStyle/>
+          <a:p>
+            <a:pPr algn="ctr"/>
+            <a:r>
+              <a:rPr b="1" sz="1100">
+                <a:solidFill>
+                  <a:srgbClr val="0F172A"/>
+                </a:solidFill>
+              </a:rPr>
+              <a:t>1. 17-BYTE LORA PACKET INGESTION
+</a:t>
+            </a:r>
+          </a:p>
+          <a:p>
             <a:r>
               <a:rPr b="1" sz="850">
                 <a:solidFill>
-                  <a:srgbClr val="334155"/>
-                </a:solidFill>
-              </a:rPr>
-              <a:t>Instant Launch to Boots-on-Ground</a:t>
-            </a:r>
-          </a:p>
-        </p:txBody>
-      </p:sp>
-      <p:sp>
-        <p:nvSpPr>
-          <p:cNvPr id="61" name="TextBox 60"/>
+                  <a:srgbClr val="0284C7"/>
+                </a:solidFill>
+              </a:rPr>
+              <a:t>Zero Cloud / Zero Internet Architecture
+Air-Gapped Local Tactical Mesh (868 MHz)
+</a:t>
+            </a:r>
+          </a:p>
+          <a:p>
+            <a:r>
+              <a:rPr sz="950">
+                <a:solidFill>
+                  <a:srgbClr val="475569"/>
+                </a:solidFill>
+              </a:rPr>
+              <a:t>Incoming telemetry packets unpack victim coordinates, biological body temperature (37.0°C), and triage status directly into the offline Leaflet GIS dashboard in milliseconds without commercial cellular service.</a:t>
+            </a:r>
+          </a:p>
+        </p:txBody>
+      </p:sp>
+      <p:sp>
+        <p:nvSpPr>
+          <p:cNvPr id="10" name="Rounded Rectangle 9"/>
+          <p:cNvSpPr/>
+          <p:nvPr/>
+        </p:nvSpPr>
+        <p:spPr>
+          <a:xfrm>
+            <a:off x="7909560" y="1051560"/>
+            <a:ext cx="73152" cy="1664208"/>
+          </a:xfrm>
+          <a:prstGeom prst="roundRect">
+            <a:avLst/>
+          </a:prstGeom>
+          <a:solidFill>
+            <a:srgbClr val="0284C7"/>
+          </a:solidFill>
+          <a:ln>
+            <a:noFill/>
+          </a:ln>
+        </p:spPr>
+        <p:style>
+          <a:lnRef idx="1">
+            <a:schemeClr val="accent1"/>
+          </a:lnRef>
+          <a:fillRef idx="3">
+            <a:schemeClr val="accent1"/>
+          </a:fillRef>
+          <a:effectRef idx="2">
+            <a:schemeClr val="accent1"/>
+          </a:effectRef>
+          <a:fontRef idx="minor">
+            <a:schemeClr val="lt1"/>
+          </a:fontRef>
+        </p:style>
+        <p:txBody>
+          <a:bodyPr rtlCol="0" anchor="ctr"/>
+          <a:lstStyle/>
+          <a:p>
+            <a:pPr algn="ctr"/>
+          </a:p>
+        </p:txBody>
+      </p:sp>
+      <p:sp>
+        <p:nvSpPr>
+          <p:cNvPr id="11" name="Rounded Rectangle 10"/>
+          <p:cNvSpPr/>
+          <p:nvPr/>
+        </p:nvSpPr>
+        <p:spPr>
+          <a:xfrm>
+            <a:off x="7909560" y="2889504"/>
+            <a:ext cx="3730752" cy="1664208"/>
+          </a:xfrm>
+          <a:prstGeom prst="roundRect">
+            <a:avLst/>
+          </a:prstGeom>
+          <a:solidFill>
+            <a:srgbClr val="FFFFFF"/>
+          </a:solidFill>
+          <a:ln w="12700">
+            <a:solidFill>
+              <a:srgbClr val="E2E8F0"/>
+            </a:solidFill>
+          </a:ln>
+          <a:effectLst>
+            <a:outerShdw blurRad="101600" dist="25400" dir="5400000" algn="t" rotWithShape="0">
+              <a:srgbClr val="0F172A">
+                <a:alpha val="10000"/>
+              </a:srgbClr>
+            </a:outerShdw>
+          </a:effectLst>
+        </p:spPr>
+        <p:style>
+          <a:lnRef idx="1">
+            <a:schemeClr val="accent1"/>
+          </a:lnRef>
+          <a:fillRef idx="3">
+            <a:schemeClr val="accent1"/>
+          </a:fillRef>
+          <a:effectRef idx="2">
+            <a:schemeClr val="accent1"/>
+          </a:effectRef>
+          <a:fontRef idx="minor">
+            <a:schemeClr val="lt1"/>
+          </a:fontRef>
+        </p:style>
+        <p:txBody>
+          <a:bodyPr rtlCol="0" anchor="t" lIns="201168" rIns="182880" tIns="128016"/>
+          <a:lstStyle/>
+          <a:p>
+            <a:pPr algn="ctr"/>
+            <a:r>
+              <a:rPr b="1" sz="1100">
+                <a:solidFill>
+                  <a:srgbClr val="0F172A"/>
+                </a:solidFill>
+              </a:rPr>
+              <a:t>2. HAZARD-AWARE DIJKSTRA ROUTING
+</a:t>
+            </a:r>
+          </a:p>
+          <a:p>
+            <a:r>
+              <a:rPr b="1" sz="850">
+                <a:solidFill>
+                  <a:srgbClr val="E11D48"/>
+                </a:solidFill>
+              </a:rPr>
+              <a:t>Dynamic Obstacle &amp; Danger Buffers
+Avoids: 11kV Severed Wires, Landslides, Fires
+</a:t>
+            </a:r>
+          </a:p>
+          <a:p>
+            <a:r>
+              <a:rPr sz="950">
+                <a:solidFill>
+                  <a:srgbClr val="475569"/>
+                </a:solidFill>
+              </a:rPr>
+              <a:t>Rescuers walking blindly into disaster zones suffer secondary casualties. Phoenix X plots an automated, hazard-weighted pedestrian extraction path navigating safely around verified hazards.</a:t>
+            </a:r>
+          </a:p>
+        </p:txBody>
+      </p:sp>
+      <p:sp>
+        <p:nvSpPr>
+          <p:cNvPr id="12" name="Rounded Rectangle 11"/>
+          <p:cNvSpPr/>
+          <p:nvPr/>
+        </p:nvSpPr>
+        <p:spPr>
+          <a:xfrm>
+            <a:off x="7909560" y="2889504"/>
+            <a:ext cx="73152" cy="1664208"/>
+          </a:xfrm>
+          <a:prstGeom prst="roundRect">
+            <a:avLst/>
+          </a:prstGeom>
+          <a:solidFill>
+            <a:srgbClr val="E11D48"/>
+          </a:solidFill>
+          <a:ln>
+            <a:noFill/>
+          </a:ln>
+        </p:spPr>
+        <p:style>
+          <a:lnRef idx="1">
+            <a:schemeClr val="accent1"/>
+          </a:lnRef>
+          <a:fillRef idx="3">
+            <a:schemeClr val="accent1"/>
+          </a:fillRef>
+          <a:effectRef idx="2">
+            <a:schemeClr val="accent1"/>
+          </a:effectRef>
+          <a:fontRef idx="minor">
+            <a:schemeClr val="lt1"/>
+          </a:fontRef>
+        </p:style>
+        <p:txBody>
+          <a:bodyPr rtlCol="0" anchor="ctr"/>
+          <a:lstStyle/>
+          <a:p>
+            <a:pPr algn="ctr"/>
+          </a:p>
+        </p:txBody>
+      </p:sp>
+      <p:sp>
+        <p:nvSpPr>
+          <p:cNvPr id="13" name="Rounded Rectangle 12"/>
+          <p:cNvSpPr/>
+          <p:nvPr/>
+        </p:nvSpPr>
+        <p:spPr>
+          <a:xfrm>
+            <a:off x="7909560" y="4727448"/>
+            <a:ext cx="3730752" cy="1664208"/>
+          </a:xfrm>
+          <a:prstGeom prst="roundRect">
+            <a:avLst/>
+          </a:prstGeom>
+          <a:solidFill>
+            <a:srgbClr val="FFFFFF"/>
+          </a:solidFill>
+          <a:ln w="12700">
+            <a:solidFill>
+              <a:srgbClr val="E2E8F0"/>
+            </a:solidFill>
+          </a:ln>
+          <a:effectLst>
+            <a:outerShdw blurRad="101600" dist="25400" dir="5400000" algn="t" rotWithShape="0">
+              <a:srgbClr val="0F172A">
+                <a:alpha val="10000"/>
+              </a:srgbClr>
+            </a:outerShdw>
+          </a:effectLst>
+        </p:spPr>
+        <p:style>
+          <a:lnRef idx="1">
+            <a:schemeClr val="accent1"/>
+          </a:lnRef>
+          <a:fillRef idx="3">
+            <a:schemeClr val="accent1"/>
+          </a:fillRef>
+          <a:effectRef idx="2">
+            <a:schemeClr val="accent1"/>
+          </a:effectRef>
+          <a:fontRef idx="minor">
+            <a:schemeClr val="lt1"/>
+          </a:fontRef>
+        </p:style>
+        <p:txBody>
+          <a:bodyPr rtlCol="0" anchor="t" lIns="201168" rIns="182880" tIns="128016"/>
+          <a:lstStyle/>
+          <a:p>
+            <a:pPr algn="ctr"/>
+            <a:r>
+              <a:rPr b="1" sz="1100">
+                <a:solidFill>
+                  <a:srgbClr val="0F172A"/>
+                </a:solidFill>
+              </a:rPr>
+              <a:t>3. 5-MINUTE TACTICAL CYCLE
+</a:t>
+            </a:r>
+          </a:p>
+          <a:p>
+            <a:r>
+              <a:rPr b="1" sz="850">
+                <a:solidFill>
+                  <a:srgbClr val="0D9488"/>
+                </a:solidFill>
+              </a:rPr>
+              <a:t>Golden 72 Hours Response Compression
+Instant Triage Priority for NDRF / SDRF
+</a:t>
+            </a:r>
+          </a:p>
+          <a:p>
+            <a:r>
+              <a:rPr sz="950">
+                <a:solidFill>
+                  <a:srgbClr val="475569"/>
+                </a:solidFill>
+              </a:rPr>
+              <a:t>What traditionally takes hours of agonizing, dangerous foot searches across square kilometers of debris is compressed into a rapid sub-5-minute autonomous sortie from unboxing to casualty recovery.</a:t>
+            </a:r>
+          </a:p>
+        </p:txBody>
+      </p:sp>
+      <p:sp>
+        <p:nvSpPr>
+          <p:cNvPr id="14" name="Rounded Rectangle 13"/>
+          <p:cNvSpPr/>
+          <p:nvPr/>
+        </p:nvSpPr>
+        <p:spPr>
+          <a:xfrm>
+            <a:off x="7909560" y="4727448"/>
+            <a:ext cx="73152" cy="1664208"/>
+          </a:xfrm>
+          <a:prstGeom prst="roundRect">
+            <a:avLst/>
+          </a:prstGeom>
+          <a:solidFill>
+            <a:srgbClr val="0D9488"/>
+          </a:solidFill>
+          <a:ln>
+            <a:noFill/>
+          </a:ln>
+        </p:spPr>
+        <p:style>
+          <a:lnRef idx="1">
+            <a:schemeClr val="accent1"/>
+          </a:lnRef>
+          <a:fillRef idx="3">
+            <a:schemeClr val="accent1"/>
+          </a:fillRef>
+          <a:effectRef idx="2">
+            <a:schemeClr val="accent1"/>
+          </a:effectRef>
+          <a:fontRef idx="minor">
+            <a:schemeClr val="lt1"/>
+          </a:fontRef>
+        </p:style>
+        <p:txBody>
+          <a:bodyPr rtlCol="0" anchor="ctr"/>
+          <a:lstStyle/>
+          <a:p>
+            <a:pPr algn="ctr"/>
+          </a:p>
+        </p:txBody>
+      </p:sp>
+    </p:spTree>
+  </p:cSld>
+  <p:clrMapOvr>
+    <a:masterClrMapping/>
+  </p:clrMapOvr>
+</p:sld>
+</file>
+
+<file path=ppt/slides/slide7.xml><?xml version="1.0" encoding="utf-8"?>
+<p:sld xmlns:a="http://schemas.openxmlformats.org/drawingml/2006/main" xmlns:p="http://schemas.openxmlformats.org/presentationml/2006/main" xmlns:r="http://schemas.openxmlformats.org/officeDocument/2006/relationships">
+  <p:cSld>
+    <p:spTree>
+      <p:nvGrpSpPr>
+        <p:cNvPr id="1" name=""/>
+        <p:cNvGrpSpPr/>
+        <p:nvPr/>
+      </p:nvGrpSpPr>
+      <p:grpSpPr/>
+      <p:sp>
+        <p:nvSpPr>
+          <p:cNvPr id="2" name="Rectangle 1"/>
+          <p:cNvSpPr/>
+          <p:nvPr/>
+        </p:nvSpPr>
+        <p:spPr>
+          <a:xfrm>
+            <a:off x="0" y="0"/>
+            <a:ext cx="12191695" cy="6858000"/>
+          </a:xfrm>
+          <a:prstGeom prst="rect">
+            <a:avLst/>
+          </a:prstGeom>
+          <a:solidFill>
+            <a:srgbClr val="F8FAFC"/>
+          </a:solidFill>
+          <a:ln>
+            <a:noFill/>
+          </a:ln>
+        </p:spPr>
+        <p:style>
+          <a:lnRef idx="1">
+            <a:schemeClr val="accent1"/>
+          </a:lnRef>
+          <a:fillRef idx="3">
+            <a:schemeClr val="accent1"/>
+          </a:fillRef>
+          <a:effectRef idx="2">
+            <a:schemeClr val="accent1"/>
+          </a:effectRef>
+          <a:fontRef idx="minor">
+            <a:schemeClr val="lt1"/>
+          </a:fontRef>
+        </p:style>
+        <p:txBody>
+          <a:bodyPr rtlCol="0" anchor="ctr"/>
+          <a:lstStyle/>
+          <a:p>
+            <a:pPr algn="ctr"/>
+          </a:p>
+        </p:txBody>
+      </p:sp>
+      <p:sp>
+        <p:nvSpPr>
+          <p:cNvPr id="3" name="Rounded Rectangle 2"/>
+          <p:cNvSpPr/>
+          <p:nvPr/>
+        </p:nvSpPr>
+        <p:spPr>
+          <a:xfrm>
+            <a:off x="548640" y="274320"/>
+            <a:ext cx="1691640" cy="384048"/>
+          </a:xfrm>
+          <a:prstGeom prst="roundRect">
+            <a:avLst/>
+          </a:prstGeom>
+          <a:solidFill>
+            <a:srgbClr val="FFFFFF"/>
+          </a:solidFill>
+          <a:ln w="12700">
+            <a:solidFill>
+              <a:srgbClr val="E2E8F0"/>
+            </a:solidFill>
+          </a:ln>
+        </p:spPr>
+        <p:style>
+          <a:lnRef idx="1">
+            <a:schemeClr val="accent1"/>
+          </a:lnRef>
+          <a:fillRef idx="3">
+            <a:schemeClr val="accent1"/>
+          </a:fillRef>
+          <a:effectRef idx="2">
+            <a:schemeClr val="accent1"/>
+          </a:effectRef>
+          <a:fontRef idx="minor">
+            <a:schemeClr val="lt1"/>
+          </a:fontRef>
+        </p:style>
+        <p:txBody>
+          <a:bodyPr rtlCol="0" anchor="ctr"/>
+          <a:lstStyle/>
+          <a:p>
+            <a:pPr algn="ctr"/>
+            <a:r>
+              <a:rPr sz="950" b="1">
+                <a:solidFill>
+                  <a:srgbClr val="1E293B"/>
+                </a:solidFill>
+                <a:latin typeface="Calibri"/>
+              </a:rPr>
+              <a:t>PHOENIX X · SIH26177</a:t>
+            </a:r>
+          </a:p>
+        </p:txBody>
+      </p:sp>
+      <p:sp>
+        <p:nvSpPr>
+          <p:cNvPr id="4" name="TextBox 3"/>
           <p:cNvSpPr txBox="1"/>
           <p:nvPr/>
         </p:nvSpPr>
         <p:spPr>
           <a:xfrm>
-            <a:off x="9473184" y="5513832"/>
-            <a:ext cx="2130552" cy="795528"/>
+            <a:off x="2377440" y="219456"/>
+            <a:ext cx="6949440" cy="219456"/>
           </a:xfrm>
           <a:prstGeom prst="rect">
             <a:avLst/>
@@ -12025,19 +12221,490 @@
           <a:noFill/>
         </p:spPr>
         <p:txBody>
-          <a:bodyPr wrap="square" lIns="0" rIns="0" tIns="0" bIns="0">
+          <a:bodyPr wrap="none" lIns="0" rIns="0" tIns="0" bIns="0">
             <a:spAutoFit/>
           </a:bodyPr>
           <a:lstStyle/>
           <a:p>
             <a:r>
-              <a:rPr sz="950">
-                <a:solidFill>
-                  <a:srgbClr val="334155"/>
-                </a:solidFill>
-              </a:rPr>
-              <a:t>Compresses hours of manual searching into minutes—delivering urgent medical triage within the Golden 72 Hours.</a:t>
-            </a:r>
+              <a:rPr sz="950" b="1">
+                <a:solidFill>
+                  <a:srgbClr val="EA580C"/>
+                </a:solidFill>
+                <a:latin typeface="Calibri"/>
+              </a:rPr>
+              <a:t>TACTICAL PARADIGM SHIFT · FIRST RESPONDER RESILIENCE</a:t>
+            </a:r>
+          </a:p>
+        </p:txBody>
+      </p:sp>
+      <p:sp>
+        <p:nvSpPr>
+          <p:cNvPr id="5" name="TextBox 4"/>
+          <p:cNvSpPr txBox="1"/>
+          <p:nvPr/>
+        </p:nvSpPr>
+        <p:spPr>
+          <a:xfrm>
+            <a:off x="2377440" y="438912"/>
+            <a:ext cx="6949440" cy="411480"/>
+          </a:xfrm>
+          <a:prstGeom prst="rect">
+            <a:avLst/>
+          </a:prstGeom>
+          <a:noFill/>
+        </p:spPr>
+        <p:txBody>
+          <a:bodyPr wrap="none" lIns="0" rIns="0" tIns="0" bIns="0">
+            <a:spAutoFit/>
+          </a:bodyPr>
+          <a:lstStyle/>
+          <a:p>
+            <a:r>
+              <a:rPr sz="1700" b="1">
+                <a:solidFill>
+                  <a:srgbClr val="0F172A"/>
+                </a:solidFill>
+                <a:latin typeface="Calibri"/>
+              </a:rPr>
+              <a:t>Traditional Foot Search vs. Project Phoenix X Autonomous Triage</a:t>
+            </a:r>
+          </a:p>
+        </p:txBody>
+      </p:sp>
+      <p:sp>
+        <p:nvSpPr>
+          <p:cNvPr id="6" name="Rounded Rectangle 5"/>
+          <p:cNvSpPr/>
+          <p:nvPr/>
+        </p:nvSpPr>
+        <p:spPr>
+          <a:xfrm>
+            <a:off x="9418320" y="274320"/>
+            <a:ext cx="2194560" cy="384048"/>
+          </a:xfrm>
+          <a:prstGeom prst="roundRect">
+            <a:avLst/>
+          </a:prstGeom>
+          <a:solidFill>
+            <a:srgbClr val="FFF7ED"/>
+          </a:solidFill>
+          <a:ln w="12700">
+            <a:solidFill>
+              <a:srgbClr val="FED7AA"/>
+            </a:solidFill>
+          </a:ln>
+        </p:spPr>
+        <p:style>
+          <a:lnRef idx="1">
+            <a:schemeClr val="accent1"/>
+          </a:lnRef>
+          <a:fillRef idx="3">
+            <a:schemeClr val="accent1"/>
+          </a:fillRef>
+          <a:effectRef idx="2">
+            <a:schemeClr val="accent1"/>
+          </a:effectRef>
+          <a:fontRef idx="minor">
+            <a:schemeClr val="lt1"/>
+          </a:fontRef>
+        </p:style>
+        <p:txBody>
+          <a:bodyPr rtlCol="0" anchor="ctr"/>
+          <a:lstStyle/>
+          <a:p>
+            <a:pPr algn="ctr"/>
+            <a:r>
+              <a:rPr sz="950" b="1">
+                <a:solidFill>
+                  <a:srgbClr val="EA580C"/>
+                </a:solidFill>
+                <a:latin typeface="Calibri"/>
+              </a:rPr>
+              <a:t>OPERATIONAL IMPACT</a:t>
+            </a:r>
+          </a:p>
+        </p:txBody>
+      </p:sp>
+      <p:sp>
+        <p:nvSpPr>
+          <p:cNvPr id="7" name="Rounded Rectangle 6"/>
+          <p:cNvSpPr/>
+          <p:nvPr/>
+        </p:nvSpPr>
+        <p:spPr>
+          <a:xfrm>
+            <a:off x="548640" y="1143000"/>
+            <a:ext cx="5349240" cy="5120640"/>
+          </a:xfrm>
+          <a:prstGeom prst="roundRect">
+            <a:avLst/>
+          </a:prstGeom>
+          <a:solidFill>
+            <a:srgbClr val="FFFFFF"/>
+          </a:solidFill>
+          <a:ln w="19050">
+            <a:solidFill>
+              <a:srgbClr val="FFF1F2"/>
+            </a:solidFill>
+          </a:ln>
+          <a:effectLst>
+            <a:outerShdw blurRad="101600" dist="25400" dir="5400000" algn="t" rotWithShape="0">
+              <a:srgbClr val="0F172A">
+                <a:alpha val="10000"/>
+              </a:srgbClr>
+            </a:outerShdw>
+          </a:effectLst>
+        </p:spPr>
+        <p:style>
+          <a:lnRef idx="1">
+            <a:schemeClr val="accent1"/>
+          </a:lnRef>
+          <a:fillRef idx="3">
+            <a:schemeClr val="accent1"/>
+          </a:fillRef>
+          <a:effectRef idx="2">
+            <a:schemeClr val="accent1"/>
+          </a:effectRef>
+          <a:fontRef idx="minor">
+            <a:schemeClr val="lt1"/>
+          </a:fontRef>
+        </p:style>
+        <p:txBody>
+          <a:bodyPr rtlCol="0" anchor="t" lIns="320040" rIns="320040" tIns="274320"/>
+          <a:lstStyle/>
+          <a:p>
+            <a:pPr algn="ctr"/>
+            <a:r>
+              <a:rPr b="1" sz="1300">
+                <a:solidFill>
+                  <a:srgbClr val="E11D48"/>
+                </a:solidFill>
+              </a:rPr>
+              <a:t>TRADITIONAL DISASTER RECONNAISSANCE
+</a:t>
+            </a:r>
+          </a:p>
+          <a:p>
+            <a:r>
+              <a:rPr sz="1000">
+                <a:solidFill>
+                  <a:srgbClr val="64748B"/>
+                </a:solidFill>
+              </a:rPr>
+              <a:t>Manual Foot Sweeps &amp; Standard Visual Cameras
+</a:t>
+            </a:r>
+          </a:p>
+          <a:p>
+            <a:r>
+              <a:rPr b="1" sz="1000">
+                <a:solidFill>
+                  <a:srgbClr val="0F172A"/>
+                </a:solidFill>
+              </a:rPr>
+              <a:t>❌ Blind Foot Patrols:</a:t>
+            </a:r>
+            <a:r>
+              <a:rPr sz="1000">
+                <a:solidFill>
+                  <a:srgbClr val="475569"/>
+                </a:solidFill>
+              </a:rPr>
+              <a:t> Rescuers sweep unstable terrain on foot across square kilometers; takes 4 to 8 hours per sector.
+</a:t>
+            </a:r>
+          </a:p>
+          <a:p>
+            <a:r>
+              <a:rPr b="1" sz="1000">
+                <a:solidFill>
+                  <a:srgbClr val="0F172A"/>
+                </a:solidFill>
+              </a:rPr>
+              <a:t>❌ Darkness &amp; Smoke Blockade:</a:t>
+            </a:r>
+            <a:r>
+              <a:rPr sz="1000">
+                <a:solidFill>
+                  <a:srgbClr val="475569"/>
+                </a:solidFill>
+              </a:rPr>
+              <a:t> Operations halt at sunset; dust and thick smoke plumes completely blind standard optical cameras.
+</a:t>
+            </a:r>
+          </a:p>
+          <a:p>
+            <a:r>
+              <a:rPr b="1" sz="1000">
+                <a:solidFill>
+                  <a:srgbClr val="0F172A"/>
+                </a:solidFill>
+              </a:rPr>
+              <a:t>❌ Rescuer Secondary Casualties:</a:t>
+            </a:r>
+            <a:r>
+              <a:rPr sz="1000">
+                <a:solidFill>
+                  <a:srgbClr val="475569"/>
+                </a:solidFill>
+              </a:rPr>
+              <a:t> Crews step blindly into severed 11kV live powerlines, gas leaks, and secondary mudslide slip planes.
+</a:t>
+            </a:r>
+          </a:p>
+          <a:p>
+            <a:r>
+              <a:rPr b="1" sz="1000">
+                <a:solidFill>
+                  <a:srgbClr val="0F172A"/>
+                </a:solidFill>
+              </a:rPr>
+              <a:t>❌ Cellular Infrastructure Collapse:</a:t>
+            </a:r>
+            <a:r>
+              <a:rPr sz="1000">
+                <a:solidFill>
+                  <a:srgbClr val="475569"/>
+                </a:solidFill>
+              </a:rPr>
+              <a:t> Drones relying on 4G/5G mobile towers or Wi-Fi stream fail instantly when towers collapse.
+</a:t>
+            </a:r>
+          </a:p>
+        </p:txBody>
+      </p:sp>
+      <p:sp>
+        <p:nvSpPr>
+          <p:cNvPr id="8" name="Rounded Rectangle 7"/>
+          <p:cNvSpPr/>
+          <p:nvPr/>
+        </p:nvSpPr>
+        <p:spPr>
+          <a:xfrm>
+            <a:off x="548640" y="1143000"/>
+            <a:ext cx="5349240" cy="73152"/>
+          </a:xfrm>
+          <a:prstGeom prst="roundRect">
+            <a:avLst/>
+          </a:prstGeom>
+          <a:solidFill>
+            <a:srgbClr val="E11D48"/>
+          </a:solidFill>
+          <a:ln>
+            <a:noFill/>
+          </a:ln>
+        </p:spPr>
+        <p:style>
+          <a:lnRef idx="1">
+            <a:schemeClr val="accent1"/>
+          </a:lnRef>
+          <a:fillRef idx="3">
+            <a:schemeClr val="accent1"/>
+          </a:fillRef>
+          <a:effectRef idx="2">
+            <a:schemeClr val="accent1"/>
+          </a:effectRef>
+          <a:fontRef idx="minor">
+            <a:schemeClr val="lt1"/>
+          </a:fontRef>
+        </p:style>
+        <p:txBody>
+          <a:bodyPr rtlCol="0" anchor="ctr"/>
+          <a:lstStyle/>
+          <a:p>
+            <a:pPr algn="ctr"/>
+          </a:p>
+        </p:txBody>
+      </p:sp>
+      <p:sp>
+        <p:nvSpPr>
+          <p:cNvPr id="9" name="Rounded Rectangle 8"/>
+          <p:cNvSpPr/>
+          <p:nvPr/>
+        </p:nvSpPr>
+        <p:spPr>
+          <a:xfrm>
+            <a:off x="6291072" y="1143000"/>
+            <a:ext cx="5349240" cy="5120640"/>
+          </a:xfrm>
+          <a:prstGeom prst="roundRect">
+            <a:avLst/>
+          </a:prstGeom>
+          <a:solidFill>
+            <a:srgbClr val="FFFFFF"/>
+          </a:solidFill>
+          <a:ln w="19050">
+            <a:solidFill>
+              <a:srgbClr val="F0FDFA"/>
+            </a:solidFill>
+          </a:ln>
+          <a:effectLst>
+            <a:outerShdw blurRad="101600" dist="25400" dir="5400000" algn="t" rotWithShape="0">
+              <a:srgbClr val="0F172A">
+                <a:alpha val="10000"/>
+              </a:srgbClr>
+            </a:outerShdw>
+          </a:effectLst>
+        </p:spPr>
+        <p:style>
+          <a:lnRef idx="1">
+            <a:schemeClr val="accent1"/>
+          </a:lnRef>
+          <a:fillRef idx="3">
+            <a:schemeClr val="accent1"/>
+          </a:fillRef>
+          <a:effectRef idx="2">
+            <a:schemeClr val="accent1"/>
+          </a:effectRef>
+          <a:fontRef idx="minor">
+            <a:schemeClr val="lt1"/>
+          </a:fontRef>
+        </p:style>
+        <p:txBody>
+          <a:bodyPr rtlCol="0" anchor="t" lIns="320040" rIns="320040" tIns="274320"/>
+          <a:lstStyle/>
+          <a:p>
+            <a:pPr algn="ctr"/>
+            <a:r>
+              <a:rPr b="1" sz="1300">
+                <a:solidFill>
+                  <a:srgbClr val="0D9488"/>
+                </a:solidFill>
+              </a:rPr>
+              <a:t>PROJECT PHOENIX X AUTONOMOUS TRIAGE
+</a:t>
+            </a:r>
+          </a:p>
+          <a:p>
+            <a:r>
+              <a:rPr sz="1000">
+                <a:solidFill>
+                  <a:srgbClr val="64748B"/>
+                </a:solidFill>
+              </a:rPr>
+              <a:t>Dual-Brain Tactical Edge AI &amp; Long-Range Telemetry
+</a:t>
+            </a:r>
+          </a:p>
+          <a:p>
+            <a:r>
+              <a:rPr b="1" sz="1000">
+                <a:solidFill>
+                  <a:srgbClr val="0F172A"/>
+                </a:solidFill>
+              </a:rPr>
+              <a:t>✓ Rapid Aerial Grid Sweep:</a:t>
+            </a:r>
+            <a:r>
+              <a:rPr sz="1000">
+                <a:solidFill>
+                  <a:srgbClr val="475569"/>
+                </a:solidFill>
+              </a:rPr>
+              <a:t> Covers 2.0 km² in &lt;15 minutes. Launches from backpack in under 3 minutes without infrastructure.
+</a:t>
+            </a:r>
+          </a:p>
+          <a:p>
+            <a:r>
+              <a:rPr b="1" sz="1000">
+                <a:solidFill>
+                  <a:srgbClr val="0F172A"/>
+                </a:solidFill>
+              </a:rPr>
+              <a:t>✓ 24/7 Radiometric Thermal Lock:</a:t>
+            </a:r>
+            <a:r>
+              <a:rPr sz="1000">
+                <a:solidFill>
+                  <a:srgbClr val="475569"/>
+                </a:solidFill>
+              </a:rPr>
+              <a:t> Penetrates fog and darkness; locks living 37°C body heat through crevices using NETD &lt; 50 mK LWIR.
+</a:t>
+            </a:r>
+          </a:p>
+          <a:p>
+            <a:r>
+              <a:rPr b="1" sz="1000">
+                <a:solidFill>
+                  <a:srgbClr val="0F172A"/>
+                </a:solidFill>
+              </a:rPr>
+              <a:t>✓ Automated Safe-Path Routing:</a:t>
+            </a:r>
+            <a:r>
+              <a:rPr sz="1000">
+                <a:solidFill>
+                  <a:srgbClr val="475569"/>
+                </a:solidFill>
+              </a:rPr>
+              <a:t> Hazard-aware Dijkstra pathfinding calculates pedestrian extraction route avoiding live 11kV lines.
+</a:t>
+            </a:r>
+          </a:p>
+          <a:p>
+            <a:r>
+              <a:rPr b="1" sz="1000">
+                <a:solidFill>
+                  <a:srgbClr val="0F172A"/>
+                </a:solidFill>
+              </a:rPr>
+              <a:t>✓ 100% Offline 868 MHz LoRa Link:</a:t>
+            </a:r>
+            <a:r>
+              <a:rPr sz="1000">
+                <a:solidFill>
+                  <a:srgbClr val="475569"/>
+                </a:solidFill>
+              </a:rPr>
+              <a:t> Souli et al. (Elsevier 2024) 17-byte binary bit-packing beams coordinates across 3–5 km reliably.
+</a:t>
+            </a:r>
+          </a:p>
+        </p:txBody>
+      </p:sp>
+      <p:sp>
+        <p:nvSpPr>
+          <p:cNvPr id="10" name="Rounded Rectangle 9"/>
+          <p:cNvSpPr/>
+          <p:nvPr/>
+        </p:nvSpPr>
+        <p:spPr>
+          <a:xfrm>
+            <a:off x="6291072" y="1143000"/>
+            <a:ext cx="5349240" cy="73152"/>
+          </a:xfrm>
+          <a:prstGeom prst="roundRect">
+            <a:avLst/>
+          </a:prstGeom>
+          <a:solidFill>
+            <a:srgbClr val="0D9488"/>
+          </a:solidFill>
+          <a:ln>
+            <a:noFill/>
+          </a:ln>
+        </p:spPr>
+        <p:style>
+          <a:lnRef idx="1">
+            <a:schemeClr val="accent1"/>
+          </a:lnRef>
+          <a:fillRef idx="3">
+            <a:schemeClr val="accent1"/>
+          </a:fillRef>
+          <a:effectRef idx="2">
+            <a:schemeClr val="accent1"/>
+          </a:effectRef>
+          <a:fontRef idx="minor">
+            <a:schemeClr val="lt1"/>
+          </a:fontRef>
+        </p:style>
+        <p:txBody>
+          <a:bodyPr rtlCol="0" anchor="ctr"/>
+          <a:lstStyle/>
+          <a:p>
+            <a:pPr algn="ctr"/>
           </a:p>
         </p:txBody>
       </p:sp>

--- a/presentation/Phoenix_Drone_Graphic_Variations.pptx
+++ b/presentation/Phoenix_Drone_Graphic_Variations.pptx
@@ -12,6 +12,7 @@
     <p:sldId id="260" r:id="rId11"/>
     <p:sldId id="261" r:id="rId12"/>
     <p:sldId id="262" r:id="rId13"/>
+    <p:sldId id="263" r:id="rId14"/>
   </p:sldIdLst>
   <p:sldSz cx="12191695" cy="6858000" type="screen4x3"/>
   <p:notesSz cx="6858000" cy="9144000"/>
@@ -3145,7 +3146,7 @@
         </p:nvSpPr>
         <p:spPr>
           <a:xfrm>
-            <a:off x="731520" y="548640"/>
+            <a:off x="731520" y="502920"/>
             <a:ext cx="9144000" cy="274320"/>
           </a:xfrm>
           <a:prstGeom prst="rect">
@@ -3178,7 +3179,7 @@
         </p:nvSpPr>
         <p:spPr>
           <a:xfrm>
-            <a:off x="731520" y="868680"/>
+            <a:off x="731520" y="804672"/>
             <a:ext cx="10515600" cy="731520"/>
           </a:xfrm>
           <a:prstGeom prst="rect">
@@ -3193,7 +3194,7 @@
           <a:lstStyle/>
           <a:p>
             <a:r>
-              <a:rPr b="1" sz="2600">
+              <a:rPr b="1" sz="2500">
                 <a:solidFill>
                   <a:srgbClr val="FFFFFF"/>
                 </a:solidFill>
@@ -3211,7 +3212,7 @@
         </p:nvSpPr>
         <p:spPr>
           <a:xfrm>
-            <a:off x="731520" y="1600200"/>
+            <a:off x="731520" y="1508760"/>
             <a:ext cx="10515600" cy="365760"/>
           </a:xfrm>
           <a:prstGeom prst="rect">
@@ -3226,12 +3227,12 @@
           <a:lstStyle/>
           <a:p>
             <a:r>
-              <a:rPr sz="1250">
+              <a:rPr sz="1200">
                 <a:solidFill>
                   <a:srgbClr val="E2E8F0"/>
                 </a:solidFill>
               </a:rPr>
-              <a:t>A complete visual asset library for SIH26177: 3D product callouts, in-flight dual-beam perception, and NDRF tactical tablet routing.</a:t>
+              <a:t>Comprehensive 3D product callouts, internal dual-brain flight decks, macro gimbal optics, and tactical field maps for SIH26177.</a:t>
             </a:r>
           </a:p>
         </p:txBody>
@@ -3244,8 +3245,8 @@
         </p:nvSpPr>
         <p:spPr>
           <a:xfrm>
-            <a:off x="731520" y="2240280"/>
-            <a:ext cx="3364992" cy="2011680"/>
+            <a:off x="731520" y="2148840"/>
+            <a:ext cx="2468880" cy="2057400"/>
           </a:xfrm>
           <a:prstGeom prst="roundRect">
             <a:avLst/>
@@ -3274,39 +3275,39 @@
           </a:fontRef>
         </p:style>
         <p:txBody>
-          <a:bodyPr rtlCol="0" anchor="t" lIns="228600" rIns="228600" tIns="201168"/>
-          <a:lstStyle/>
-          <a:p>
-            <a:pPr algn="ctr"/>
-            <a:r>
-              <a:rPr b="1" sz="1050">
+          <a:bodyPr rtlCol="0" anchor="t" lIns="164592" rIns="164592" tIns="164592"/>
+          <a:lstStyle/>
+          <a:p>
+            <a:pPr algn="ctr"/>
+            <a:r>
+              <a:rPr b="1" sz="950">
                 <a:solidFill>
                   <a:srgbClr val="0284C7"/>
                 </a:solidFill>
               </a:rPr>
-              <a:t>SLIDE 2: HARDWARE SCHEMATIC
+              <a:t>SLIDE 2: AIRFRAME ARCHITECTURE
 </a:t>
             </a:r>
           </a:p>
           <a:p>
             <a:r>
-              <a:rPr b="1" sz="1250">
+              <a:rPr b="1" sz="1150">
                 <a:solidFill>
                   <a:srgbClr val="FFFFFF"/>
                 </a:solidFill>
               </a:rPr>
-              <a:t>Avionics &amp; Compute Partition
+              <a:t>3D Studio Product Callout
 </a:t>
             </a:r>
           </a:p>
           <a:p>
             <a:r>
-              <a:rPr sz="950">
+              <a:rPr sz="850">
                 <a:solidFill>
                   <a:srgbClr val="E2E8F0"/>
                 </a:solidFill>
               </a:rPr>
-              <a:t>3D Studio render with 6 interactive numbered beacon pins.</a:t>
+              <a:t>6 interactive beacon pins pointing to physical avionics and telemetry.</a:t>
             </a:r>
           </a:p>
         </p:txBody>
@@ -3319,8 +3320,8 @@
         </p:nvSpPr>
         <p:spPr>
           <a:xfrm>
-            <a:off x="731520" y="2240280"/>
-            <a:ext cx="3364992" cy="54864"/>
+            <a:off x="731520" y="2148840"/>
+            <a:ext cx="2468880" cy="54864"/>
           </a:xfrm>
           <a:prstGeom prst="roundRect">
             <a:avLst/>
@@ -3362,8 +3363,8 @@
         </p:nvSpPr>
         <p:spPr>
           <a:xfrm>
-            <a:off x="4315968" y="2240280"/>
-            <a:ext cx="3364992" cy="2011680"/>
+            <a:off x="3429000" y="2148840"/>
+            <a:ext cx="2468880" cy="2057400"/>
           </a:xfrm>
           <a:prstGeom prst="roundRect">
             <a:avLst/>
@@ -3392,12 +3393,12 @@
           </a:fontRef>
         </p:style>
         <p:txBody>
-          <a:bodyPr rtlCol="0" anchor="t" lIns="228600" rIns="228600" tIns="201168"/>
-          <a:lstStyle/>
-          <a:p>
-            <a:pPr algn="ctr"/>
-            <a:r>
-              <a:rPr b="1" sz="1050">
+          <a:bodyPr rtlCol="0" anchor="t" lIns="164592" rIns="164592" tIns="164592"/>
+          <a:lstStyle/>
+          <a:p>
+            <a:pPr algn="ctr"/>
+            <a:r>
+              <a:rPr b="1" sz="950">
                 <a:solidFill>
                   <a:srgbClr val="0D9488"/>
                 </a:solidFill>
@@ -3408,18 +3409,18 @@
           </a:p>
           <a:p>
             <a:r>
-              <a:rPr b="1" sz="1250">
+              <a:rPr b="1" sz="1150">
                 <a:solidFill>
                   <a:srgbClr val="FFFFFF"/>
                 </a:solidFill>
               </a:rPr>
-              <a:t>Buildability &amp; Legal Viability
+              <a:t>Buildability &amp; DGCA Compliance
 </a:t>
             </a:r>
           </a:p>
           <a:p>
             <a:r>
-              <a:rPr sz="950">
+              <a:rPr sz="850">
                 <a:solidFill>
                   <a:srgbClr val="E2E8F0"/>
                 </a:solidFill>
@@ -3437,8 +3438,8 @@
         </p:nvSpPr>
         <p:spPr>
           <a:xfrm>
-            <a:off x="4315968" y="2240280"/>
-            <a:ext cx="3364992" cy="54864"/>
+            <a:off x="3429000" y="2148840"/>
+            <a:ext cx="2468880" cy="54864"/>
           </a:xfrm>
           <a:prstGeom prst="roundRect">
             <a:avLst/>
@@ -3480,8 +3481,8 @@
         </p:nvSpPr>
         <p:spPr>
           <a:xfrm>
-            <a:off x="7900416" y="2240280"/>
-            <a:ext cx="3364992" cy="2011680"/>
+            <a:off x="6126480" y="2148840"/>
+            <a:ext cx="2468880" cy="2057400"/>
           </a:xfrm>
           <a:prstGeom prst="roundRect">
             <a:avLst/>
@@ -3510,39 +3511,39 @@
           </a:fontRef>
         </p:style>
         <p:txBody>
-          <a:bodyPr rtlCol="0" anchor="t" lIns="228600" rIns="228600" tIns="201168"/>
-          <a:lstStyle/>
-          <a:p>
-            <a:pPr algn="ctr"/>
-            <a:r>
-              <a:rPr b="1" sz="1050">
-                <a:solidFill>
-                  <a:srgbClr val="EA580C"/>
-                </a:solidFill>
-              </a:rPr>
-              <a:t>SLIDE 4: IN-FLIGHT DUAL-BEAM
+          <a:bodyPr rtlCol="0" anchor="t" lIns="164592" rIns="164592" tIns="164592"/>
+          <a:lstStyle/>
+          <a:p>
+            <a:pPr algn="ctr"/>
+            <a:r>
+              <a:rPr b="1" sz="950">
+                <a:solidFill>
+                  <a:srgbClr val="7C3AED"/>
+                </a:solidFill>
+              </a:rPr>
+              <a:t>SLIDE 4: DUAL-BRAIN FLIGHT DECK
 </a:t>
             </a:r>
           </a:p>
           <a:p>
             <a:r>
-              <a:rPr b="1" sz="1250">
+              <a:rPr b="1" sz="1150">
                 <a:solidFill>
                   <a:srgbClr val="FFFFFF"/>
                 </a:solidFill>
               </a:rPr>
-              <a:t>Optical + Radiometric LWIR
+              <a:t>Arduino UNO Q Compute Core
 </a:t>
             </a:r>
           </a:p>
           <a:p>
             <a:r>
-              <a:rPr sz="950">
+              <a:rPr sz="850">
                 <a:solidFill>
                   <a:srgbClr val="E2E8F0"/>
                 </a:solidFill>
               </a:rPr>
-              <a:t>Hero in-action render: Cyan optical + orange 37°C thermal lock.</a:t>
+              <a:t>Macro cutaway: Qualcomm QRB2210 Linux MPU + STM32U5 Zephyr RTOS.</a:t>
             </a:r>
           </a:p>
         </p:txBody>
@@ -3555,14 +3556,14 @@
         </p:nvSpPr>
         <p:spPr>
           <a:xfrm>
-            <a:off x="7900416" y="2240280"/>
-            <a:ext cx="3364992" cy="54864"/>
+            <a:off x="6126480" y="2148840"/>
+            <a:ext cx="2468880" cy="54864"/>
           </a:xfrm>
           <a:prstGeom prst="roundRect">
             <a:avLst/>
           </a:prstGeom>
           <a:solidFill>
-            <a:srgbClr val="EA580C"/>
+            <a:srgbClr val="7C3AED"/>
           </a:solidFill>
           <a:ln>
             <a:noFill/>
@@ -3598,8 +3599,8 @@
         </p:nvSpPr>
         <p:spPr>
           <a:xfrm>
-            <a:off x="731520" y="4434840"/>
-            <a:ext cx="3364992" cy="2011680"/>
+            <a:off x="8823960" y="2148840"/>
+            <a:ext cx="2468880" cy="2057400"/>
           </a:xfrm>
           <a:prstGeom prst="roundRect">
             <a:avLst/>
@@ -3628,39 +3629,39 @@
           </a:fontRef>
         </p:style>
         <p:txBody>
-          <a:bodyPr rtlCol="0" anchor="t" lIns="228600" rIns="228600" tIns="201168"/>
-          <a:lstStyle/>
-          <a:p>
-            <a:pPr algn="ctr"/>
-            <a:r>
-              <a:rPr b="1" sz="1050">
-                <a:solidFill>
-                  <a:srgbClr val="7C3AED"/>
-                </a:solidFill>
-              </a:rPr>
-              <a:t>SLIDE 5: 5-MINUTE SORTIE PIPELINE
+          <a:bodyPr rtlCol="0" anchor="t" lIns="164592" rIns="164592" tIns="164592"/>
+          <a:lstStyle/>
+          <a:p>
+            <a:pPr algn="ctr"/>
+            <a:r>
+              <a:rPr b="1" sz="950">
+                <a:solidFill>
+                  <a:srgbClr val="EA580C"/>
+                </a:solidFill>
+              </a:rPr>
+              <a:t>SLIDE 5: GIMBAL SENSOR MACRO
 </a:t>
             </a:r>
           </a:p>
           <a:p>
             <a:r>
-              <a:rPr b="1" sz="1250">
+              <a:rPr b="1" sz="1150">
                 <a:solidFill>
                   <a:srgbClr val="FFFFFF"/>
                 </a:solidFill>
               </a:rPr>
-              <a:t>Autonomous Mission Flow
+              <a:t>Multi-Spectral Optics &amp; ToF
 </a:t>
             </a:r>
           </a:p>
           <a:p>
             <a:r>
-              <a:rPr sz="950">
+              <a:rPr sz="850">
                 <a:solidFill>
                   <a:srgbClr val="E2E8F0"/>
                 </a:solidFill>
               </a:rPr>
-              <a:t>Horizontal 5-step chevron from unboxing to safe route.</a:t>
+              <a:t>Macro gimbal: 1080p optical, 8-14μm thermal, and downward laser altimeter.</a:t>
             </a:r>
           </a:p>
         </p:txBody>
@@ -3673,14 +3674,14 @@
         </p:nvSpPr>
         <p:spPr>
           <a:xfrm>
-            <a:off x="731520" y="4434840"/>
-            <a:ext cx="3364992" cy="54864"/>
+            <a:off x="8823960" y="2148840"/>
+            <a:ext cx="2468880" cy="54864"/>
           </a:xfrm>
           <a:prstGeom prst="roundRect">
             <a:avLst/>
           </a:prstGeom>
           <a:solidFill>
-            <a:srgbClr val="7C3AED"/>
+            <a:srgbClr val="EA580C"/>
           </a:solidFill>
           <a:ln>
             <a:noFill/>
@@ -3716,8 +3717,8 @@
         </p:nvSpPr>
         <p:spPr>
           <a:xfrm>
-            <a:off x="4315968" y="4434840"/>
-            <a:ext cx="3364992" cy="2011680"/>
+            <a:off x="1280160" y="4389120"/>
+            <a:ext cx="2468880" cy="2057400"/>
           </a:xfrm>
           <a:prstGeom prst="roundRect">
             <a:avLst/>
@@ -3746,39 +3747,39 @@
           </a:fontRef>
         </p:style>
         <p:txBody>
-          <a:bodyPr rtlCol="0" anchor="t" lIns="228600" rIns="228600" tIns="201168"/>
-          <a:lstStyle/>
-          <a:p>
-            <a:pPr algn="ctr"/>
-            <a:r>
-              <a:rPr b="1" sz="1050">
-                <a:solidFill>
-                  <a:srgbClr val="0D9488"/>
-                </a:solidFill>
-              </a:rPr>
-              <a:t>SLIDE 6: FIRST RESPONDER GCS
+          <a:bodyPr rtlCol="0" anchor="t" lIns="164592" rIns="164592" tIns="164592"/>
+          <a:lstStyle/>
+          <a:p>
+            <a:pPr algn="ctr"/>
+            <a:r>
+              <a:rPr b="1" sz="950">
+                <a:solidFill>
+                  <a:srgbClr val="EA580C"/>
+                </a:solidFill>
+              </a:rPr>
+              <a:t>SLIDE 6: IN-FLIGHT DUAL BEAM
 </a:t>
             </a:r>
           </a:p>
           <a:p>
             <a:r>
-              <a:rPr b="1" sz="1250">
+              <a:rPr b="1" sz="1150">
                 <a:solidFill>
                   <a:srgbClr val="FFFFFF"/>
                 </a:solidFill>
               </a:rPr>
-              <a:t>NDRF Tactical Tablet Field Action
+              <a:t>Optical + Radiometric LWIR
 </a:t>
             </a:r>
           </a:p>
           <a:p>
             <a:r>
-              <a:rPr sz="950">
+              <a:rPr sz="850">
                 <a:solidFill>
                   <a:srgbClr val="E2E8F0"/>
                 </a:solidFill>
               </a:rPr>
-              <a:t>Hazard-aware Dijkstra safe rescue route around 11kV wires.</a:t>
+              <a:t>Hero in-action render: Cyan optical + orange 37°C thermal lock.</a:t>
             </a:r>
           </a:p>
         </p:txBody>
@@ -3791,14 +3792,14 @@
         </p:nvSpPr>
         <p:spPr>
           <a:xfrm>
-            <a:off x="4315968" y="4434840"/>
-            <a:ext cx="3364992" cy="54864"/>
+            <a:off x="1280160" y="4389120"/>
+            <a:ext cx="2468880" cy="54864"/>
           </a:xfrm>
           <a:prstGeom prst="roundRect">
             <a:avLst/>
           </a:prstGeom>
           <a:solidFill>
-            <a:srgbClr val="0D9488"/>
+            <a:srgbClr val="EA580C"/>
           </a:solidFill>
           <a:ln>
             <a:noFill/>
@@ -3834,8 +3835,8 @@
         </p:nvSpPr>
         <p:spPr>
           <a:xfrm>
-            <a:off x="7900416" y="4434840"/>
-            <a:ext cx="3364992" cy="2011680"/>
+            <a:off x="3977640" y="4389120"/>
+            <a:ext cx="2468880" cy="2057400"/>
           </a:xfrm>
           <a:prstGeom prst="roundRect">
             <a:avLst/>
@@ -3864,39 +3865,39 @@
           </a:fontRef>
         </p:style>
         <p:txBody>
-          <a:bodyPr rtlCol="0" anchor="t" lIns="228600" rIns="228600" tIns="201168"/>
-          <a:lstStyle/>
-          <a:p>
-            <a:pPr algn="ctr"/>
-            <a:r>
-              <a:rPr b="1" sz="1050">
-                <a:solidFill>
-                  <a:srgbClr val="E11D48"/>
-                </a:solidFill>
-              </a:rPr>
-              <a:t>SLIDE 7: PARADIGM COMPARISON
+          <a:bodyPr rtlCol="0" anchor="t" lIns="164592" rIns="164592" tIns="164592"/>
+          <a:lstStyle/>
+          <a:p>
+            <a:pPr algn="ctr"/>
+            <a:r>
+              <a:rPr b="1" sz="950">
+                <a:solidFill>
+                  <a:srgbClr val="0D9488"/>
+                </a:solidFill>
+              </a:rPr>
+              <a:t>SLIDE 7: FIRST RESPONDER GCS
 </a:t>
             </a:r>
           </a:p>
           <a:p>
             <a:r>
-              <a:rPr b="1" sz="1250">
+              <a:rPr b="1" sz="1150">
                 <a:solidFill>
                   <a:srgbClr val="FFFFFF"/>
                 </a:solidFill>
               </a:rPr>
-              <a:t>Foot Search vs. Phoenix X
+              <a:t>NDRF Tactical Tablet Field Action
 </a:t>
             </a:r>
           </a:p>
           <a:p>
             <a:r>
-              <a:rPr sz="950">
+              <a:rPr sz="850">
                 <a:solidFill>
                   <a:srgbClr val="E2E8F0"/>
                 </a:solidFill>
               </a:rPr>
-              <a:t>High-contrast split comparison proving operational disruption.</a:t>
+              <a:t>Hazard-aware Dijkstra safe rescue route around 11kV wires.</a:t>
             </a:r>
           </a:p>
         </p:txBody>
@@ -3909,14 +3910,132 @@
         </p:nvSpPr>
         <p:spPr>
           <a:xfrm>
-            <a:off x="7900416" y="4434840"/>
-            <a:ext cx="3364992" cy="54864"/>
+            <a:off x="3977640" y="4389120"/>
+            <a:ext cx="2468880" cy="54864"/>
           </a:xfrm>
           <a:prstGeom prst="roundRect">
             <a:avLst/>
           </a:prstGeom>
           <a:solidFill>
-            <a:srgbClr val="E11D48"/>
+            <a:srgbClr val="0D9488"/>
+          </a:solidFill>
+          <a:ln>
+            <a:noFill/>
+          </a:ln>
+        </p:spPr>
+        <p:style>
+          <a:lnRef idx="1">
+            <a:schemeClr val="accent1"/>
+          </a:lnRef>
+          <a:fillRef idx="3">
+            <a:schemeClr val="accent1"/>
+          </a:fillRef>
+          <a:effectRef idx="2">
+            <a:schemeClr val="accent1"/>
+          </a:effectRef>
+          <a:fontRef idx="minor">
+            <a:schemeClr val="lt1"/>
+          </a:fontRef>
+        </p:style>
+        <p:txBody>
+          <a:bodyPr rtlCol="0" anchor="ctr"/>
+          <a:lstStyle/>
+          <a:p>
+            <a:pPr algn="ctr"/>
+          </a:p>
+        </p:txBody>
+      </p:sp>
+      <p:sp>
+        <p:nvSpPr>
+          <p:cNvPr id="18" name="Rounded Rectangle 17"/>
+          <p:cNvSpPr/>
+          <p:nvPr/>
+        </p:nvSpPr>
+        <p:spPr>
+          <a:xfrm>
+            <a:off x="6675120" y="4389120"/>
+            <a:ext cx="2468880" cy="2057400"/>
+          </a:xfrm>
+          <a:prstGeom prst="roundRect">
+            <a:avLst/>
+          </a:prstGeom>
+          <a:solidFill>
+            <a:srgbClr val="1E293B"/>
+          </a:solidFill>
+          <a:ln w="12700">
+            <a:solidFill>
+              <a:srgbClr val="334155"/>
+            </a:solidFill>
+          </a:ln>
+        </p:spPr>
+        <p:style>
+          <a:lnRef idx="1">
+            <a:schemeClr val="accent1"/>
+          </a:lnRef>
+          <a:fillRef idx="3">
+            <a:schemeClr val="accent1"/>
+          </a:fillRef>
+          <a:effectRef idx="2">
+            <a:schemeClr val="accent1"/>
+          </a:effectRef>
+          <a:fontRef idx="minor">
+            <a:schemeClr val="lt1"/>
+          </a:fontRef>
+        </p:style>
+        <p:txBody>
+          <a:bodyPr rtlCol="0" anchor="t" lIns="164592" rIns="164592" tIns="164592"/>
+          <a:lstStyle/>
+          <a:p>
+            <a:pPr algn="ctr"/>
+            <a:r>
+              <a:rPr b="1" sz="950">
+                <a:solidFill>
+                  <a:srgbClr val="7C3AED"/>
+                </a:solidFill>
+              </a:rPr>
+              <a:t>SLIDE 8: 5-MINUTE SORTIE PIPELINE
+</a:t>
+            </a:r>
+          </a:p>
+          <a:p>
+            <a:r>
+              <a:rPr b="1" sz="1150">
+                <a:solidFill>
+                  <a:srgbClr val="FFFFFF"/>
+                </a:solidFill>
+              </a:rPr>
+              <a:t>Autonomous Mission Flow
+</a:t>
+            </a:r>
+          </a:p>
+          <a:p>
+            <a:r>
+              <a:rPr sz="850">
+                <a:solidFill>
+                  <a:srgbClr val="E2E8F0"/>
+                </a:solidFill>
+              </a:rPr>
+              <a:t>Horizontal 5-step chevron from unboxing to safe route extraction.</a:t>
+            </a:r>
+          </a:p>
+        </p:txBody>
+      </p:sp>
+      <p:sp>
+        <p:nvSpPr>
+          <p:cNvPr id="19" name="Rounded Rectangle 18"/>
+          <p:cNvSpPr/>
+          <p:nvPr/>
+        </p:nvSpPr>
+        <p:spPr>
+          <a:xfrm>
+            <a:off x="6675120" y="4389120"/>
+            <a:ext cx="2468880" cy="54864"/>
+          </a:xfrm>
+          <a:prstGeom prst="roundRect">
+            <a:avLst/>
+          </a:prstGeom>
+          <a:solidFill>
+            <a:srgbClr val="7C3AED"/>
           </a:solidFill>
           <a:ln>
             <a:noFill/>
@@ -7122,7 +7241,7 @@
                   <a:srgbClr val="0F172A"/>
                 </a:solidFill>
               </a:rPr>
-              <a:t>TACTICAL RECONNAISSANCE AIRFRAME </a:t>
+              <a:t>AIRFRAME SIZING SPECIFICATION </a:t>
             </a:r>
             <a:r>
               <a:rPr sz="1000">
@@ -7130,7 +7249,7 @@
                   <a:srgbClr val="64748B"/>
                 </a:solidFill>
               </a:rPr>
-              <a:t>· 3D PRODUCT SCHEMATIC</a:t>
+              <a:t>· STATUTORY COMPLIANCE</a:t>
             </a:r>
           </a:p>
         </p:txBody>
@@ -7801,7 +7920,7 @@
                   <a:srgbClr val="64748B"/>
                 </a:solidFill>
               </a:rPr>
-              <a:t>AUW MASS BUDGET
+              <a:t>TOTAL AIRFRAME WEIGHT
 </a:t>
             </a:r>
           </a:p>
@@ -7823,7 +7942,7 @@
                   <a:srgbClr val="334155"/>
                 </a:solidFill>
               </a:rPr>
-              <a:t>DGCA Micro Category</a:t>
+              <a:t>Bouabdallah 38% Battery</a:t>
             </a:r>
           </a:p>
         </p:txBody>
@@ -7876,7 +7995,7 @@
                   <a:srgbClr val="64748B"/>
                 </a:solidFill>
               </a:rPr>
-              <a:t>DUAL-BRAIN CHIPS
+              <a:t>POWER ALLOCATION
 </a:t>
             </a:r>
           </a:p>
@@ -7887,7 +8006,7 @@
                   <a:srgbClr val="7C3AED"/>
                 </a:solidFill>
               </a:rPr>
-              <a:t>QRB2210 + STM32
+              <a:t>&lt; 5W AI Compute
 </a:t>
             </a:r>
           </a:p>
@@ -7898,7 +8017,7 @@
                   <a:srgbClr val="334155"/>
                 </a:solidFill>
               </a:rPr>
-              <a:t>Linux NPU + Zephyr RTOS</a:t>
+              <a:t>90% Preserved for Lift</a:t>
             </a:r>
           </a:p>
         </p:txBody>
@@ -7951,7 +8070,7 @@
                   <a:srgbClr val="64748B"/>
                 </a:solidFill>
               </a:rPr>
-              <a:t>OFF-GRID TELEMETRY
+              <a:t>PRODUCTION COST
 </a:t>
             </a:r>
           </a:p>
@@ -7962,7 +8081,7 @@
                   <a:srgbClr val="0284C7"/>
                 </a:solidFill>
               </a:rPr>
-              <a:t>868 MHz LoRa
+              <a:t>₹1.2 Lakh
 </a:t>
             </a:r>
           </a:p>
@@ -7973,7 +8092,7 @@
                   <a:srgbClr val="334155"/>
                 </a:solidFill>
               </a:rPr>
-              <a:t>17-byte P2P (3–5 km)</a:t>
+              <a:t>1/10th DJI Matrice 30T</a:t>
             </a:r>
           </a:p>
         </p:txBody>
@@ -9724,7 +9843,7 @@
                 </a:solidFill>
                 <a:latin typeface="Calibri"/>
               </a:rPr>
-              <a:t>MULTI-SPECTRAL PERCEPTION · REAL-TIME TARGET ACQUISITION</a:t>
+              <a:t>PHYSICAL AI HARDWARE STACK · ARDUINO UNO Q PARTITION</a:t>
             </a:r>
           </a:p>
         </p:txBody>
@@ -9758,7 +9877,7 @@
                 </a:solidFill>
                 <a:latin typeface="Calibri"/>
               </a:rPr>
-              <a:t>How Phoenix X Detects Living Survivors Through Dense Smoke &amp; Debris</a:t>
+              <a:t>Dual-Brain Real-Time Flight Stabilization &amp; Edge-AI Compute Core</a:t>
             </a:r>
           </a:p>
         </p:txBody>
@@ -9778,11 +9897,11 @@
             <a:avLst/>
           </a:prstGeom>
           <a:solidFill>
-            <a:srgbClr val="FFF7ED"/>
+            <a:srgbClr val="F5F3FF"/>
           </a:solidFill>
           <a:ln w="12700">
             <a:solidFill>
-              <a:srgbClr val="FED7AA"/>
+              <a:srgbClr val="7C3AED"/>
             </a:solidFill>
           </a:ln>
         </p:spPr>
@@ -9808,11 +9927,11 @@
             <a:r>
               <a:rPr sz="950" b="1">
                 <a:solidFill>
-                  <a:srgbClr val="EA580C"/>
+                  <a:srgbClr val="7C3AED"/>
                 </a:solidFill>
                 <a:latin typeface="Calibri"/>
               </a:rPr>
-              <a:t>DUAL-BEAM TACTICAL HUD</a:t>
+              <a:t>QUALCOMM DRAGONWING</a:t>
             </a:r>
           </a:p>
         </p:txBody>
@@ -9826,7 +9945,7 @@
         <p:spPr>
           <a:xfrm>
             <a:off x="548640" y="1051560"/>
-            <a:ext cx="7132320" cy="5349240"/>
+            <a:ext cx="5943600" cy="5349240"/>
           </a:xfrm>
           <a:prstGeom prst="roundRect">
             <a:avLst/>
@@ -9869,9 +9988,93 @@
           </a:p>
         </p:txBody>
       </p:sp>
+      <p:sp>
+        <p:nvSpPr>
+          <p:cNvPr id="8" name="Rounded Rectangle 7"/>
+          <p:cNvSpPr/>
+          <p:nvPr/>
+        </p:nvSpPr>
+        <p:spPr>
+          <a:xfrm>
+            <a:off x="731520" y="1216152"/>
+            <a:ext cx="1463040" cy="54864"/>
+          </a:xfrm>
+          <a:prstGeom prst="roundRect">
+            <a:avLst/>
+          </a:prstGeom>
+          <a:solidFill>
+            <a:srgbClr val="EA580C"/>
+          </a:solidFill>
+          <a:ln>
+            <a:noFill/>
+          </a:ln>
+        </p:spPr>
+        <p:style>
+          <a:lnRef idx="1">
+            <a:schemeClr val="accent1"/>
+          </a:lnRef>
+          <a:fillRef idx="3">
+            <a:schemeClr val="accent1"/>
+          </a:fillRef>
+          <a:effectRef idx="2">
+            <a:schemeClr val="accent1"/>
+          </a:effectRef>
+          <a:fontRef idx="minor">
+            <a:schemeClr val="lt1"/>
+          </a:fontRef>
+        </p:style>
+        <p:txBody>
+          <a:bodyPr rtlCol="0" anchor="ctr"/>
+          <a:lstStyle/>
+          <a:p>
+            <a:pPr algn="ctr"/>
+          </a:p>
+        </p:txBody>
+      </p:sp>
+      <p:sp>
+        <p:nvSpPr>
+          <p:cNvPr id="9" name="TextBox 8"/>
+          <p:cNvSpPr txBox="1"/>
+          <p:nvPr/>
+        </p:nvSpPr>
+        <p:spPr>
+          <a:xfrm>
+            <a:off x="731520" y="1325880"/>
+            <a:ext cx="4114800" cy="274320"/>
+          </a:xfrm>
+          <a:prstGeom prst="rect">
+            <a:avLst/>
+          </a:prstGeom>
+          <a:noFill/>
+        </p:spPr>
+        <p:txBody>
+          <a:bodyPr wrap="none" lIns="0" rIns="0" tIns="0" bIns="0">
+            <a:spAutoFit/>
+          </a:bodyPr>
+          <a:lstStyle/>
+          <a:p>
+            <a:r>
+              <a:rPr b="1" sz="1000">
+                <a:solidFill>
+                  <a:srgbClr val="0F172A"/>
+                </a:solidFill>
+              </a:rPr>
+              <a:t>DUAL-BRAIN FLIGHT CONTROLLER </a:t>
+            </a:r>
+            <a:r>
+              <a:rPr sz="1000">
+                <a:solidFill>
+                  <a:srgbClr val="64748B"/>
+                </a:solidFill>
+              </a:rPr>
+              <a:t>· ARDUINO UNO Q ARCHITECTURE</a:t>
+            </a:r>
+          </a:p>
+        </p:txBody>
+      </p:sp>
       <p:pic>
         <p:nvPicPr>
-          <p:cNvPr id="8" name="Picture 7" descr="phoenix_drone_dual_beam_action.jpg"/>
+          <p:cNvPr id="10" name="Picture 9" descr="uno_q_quadcopter_deck.jpg"/>
           <p:cNvPicPr>
             <a:picLocks noChangeAspect="1"/>
           </p:cNvPicPr>
@@ -9885,8 +10088,8 @@
         </p:blipFill>
         <p:spPr>
           <a:xfrm>
-            <a:off x="685800" y="1188720"/>
-            <a:ext cx="6858000" cy="5074920"/>
+            <a:off x="777240" y="1783080"/>
+            <a:ext cx="5486400" cy="3063240"/>
           </a:xfrm>
           <a:prstGeom prst="rect">
             <a:avLst/>
@@ -9895,14 +10098,833 @@
       </p:pic>
       <p:sp>
         <p:nvSpPr>
-          <p:cNvPr id="9" name="Rounded Rectangle 8"/>
-          <p:cNvSpPr/>
-          <p:nvPr/>
-        </p:nvSpPr>
-        <p:spPr>
-          <a:xfrm>
-            <a:off x="7909560" y="1051560"/>
-            <a:ext cx="3730752" cy="1664208"/>
+          <p:cNvPr id="11" name="Oval 10"/>
+          <p:cNvSpPr/>
+          <p:nvPr/>
+        </p:nvSpPr>
+        <p:spPr>
+          <a:xfrm>
+            <a:off x="3127248" y="2617287"/>
+            <a:ext cx="402336" cy="402336"/>
+          </a:xfrm>
+          <a:prstGeom prst="ellipse">
+            <a:avLst/>
+          </a:prstGeom>
+          <a:solidFill>
+            <a:srgbClr val="7C3AED">
+              <a:alpha val="35000"/>
+            </a:srgbClr>
+          </a:solidFill>
+          <a:ln>
+            <a:noFill/>
+          </a:ln>
+        </p:spPr>
+        <p:style>
+          <a:lnRef idx="1">
+            <a:schemeClr val="accent1"/>
+          </a:lnRef>
+          <a:fillRef idx="3">
+            <a:schemeClr val="accent1"/>
+          </a:fillRef>
+          <a:effectRef idx="2">
+            <a:schemeClr val="accent1"/>
+          </a:effectRef>
+          <a:fontRef idx="minor">
+            <a:schemeClr val="lt1"/>
+          </a:fontRef>
+        </p:style>
+        <p:txBody>
+          <a:bodyPr rtlCol="0" anchor="ctr"/>
+          <a:lstStyle/>
+          <a:p>
+            <a:pPr algn="ctr"/>
+          </a:p>
+        </p:txBody>
+      </p:sp>
+      <p:sp>
+        <p:nvSpPr>
+          <p:cNvPr id="12" name="Oval 11"/>
+          <p:cNvSpPr/>
+          <p:nvPr/>
+        </p:nvSpPr>
+        <p:spPr>
+          <a:xfrm>
+            <a:off x="3182112" y="2672151"/>
+            <a:ext cx="292608" cy="292608"/>
+          </a:xfrm>
+          <a:prstGeom prst="ellipse">
+            <a:avLst/>
+          </a:prstGeom>
+          <a:solidFill>
+            <a:srgbClr val="7C3AED"/>
+          </a:solidFill>
+          <a:ln w="19050">
+            <a:solidFill>
+              <a:srgbClr val="FFFFFF"/>
+            </a:solidFill>
+          </a:ln>
+        </p:spPr>
+        <p:style>
+          <a:lnRef idx="1">
+            <a:schemeClr val="accent1"/>
+          </a:lnRef>
+          <a:fillRef idx="3">
+            <a:schemeClr val="accent1"/>
+          </a:fillRef>
+          <a:effectRef idx="2">
+            <a:schemeClr val="accent1"/>
+          </a:effectRef>
+          <a:fontRef idx="minor">
+            <a:schemeClr val="lt1"/>
+          </a:fontRef>
+        </p:style>
+        <p:txBody>
+          <a:bodyPr rtlCol="0" anchor="ctr"/>
+          <a:lstStyle/>
+          <a:p>
+            <a:pPr algn="ctr"/>
+            <a:r>
+              <a:rPr sz="1100" b="1">
+                <a:solidFill>
+                  <a:srgbClr val="FFFFFF"/>
+                </a:solidFill>
+                <a:latin typeface="Calibri"/>
+              </a:rPr>
+              <a:t>1</a:t>
+            </a:r>
+          </a:p>
+        </p:txBody>
+      </p:sp>
+      <p:sp>
+        <p:nvSpPr>
+          <p:cNvPr id="13" name="Oval 12"/>
+          <p:cNvSpPr/>
+          <p:nvPr/>
+        </p:nvSpPr>
+        <p:spPr>
+          <a:xfrm>
+            <a:off x="3566160" y="3098215"/>
+            <a:ext cx="402336" cy="402336"/>
+          </a:xfrm>
+          <a:prstGeom prst="ellipse">
+            <a:avLst/>
+          </a:prstGeom>
+          <a:solidFill>
+            <a:srgbClr val="0D9488">
+              <a:alpha val="35000"/>
+            </a:srgbClr>
+          </a:solidFill>
+          <a:ln>
+            <a:noFill/>
+          </a:ln>
+        </p:spPr>
+        <p:style>
+          <a:lnRef idx="1">
+            <a:schemeClr val="accent1"/>
+          </a:lnRef>
+          <a:fillRef idx="3">
+            <a:schemeClr val="accent1"/>
+          </a:fillRef>
+          <a:effectRef idx="2">
+            <a:schemeClr val="accent1"/>
+          </a:effectRef>
+          <a:fontRef idx="minor">
+            <a:schemeClr val="lt1"/>
+          </a:fontRef>
+        </p:style>
+        <p:txBody>
+          <a:bodyPr rtlCol="0" anchor="ctr"/>
+          <a:lstStyle/>
+          <a:p>
+            <a:pPr algn="ctr"/>
+          </a:p>
+        </p:txBody>
+      </p:sp>
+      <p:sp>
+        <p:nvSpPr>
+          <p:cNvPr id="14" name="Oval 13"/>
+          <p:cNvSpPr/>
+          <p:nvPr/>
+        </p:nvSpPr>
+        <p:spPr>
+          <a:xfrm>
+            <a:off x="3621024" y="3153079"/>
+            <a:ext cx="292608" cy="292608"/>
+          </a:xfrm>
+          <a:prstGeom prst="ellipse">
+            <a:avLst/>
+          </a:prstGeom>
+          <a:solidFill>
+            <a:srgbClr val="0D9488"/>
+          </a:solidFill>
+          <a:ln w="19050">
+            <a:solidFill>
+              <a:srgbClr val="FFFFFF"/>
+            </a:solidFill>
+          </a:ln>
+        </p:spPr>
+        <p:style>
+          <a:lnRef idx="1">
+            <a:schemeClr val="accent1"/>
+          </a:lnRef>
+          <a:fillRef idx="3">
+            <a:schemeClr val="accent1"/>
+          </a:fillRef>
+          <a:effectRef idx="2">
+            <a:schemeClr val="accent1"/>
+          </a:effectRef>
+          <a:fontRef idx="minor">
+            <a:schemeClr val="lt1"/>
+          </a:fontRef>
+        </p:style>
+        <p:txBody>
+          <a:bodyPr rtlCol="0" anchor="ctr"/>
+          <a:lstStyle/>
+          <a:p>
+            <a:pPr algn="ctr"/>
+            <a:r>
+              <a:rPr sz="1100" b="1">
+                <a:solidFill>
+                  <a:srgbClr val="FFFFFF"/>
+                </a:solidFill>
+                <a:latin typeface="Calibri"/>
+              </a:rPr>
+              <a:t>2</a:t>
+            </a:r>
+          </a:p>
+        </p:txBody>
+      </p:sp>
+      <p:sp>
+        <p:nvSpPr>
+          <p:cNvPr id="15" name="Oval 14"/>
+          <p:cNvSpPr/>
+          <p:nvPr/>
+        </p:nvSpPr>
+        <p:spPr>
+          <a:xfrm>
+            <a:off x="3363163" y="2899105"/>
+            <a:ext cx="402336" cy="402336"/>
+          </a:xfrm>
+          <a:prstGeom prst="ellipse">
+            <a:avLst/>
+          </a:prstGeom>
+          <a:solidFill>
+            <a:srgbClr val="EA580C">
+              <a:alpha val="35000"/>
+            </a:srgbClr>
+          </a:solidFill>
+          <a:ln>
+            <a:noFill/>
+          </a:ln>
+        </p:spPr>
+        <p:style>
+          <a:lnRef idx="1">
+            <a:schemeClr val="accent1"/>
+          </a:lnRef>
+          <a:fillRef idx="3">
+            <a:schemeClr val="accent1"/>
+          </a:fillRef>
+          <a:effectRef idx="2">
+            <a:schemeClr val="accent1"/>
+          </a:effectRef>
+          <a:fontRef idx="minor">
+            <a:schemeClr val="lt1"/>
+          </a:fontRef>
+        </p:style>
+        <p:txBody>
+          <a:bodyPr rtlCol="0" anchor="ctr"/>
+          <a:lstStyle/>
+          <a:p>
+            <a:pPr algn="ctr"/>
+          </a:p>
+        </p:txBody>
+      </p:sp>
+      <p:sp>
+        <p:nvSpPr>
+          <p:cNvPr id="16" name="Oval 15"/>
+          <p:cNvSpPr/>
+          <p:nvPr/>
+        </p:nvSpPr>
+        <p:spPr>
+          <a:xfrm>
+            <a:off x="3418027" y="2953969"/>
+            <a:ext cx="292608" cy="292608"/>
+          </a:xfrm>
+          <a:prstGeom prst="ellipse">
+            <a:avLst/>
+          </a:prstGeom>
+          <a:solidFill>
+            <a:srgbClr val="EA580C"/>
+          </a:solidFill>
+          <a:ln w="19050">
+            <a:solidFill>
+              <a:srgbClr val="FFFFFF"/>
+            </a:solidFill>
+          </a:ln>
+        </p:spPr>
+        <p:style>
+          <a:lnRef idx="1">
+            <a:schemeClr val="accent1"/>
+          </a:lnRef>
+          <a:fillRef idx="3">
+            <a:schemeClr val="accent1"/>
+          </a:fillRef>
+          <a:effectRef idx="2">
+            <a:schemeClr val="accent1"/>
+          </a:effectRef>
+          <a:fontRef idx="minor">
+            <a:schemeClr val="lt1"/>
+          </a:fontRef>
+        </p:style>
+        <p:txBody>
+          <a:bodyPr rtlCol="0" anchor="ctr"/>
+          <a:lstStyle/>
+          <a:p>
+            <a:pPr algn="ctr"/>
+            <a:r>
+              <a:rPr sz="1100" b="1">
+                <a:solidFill>
+                  <a:srgbClr val="FFFFFF"/>
+                </a:solidFill>
+                <a:latin typeface="Calibri"/>
+              </a:rPr>
+              <a:t>3</a:t>
+            </a:r>
+          </a:p>
+        </p:txBody>
+      </p:sp>
+      <p:sp>
+        <p:nvSpPr>
+          <p:cNvPr id="17" name="Oval 16"/>
+          <p:cNvSpPr/>
+          <p:nvPr/>
+        </p:nvSpPr>
+        <p:spPr>
+          <a:xfrm>
+            <a:off x="4125772" y="3536259"/>
+            <a:ext cx="402336" cy="402336"/>
+          </a:xfrm>
+          <a:prstGeom prst="ellipse">
+            <a:avLst/>
+          </a:prstGeom>
+          <a:solidFill>
+            <a:srgbClr val="0284C7">
+              <a:alpha val="35000"/>
+            </a:srgbClr>
+          </a:solidFill>
+          <a:ln>
+            <a:noFill/>
+          </a:ln>
+        </p:spPr>
+        <p:style>
+          <a:lnRef idx="1">
+            <a:schemeClr val="accent1"/>
+          </a:lnRef>
+          <a:fillRef idx="3">
+            <a:schemeClr val="accent1"/>
+          </a:fillRef>
+          <a:effectRef idx="2">
+            <a:schemeClr val="accent1"/>
+          </a:effectRef>
+          <a:fontRef idx="minor">
+            <a:schemeClr val="lt1"/>
+          </a:fontRef>
+        </p:style>
+        <p:txBody>
+          <a:bodyPr rtlCol="0" anchor="ctr"/>
+          <a:lstStyle/>
+          <a:p>
+            <a:pPr algn="ctr"/>
+          </a:p>
+        </p:txBody>
+      </p:sp>
+      <p:sp>
+        <p:nvSpPr>
+          <p:cNvPr id="18" name="Oval 17"/>
+          <p:cNvSpPr/>
+          <p:nvPr/>
+        </p:nvSpPr>
+        <p:spPr>
+          <a:xfrm>
+            <a:off x="4180636" y="3591123"/>
+            <a:ext cx="292608" cy="292608"/>
+          </a:xfrm>
+          <a:prstGeom prst="ellipse">
+            <a:avLst/>
+          </a:prstGeom>
+          <a:solidFill>
+            <a:srgbClr val="0284C7"/>
+          </a:solidFill>
+          <a:ln w="19050">
+            <a:solidFill>
+              <a:srgbClr val="FFFFFF"/>
+            </a:solidFill>
+          </a:ln>
+        </p:spPr>
+        <p:style>
+          <a:lnRef idx="1">
+            <a:schemeClr val="accent1"/>
+          </a:lnRef>
+          <a:fillRef idx="3">
+            <a:schemeClr val="accent1"/>
+          </a:fillRef>
+          <a:effectRef idx="2">
+            <a:schemeClr val="accent1"/>
+          </a:effectRef>
+          <a:fontRef idx="minor">
+            <a:schemeClr val="lt1"/>
+          </a:fontRef>
+        </p:style>
+        <p:txBody>
+          <a:bodyPr rtlCol="0" anchor="ctr"/>
+          <a:lstStyle/>
+          <a:p>
+            <a:pPr algn="ctr"/>
+            <a:r>
+              <a:rPr sz="1100" b="1">
+                <a:solidFill>
+                  <a:srgbClr val="FFFFFF"/>
+                </a:solidFill>
+                <a:latin typeface="Calibri"/>
+              </a:rPr>
+              <a:t>4</a:t>
+            </a:r>
+          </a:p>
+        </p:txBody>
+      </p:sp>
+      <p:sp>
+        <p:nvSpPr>
+          <p:cNvPr id="19" name="Oval 18"/>
+          <p:cNvSpPr/>
+          <p:nvPr/>
+        </p:nvSpPr>
+        <p:spPr>
+          <a:xfrm>
+            <a:off x="1651406" y="2258888"/>
+            <a:ext cx="402336" cy="402336"/>
+          </a:xfrm>
+          <a:prstGeom prst="ellipse">
+            <a:avLst/>
+          </a:prstGeom>
+          <a:solidFill>
+            <a:srgbClr val="EA580C">
+              <a:alpha val="35000"/>
+            </a:srgbClr>
+          </a:solidFill>
+          <a:ln>
+            <a:noFill/>
+          </a:ln>
+        </p:spPr>
+        <p:style>
+          <a:lnRef idx="1">
+            <a:schemeClr val="accent1"/>
+          </a:lnRef>
+          <a:fillRef idx="3">
+            <a:schemeClr val="accent1"/>
+          </a:fillRef>
+          <a:effectRef idx="2">
+            <a:schemeClr val="accent1"/>
+          </a:effectRef>
+          <a:fontRef idx="minor">
+            <a:schemeClr val="lt1"/>
+          </a:fontRef>
+        </p:style>
+        <p:txBody>
+          <a:bodyPr rtlCol="0" anchor="ctr"/>
+          <a:lstStyle/>
+          <a:p>
+            <a:pPr algn="ctr"/>
+          </a:p>
+        </p:txBody>
+      </p:sp>
+      <p:sp>
+        <p:nvSpPr>
+          <p:cNvPr id="20" name="Oval 19"/>
+          <p:cNvSpPr/>
+          <p:nvPr/>
+        </p:nvSpPr>
+        <p:spPr>
+          <a:xfrm>
+            <a:off x="1706270" y="2313752"/>
+            <a:ext cx="292608" cy="292608"/>
+          </a:xfrm>
+          <a:prstGeom prst="ellipse">
+            <a:avLst/>
+          </a:prstGeom>
+          <a:solidFill>
+            <a:srgbClr val="EA580C"/>
+          </a:solidFill>
+          <a:ln w="19050">
+            <a:solidFill>
+              <a:srgbClr val="FFFFFF"/>
+            </a:solidFill>
+          </a:ln>
+        </p:spPr>
+        <p:style>
+          <a:lnRef idx="1">
+            <a:schemeClr val="accent1"/>
+          </a:lnRef>
+          <a:fillRef idx="3">
+            <a:schemeClr val="accent1"/>
+          </a:fillRef>
+          <a:effectRef idx="2">
+            <a:schemeClr val="accent1"/>
+          </a:effectRef>
+          <a:fontRef idx="minor">
+            <a:schemeClr val="lt1"/>
+          </a:fontRef>
+        </p:style>
+        <p:txBody>
+          <a:bodyPr rtlCol="0" anchor="ctr"/>
+          <a:lstStyle/>
+          <a:p>
+            <a:pPr algn="ctr"/>
+            <a:r>
+              <a:rPr sz="1100" b="1">
+                <a:solidFill>
+                  <a:srgbClr val="FFFFFF"/>
+                </a:solidFill>
+                <a:latin typeface="Calibri"/>
+              </a:rPr>
+              <a:t>5</a:t>
+            </a:r>
+          </a:p>
+        </p:txBody>
+      </p:sp>
+      <p:sp>
+        <p:nvSpPr>
+          <p:cNvPr id="21" name="Oval 20"/>
+          <p:cNvSpPr/>
+          <p:nvPr/>
+        </p:nvSpPr>
+        <p:spPr>
+          <a:xfrm>
+            <a:off x="2249424" y="2975686"/>
+            <a:ext cx="402336" cy="402336"/>
+          </a:xfrm>
+          <a:prstGeom prst="ellipse">
+            <a:avLst/>
+          </a:prstGeom>
+          <a:solidFill>
+            <a:srgbClr val="0284C7">
+              <a:alpha val="35000"/>
+            </a:srgbClr>
+          </a:solidFill>
+          <a:ln>
+            <a:noFill/>
+          </a:ln>
+        </p:spPr>
+        <p:style>
+          <a:lnRef idx="1">
+            <a:schemeClr val="accent1"/>
+          </a:lnRef>
+          <a:fillRef idx="3">
+            <a:schemeClr val="accent1"/>
+          </a:fillRef>
+          <a:effectRef idx="2">
+            <a:schemeClr val="accent1"/>
+          </a:effectRef>
+          <a:fontRef idx="minor">
+            <a:schemeClr val="lt1"/>
+          </a:fontRef>
+        </p:style>
+        <p:txBody>
+          <a:bodyPr rtlCol="0" anchor="ctr"/>
+          <a:lstStyle/>
+          <a:p>
+            <a:pPr algn="ctr"/>
+          </a:p>
+        </p:txBody>
+      </p:sp>
+      <p:sp>
+        <p:nvSpPr>
+          <p:cNvPr id="22" name="Oval 21"/>
+          <p:cNvSpPr/>
+          <p:nvPr/>
+        </p:nvSpPr>
+        <p:spPr>
+          <a:xfrm>
+            <a:off x="2304288" y="3030550"/>
+            <a:ext cx="292608" cy="292608"/>
+          </a:xfrm>
+          <a:prstGeom prst="ellipse">
+            <a:avLst/>
+          </a:prstGeom>
+          <a:solidFill>
+            <a:srgbClr val="0284C7"/>
+          </a:solidFill>
+          <a:ln w="19050">
+            <a:solidFill>
+              <a:srgbClr val="FFFFFF"/>
+            </a:solidFill>
+          </a:ln>
+        </p:spPr>
+        <p:style>
+          <a:lnRef idx="1">
+            <a:schemeClr val="accent1"/>
+          </a:lnRef>
+          <a:fillRef idx="3">
+            <a:schemeClr val="accent1"/>
+          </a:fillRef>
+          <a:effectRef idx="2">
+            <a:schemeClr val="accent1"/>
+          </a:effectRef>
+          <a:fontRef idx="minor">
+            <a:schemeClr val="lt1"/>
+          </a:fontRef>
+        </p:style>
+        <p:txBody>
+          <a:bodyPr rtlCol="0" anchor="ctr"/>
+          <a:lstStyle/>
+          <a:p>
+            <a:pPr algn="ctr"/>
+            <a:r>
+              <a:rPr sz="1100" b="1">
+                <a:solidFill>
+                  <a:srgbClr val="FFFFFF"/>
+                </a:solidFill>
+                <a:latin typeface="Calibri"/>
+              </a:rPr>
+              <a:t>6</a:t>
+            </a:r>
+          </a:p>
+        </p:txBody>
+      </p:sp>
+      <p:sp>
+        <p:nvSpPr>
+          <p:cNvPr id="23" name="Rounded Rectangle 22"/>
+          <p:cNvSpPr/>
+          <p:nvPr/>
+        </p:nvSpPr>
+        <p:spPr>
+          <a:xfrm>
+            <a:off x="749808" y="5029199"/>
+            <a:ext cx="1737360" cy="1143000"/>
+          </a:xfrm>
+          <a:prstGeom prst="roundRect">
+            <a:avLst/>
+          </a:prstGeom>
+          <a:solidFill>
+            <a:srgbClr val="F5F3FF"/>
+          </a:solidFill>
+          <a:ln w="9525">
+            <a:solidFill>
+              <a:srgbClr val="E2E8F0"/>
+            </a:solidFill>
+          </a:ln>
+        </p:spPr>
+        <p:style>
+          <a:lnRef idx="1">
+            <a:schemeClr val="accent1"/>
+          </a:lnRef>
+          <a:fillRef idx="3">
+            <a:schemeClr val="accent1"/>
+          </a:fillRef>
+          <a:effectRef idx="2">
+            <a:schemeClr val="accent1"/>
+          </a:effectRef>
+          <a:fontRef idx="minor">
+            <a:schemeClr val="lt1"/>
+          </a:fontRef>
+        </p:style>
+        <p:txBody>
+          <a:bodyPr rtlCol="0" anchor="t" lIns="109728" rIns="109728" tIns="109728"/>
+          <a:lstStyle/>
+          <a:p>
+            <a:pPr algn="ctr"/>
+            <a:r>
+              <a:rPr sz="850" b="1">
+                <a:solidFill>
+                  <a:srgbClr val="64748B"/>
+                </a:solidFill>
+              </a:rPr>
+              <a:t>NPU INFERENCE RATE
+</a:t>
+            </a:r>
+          </a:p>
+          <a:p>
+            <a:r>
+              <a:rPr sz="1300" b="1">
+                <a:solidFill>
+                  <a:srgbClr val="7C3AED"/>
+                </a:solidFill>
+              </a:rPr>
+              <a:t>12–15 FPS
+</a:t>
+            </a:r>
+          </a:p>
+          <a:p>
+            <a:r>
+              <a:rPr sz="850">
+                <a:solidFill>
+                  <a:srgbClr val="334155"/>
+                </a:solidFill>
+              </a:rPr>
+              <a:t>INT8 YOLOv8 Quantized</a:t>
+            </a:r>
+          </a:p>
+        </p:txBody>
+      </p:sp>
+      <p:sp>
+        <p:nvSpPr>
+          <p:cNvPr id="24" name="Rounded Rectangle 23"/>
+          <p:cNvSpPr/>
+          <p:nvPr/>
+        </p:nvSpPr>
+        <p:spPr>
+          <a:xfrm>
+            <a:off x="2615184" y="5029199"/>
+            <a:ext cx="1737360" cy="1143000"/>
+          </a:xfrm>
+          <a:prstGeom prst="roundRect">
+            <a:avLst/>
+          </a:prstGeom>
+          <a:solidFill>
+            <a:srgbClr val="F0FDFA"/>
+          </a:solidFill>
+          <a:ln w="9525">
+            <a:solidFill>
+              <a:srgbClr val="E2E8F0"/>
+            </a:solidFill>
+          </a:ln>
+        </p:spPr>
+        <p:style>
+          <a:lnRef idx="1">
+            <a:schemeClr val="accent1"/>
+          </a:lnRef>
+          <a:fillRef idx="3">
+            <a:schemeClr val="accent1"/>
+          </a:fillRef>
+          <a:effectRef idx="2">
+            <a:schemeClr val="accent1"/>
+          </a:effectRef>
+          <a:fontRef idx="minor">
+            <a:schemeClr val="lt1"/>
+          </a:fontRef>
+        </p:style>
+        <p:txBody>
+          <a:bodyPr rtlCol="0" anchor="t" lIns="109728" rIns="109728" tIns="109728"/>
+          <a:lstStyle/>
+          <a:p>
+            <a:pPr algn="ctr"/>
+            <a:r>
+              <a:rPr sz="850" b="1">
+                <a:solidFill>
+                  <a:srgbClr val="64748B"/>
+                </a:solidFill>
+              </a:rPr>
+              <a:t>FLIGHT LOOP PERIOD
+</a:t>
+            </a:r>
+          </a:p>
+          <a:p>
+            <a:r>
+              <a:rPr sz="1300" b="1">
+                <a:solidFill>
+                  <a:srgbClr val="0D9488"/>
+                </a:solidFill>
+              </a:rPr>
+              <a:t>4.0 ms (250 Hz)
+</a:t>
+            </a:r>
+          </a:p>
+          <a:p>
+            <a:r>
+              <a:rPr sz="850">
+                <a:solidFill>
+                  <a:srgbClr val="334155"/>
+                </a:solidFill>
+              </a:rPr>
+              <a:t>Deterministic Zephyr Loop</a:t>
+            </a:r>
+          </a:p>
+        </p:txBody>
+      </p:sp>
+      <p:sp>
+        <p:nvSpPr>
+          <p:cNvPr id="25" name="Rounded Rectangle 24"/>
+          <p:cNvSpPr/>
+          <p:nvPr/>
+        </p:nvSpPr>
+        <p:spPr>
+          <a:xfrm>
+            <a:off x="4480560" y="5029199"/>
+            <a:ext cx="1737360" cy="1143000"/>
+          </a:xfrm>
+          <a:prstGeom prst="roundRect">
+            <a:avLst/>
+          </a:prstGeom>
+          <a:solidFill>
+            <a:srgbClr val="F0F9FF"/>
+          </a:solidFill>
+          <a:ln w="9525">
+            <a:solidFill>
+              <a:srgbClr val="E2E8F0"/>
+            </a:solidFill>
+          </a:ln>
+        </p:spPr>
+        <p:style>
+          <a:lnRef idx="1">
+            <a:schemeClr val="accent1"/>
+          </a:lnRef>
+          <a:fillRef idx="3">
+            <a:schemeClr val="accent1"/>
+          </a:fillRef>
+          <a:effectRef idx="2">
+            <a:schemeClr val="accent1"/>
+          </a:effectRef>
+          <a:fontRef idx="minor">
+            <a:schemeClr val="lt1"/>
+          </a:fontRef>
+        </p:style>
+        <p:txBody>
+          <a:bodyPr rtlCol="0" anchor="t" lIns="109728" rIns="109728" tIns="109728"/>
+          <a:lstStyle/>
+          <a:p>
+            <a:pPr algn="ctr"/>
+            <a:r>
+              <a:rPr sz="850" b="1">
+                <a:solidFill>
+                  <a:srgbClr val="64748B"/>
+                </a:solidFill>
+              </a:rPr>
+              <a:t>MEMORY FOOTPRINT
+</a:t>
+            </a:r>
+          </a:p>
+          <a:p>
+            <a:r>
+              <a:rPr sz="1300" b="1">
+                <a:solidFill>
+                  <a:srgbClr val="0284C7"/>
+                </a:solidFill>
+              </a:rPr>
+              <a:t>620 MB / 2 GB
+</a:t>
+            </a:r>
+          </a:p>
+          <a:p>
+            <a:r>
+              <a:rPr sz="850">
+                <a:solidFill>
+                  <a:srgbClr val="334155"/>
+                </a:solidFill>
+              </a:rPr>
+              <a:t>70% Free Safety Headroom</a:t>
+            </a:r>
+          </a:p>
+        </p:txBody>
+      </p:sp>
+      <p:sp>
+        <p:nvSpPr>
+          <p:cNvPr id="26" name="Rounded Rectangle 25"/>
+          <p:cNvSpPr/>
+          <p:nvPr/>
+        </p:nvSpPr>
+        <p:spPr>
+          <a:xfrm>
+            <a:off x="6720840" y="1051560"/>
+            <a:ext cx="2423160" cy="1664208"/>
           </a:xfrm>
           <a:prstGeom prst="roundRect">
             <a:avLst/>
@@ -9938,60 +10960,29 @@
           </a:fontRef>
         </p:style>
         <p:txBody>
-          <a:bodyPr rtlCol="0" anchor="t" lIns="201168" rIns="182880" tIns="128016"/>
-          <a:lstStyle/>
-          <a:p>
-            <a:pPr algn="ctr"/>
-            <a:r>
-              <a:rPr b="1" sz="1100">
-                <a:solidFill>
-                  <a:srgbClr val="0F172A"/>
-                </a:solidFill>
-              </a:rPr>
-              <a:t>1. DUAL-SPECTRAL CONICAL SENSING
-</a:t>
-            </a:r>
-          </a:p>
-          <a:p>
-            <a:r>
-              <a:rPr b="1" sz="850">
-                <a:solidFill>
-                  <a:srgbClr val="0284C7"/>
-                </a:solidFill>
-              </a:rPr>
-              <a:t>Cyan Beam: 1080p Optical Geometry
-Orange Beam: 8–14μm Radiometric LWIR
-</a:t>
-            </a:r>
-          </a:p>
-          <a:p>
-            <a:r>
-              <a:rPr sz="950">
-                <a:solidFill>
-                  <a:srgbClr val="475569"/>
-                </a:solidFill>
-              </a:rPr>
-              <a:t>Standard RGB cameras blind at dusk and in smoke plumes. Phoenix X projects co-registered optical and thermal fields-of-view, continuously scanning rubble crevices for human infrared emissions.</a:t>
-            </a:r>
-          </a:p>
-        </p:txBody>
-      </p:sp>
-      <p:sp>
-        <p:nvSpPr>
-          <p:cNvPr id="10" name="Rounded Rectangle 9"/>
-          <p:cNvSpPr/>
-          <p:nvPr/>
-        </p:nvSpPr>
-        <p:spPr>
-          <a:xfrm>
-            <a:off x="7909560" y="1051560"/>
+          <a:bodyPr rtlCol="0" anchor="ctr"/>
+          <a:lstStyle/>
+          <a:p>
+            <a:pPr algn="ctr"/>
+          </a:p>
+        </p:txBody>
+      </p:sp>
+      <p:sp>
+        <p:nvSpPr>
+          <p:cNvPr id="27" name="Rounded Rectangle 26"/>
+          <p:cNvSpPr/>
+          <p:nvPr/>
+        </p:nvSpPr>
+        <p:spPr>
+          <a:xfrm>
+            <a:off x="6720840" y="1051560"/>
             <a:ext cx="73152" cy="1664208"/>
           </a:xfrm>
           <a:prstGeom prst="roundRect">
             <a:avLst/>
           </a:prstGeom>
           <a:solidFill>
-            <a:srgbClr val="0284C7"/>
+            <a:srgbClr val="7C3AED"/>
           </a:solidFill>
           <a:ln>
             <a:noFill/>
@@ -10021,14 +11012,186 @@
       </p:sp>
       <p:sp>
         <p:nvSpPr>
-          <p:cNvPr id="11" name="Rounded Rectangle 10"/>
-          <p:cNvSpPr/>
-          <p:nvPr/>
-        </p:nvSpPr>
-        <p:spPr>
-          <a:xfrm>
-            <a:off x="7909560" y="2889504"/>
-            <a:ext cx="3730752" cy="1664208"/>
+          <p:cNvPr id="28" name="Oval 27"/>
+          <p:cNvSpPr/>
+          <p:nvPr/>
+        </p:nvSpPr>
+        <p:spPr>
+          <a:xfrm>
+            <a:off x="6867144" y="1179576"/>
+            <a:ext cx="310896" cy="310896"/>
+          </a:xfrm>
+          <a:prstGeom prst="ellipse">
+            <a:avLst/>
+          </a:prstGeom>
+          <a:solidFill>
+            <a:srgbClr val="7C3AED"/>
+          </a:solidFill>
+          <a:ln w="12700">
+            <a:solidFill>
+              <a:srgbClr val="FFFFFF"/>
+            </a:solidFill>
+          </a:ln>
+        </p:spPr>
+        <p:style>
+          <a:lnRef idx="1">
+            <a:schemeClr val="accent1"/>
+          </a:lnRef>
+          <a:fillRef idx="3">
+            <a:schemeClr val="accent1"/>
+          </a:fillRef>
+          <a:effectRef idx="2">
+            <a:schemeClr val="accent1"/>
+          </a:effectRef>
+          <a:fontRef idx="minor">
+            <a:schemeClr val="lt1"/>
+          </a:fontRef>
+        </p:style>
+        <p:txBody>
+          <a:bodyPr rtlCol="0" anchor="ctr"/>
+          <a:lstStyle/>
+          <a:p>
+            <a:pPr algn="ctr"/>
+            <a:r>
+              <a:rPr b="1" sz="1100">
+                <a:solidFill>
+                  <a:srgbClr val="FFFFFF"/>
+                </a:solidFill>
+              </a:rPr>
+              <a:t>1</a:t>
+            </a:r>
+          </a:p>
+        </p:txBody>
+      </p:sp>
+      <p:sp>
+        <p:nvSpPr>
+          <p:cNvPr id="29" name="TextBox 28"/>
+          <p:cNvSpPr txBox="1"/>
+          <p:nvPr/>
+        </p:nvSpPr>
+        <p:spPr>
+          <a:xfrm>
+            <a:off x="7251192" y="1161288"/>
+            <a:ext cx="1801368" cy="347472"/>
+          </a:xfrm>
+          <a:prstGeom prst="rect">
+            <a:avLst/>
+          </a:prstGeom>
+          <a:noFill/>
+        </p:spPr>
+        <p:txBody>
+          <a:bodyPr wrap="none" lIns="0" rIns="0" tIns="0" bIns="0">
+            <a:spAutoFit/>
+          </a:bodyPr>
+          <a:lstStyle/>
+          <a:p>
+            <a:r>
+              <a:rPr b="1" sz="1100">
+                <a:solidFill>
+                  <a:srgbClr val="0F172A"/>
+                </a:solidFill>
+              </a:rPr>
+              <a:t>Qualcomm QRB2210 Linux MPU</a:t>
+            </a:r>
+          </a:p>
+        </p:txBody>
+      </p:sp>
+      <p:sp>
+        <p:nvSpPr>
+          <p:cNvPr id="30" name="Rounded Rectangle 29"/>
+          <p:cNvSpPr/>
+          <p:nvPr/>
+        </p:nvSpPr>
+        <p:spPr>
+          <a:xfrm>
+            <a:off x="6867144" y="1554480"/>
+            <a:ext cx="2130552" cy="237744"/>
+          </a:xfrm>
+          <a:prstGeom prst="roundRect">
+            <a:avLst/>
+          </a:prstGeom>
+          <a:solidFill>
+            <a:srgbClr val="F1F5F9"/>
+          </a:solidFill>
+          <a:ln w="6350">
+            <a:solidFill>
+              <a:srgbClr val="E2E8F0"/>
+            </a:solidFill>
+          </a:ln>
+        </p:spPr>
+        <p:style>
+          <a:lnRef idx="1">
+            <a:schemeClr val="accent1"/>
+          </a:lnRef>
+          <a:fillRef idx="3">
+            <a:schemeClr val="accent1"/>
+          </a:fillRef>
+          <a:effectRef idx="2">
+            <a:schemeClr val="accent1"/>
+          </a:effectRef>
+          <a:fontRef idx="minor">
+            <a:schemeClr val="lt1"/>
+          </a:fontRef>
+        </p:style>
+        <p:txBody>
+          <a:bodyPr rtlCol="0" anchor="ctr" lIns="73152"/>
+          <a:lstStyle/>
+          <a:p>
+            <a:pPr algn="ctr"/>
+            <a:r>
+              <a:rPr b="1" sz="850">
+                <a:solidFill>
+                  <a:srgbClr val="334155"/>
+                </a:solidFill>
+              </a:rPr>
+              <a:t>Quad-Core 64-Bit Arm + Hexagon NPU</a:t>
+            </a:r>
+          </a:p>
+        </p:txBody>
+      </p:sp>
+      <p:sp>
+        <p:nvSpPr>
+          <p:cNvPr id="31" name="TextBox 30"/>
+          <p:cNvSpPr txBox="1"/>
+          <p:nvPr/>
+        </p:nvSpPr>
+        <p:spPr>
+          <a:xfrm>
+            <a:off x="6867144" y="1856232"/>
+            <a:ext cx="2130552" cy="795528"/>
+          </a:xfrm>
+          <a:prstGeom prst="rect">
+            <a:avLst/>
+          </a:prstGeom>
+          <a:noFill/>
+        </p:spPr>
+        <p:txBody>
+          <a:bodyPr wrap="square" lIns="0" rIns="0" tIns="0" bIns="0">
+            <a:spAutoFit/>
+          </a:bodyPr>
+          <a:lstStyle/>
+          <a:p>
+            <a:r>
+              <a:rPr sz="950">
+                <a:solidFill>
+                  <a:srgbClr val="334155"/>
+                </a:solidFill>
+              </a:rPr>
+              <a:t>Executes INT8-quantized YOLOv8 object detection on camera stream within a strict 5W envelope. Runs ray-casting geodetics.</a:t>
+            </a:r>
+          </a:p>
+        </p:txBody>
+      </p:sp>
+      <p:sp>
+        <p:nvSpPr>
+          <p:cNvPr id="32" name="Rounded Rectangle 31"/>
+          <p:cNvSpPr/>
+          <p:nvPr/>
+        </p:nvSpPr>
+        <p:spPr>
+          <a:xfrm>
+            <a:off x="9326880" y="1051560"/>
+            <a:ext cx="2423160" cy="1664208"/>
           </a:xfrm>
           <a:prstGeom prst="roundRect">
             <a:avLst/>
@@ -10064,60 +11227,29 @@
           </a:fontRef>
         </p:style>
         <p:txBody>
-          <a:bodyPr rtlCol="0" anchor="t" lIns="201168" rIns="182880" tIns="128016"/>
-          <a:lstStyle/>
-          <a:p>
-            <a:pPr algn="ctr"/>
-            <a:r>
-              <a:rPr b="1" sz="1100">
-                <a:solidFill>
-                  <a:srgbClr val="0F172A"/>
-                </a:solidFill>
-              </a:rPr>
-              <a:t>2. RADIOMETRIC CORE HEAT FILTER
-</a:t>
-            </a:r>
-          </a:p>
-          <a:p>
-            <a:r>
-              <a:rPr b="1" sz="850">
-                <a:solidFill>
-                  <a:srgbClr val="EA580C"/>
-                </a:solidFill>
-              </a:rPr>
-              <a:t>Gated Detection: 36.5°C to 37.5°C
-Noise Equivalent Temp Diff: NETD &lt; 50 mK
-</a:t>
-            </a:r>
-          </a:p>
-          <a:p>
-            <a:r>
-              <a:rPr sz="950">
-                <a:solidFill>
-                  <a:srgbClr val="475569"/>
-                </a:solidFill>
-              </a:rPr>
-              <a:t>Solar radiation heats tin roofs, wet mud, and rocks to over 45°C. Phoenix X isolates true biological core temperature profiles, instantly discarding thermal false alarms before passing tensors to the NPU.</a:t>
-            </a:r>
-          </a:p>
-        </p:txBody>
-      </p:sp>
-      <p:sp>
-        <p:nvSpPr>
-          <p:cNvPr id="12" name="Rounded Rectangle 11"/>
-          <p:cNvSpPr/>
-          <p:nvPr/>
-        </p:nvSpPr>
-        <p:spPr>
-          <a:xfrm>
-            <a:off x="7909560" y="2889504"/>
+          <a:bodyPr rtlCol="0" anchor="ctr"/>
+          <a:lstStyle/>
+          <a:p>
+            <a:pPr algn="ctr"/>
+          </a:p>
+        </p:txBody>
+      </p:sp>
+      <p:sp>
+        <p:nvSpPr>
+          <p:cNvPr id="33" name="Rounded Rectangle 32"/>
+          <p:cNvSpPr/>
+          <p:nvPr/>
+        </p:nvSpPr>
+        <p:spPr>
+          <a:xfrm>
+            <a:off x="9326880" y="1051560"/>
             <a:ext cx="73152" cy="1664208"/>
           </a:xfrm>
           <a:prstGeom prst="roundRect">
             <a:avLst/>
           </a:prstGeom>
           <a:solidFill>
-            <a:srgbClr val="EA580C"/>
+            <a:srgbClr val="0D9488"/>
           </a:solidFill>
           <a:ln>
             <a:noFill/>
@@ -10147,14 +11279,186 @@
       </p:sp>
       <p:sp>
         <p:nvSpPr>
-          <p:cNvPr id="13" name="Rounded Rectangle 12"/>
-          <p:cNvSpPr/>
-          <p:nvPr/>
-        </p:nvSpPr>
-        <p:spPr>
-          <a:xfrm>
-            <a:off x="7909560" y="4727448"/>
-            <a:ext cx="3730752" cy="1664208"/>
+          <p:cNvPr id="34" name="Oval 33"/>
+          <p:cNvSpPr/>
+          <p:nvPr/>
+        </p:nvSpPr>
+        <p:spPr>
+          <a:xfrm>
+            <a:off x="9473184" y="1179576"/>
+            <a:ext cx="310896" cy="310896"/>
+          </a:xfrm>
+          <a:prstGeom prst="ellipse">
+            <a:avLst/>
+          </a:prstGeom>
+          <a:solidFill>
+            <a:srgbClr val="0D9488"/>
+          </a:solidFill>
+          <a:ln w="12700">
+            <a:solidFill>
+              <a:srgbClr val="FFFFFF"/>
+            </a:solidFill>
+          </a:ln>
+        </p:spPr>
+        <p:style>
+          <a:lnRef idx="1">
+            <a:schemeClr val="accent1"/>
+          </a:lnRef>
+          <a:fillRef idx="3">
+            <a:schemeClr val="accent1"/>
+          </a:fillRef>
+          <a:effectRef idx="2">
+            <a:schemeClr val="accent1"/>
+          </a:effectRef>
+          <a:fontRef idx="minor">
+            <a:schemeClr val="lt1"/>
+          </a:fontRef>
+        </p:style>
+        <p:txBody>
+          <a:bodyPr rtlCol="0" anchor="ctr"/>
+          <a:lstStyle/>
+          <a:p>
+            <a:pPr algn="ctr"/>
+            <a:r>
+              <a:rPr b="1" sz="1100">
+                <a:solidFill>
+                  <a:srgbClr val="FFFFFF"/>
+                </a:solidFill>
+              </a:rPr>
+              <a:t>2</a:t>
+            </a:r>
+          </a:p>
+        </p:txBody>
+      </p:sp>
+      <p:sp>
+        <p:nvSpPr>
+          <p:cNvPr id="35" name="TextBox 34"/>
+          <p:cNvSpPr txBox="1"/>
+          <p:nvPr/>
+        </p:nvSpPr>
+        <p:spPr>
+          <a:xfrm>
+            <a:off x="9857232" y="1161288"/>
+            <a:ext cx="1801368" cy="347472"/>
+          </a:xfrm>
+          <a:prstGeom prst="rect">
+            <a:avLst/>
+          </a:prstGeom>
+          <a:noFill/>
+        </p:spPr>
+        <p:txBody>
+          <a:bodyPr wrap="none" lIns="0" rIns="0" tIns="0" bIns="0">
+            <a:spAutoFit/>
+          </a:bodyPr>
+          <a:lstStyle/>
+          <a:p>
+            <a:r>
+              <a:rPr b="1" sz="1100">
+                <a:solidFill>
+                  <a:srgbClr val="0F172A"/>
+                </a:solidFill>
+              </a:rPr>
+              <a:t>STMicroelectronics STM32U585 MCU</a:t>
+            </a:r>
+          </a:p>
+        </p:txBody>
+      </p:sp>
+      <p:sp>
+        <p:nvSpPr>
+          <p:cNvPr id="36" name="Rounded Rectangle 35"/>
+          <p:cNvSpPr/>
+          <p:nvPr/>
+        </p:nvSpPr>
+        <p:spPr>
+          <a:xfrm>
+            <a:off x="9473184" y="1554480"/>
+            <a:ext cx="2130552" cy="237744"/>
+          </a:xfrm>
+          <a:prstGeom prst="roundRect">
+            <a:avLst/>
+          </a:prstGeom>
+          <a:solidFill>
+            <a:srgbClr val="F1F5F9"/>
+          </a:solidFill>
+          <a:ln w="6350">
+            <a:solidFill>
+              <a:srgbClr val="E2E8F0"/>
+            </a:solidFill>
+          </a:ln>
+        </p:spPr>
+        <p:style>
+          <a:lnRef idx="1">
+            <a:schemeClr val="accent1"/>
+          </a:lnRef>
+          <a:fillRef idx="3">
+            <a:schemeClr val="accent1"/>
+          </a:fillRef>
+          <a:effectRef idx="2">
+            <a:schemeClr val="accent1"/>
+          </a:effectRef>
+          <a:fontRef idx="minor">
+            <a:schemeClr val="lt1"/>
+          </a:fontRef>
+        </p:style>
+        <p:txBody>
+          <a:bodyPr rtlCol="0" anchor="ctr" lIns="73152"/>
+          <a:lstStyle/>
+          <a:p>
+            <a:pPr algn="ctr"/>
+            <a:r>
+              <a:rPr b="1" sz="850">
+                <a:solidFill>
+                  <a:srgbClr val="334155"/>
+                </a:solidFill>
+              </a:rPr>
+              <a:t>Zephyr RTOS @ 250 Hz Loop · 786 KB SRAM</a:t>
+            </a:r>
+          </a:p>
+        </p:txBody>
+      </p:sp>
+      <p:sp>
+        <p:nvSpPr>
+          <p:cNvPr id="37" name="TextBox 36"/>
+          <p:cNvSpPr txBox="1"/>
+          <p:nvPr/>
+        </p:nvSpPr>
+        <p:spPr>
+          <a:xfrm>
+            <a:off x="9473184" y="1856232"/>
+            <a:ext cx="2130552" cy="795528"/>
+          </a:xfrm>
+          <a:prstGeom prst="rect">
+            <a:avLst/>
+          </a:prstGeom>
+          <a:noFill/>
+        </p:spPr>
+        <p:txBody>
+          <a:bodyPr wrap="square" lIns="0" rIns="0" tIns="0" bIns="0">
+            <a:spAutoFit/>
+          </a:bodyPr>
+          <a:lstStyle/>
+          <a:p>
+            <a:r>
+              <a:rPr sz="950">
+                <a:solidFill>
+                  <a:srgbClr val="334155"/>
+                </a:solidFill>
+              </a:rPr>
+              <a:t>Executes deterministic 4ms PID attitude control. Directly pulses motor ESCs without touching the AI vision pipeline.</a:t>
+            </a:r>
+          </a:p>
+        </p:txBody>
+      </p:sp>
+      <p:sp>
+        <p:nvSpPr>
+          <p:cNvPr id="38" name="Rounded Rectangle 37"/>
+          <p:cNvSpPr/>
+          <p:nvPr/>
+        </p:nvSpPr>
+        <p:spPr>
+          <a:xfrm>
+            <a:off x="6720840" y="2880360"/>
+            <a:ext cx="2423160" cy="1664208"/>
           </a:xfrm>
           <a:prstGeom prst="roundRect">
             <a:avLst/>
@@ -10190,60 +11494,29 @@
           </a:fontRef>
         </p:style>
         <p:txBody>
-          <a:bodyPr rtlCol="0" anchor="t" lIns="201168" rIns="182880" tIns="128016"/>
-          <a:lstStyle/>
-          <a:p>
-            <a:pPr algn="ctr"/>
-            <a:r>
-              <a:rPr b="1" sz="1100">
-                <a:solidFill>
-                  <a:srgbClr val="0F172A"/>
-                </a:solidFill>
-              </a:rPr>
-              <a:t>3. 6-DOF TAIT-BRYAN RAY-CASTING
-</a:t>
-            </a:r>
-          </a:p>
-          <a:p>
-            <a:r>
-              <a:rPr b="1" sz="850">
-                <a:solidFill>
-                  <a:srgbClr val="0D9488"/>
-                </a:solidFill>
-              </a:rPr>
-              <a:t>Optical-to-Ground Vector Projection
-Accuracy: WGS-84 within ±2.1m SEP
-</a:t>
-            </a:r>
-          </a:p>
-          <a:p>
-            <a:r>
-              <a:rPr sz="950">
-                <a:solidFill>
-                  <a:srgbClr val="475569"/>
-                </a:solidFill>
-              </a:rPr>
-              <a:t>Hovering overhead puts drones at risk of collision. The drone flies at an oblique standoff angle; its onboard NPU projects camera bounding-box pixels directly onto a local DEM elevation grid in &lt; 60 ms.</a:t>
-            </a:r>
-          </a:p>
-        </p:txBody>
-      </p:sp>
-      <p:sp>
-        <p:nvSpPr>
-          <p:cNvPr id="14" name="Rounded Rectangle 13"/>
-          <p:cNvSpPr/>
-          <p:nvPr/>
-        </p:nvSpPr>
-        <p:spPr>
-          <a:xfrm>
-            <a:off x="7909560" y="4727448"/>
+          <a:bodyPr rtlCol="0" anchor="ctr"/>
+          <a:lstStyle/>
+          <a:p>
+            <a:pPr algn="ctr"/>
+          </a:p>
+        </p:txBody>
+      </p:sp>
+      <p:sp>
+        <p:nvSpPr>
+          <p:cNvPr id="39" name="Rounded Rectangle 38"/>
+          <p:cNvSpPr/>
+          <p:nvPr/>
+        </p:nvSpPr>
+        <p:spPr>
+          <a:xfrm>
+            <a:off x="6720840" y="2880360"/>
             <a:ext cx="73152" cy="1664208"/>
           </a:xfrm>
           <a:prstGeom prst="roundRect">
             <a:avLst/>
           </a:prstGeom>
           <a:solidFill>
-            <a:srgbClr val="0D9488"/>
+            <a:srgbClr val="EA580C"/>
           </a:solidFill>
           <a:ln>
             <a:noFill/>
@@ -10268,6 +11541,979 @@
           <a:lstStyle/>
           <a:p>
             <a:pPr algn="ctr"/>
+          </a:p>
+        </p:txBody>
+      </p:sp>
+      <p:sp>
+        <p:nvSpPr>
+          <p:cNvPr id="40" name="Oval 39"/>
+          <p:cNvSpPr/>
+          <p:nvPr/>
+        </p:nvSpPr>
+        <p:spPr>
+          <a:xfrm>
+            <a:off x="6867144" y="3008376"/>
+            <a:ext cx="310896" cy="310896"/>
+          </a:xfrm>
+          <a:prstGeom prst="ellipse">
+            <a:avLst/>
+          </a:prstGeom>
+          <a:solidFill>
+            <a:srgbClr val="EA580C"/>
+          </a:solidFill>
+          <a:ln w="12700">
+            <a:solidFill>
+              <a:srgbClr val="FFFFFF"/>
+            </a:solidFill>
+          </a:ln>
+        </p:spPr>
+        <p:style>
+          <a:lnRef idx="1">
+            <a:schemeClr val="accent1"/>
+          </a:lnRef>
+          <a:fillRef idx="3">
+            <a:schemeClr val="accent1"/>
+          </a:fillRef>
+          <a:effectRef idx="2">
+            <a:schemeClr val="accent1"/>
+          </a:effectRef>
+          <a:fontRef idx="minor">
+            <a:schemeClr val="lt1"/>
+          </a:fontRef>
+        </p:style>
+        <p:txBody>
+          <a:bodyPr rtlCol="0" anchor="ctr"/>
+          <a:lstStyle/>
+          <a:p>
+            <a:pPr algn="ctr"/>
+            <a:r>
+              <a:rPr b="1" sz="1100">
+                <a:solidFill>
+                  <a:srgbClr val="FFFFFF"/>
+                </a:solidFill>
+              </a:rPr>
+              <a:t>3</a:t>
+            </a:r>
+          </a:p>
+        </p:txBody>
+      </p:sp>
+      <p:sp>
+        <p:nvSpPr>
+          <p:cNvPr id="41" name="TextBox 40"/>
+          <p:cNvSpPr txBox="1"/>
+          <p:nvPr/>
+        </p:nvSpPr>
+        <p:spPr>
+          <a:xfrm>
+            <a:off x="7251192" y="2990088"/>
+            <a:ext cx="1801368" cy="347472"/>
+          </a:xfrm>
+          <a:prstGeom prst="rect">
+            <a:avLst/>
+          </a:prstGeom>
+          <a:noFill/>
+        </p:spPr>
+        <p:txBody>
+          <a:bodyPr wrap="none" lIns="0" rIns="0" tIns="0" bIns="0">
+            <a:spAutoFit/>
+          </a:bodyPr>
+          <a:lstStyle/>
+          <a:p>
+            <a:r>
+              <a:rPr b="1" sz="1100">
+                <a:solidFill>
+                  <a:srgbClr val="0F172A"/>
+                </a:solidFill>
+              </a:rPr>
+              <a:t>Non-Blocking RPC Inter-Core Bridge</a:t>
+            </a:r>
+          </a:p>
+        </p:txBody>
+      </p:sp>
+      <p:sp>
+        <p:nvSpPr>
+          <p:cNvPr id="42" name="Rounded Rectangle 41"/>
+          <p:cNvSpPr/>
+          <p:nvPr/>
+        </p:nvSpPr>
+        <p:spPr>
+          <a:xfrm>
+            <a:off x="6867144" y="3383280"/>
+            <a:ext cx="2130552" cy="237744"/>
+          </a:xfrm>
+          <a:prstGeom prst="roundRect">
+            <a:avLst/>
+          </a:prstGeom>
+          <a:solidFill>
+            <a:srgbClr val="F1F5F9"/>
+          </a:solidFill>
+          <a:ln w="6350">
+            <a:solidFill>
+              <a:srgbClr val="E2E8F0"/>
+            </a:solidFill>
+          </a:ln>
+        </p:spPr>
+        <p:style>
+          <a:lnRef idx="1">
+            <a:schemeClr val="accent1"/>
+          </a:lnRef>
+          <a:fillRef idx="3">
+            <a:schemeClr val="accent1"/>
+          </a:fillRef>
+          <a:effectRef idx="2">
+            <a:schemeClr val="accent1"/>
+          </a:effectRef>
+          <a:fontRef idx="minor">
+            <a:schemeClr val="lt1"/>
+          </a:fontRef>
+        </p:style>
+        <p:txBody>
+          <a:bodyPr rtlCol="0" anchor="ctr" lIns="73152"/>
+          <a:lstStyle/>
+          <a:p>
+            <a:pPr algn="ctr"/>
+            <a:r>
+              <a:rPr b="1" sz="850">
+                <a:solidFill>
+                  <a:srgbClr val="334155"/>
+                </a:solidFill>
+              </a:rPr>
+              <a:t>Asynchronous bridge.notify() Calls</a:t>
+            </a:r>
+          </a:p>
+        </p:txBody>
+      </p:sp>
+      <p:sp>
+        <p:nvSpPr>
+          <p:cNvPr id="43" name="TextBox 42"/>
+          <p:cNvSpPr txBox="1"/>
+          <p:nvPr/>
+        </p:nvSpPr>
+        <p:spPr>
+          <a:xfrm>
+            <a:off x="6867144" y="3685032"/>
+            <a:ext cx="2130552" cy="795528"/>
+          </a:xfrm>
+          <a:prstGeom prst="rect">
+            <a:avLst/>
+          </a:prstGeom>
+          <a:noFill/>
+        </p:spPr>
+        <p:txBody>
+          <a:bodyPr wrap="square" lIns="0" rIns="0" tIns="0" bIns="0">
+            <a:spAutoFit/>
+          </a:bodyPr>
+          <a:lstStyle/>
+          <a:p>
+            <a:r>
+              <a:rPr sz="950">
+                <a:solidFill>
+                  <a:srgbClr val="334155"/>
+                </a:solidFill>
+              </a:rPr>
+              <a:t>Shared-memory messaging separates flight dynamics from Linux OS jitter. If Linux restarts, drone never crashes.</a:t>
+            </a:r>
+          </a:p>
+        </p:txBody>
+      </p:sp>
+      <p:sp>
+        <p:nvSpPr>
+          <p:cNvPr id="44" name="Rounded Rectangle 43"/>
+          <p:cNvSpPr/>
+          <p:nvPr/>
+        </p:nvSpPr>
+        <p:spPr>
+          <a:xfrm>
+            <a:off x="9326880" y="2880360"/>
+            <a:ext cx="2423160" cy="1664208"/>
+          </a:xfrm>
+          <a:prstGeom prst="roundRect">
+            <a:avLst/>
+          </a:prstGeom>
+          <a:solidFill>
+            <a:srgbClr val="FFFFFF"/>
+          </a:solidFill>
+          <a:ln w="12700">
+            <a:solidFill>
+              <a:srgbClr val="E2E8F0"/>
+            </a:solidFill>
+          </a:ln>
+          <a:effectLst>
+            <a:outerShdw blurRad="101600" dist="25400" dir="5400000" algn="t" rotWithShape="0">
+              <a:srgbClr val="0F172A">
+                <a:alpha val="10000"/>
+              </a:srgbClr>
+            </a:outerShdw>
+          </a:effectLst>
+        </p:spPr>
+        <p:style>
+          <a:lnRef idx="1">
+            <a:schemeClr val="accent1"/>
+          </a:lnRef>
+          <a:fillRef idx="3">
+            <a:schemeClr val="accent1"/>
+          </a:fillRef>
+          <a:effectRef idx="2">
+            <a:schemeClr val="accent1"/>
+          </a:effectRef>
+          <a:fontRef idx="minor">
+            <a:schemeClr val="lt1"/>
+          </a:fontRef>
+        </p:style>
+        <p:txBody>
+          <a:bodyPr rtlCol="0" anchor="ctr"/>
+          <a:lstStyle/>
+          <a:p>
+            <a:pPr algn="ctr"/>
+          </a:p>
+        </p:txBody>
+      </p:sp>
+      <p:sp>
+        <p:nvSpPr>
+          <p:cNvPr id="45" name="Rounded Rectangle 44"/>
+          <p:cNvSpPr/>
+          <p:nvPr/>
+        </p:nvSpPr>
+        <p:spPr>
+          <a:xfrm>
+            <a:off x="9326880" y="2880360"/>
+            <a:ext cx="73152" cy="1664208"/>
+          </a:xfrm>
+          <a:prstGeom prst="roundRect">
+            <a:avLst/>
+          </a:prstGeom>
+          <a:solidFill>
+            <a:srgbClr val="0284C7"/>
+          </a:solidFill>
+          <a:ln>
+            <a:noFill/>
+          </a:ln>
+        </p:spPr>
+        <p:style>
+          <a:lnRef idx="1">
+            <a:schemeClr val="accent1"/>
+          </a:lnRef>
+          <a:fillRef idx="3">
+            <a:schemeClr val="accent1"/>
+          </a:fillRef>
+          <a:effectRef idx="2">
+            <a:schemeClr val="accent1"/>
+          </a:effectRef>
+          <a:fontRef idx="minor">
+            <a:schemeClr val="lt1"/>
+          </a:fontRef>
+        </p:style>
+        <p:txBody>
+          <a:bodyPr rtlCol="0" anchor="ctr"/>
+          <a:lstStyle/>
+          <a:p>
+            <a:pPr algn="ctr"/>
+          </a:p>
+        </p:txBody>
+      </p:sp>
+      <p:sp>
+        <p:nvSpPr>
+          <p:cNvPr id="46" name="Oval 45"/>
+          <p:cNvSpPr/>
+          <p:nvPr/>
+        </p:nvSpPr>
+        <p:spPr>
+          <a:xfrm>
+            <a:off x="9473184" y="3008376"/>
+            <a:ext cx="310896" cy="310896"/>
+          </a:xfrm>
+          <a:prstGeom prst="ellipse">
+            <a:avLst/>
+          </a:prstGeom>
+          <a:solidFill>
+            <a:srgbClr val="0284C7"/>
+          </a:solidFill>
+          <a:ln w="12700">
+            <a:solidFill>
+              <a:srgbClr val="FFFFFF"/>
+            </a:solidFill>
+          </a:ln>
+        </p:spPr>
+        <p:style>
+          <a:lnRef idx="1">
+            <a:schemeClr val="accent1"/>
+          </a:lnRef>
+          <a:fillRef idx="3">
+            <a:schemeClr val="accent1"/>
+          </a:fillRef>
+          <a:effectRef idx="2">
+            <a:schemeClr val="accent1"/>
+          </a:effectRef>
+          <a:fontRef idx="minor">
+            <a:schemeClr val="lt1"/>
+          </a:fontRef>
+        </p:style>
+        <p:txBody>
+          <a:bodyPr rtlCol="0" anchor="ctr"/>
+          <a:lstStyle/>
+          <a:p>
+            <a:pPr algn="ctr"/>
+            <a:r>
+              <a:rPr b="1" sz="1100">
+                <a:solidFill>
+                  <a:srgbClr val="FFFFFF"/>
+                </a:solidFill>
+              </a:rPr>
+              <a:t>4</a:t>
+            </a:r>
+          </a:p>
+        </p:txBody>
+      </p:sp>
+      <p:sp>
+        <p:nvSpPr>
+          <p:cNvPr id="47" name="TextBox 46"/>
+          <p:cNvSpPr txBox="1"/>
+          <p:nvPr/>
+        </p:nvSpPr>
+        <p:spPr>
+          <a:xfrm>
+            <a:off x="9857232" y="2990088"/>
+            <a:ext cx="1801368" cy="347472"/>
+          </a:xfrm>
+          <a:prstGeom prst="rect">
+            <a:avLst/>
+          </a:prstGeom>
+          <a:noFill/>
+        </p:spPr>
+        <p:txBody>
+          <a:bodyPr wrap="none" lIns="0" rIns="0" tIns="0" bIns="0">
+            <a:spAutoFit/>
+          </a:bodyPr>
+          <a:lstStyle/>
+          <a:p>
+            <a:r>
+              <a:rPr b="1" sz="1100">
+                <a:solidFill>
+                  <a:srgbClr val="0F172A"/>
+                </a:solidFill>
+              </a:rPr>
+              <a:t>Semtech SX1262 LoRa Node</a:t>
+            </a:r>
+          </a:p>
+        </p:txBody>
+      </p:sp>
+      <p:sp>
+        <p:nvSpPr>
+          <p:cNvPr id="48" name="Rounded Rectangle 47"/>
+          <p:cNvSpPr/>
+          <p:nvPr/>
+        </p:nvSpPr>
+        <p:spPr>
+          <a:xfrm>
+            <a:off x="9473184" y="3383280"/>
+            <a:ext cx="2130552" cy="237744"/>
+          </a:xfrm>
+          <a:prstGeom prst="roundRect">
+            <a:avLst/>
+          </a:prstGeom>
+          <a:solidFill>
+            <a:srgbClr val="F1F5F9"/>
+          </a:solidFill>
+          <a:ln w="6350">
+            <a:solidFill>
+              <a:srgbClr val="E2E8F0"/>
+            </a:solidFill>
+          </a:ln>
+        </p:spPr>
+        <p:style>
+          <a:lnRef idx="1">
+            <a:schemeClr val="accent1"/>
+          </a:lnRef>
+          <a:fillRef idx="3">
+            <a:schemeClr val="accent1"/>
+          </a:fillRef>
+          <a:effectRef idx="2">
+            <a:schemeClr val="accent1"/>
+          </a:effectRef>
+          <a:fontRef idx="minor">
+            <a:schemeClr val="lt1"/>
+          </a:fontRef>
+        </p:style>
+        <p:txBody>
+          <a:bodyPr rtlCol="0" anchor="ctr" lIns="73152"/>
+          <a:lstStyle/>
+          <a:p>
+            <a:pPr algn="ctr"/>
+            <a:r>
+              <a:rPr b="1" sz="850">
+                <a:solidFill>
+                  <a:srgbClr val="334155"/>
+                </a:solidFill>
+              </a:rPr>
+              <a:t>868 MHz Sub-GHz SPI · +22 dBm PA</a:t>
+            </a:r>
+          </a:p>
+        </p:txBody>
+      </p:sp>
+      <p:sp>
+        <p:nvSpPr>
+          <p:cNvPr id="49" name="TextBox 48"/>
+          <p:cNvSpPr txBox="1"/>
+          <p:nvPr/>
+        </p:nvSpPr>
+        <p:spPr>
+          <a:xfrm>
+            <a:off x="9473184" y="3685032"/>
+            <a:ext cx="2130552" cy="795528"/>
+          </a:xfrm>
+          <a:prstGeom prst="rect">
+            <a:avLst/>
+          </a:prstGeom>
+          <a:noFill/>
+        </p:spPr>
+        <p:txBody>
+          <a:bodyPr wrap="square" lIns="0" rIns="0" tIns="0" bIns="0">
+            <a:spAutoFit/>
+          </a:bodyPr>
+          <a:lstStyle/>
+          <a:p>
+            <a:r>
+              <a:rPr sz="950">
+                <a:solidFill>
+                  <a:srgbClr val="334155"/>
+                </a:solidFill>
+              </a:rPr>
+              <a:t>Punches encrypted 17-byte victim coordinates through concrete debris over 3–5 km to portable ground station.</a:t>
+            </a:r>
+          </a:p>
+        </p:txBody>
+      </p:sp>
+      <p:sp>
+        <p:nvSpPr>
+          <p:cNvPr id="50" name="Rounded Rectangle 49"/>
+          <p:cNvSpPr/>
+          <p:nvPr/>
+        </p:nvSpPr>
+        <p:spPr>
+          <a:xfrm>
+            <a:off x="6720840" y="4709160"/>
+            <a:ext cx="2423160" cy="1664208"/>
+          </a:xfrm>
+          <a:prstGeom prst="roundRect">
+            <a:avLst/>
+          </a:prstGeom>
+          <a:solidFill>
+            <a:srgbClr val="FFFFFF"/>
+          </a:solidFill>
+          <a:ln w="12700">
+            <a:solidFill>
+              <a:srgbClr val="E2E8F0"/>
+            </a:solidFill>
+          </a:ln>
+          <a:effectLst>
+            <a:outerShdw blurRad="101600" dist="25400" dir="5400000" algn="t" rotWithShape="0">
+              <a:srgbClr val="0F172A">
+                <a:alpha val="10000"/>
+              </a:srgbClr>
+            </a:outerShdw>
+          </a:effectLst>
+        </p:spPr>
+        <p:style>
+          <a:lnRef idx="1">
+            <a:schemeClr val="accent1"/>
+          </a:lnRef>
+          <a:fillRef idx="3">
+            <a:schemeClr val="accent1"/>
+          </a:fillRef>
+          <a:effectRef idx="2">
+            <a:schemeClr val="accent1"/>
+          </a:effectRef>
+          <a:fontRef idx="minor">
+            <a:schemeClr val="lt1"/>
+          </a:fontRef>
+        </p:style>
+        <p:txBody>
+          <a:bodyPr rtlCol="0" anchor="ctr"/>
+          <a:lstStyle/>
+          <a:p>
+            <a:pPr algn="ctr"/>
+          </a:p>
+        </p:txBody>
+      </p:sp>
+      <p:sp>
+        <p:nvSpPr>
+          <p:cNvPr id="51" name="Rounded Rectangle 50"/>
+          <p:cNvSpPr/>
+          <p:nvPr/>
+        </p:nvSpPr>
+        <p:spPr>
+          <a:xfrm>
+            <a:off x="6720840" y="4709160"/>
+            <a:ext cx="73152" cy="1664208"/>
+          </a:xfrm>
+          <a:prstGeom prst="roundRect">
+            <a:avLst/>
+          </a:prstGeom>
+          <a:solidFill>
+            <a:srgbClr val="EA580C"/>
+          </a:solidFill>
+          <a:ln>
+            <a:noFill/>
+          </a:ln>
+        </p:spPr>
+        <p:style>
+          <a:lnRef idx="1">
+            <a:schemeClr val="accent1"/>
+          </a:lnRef>
+          <a:fillRef idx="3">
+            <a:schemeClr val="accent1"/>
+          </a:fillRef>
+          <a:effectRef idx="2">
+            <a:schemeClr val="accent1"/>
+          </a:effectRef>
+          <a:fontRef idx="minor">
+            <a:schemeClr val="lt1"/>
+          </a:fontRef>
+        </p:style>
+        <p:txBody>
+          <a:bodyPr rtlCol="0" anchor="ctr"/>
+          <a:lstStyle/>
+          <a:p>
+            <a:pPr algn="ctr"/>
+          </a:p>
+        </p:txBody>
+      </p:sp>
+      <p:sp>
+        <p:nvSpPr>
+          <p:cNvPr id="52" name="Oval 51"/>
+          <p:cNvSpPr/>
+          <p:nvPr/>
+        </p:nvSpPr>
+        <p:spPr>
+          <a:xfrm>
+            <a:off x="6867144" y="4837176"/>
+            <a:ext cx="310896" cy="310896"/>
+          </a:xfrm>
+          <a:prstGeom prst="ellipse">
+            <a:avLst/>
+          </a:prstGeom>
+          <a:solidFill>
+            <a:srgbClr val="EA580C"/>
+          </a:solidFill>
+          <a:ln w="12700">
+            <a:solidFill>
+              <a:srgbClr val="FFFFFF"/>
+            </a:solidFill>
+          </a:ln>
+        </p:spPr>
+        <p:style>
+          <a:lnRef idx="1">
+            <a:schemeClr val="accent1"/>
+          </a:lnRef>
+          <a:fillRef idx="3">
+            <a:schemeClr val="accent1"/>
+          </a:fillRef>
+          <a:effectRef idx="2">
+            <a:schemeClr val="accent1"/>
+          </a:effectRef>
+          <a:fontRef idx="minor">
+            <a:schemeClr val="lt1"/>
+          </a:fontRef>
+        </p:style>
+        <p:txBody>
+          <a:bodyPr rtlCol="0" anchor="ctr"/>
+          <a:lstStyle/>
+          <a:p>
+            <a:pPr algn="ctr"/>
+            <a:r>
+              <a:rPr b="1" sz="1100">
+                <a:solidFill>
+                  <a:srgbClr val="FFFFFF"/>
+                </a:solidFill>
+              </a:rPr>
+              <a:t>5</a:t>
+            </a:r>
+          </a:p>
+        </p:txBody>
+      </p:sp>
+      <p:sp>
+        <p:nvSpPr>
+          <p:cNvPr id="53" name="TextBox 52"/>
+          <p:cNvSpPr txBox="1"/>
+          <p:nvPr/>
+        </p:nvSpPr>
+        <p:spPr>
+          <a:xfrm>
+            <a:off x="7251192" y="4818888"/>
+            <a:ext cx="1801368" cy="347472"/>
+          </a:xfrm>
+          <a:prstGeom prst="rect">
+            <a:avLst/>
+          </a:prstGeom>
+          <a:noFill/>
+        </p:spPr>
+        <p:txBody>
+          <a:bodyPr wrap="none" lIns="0" rIns="0" tIns="0" bIns="0">
+            <a:spAutoFit/>
+          </a:bodyPr>
+          <a:lstStyle/>
+          <a:p>
+            <a:r>
+              <a:rPr b="1" sz="1100">
+                <a:solidFill>
+                  <a:srgbClr val="0F172A"/>
+                </a:solidFill>
+              </a:rPr>
+              <a:t>Patched 350 Hz Hardware PWM</a:t>
+            </a:r>
+          </a:p>
+        </p:txBody>
+      </p:sp>
+      <p:sp>
+        <p:nvSpPr>
+          <p:cNvPr id="54" name="Rounded Rectangle 53"/>
+          <p:cNvSpPr/>
+          <p:nvPr/>
+        </p:nvSpPr>
+        <p:spPr>
+          <a:xfrm>
+            <a:off x="6867144" y="5212080"/>
+            <a:ext cx="2130552" cy="237744"/>
+          </a:xfrm>
+          <a:prstGeom prst="roundRect">
+            <a:avLst/>
+          </a:prstGeom>
+          <a:solidFill>
+            <a:srgbClr val="F1F5F9"/>
+          </a:solidFill>
+          <a:ln w="6350">
+            <a:solidFill>
+              <a:srgbClr val="E2E8F0"/>
+            </a:solidFill>
+          </a:ln>
+        </p:spPr>
+        <p:style>
+          <a:lnRef idx="1">
+            <a:schemeClr val="accent1"/>
+          </a:lnRef>
+          <a:fillRef idx="3">
+            <a:schemeClr val="accent1"/>
+          </a:fillRef>
+          <a:effectRef idx="2">
+            <a:schemeClr val="accent1"/>
+          </a:effectRef>
+          <a:fontRef idx="minor">
+            <a:schemeClr val="lt1"/>
+          </a:fontRef>
+        </p:style>
+        <p:txBody>
+          <a:bodyPr rtlCol="0" anchor="ctr" lIns="73152"/>
+          <a:lstStyle/>
+          <a:p>
+            <a:pPr algn="ctr"/>
+            <a:r>
+              <a:rPr b="1" sz="850">
+                <a:solidFill>
+                  <a:srgbClr val="334155"/>
+                </a:solidFill>
+              </a:rPr>
+              <a:t>Direct Brushless ESC Synchronization</a:t>
+            </a:r>
+          </a:p>
+        </p:txBody>
+      </p:sp>
+      <p:sp>
+        <p:nvSpPr>
+          <p:cNvPr id="55" name="TextBox 54"/>
+          <p:cNvSpPr txBox="1"/>
+          <p:nvPr/>
+        </p:nvSpPr>
+        <p:spPr>
+          <a:xfrm>
+            <a:off x="6867144" y="5513832"/>
+            <a:ext cx="2130552" cy="795528"/>
+          </a:xfrm>
+          <a:prstGeom prst="rect">
+            <a:avLst/>
+          </a:prstGeom>
+          <a:noFill/>
+        </p:spPr>
+        <p:txBody>
+          <a:bodyPr wrap="square" lIns="0" rIns="0" tIns="0" bIns="0">
+            <a:spAutoFit/>
+          </a:bodyPr>
+          <a:lstStyle/>
+          <a:p>
+            <a:r>
+              <a:rPr sz="950">
+                <a:solidFill>
+                  <a:srgbClr val="334155"/>
+                </a:solidFill>
+              </a:rPr>
+              <a:t>Custom Zephyr kernel patch modifies timer period down to 2.5ms (400 Hz) for lag-free motor response.</a:t>
+            </a:r>
+          </a:p>
+        </p:txBody>
+      </p:sp>
+      <p:sp>
+        <p:nvSpPr>
+          <p:cNvPr id="56" name="Rounded Rectangle 55"/>
+          <p:cNvSpPr/>
+          <p:nvPr/>
+        </p:nvSpPr>
+        <p:spPr>
+          <a:xfrm>
+            <a:off x="9326880" y="4709160"/>
+            <a:ext cx="2423160" cy="1664208"/>
+          </a:xfrm>
+          <a:prstGeom prst="roundRect">
+            <a:avLst/>
+          </a:prstGeom>
+          <a:solidFill>
+            <a:srgbClr val="FFFFFF"/>
+          </a:solidFill>
+          <a:ln w="12700">
+            <a:solidFill>
+              <a:srgbClr val="E2E8F0"/>
+            </a:solidFill>
+          </a:ln>
+          <a:effectLst>
+            <a:outerShdw blurRad="101600" dist="25400" dir="5400000" algn="t" rotWithShape="0">
+              <a:srgbClr val="0F172A">
+                <a:alpha val="10000"/>
+              </a:srgbClr>
+            </a:outerShdw>
+          </a:effectLst>
+        </p:spPr>
+        <p:style>
+          <a:lnRef idx="1">
+            <a:schemeClr val="accent1"/>
+          </a:lnRef>
+          <a:fillRef idx="3">
+            <a:schemeClr val="accent1"/>
+          </a:fillRef>
+          <a:effectRef idx="2">
+            <a:schemeClr val="accent1"/>
+          </a:effectRef>
+          <a:fontRef idx="minor">
+            <a:schemeClr val="lt1"/>
+          </a:fontRef>
+        </p:style>
+        <p:txBody>
+          <a:bodyPr rtlCol="0" anchor="ctr"/>
+          <a:lstStyle/>
+          <a:p>
+            <a:pPr algn="ctr"/>
+          </a:p>
+        </p:txBody>
+      </p:sp>
+      <p:sp>
+        <p:nvSpPr>
+          <p:cNvPr id="57" name="Rounded Rectangle 56"/>
+          <p:cNvSpPr/>
+          <p:nvPr/>
+        </p:nvSpPr>
+        <p:spPr>
+          <a:xfrm>
+            <a:off x="9326880" y="4709160"/>
+            <a:ext cx="73152" cy="1664208"/>
+          </a:xfrm>
+          <a:prstGeom prst="roundRect">
+            <a:avLst/>
+          </a:prstGeom>
+          <a:solidFill>
+            <a:srgbClr val="0284C7"/>
+          </a:solidFill>
+          <a:ln>
+            <a:noFill/>
+          </a:ln>
+        </p:spPr>
+        <p:style>
+          <a:lnRef idx="1">
+            <a:schemeClr val="accent1"/>
+          </a:lnRef>
+          <a:fillRef idx="3">
+            <a:schemeClr val="accent1"/>
+          </a:fillRef>
+          <a:effectRef idx="2">
+            <a:schemeClr val="accent1"/>
+          </a:effectRef>
+          <a:fontRef idx="minor">
+            <a:schemeClr val="lt1"/>
+          </a:fontRef>
+        </p:style>
+        <p:txBody>
+          <a:bodyPr rtlCol="0" anchor="ctr"/>
+          <a:lstStyle/>
+          <a:p>
+            <a:pPr algn="ctr"/>
+          </a:p>
+        </p:txBody>
+      </p:sp>
+      <p:sp>
+        <p:nvSpPr>
+          <p:cNvPr id="58" name="Oval 57"/>
+          <p:cNvSpPr/>
+          <p:nvPr/>
+        </p:nvSpPr>
+        <p:spPr>
+          <a:xfrm>
+            <a:off x="9473184" y="4837176"/>
+            <a:ext cx="310896" cy="310896"/>
+          </a:xfrm>
+          <a:prstGeom prst="ellipse">
+            <a:avLst/>
+          </a:prstGeom>
+          <a:solidFill>
+            <a:srgbClr val="0284C7"/>
+          </a:solidFill>
+          <a:ln w="12700">
+            <a:solidFill>
+              <a:srgbClr val="FFFFFF"/>
+            </a:solidFill>
+          </a:ln>
+        </p:spPr>
+        <p:style>
+          <a:lnRef idx="1">
+            <a:schemeClr val="accent1"/>
+          </a:lnRef>
+          <a:fillRef idx="3">
+            <a:schemeClr val="accent1"/>
+          </a:fillRef>
+          <a:effectRef idx="2">
+            <a:schemeClr val="accent1"/>
+          </a:effectRef>
+          <a:fontRef idx="minor">
+            <a:schemeClr val="lt1"/>
+          </a:fontRef>
+        </p:style>
+        <p:txBody>
+          <a:bodyPr rtlCol="0" anchor="ctr"/>
+          <a:lstStyle/>
+          <a:p>
+            <a:pPr algn="ctr"/>
+            <a:r>
+              <a:rPr b="1" sz="1100">
+                <a:solidFill>
+                  <a:srgbClr val="FFFFFF"/>
+                </a:solidFill>
+              </a:rPr>
+              <a:t>6</a:t>
+            </a:r>
+          </a:p>
+        </p:txBody>
+      </p:sp>
+      <p:sp>
+        <p:nvSpPr>
+          <p:cNvPr id="59" name="TextBox 58"/>
+          <p:cNvSpPr txBox="1"/>
+          <p:nvPr/>
+        </p:nvSpPr>
+        <p:spPr>
+          <a:xfrm>
+            <a:off x="9857232" y="4818888"/>
+            <a:ext cx="1801368" cy="347472"/>
+          </a:xfrm>
+          <a:prstGeom prst="rect">
+            <a:avLst/>
+          </a:prstGeom>
+          <a:noFill/>
+        </p:spPr>
+        <p:txBody>
+          <a:bodyPr wrap="none" lIns="0" rIns="0" tIns="0" bIns="0">
+            <a:spAutoFit/>
+          </a:bodyPr>
+          <a:lstStyle/>
+          <a:p>
+            <a:r>
+              <a:rPr b="1" sz="1100">
+                <a:solidFill>
+                  <a:srgbClr val="0F172A"/>
+                </a:solidFill>
+              </a:rPr>
+              <a:t>Silicone Vibration Dampers</a:t>
+            </a:r>
+          </a:p>
+        </p:txBody>
+      </p:sp>
+      <p:sp>
+        <p:nvSpPr>
+          <p:cNvPr id="60" name="Rounded Rectangle 59"/>
+          <p:cNvSpPr/>
+          <p:nvPr/>
+        </p:nvSpPr>
+        <p:spPr>
+          <a:xfrm>
+            <a:off x="9473184" y="5212080"/>
+            <a:ext cx="2130552" cy="237744"/>
+          </a:xfrm>
+          <a:prstGeom prst="roundRect">
+            <a:avLst/>
+          </a:prstGeom>
+          <a:solidFill>
+            <a:srgbClr val="F1F5F9"/>
+          </a:solidFill>
+          <a:ln w="6350">
+            <a:solidFill>
+              <a:srgbClr val="E2E8F0"/>
+            </a:solidFill>
+          </a:ln>
+        </p:spPr>
+        <p:style>
+          <a:lnRef idx="1">
+            <a:schemeClr val="accent1"/>
+          </a:lnRef>
+          <a:fillRef idx="3">
+            <a:schemeClr val="accent1"/>
+          </a:fillRef>
+          <a:effectRef idx="2">
+            <a:schemeClr val="accent1"/>
+          </a:effectRef>
+          <a:fontRef idx="minor">
+            <a:schemeClr val="lt1"/>
+          </a:fontRef>
+        </p:style>
+        <p:txBody>
+          <a:bodyPr rtlCol="0" anchor="ctr" lIns="73152"/>
+          <a:lstStyle/>
+          <a:p>
+            <a:pPr algn="ctr"/>
+            <a:r>
+              <a:rPr b="1" sz="850">
+                <a:solidFill>
+                  <a:srgbClr val="334155"/>
+                </a:solidFill>
+              </a:rPr>
+              <a:t>IMU Harmonic Mechanical Isolation</a:t>
+            </a:r>
+          </a:p>
+        </p:txBody>
+      </p:sp>
+      <p:sp>
+        <p:nvSpPr>
+          <p:cNvPr id="61" name="TextBox 60"/>
+          <p:cNvSpPr txBox="1"/>
+          <p:nvPr/>
+        </p:nvSpPr>
+        <p:spPr>
+          <a:xfrm>
+            <a:off x="9473184" y="5513832"/>
+            <a:ext cx="2130552" cy="795528"/>
+          </a:xfrm>
+          <a:prstGeom prst="rect">
+            <a:avLst/>
+          </a:prstGeom>
+          <a:noFill/>
+        </p:spPr>
+        <p:txBody>
+          <a:bodyPr wrap="square" lIns="0" rIns="0" tIns="0" bIns="0">
+            <a:spAutoFit/>
+          </a:bodyPr>
+          <a:lstStyle/>
+          <a:p>
+            <a:r>
+              <a:rPr sz="950">
+                <a:solidFill>
+                  <a:srgbClr val="334155"/>
+                </a:solidFill>
+              </a:rPr>
+              <a:t>Four corner silicone dampening balls isolate the onboard MPU6050 gyroscope from high-RPM motor flutter.</a:t>
+            </a:r>
           </a:p>
         </p:txBody>
       </p:sp>
@@ -10415,7 +12661,7 @@
                 </a:solidFill>
                 <a:latin typeface="Calibri"/>
               </a:rPr>
-              <a:t>OPERATIONAL PIPELINE · ZERO-CONNECTIVITY RECONNAISSANCE</a:t>
+              <a:t>MULTI-SPECTRAL OPTICS &amp; GEOLOCATION · SENSOR PAYLOAD</a:t>
             </a:r>
           </a:p>
         </p:txBody>
@@ -10449,7 +12695,7 @@
                 </a:solidFill>
                 <a:latin typeface="Calibri"/>
               </a:rPr>
-              <a:t>End-to-End Autonomous Reconnaissance &amp; Survivor Extraction Flow</a:t>
+              <a:t>Dual-Spectral Optical/Thermal Gimbal &amp; Downward Laser Ray-Caster</a:t>
             </a:r>
           </a:p>
         </p:txBody>
@@ -10503,7 +12749,7 @@
                 </a:solidFill>
                 <a:latin typeface="Calibri"/>
               </a:rPr>
-              <a:t>RAPID SORTIE PIPELINE</a:t>
+              <a:t>RADIOMETRIC GIMBAL</a:t>
             </a:r>
           </a:p>
         </p:txBody>
@@ -10516,8 +12762,8 @@
         </p:nvSpPr>
         <p:spPr>
           <a:xfrm>
-            <a:off x="548640" y="1143000"/>
-            <a:ext cx="2084831" cy="5120640"/>
+            <a:off x="548640" y="1051560"/>
+            <a:ext cx="5943600" cy="5349240"/>
           </a:xfrm>
           <a:prstGeom prst="roundRect">
             <a:avLst/>
@@ -10553,40 +12799,10 @@
           </a:fontRef>
         </p:style>
         <p:txBody>
-          <a:bodyPr rtlCol="0" anchor="t" lIns="182880" rIns="182880" tIns="868680"/>
-          <a:lstStyle/>
-          <a:p>
-            <a:pPr algn="ctr"/>
-            <a:r>
-              <a:rPr b="1" sz="1100">
-                <a:solidFill>
-                  <a:srgbClr val="0F172A"/>
-                </a:solidFill>
-              </a:rPr>
-              <a:t>1. RAPID SORTIE LAUNCH
-</a:t>
-            </a:r>
-          </a:p>
-          <a:p>
-            <a:r>
-              <a:rPr b="1" sz="950">
-                <a:solidFill>
-                  <a:srgbClr val="EA580C"/>
-                </a:solidFill>
-              </a:rPr>
-              <a:t>&lt; 3 Minutes Deployment
-</a:t>
-            </a:r>
-          </a:p>
-          <a:p>
-            <a:r>
-              <a:rPr sz="950">
-                <a:solidFill>
-                  <a:srgbClr val="475569"/>
-                </a:solidFill>
-              </a:rPr>
-              <a:t>Operator outlines 2 km² search polygon on offline tablet. UAV unboxes from rugged backpack and auto-launches.</a:t>
-            </a:r>
+          <a:bodyPr rtlCol="0" anchor="ctr"/>
+          <a:lstStyle/>
+          <a:p>
+            <a:pPr algn="ctr"/>
           </a:p>
         </p:txBody>
       </p:sp>
@@ -10598,8 +12814,8 @@
         </p:nvSpPr>
         <p:spPr>
           <a:xfrm>
-            <a:off x="548640" y="1143000"/>
-            <a:ext cx="2084831" cy="73152"/>
+            <a:off x="731520" y="1216152"/>
+            <a:ext cx="1463040" cy="54864"/>
           </a:xfrm>
           <a:prstGeom prst="roundRect">
             <a:avLst/>
@@ -10635,20 +12851,130 @@
       </p:sp>
       <p:sp>
         <p:nvSpPr>
-          <p:cNvPr id="9" name="Oval 8"/>
-          <p:cNvSpPr/>
-          <p:nvPr/>
-        </p:nvSpPr>
-        <p:spPr>
-          <a:xfrm>
-            <a:off x="731520" y="1371600"/>
-            <a:ext cx="475488" cy="475488"/>
+          <p:cNvPr id="9" name="TextBox 8"/>
+          <p:cNvSpPr txBox="1"/>
+          <p:nvPr/>
+        </p:nvSpPr>
+        <p:spPr>
+          <a:xfrm>
+            <a:off x="731520" y="1325880"/>
+            <a:ext cx="4114800" cy="274320"/>
+          </a:xfrm>
+          <a:prstGeom prst="rect">
+            <a:avLst/>
+          </a:prstGeom>
+          <a:noFill/>
+        </p:spPr>
+        <p:txBody>
+          <a:bodyPr wrap="none" lIns="0" rIns="0" tIns="0" bIns="0">
+            <a:spAutoFit/>
+          </a:bodyPr>
+          <a:lstStyle/>
+          <a:p>
+            <a:r>
+              <a:rPr b="1" sz="1000">
+                <a:solidFill>
+                  <a:srgbClr val="0F172A"/>
+                </a:solidFill>
+              </a:rPr>
+              <a:t>DUAL-SPECTRAL SENSOR PAYLOAD </a:t>
+            </a:r>
+            <a:r>
+              <a:rPr sz="1000">
+                <a:solidFill>
+                  <a:srgbClr val="64748B"/>
+                </a:solidFill>
+              </a:rPr>
+              <a:t>· RAY-CASTING OPTICS</a:t>
+            </a:r>
+          </a:p>
+        </p:txBody>
+      </p:sp>
+      <p:pic>
+        <p:nvPicPr>
+          <p:cNvPr id="10" name="Picture 9" descr="gimbal_sensor_macro_render.jpg"/>
+          <p:cNvPicPr>
+            <a:picLocks noChangeAspect="1"/>
+          </p:cNvPicPr>
+          <p:nvPr/>
+        </p:nvPicPr>
+        <p:blipFill>
+          <a:blip r:embed="rId2"/>
+          <a:stretch>
+            <a:fillRect/>
+          </a:stretch>
+        </p:blipFill>
+        <p:spPr>
+          <a:xfrm>
+            <a:off x="777240" y="1783080"/>
+            <a:ext cx="5486400" cy="3063240"/>
+          </a:xfrm>
+          <a:prstGeom prst="rect">
+            <a:avLst/>
+          </a:prstGeom>
+        </p:spPr>
+      </p:pic>
+      <p:sp>
+        <p:nvSpPr>
+          <p:cNvPr id="11" name="Oval 10"/>
+          <p:cNvSpPr/>
+          <p:nvPr/>
+        </p:nvSpPr>
+        <p:spPr>
+          <a:xfrm>
+            <a:off x="3445459" y="2938927"/>
+            <a:ext cx="402336" cy="402336"/>
           </a:xfrm>
           <a:prstGeom prst="ellipse">
             <a:avLst/>
           </a:prstGeom>
           <a:solidFill>
-            <a:srgbClr val="EA580C"/>
+            <a:srgbClr val="0284C7">
+              <a:alpha val="35000"/>
+            </a:srgbClr>
+          </a:solidFill>
+          <a:ln>
+            <a:noFill/>
+          </a:ln>
+        </p:spPr>
+        <p:style>
+          <a:lnRef idx="1">
+            <a:schemeClr val="accent1"/>
+          </a:lnRef>
+          <a:fillRef idx="3">
+            <a:schemeClr val="accent1"/>
+          </a:fillRef>
+          <a:effectRef idx="2">
+            <a:schemeClr val="accent1"/>
+          </a:effectRef>
+          <a:fontRef idx="minor">
+            <a:schemeClr val="lt1"/>
+          </a:fontRef>
+        </p:style>
+        <p:txBody>
+          <a:bodyPr rtlCol="0" anchor="ctr"/>
+          <a:lstStyle/>
+          <a:p>
+            <a:pPr algn="ctr"/>
+          </a:p>
+        </p:txBody>
+      </p:sp>
+      <p:sp>
+        <p:nvSpPr>
+          <p:cNvPr id="12" name="Oval 11"/>
+          <p:cNvSpPr/>
+          <p:nvPr/>
+        </p:nvSpPr>
+        <p:spPr>
+          <a:xfrm>
+            <a:off x="3500323" y="2993791"/>
+            <a:ext cx="292608" cy="292608"/>
+          </a:xfrm>
+          <a:prstGeom prst="ellipse">
+            <a:avLst/>
+          </a:prstGeom>
+          <a:solidFill>
+            <a:srgbClr val="0284C7"/>
           </a:solidFill>
           <a:ln w="19050">
             <a:solidFill>
@@ -10676,34 +13002,755 @@
           <a:p>
             <a:pPr algn="ctr"/>
             <a:r>
-              <a:rPr b="1" sz="1300">
+              <a:rPr sz="1100" b="1">
                 <a:solidFill>
                   <a:srgbClr val="FFFFFF"/>
                 </a:solidFill>
-              </a:rPr>
-              <a:t>01</a:t>
-            </a:r>
-          </a:p>
-        </p:txBody>
-      </p:sp>
-      <p:sp>
-        <p:nvSpPr>
-          <p:cNvPr id="10" name="Rounded Rectangle 9"/>
-          <p:cNvSpPr/>
-          <p:nvPr/>
-        </p:nvSpPr>
-        <p:spPr>
-          <a:xfrm>
-            <a:off x="2798063" y="1143000"/>
-            <a:ext cx="2084831" cy="5120640"/>
+                <a:latin typeface="Calibri"/>
+              </a:rPr>
+              <a:t>1</a:t>
+            </a:r>
+          </a:p>
+        </p:txBody>
+      </p:sp>
+      <p:sp>
+        <p:nvSpPr>
+          <p:cNvPr id="13" name="Oval 12"/>
+          <p:cNvSpPr/>
+          <p:nvPr/>
+        </p:nvSpPr>
+        <p:spPr>
+          <a:xfrm>
+            <a:off x="4405579" y="2975686"/>
+            <a:ext cx="402336" cy="402336"/>
+          </a:xfrm>
+          <a:prstGeom prst="ellipse">
+            <a:avLst/>
+          </a:prstGeom>
+          <a:solidFill>
+            <a:srgbClr val="EA580C">
+              <a:alpha val="35000"/>
+            </a:srgbClr>
+          </a:solidFill>
+          <a:ln>
+            <a:noFill/>
+          </a:ln>
+        </p:spPr>
+        <p:style>
+          <a:lnRef idx="1">
+            <a:schemeClr val="accent1"/>
+          </a:lnRef>
+          <a:fillRef idx="3">
+            <a:schemeClr val="accent1"/>
+          </a:fillRef>
+          <a:effectRef idx="2">
+            <a:schemeClr val="accent1"/>
+          </a:effectRef>
+          <a:fontRef idx="minor">
+            <a:schemeClr val="lt1"/>
+          </a:fontRef>
+        </p:style>
+        <p:txBody>
+          <a:bodyPr rtlCol="0" anchor="ctr"/>
+          <a:lstStyle/>
+          <a:p>
+            <a:pPr algn="ctr"/>
+          </a:p>
+        </p:txBody>
+      </p:sp>
+      <p:sp>
+        <p:nvSpPr>
+          <p:cNvPr id="14" name="Oval 13"/>
+          <p:cNvSpPr/>
+          <p:nvPr/>
+        </p:nvSpPr>
+        <p:spPr>
+          <a:xfrm>
+            <a:off x="4460443" y="3030550"/>
+            <a:ext cx="292608" cy="292608"/>
+          </a:xfrm>
+          <a:prstGeom prst="ellipse">
+            <a:avLst/>
+          </a:prstGeom>
+          <a:solidFill>
+            <a:srgbClr val="EA580C"/>
+          </a:solidFill>
+          <a:ln w="19050">
+            <a:solidFill>
+              <a:srgbClr val="FFFFFF"/>
+            </a:solidFill>
+          </a:ln>
+        </p:spPr>
+        <p:style>
+          <a:lnRef idx="1">
+            <a:schemeClr val="accent1"/>
+          </a:lnRef>
+          <a:fillRef idx="3">
+            <a:schemeClr val="accent1"/>
+          </a:fillRef>
+          <a:effectRef idx="2">
+            <a:schemeClr val="accent1"/>
+          </a:effectRef>
+          <a:fontRef idx="minor">
+            <a:schemeClr val="lt1"/>
+          </a:fontRef>
+        </p:style>
+        <p:txBody>
+          <a:bodyPr rtlCol="0" anchor="ctr"/>
+          <a:lstStyle/>
+          <a:p>
+            <a:pPr algn="ctr"/>
+            <a:r>
+              <a:rPr sz="1100" b="1">
+                <a:solidFill>
+                  <a:srgbClr val="FFFFFF"/>
+                </a:solidFill>
+                <a:latin typeface="Calibri"/>
+              </a:rPr>
+              <a:t>2</a:t>
+            </a:r>
+          </a:p>
+        </p:txBody>
+      </p:sp>
+      <p:sp>
+        <p:nvSpPr>
+          <p:cNvPr id="15" name="Oval 14"/>
+          <p:cNvSpPr/>
+          <p:nvPr/>
+        </p:nvSpPr>
+        <p:spPr>
+          <a:xfrm>
+            <a:off x="4762195" y="2938927"/>
+            <a:ext cx="402336" cy="402336"/>
+          </a:xfrm>
+          <a:prstGeom prst="ellipse">
+            <a:avLst/>
+          </a:prstGeom>
+          <a:solidFill>
+            <a:srgbClr val="EA580C">
+              <a:alpha val="35000"/>
+            </a:srgbClr>
+          </a:solidFill>
+          <a:ln>
+            <a:noFill/>
+          </a:ln>
+        </p:spPr>
+        <p:style>
+          <a:lnRef idx="1">
+            <a:schemeClr val="accent1"/>
+          </a:lnRef>
+          <a:fillRef idx="3">
+            <a:schemeClr val="accent1"/>
+          </a:fillRef>
+          <a:effectRef idx="2">
+            <a:schemeClr val="accent1"/>
+          </a:effectRef>
+          <a:fontRef idx="minor">
+            <a:schemeClr val="lt1"/>
+          </a:fontRef>
+        </p:style>
+        <p:txBody>
+          <a:bodyPr rtlCol="0" anchor="ctr"/>
+          <a:lstStyle/>
+          <a:p>
+            <a:pPr algn="ctr"/>
+          </a:p>
+        </p:txBody>
+      </p:sp>
+      <p:sp>
+        <p:nvSpPr>
+          <p:cNvPr id="16" name="Oval 15"/>
+          <p:cNvSpPr/>
+          <p:nvPr/>
+        </p:nvSpPr>
+        <p:spPr>
+          <a:xfrm>
+            <a:off x="4817059" y="2993791"/>
+            <a:ext cx="292608" cy="292608"/>
+          </a:xfrm>
+          <a:prstGeom prst="ellipse">
+            <a:avLst/>
+          </a:prstGeom>
+          <a:solidFill>
+            <a:srgbClr val="EA580C"/>
+          </a:solidFill>
+          <a:ln w="19050">
+            <a:solidFill>
+              <a:srgbClr val="FFFFFF"/>
+            </a:solidFill>
+          </a:ln>
+        </p:spPr>
+        <p:style>
+          <a:lnRef idx="1">
+            <a:schemeClr val="accent1"/>
+          </a:lnRef>
+          <a:fillRef idx="3">
+            <a:schemeClr val="accent1"/>
+          </a:fillRef>
+          <a:effectRef idx="2">
+            <a:schemeClr val="accent1"/>
+          </a:effectRef>
+          <a:fontRef idx="minor">
+            <a:schemeClr val="lt1"/>
+          </a:fontRef>
+        </p:style>
+        <p:txBody>
+          <a:bodyPr rtlCol="0" anchor="ctr"/>
+          <a:lstStyle/>
+          <a:p>
+            <a:pPr algn="ctr"/>
+            <a:r>
+              <a:rPr sz="1100" b="1">
+                <a:solidFill>
+                  <a:srgbClr val="FFFFFF"/>
+                </a:solidFill>
+                <a:latin typeface="Calibri"/>
+              </a:rPr>
+              <a:t>3</a:t>
+            </a:r>
+          </a:p>
+        </p:txBody>
+      </p:sp>
+      <p:sp>
+        <p:nvSpPr>
+          <p:cNvPr id="17" name="Oval 16"/>
+          <p:cNvSpPr/>
+          <p:nvPr/>
+        </p:nvSpPr>
+        <p:spPr>
+          <a:xfrm>
+            <a:off x="4043476" y="3735369"/>
+            <a:ext cx="402336" cy="402336"/>
+          </a:xfrm>
+          <a:prstGeom prst="ellipse">
+            <a:avLst/>
+          </a:prstGeom>
+          <a:solidFill>
+            <a:srgbClr val="0D9488">
+              <a:alpha val="35000"/>
+            </a:srgbClr>
+          </a:solidFill>
+          <a:ln>
+            <a:noFill/>
+          </a:ln>
+        </p:spPr>
+        <p:style>
+          <a:lnRef idx="1">
+            <a:schemeClr val="accent1"/>
+          </a:lnRef>
+          <a:fillRef idx="3">
+            <a:schemeClr val="accent1"/>
+          </a:fillRef>
+          <a:effectRef idx="2">
+            <a:schemeClr val="accent1"/>
+          </a:effectRef>
+          <a:fontRef idx="minor">
+            <a:schemeClr val="lt1"/>
+          </a:fontRef>
+        </p:style>
+        <p:txBody>
+          <a:bodyPr rtlCol="0" anchor="ctr"/>
+          <a:lstStyle/>
+          <a:p>
+            <a:pPr algn="ctr"/>
+          </a:p>
+        </p:txBody>
+      </p:sp>
+      <p:sp>
+        <p:nvSpPr>
+          <p:cNvPr id="18" name="Oval 17"/>
+          <p:cNvSpPr/>
+          <p:nvPr/>
+        </p:nvSpPr>
+        <p:spPr>
+          <a:xfrm>
+            <a:off x="4098340" y="3790233"/>
+            <a:ext cx="292608" cy="292608"/>
+          </a:xfrm>
+          <a:prstGeom prst="ellipse">
+            <a:avLst/>
+          </a:prstGeom>
+          <a:solidFill>
+            <a:srgbClr val="0D9488"/>
+          </a:solidFill>
+          <a:ln w="19050">
+            <a:solidFill>
+              <a:srgbClr val="FFFFFF"/>
+            </a:solidFill>
+          </a:ln>
+        </p:spPr>
+        <p:style>
+          <a:lnRef idx="1">
+            <a:schemeClr val="accent1"/>
+          </a:lnRef>
+          <a:fillRef idx="3">
+            <a:schemeClr val="accent1"/>
+          </a:fillRef>
+          <a:effectRef idx="2">
+            <a:schemeClr val="accent1"/>
+          </a:effectRef>
+          <a:fontRef idx="minor">
+            <a:schemeClr val="lt1"/>
+          </a:fontRef>
+        </p:style>
+        <p:txBody>
+          <a:bodyPr rtlCol="0" anchor="ctr"/>
+          <a:lstStyle/>
+          <a:p>
+            <a:pPr algn="ctr"/>
+            <a:r>
+              <a:rPr sz="1100" b="1">
+                <a:solidFill>
+                  <a:srgbClr val="FFFFFF"/>
+                </a:solidFill>
+                <a:latin typeface="Calibri"/>
+              </a:rPr>
+              <a:t>4</a:t>
+            </a:r>
+          </a:p>
+        </p:txBody>
+      </p:sp>
+      <p:sp>
+        <p:nvSpPr>
+          <p:cNvPr id="19" name="Oval 18"/>
+          <p:cNvSpPr/>
+          <p:nvPr/>
+        </p:nvSpPr>
+        <p:spPr>
+          <a:xfrm>
+            <a:off x="2688336" y="2859283"/>
+            <a:ext cx="402336" cy="402336"/>
+          </a:xfrm>
+          <a:prstGeom prst="ellipse">
+            <a:avLst/>
+          </a:prstGeom>
+          <a:solidFill>
+            <a:srgbClr val="7C3AED">
+              <a:alpha val="35000"/>
+            </a:srgbClr>
+          </a:solidFill>
+          <a:ln>
+            <a:noFill/>
+          </a:ln>
+        </p:spPr>
+        <p:style>
+          <a:lnRef idx="1">
+            <a:schemeClr val="accent1"/>
+          </a:lnRef>
+          <a:fillRef idx="3">
+            <a:schemeClr val="accent1"/>
+          </a:fillRef>
+          <a:effectRef idx="2">
+            <a:schemeClr val="accent1"/>
+          </a:effectRef>
+          <a:fontRef idx="minor">
+            <a:schemeClr val="lt1"/>
+          </a:fontRef>
+        </p:style>
+        <p:txBody>
+          <a:bodyPr rtlCol="0" anchor="ctr"/>
+          <a:lstStyle/>
+          <a:p>
+            <a:pPr algn="ctr"/>
+          </a:p>
+        </p:txBody>
+      </p:sp>
+      <p:sp>
+        <p:nvSpPr>
+          <p:cNvPr id="20" name="Oval 19"/>
+          <p:cNvSpPr/>
+          <p:nvPr/>
+        </p:nvSpPr>
+        <p:spPr>
+          <a:xfrm>
+            <a:off x="2743200" y="2914147"/>
+            <a:ext cx="292608" cy="292608"/>
+          </a:xfrm>
+          <a:prstGeom prst="ellipse">
+            <a:avLst/>
+          </a:prstGeom>
+          <a:solidFill>
+            <a:srgbClr val="7C3AED"/>
+          </a:solidFill>
+          <a:ln w="19050">
+            <a:solidFill>
+              <a:srgbClr val="FFFFFF"/>
+            </a:solidFill>
+          </a:ln>
+        </p:spPr>
+        <p:style>
+          <a:lnRef idx="1">
+            <a:schemeClr val="accent1"/>
+          </a:lnRef>
+          <a:fillRef idx="3">
+            <a:schemeClr val="accent1"/>
+          </a:fillRef>
+          <a:effectRef idx="2">
+            <a:schemeClr val="accent1"/>
+          </a:effectRef>
+          <a:fontRef idx="minor">
+            <a:schemeClr val="lt1"/>
+          </a:fontRef>
+        </p:style>
+        <p:txBody>
+          <a:bodyPr rtlCol="0" anchor="ctr"/>
+          <a:lstStyle/>
+          <a:p>
+            <a:pPr algn="ctr"/>
+            <a:r>
+              <a:rPr sz="1100" b="1">
+                <a:solidFill>
+                  <a:srgbClr val="FFFFFF"/>
+                </a:solidFill>
+                <a:latin typeface="Calibri"/>
+              </a:rPr>
+              <a:t>5</a:t>
+            </a:r>
+          </a:p>
+        </p:txBody>
+      </p:sp>
+      <p:sp>
+        <p:nvSpPr>
+          <p:cNvPr id="21" name="Oval 20"/>
+          <p:cNvSpPr/>
+          <p:nvPr/>
+        </p:nvSpPr>
+        <p:spPr>
+          <a:xfrm>
+            <a:off x="2929737" y="1741200"/>
+            <a:ext cx="402336" cy="402336"/>
+          </a:xfrm>
+          <a:prstGeom prst="ellipse">
+            <a:avLst/>
+          </a:prstGeom>
+          <a:solidFill>
+            <a:srgbClr val="0284C7">
+              <a:alpha val="35000"/>
+            </a:srgbClr>
+          </a:solidFill>
+          <a:ln>
+            <a:noFill/>
+          </a:ln>
+        </p:spPr>
+        <p:style>
+          <a:lnRef idx="1">
+            <a:schemeClr val="accent1"/>
+          </a:lnRef>
+          <a:fillRef idx="3">
+            <a:schemeClr val="accent1"/>
+          </a:fillRef>
+          <a:effectRef idx="2">
+            <a:schemeClr val="accent1"/>
+          </a:effectRef>
+          <a:fontRef idx="minor">
+            <a:schemeClr val="lt1"/>
+          </a:fontRef>
+        </p:style>
+        <p:txBody>
+          <a:bodyPr rtlCol="0" anchor="ctr"/>
+          <a:lstStyle/>
+          <a:p>
+            <a:pPr algn="ctr"/>
+          </a:p>
+        </p:txBody>
+      </p:sp>
+      <p:sp>
+        <p:nvSpPr>
+          <p:cNvPr id="22" name="Oval 21"/>
+          <p:cNvSpPr/>
+          <p:nvPr/>
+        </p:nvSpPr>
+        <p:spPr>
+          <a:xfrm>
+            <a:off x="2984601" y="1796064"/>
+            <a:ext cx="292608" cy="292608"/>
+          </a:xfrm>
+          <a:prstGeom prst="ellipse">
+            <a:avLst/>
+          </a:prstGeom>
+          <a:solidFill>
+            <a:srgbClr val="0284C7"/>
+          </a:solidFill>
+          <a:ln w="19050">
+            <a:solidFill>
+              <a:srgbClr val="FFFFFF"/>
+            </a:solidFill>
+          </a:ln>
+        </p:spPr>
+        <p:style>
+          <a:lnRef idx="1">
+            <a:schemeClr val="accent1"/>
+          </a:lnRef>
+          <a:fillRef idx="3">
+            <a:schemeClr val="accent1"/>
+          </a:fillRef>
+          <a:effectRef idx="2">
+            <a:schemeClr val="accent1"/>
+          </a:effectRef>
+          <a:fontRef idx="minor">
+            <a:schemeClr val="lt1"/>
+          </a:fontRef>
+        </p:style>
+        <p:txBody>
+          <a:bodyPr rtlCol="0" anchor="ctr"/>
+          <a:lstStyle/>
+          <a:p>
+            <a:pPr algn="ctr"/>
+            <a:r>
+              <a:rPr sz="1100" b="1">
+                <a:solidFill>
+                  <a:srgbClr val="FFFFFF"/>
+                </a:solidFill>
+                <a:latin typeface="Calibri"/>
+              </a:rPr>
+              <a:t>6</a:t>
+            </a:r>
+          </a:p>
+        </p:txBody>
+      </p:sp>
+      <p:sp>
+        <p:nvSpPr>
+          <p:cNvPr id="23" name="Rounded Rectangle 22"/>
+          <p:cNvSpPr/>
+          <p:nvPr/>
+        </p:nvSpPr>
+        <p:spPr>
+          <a:xfrm>
+            <a:off x="749808" y="5029199"/>
+            <a:ext cx="1737360" cy="1143000"/>
           </a:xfrm>
           <a:prstGeom prst="roundRect">
             <a:avLst/>
           </a:prstGeom>
           <a:solidFill>
+            <a:srgbClr val="FFF7ED"/>
+          </a:solidFill>
+          <a:ln w="9525">
+            <a:solidFill>
+              <a:srgbClr val="E2E8F0"/>
+            </a:solidFill>
+          </a:ln>
+        </p:spPr>
+        <p:style>
+          <a:lnRef idx="1">
+            <a:schemeClr val="accent1"/>
+          </a:lnRef>
+          <a:fillRef idx="3">
+            <a:schemeClr val="accent1"/>
+          </a:fillRef>
+          <a:effectRef idx="2">
+            <a:schemeClr val="accent1"/>
+          </a:effectRef>
+          <a:fontRef idx="minor">
+            <a:schemeClr val="lt1"/>
+          </a:fontRef>
+        </p:style>
+        <p:txBody>
+          <a:bodyPr rtlCol="0" anchor="t" lIns="109728" rIns="109728" tIns="109728"/>
+          <a:lstStyle/>
+          <a:p>
+            <a:pPr algn="ctr"/>
+            <a:r>
+              <a:rPr sz="850" b="1">
+                <a:solidFill>
+                  <a:srgbClr val="64748B"/>
+                </a:solidFill>
+              </a:rPr>
+              <a:t>THERMAL SENSITIVITY
+</a:t>
+            </a:r>
+          </a:p>
+          <a:p>
+            <a:r>
+              <a:rPr sz="1300" b="1">
+                <a:solidFill>
+                  <a:srgbClr val="EA580C"/>
+                </a:solidFill>
+              </a:rPr>
+              <a:t>NETD &lt; 50 mK
+</a:t>
+            </a:r>
+          </a:p>
+          <a:p>
+            <a:r>
+              <a:rPr sz="850">
+                <a:solidFill>
+                  <a:srgbClr val="334155"/>
+                </a:solidFill>
+              </a:rPr>
+              <a:t>8–14μm Uncooled Sensor</a:t>
+            </a:r>
+          </a:p>
+        </p:txBody>
+      </p:sp>
+      <p:sp>
+        <p:nvSpPr>
+          <p:cNvPr id="24" name="Rounded Rectangle 23"/>
+          <p:cNvSpPr/>
+          <p:nvPr/>
+        </p:nvSpPr>
+        <p:spPr>
+          <a:xfrm>
+            <a:off x="2615184" y="5029199"/>
+            <a:ext cx="1737360" cy="1143000"/>
+          </a:xfrm>
+          <a:prstGeom prst="roundRect">
+            <a:avLst/>
+          </a:prstGeom>
+          <a:solidFill>
+            <a:srgbClr val="F0FDFA"/>
+          </a:solidFill>
+          <a:ln w="9525">
+            <a:solidFill>
+              <a:srgbClr val="E2E8F0"/>
+            </a:solidFill>
+          </a:ln>
+        </p:spPr>
+        <p:style>
+          <a:lnRef idx="1">
+            <a:schemeClr val="accent1"/>
+          </a:lnRef>
+          <a:fillRef idx="3">
+            <a:schemeClr val="accent1"/>
+          </a:fillRef>
+          <a:effectRef idx="2">
+            <a:schemeClr val="accent1"/>
+          </a:effectRef>
+          <a:fontRef idx="minor">
+            <a:schemeClr val="lt1"/>
+          </a:fontRef>
+        </p:style>
+        <p:txBody>
+          <a:bodyPr rtlCol="0" anchor="t" lIns="109728" rIns="109728" tIns="109728"/>
+          <a:lstStyle/>
+          <a:p>
+            <a:pPr algn="ctr"/>
+            <a:r>
+              <a:rPr sz="850" b="1">
+                <a:solidFill>
+                  <a:srgbClr val="64748B"/>
+                </a:solidFill>
+              </a:rPr>
+              <a:t>BIOLOGICAL GATE
+</a:t>
+            </a:r>
+          </a:p>
+          <a:p>
+            <a:r>
+              <a:rPr sz="1300" b="1">
+                <a:solidFill>
+                  <a:srgbClr val="0D9488"/>
+                </a:solidFill>
+              </a:rPr>
+              <a:t>36.5°C – 37.5°C
+</a:t>
+            </a:r>
+          </a:p>
+          <a:p>
+            <a:r>
+              <a:rPr sz="850">
+                <a:solidFill>
+                  <a:srgbClr val="334155"/>
+                </a:solidFill>
+              </a:rPr>
+              <a:t>Rejects Solar False Heat</a:t>
+            </a:r>
+          </a:p>
+        </p:txBody>
+      </p:sp>
+      <p:sp>
+        <p:nvSpPr>
+          <p:cNvPr id="25" name="Rounded Rectangle 24"/>
+          <p:cNvSpPr/>
+          <p:nvPr/>
+        </p:nvSpPr>
+        <p:spPr>
+          <a:xfrm>
+            <a:off x="4480560" y="5029199"/>
+            <a:ext cx="1737360" cy="1143000"/>
+          </a:xfrm>
+          <a:prstGeom prst="roundRect">
+            <a:avLst/>
+          </a:prstGeom>
+          <a:solidFill>
+            <a:srgbClr val="F0F9FF"/>
+          </a:solidFill>
+          <a:ln w="9525">
+            <a:solidFill>
+              <a:srgbClr val="E2E8F0"/>
+            </a:solidFill>
+          </a:ln>
+        </p:spPr>
+        <p:style>
+          <a:lnRef idx="1">
+            <a:schemeClr val="accent1"/>
+          </a:lnRef>
+          <a:fillRef idx="3">
+            <a:schemeClr val="accent1"/>
+          </a:fillRef>
+          <a:effectRef idx="2">
+            <a:schemeClr val="accent1"/>
+          </a:effectRef>
+          <a:fontRef idx="minor">
+            <a:schemeClr val="lt1"/>
+          </a:fontRef>
+        </p:style>
+        <p:txBody>
+          <a:bodyPr rtlCol="0" anchor="t" lIns="109728" rIns="109728" tIns="109728"/>
+          <a:lstStyle/>
+          <a:p>
+            <a:pPr algn="ctr"/>
+            <a:r>
+              <a:rPr sz="850" b="1">
+                <a:solidFill>
+                  <a:srgbClr val="64748B"/>
+                </a:solidFill>
+              </a:rPr>
+              <a:t>GEODETIC ACCURACY
+</a:t>
+            </a:r>
+          </a:p>
+          <a:p>
+            <a:r>
+              <a:rPr sz="1300" b="1">
+                <a:solidFill>
+                  <a:srgbClr val="0284C7"/>
+                </a:solidFill>
+              </a:rPr>
+              <a:t>±2.1m SEP
+</a:t>
+            </a:r>
+          </a:p>
+          <a:p>
+            <a:r>
+              <a:rPr sz="850">
+                <a:solidFill>
+                  <a:srgbClr val="334155"/>
+                </a:solidFill>
+              </a:rPr>
+              <a:t>WGS-84 Coordinate Output</a:t>
+            </a:r>
+          </a:p>
+        </p:txBody>
+      </p:sp>
+      <p:sp>
+        <p:nvSpPr>
+          <p:cNvPr id="26" name="Rounded Rectangle 25"/>
+          <p:cNvSpPr/>
+          <p:nvPr/>
+        </p:nvSpPr>
+        <p:spPr>
+          <a:xfrm>
+            <a:off x="6720840" y="1051560"/>
+            <a:ext cx="2423160" cy="1664208"/>
+          </a:xfrm>
+          <a:prstGeom prst="roundRect">
+            <a:avLst/>
+          </a:prstGeom>
+          <a:solidFill>
             <a:srgbClr val="FFFFFF"/>
           </a:solidFill>
-          <a:ln w="15240">
+          <a:ln w="12700">
             <a:solidFill>
               <a:srgbClr val="E2E8F0"/>
             </a:solidFill>
@@ -10731,53 +13778,23 @@
           </a:fontRef>
         </p:style>
         <p:txBody>
-          <a:bodyPr rtlCol="0" anchor="t" lIns="182880" rIns="182880" tIns="868680"/>
-          <a:lstStyle/>
-          <a:p>
-            <a:pPr algn="ctr"/>
-            <a:r>
-              <a:rPr b="1" sz="1100">
-                <a:solidFill>
-                  <a:srgbClr val="0F172A"/>
-                </a:solidFill>
-              </a:rPr>
-              <a:t>2. BOUSTROPHEDON SWEEP
-</a:t>
-            </a:r>
-          </a:p>
-          <a:p>
-            <a:r>
-              <a:rPr b="1" sz="950">
-                <a:solidFill>
-                  <a:srgbClr val="0284C7"/>
-                </a:solidFill>
-              </a:rPr>
-              <a:t>STM32U5 @ 250 Hz Loop
-</a:t>
-            </a:r>
-          </a:p>
-          <a:p>
-            <a:r>
-              <a:rPr sz="950">
-                <a:solidFill>
-                  <a:srgbClr val="475569"/>
-                </a:solidFill>
-              </a:rPr>
-              <a:t>Autonomous lawnmower search trajectory at 25-30m AGL. 1D ToF laser altimeter maintains terrain contour following.</a:t>
-            </a:r>
-          </a:p>
-        </p:txBody>
-      </p:sp>
-      <p:sp>
-        <p:nvSpPr>
-          <p:cNvPr id="11" name="Rounded Rectangle 10"/>
-          <p:cNvSpPr/>
-          <p:nvPr/>
-        </p:nvSpPr>
-        <p:spPr>
-          <a:xfrm>
-            <a:off x="2798063" y="1143000"/>
-            <a:ext cx="2084831" cy="73152"/>
+          <a:bodyPr rtlCol="0" anchor="ctr"/>
+          <a:lstStyle/>
+          <a:p>
+            <a:pPr algn="ctr"/>
+          </a:p>
+        </p:txBody>
+      </p:sp>
+      <p:sp>
+        <p:nvSpPr>
+          <p:cNvPr id="27" name="Rounded Rectangle 26"/>
+          <p:cNvSpPr/>
+          <p:nvPr/>
+        </p:nvSpPr>
+        <p:spPr>
+          <a:xfrm>
+            <a:off x="6720840" y="1051560"/>
+            <a:ext cx="73152" cy="1664208"/>
           </a:xfrm>
           <a:prstGeom prst="roundRect">
             <a:avLst/>
@@ -10813,14 +13830,14 @@
       </p:sp>
       <p:sp>
         <p:nvSpPr>
-          <p:cNvPr id="12" name="Oval 11"/>
-          <p:cNvSpPr/>
-          <p:nvPr/>
-        </p:nvSpPr>
-        <p:spPr>
-          <a:xfrm>
-            <a:off x="2980943" y="1371600"/>
-            <a:ext cx="475488" cy="475488"/>
+          <p:cNvPr id="28" name="Oval 27"/>
+          <p:cNvSpPr/>
+          <p:nvPr/>
+        </p:nvSpPr>
+        <p:spPr>
+          <a:xfrm>
+            <a:off x="6867144" y="1179576"/>
+            <a:ext cx="310896" cy="310896"/>
           </a:xfrm>
           <a:prstGeom prst="ellipse">
             <a:avLst/>
@@ -10828,7 +13845,7 @@
           <a:solidFill>
             <a:srgbClr val="0284C7"/>
           </a:solidFill>
-          <a:ln w="19050">
+          <a:ln w="12700">
             <a:solidFill>
               <a:srgbClr val="FFFFFF"/>
             </a:solidFill>
@@ -10854,34 +13871,153 @@
           <a:p>
             <a:pPr algn="ctr"/>
             <a:r>
-              <a:rPr b="1" sz="1300">
+              <a:rPr b="1" sz="1100">
                 <a:solidFill>
                   <a:srgbClr val="FFFFFF"/>
                 </a:solidFill>
               </a:rPr>
-              <a:t>02</a:t>
-            </a:r>
-          </a:p>
-        </p:txBody>
-      </p:sp>
-      <p:sp>
-        <p:nvSpPr>
-          <p:cNvPr id="13" name="Rounded Rectangle 12"/>
-          <p:cNvSpPr/>
-          <p:nvPr/>
-        </p:nvSpPr>
-        <p:spPr>
-          <a:xfrm>
-            <a:off x="5047486" y="1143000"/>
-            <a:ext cx="2084831" cy="5120640"/>
+              <a:t>1</a:t>
+            </a:r>
+          </a:p>
+        </p:txBody>
+      </p:sp>
+      <p:sp>
+        <p:nvSpPr>
+          <p:cNvPr id="29" name="TextBox 28"/>
+          <p:cNvSpPr txBox="1"/>
+          <p:nvPr/>
+        </p:nvSpPr>
+        <p:spPr>
+          <a:xfrm>
+            <a:off x="7251192" y="1161288"/>
+            <a:ext cx="1801368" cy="347472"/>
+          </a:xfrm>
+          <a:prstGeom prst="rect">
+            <a:avLst/>
+          </a:prstGeom>
+          <a:noFill/>
+        </p:spPr>
+        <p:txBody>
+          <a:bodyPr wrap="none" lIns="0" rIns="0" tIns="0" bIns="0">
+            <a:spAutoFit/>
+          </a:bodyPr>
+          <a:lstStyle/>
+          <a:p>
+            <a:r>
+              <a:rPr b="1" sz="1100">
+                <a:solidFill>
+                  <a:srgbClr val="0F172A"/>
+                </a:solidFill>
+              </a:rPr>
+              <a:t>Daylight Optical 1080p Sensor</a:t>
+            </a:r>
+          </a:p>
+        </p:txBody>
+      </p:sp>
+      <p:sp>
+        <p:nvSpPr>
+          <p:cNvPr id="30" name="Rounded Rectangle 29"/>
+          <p:cNvSpPr/>
+          <p:nvPr/>
+        </p:nvSpPr>
+        <p:spPr>
+          <a:xfrm>
+            <a:off x="6867144" y="1554480"/>
+            <a:ext cx="2130552" cy="237744"/>
           </a:xfrm>
           <a:prstGeom prst="roundRect">
             <a:avLst/>
           </a:prstGeom>
           <a:solidFill>
+            <a:srgbClr val="F1F5F9"/>
+          </a:solidFill>
+          <a:ln w="6350">
+            <a:solidFill>
+              <a:srgbClr val="E2E8F0"/>
+            </a:solidFill>
+          </a:ln>
+        </p:spPr>
+        <p:style>
+          <a:lnRef idx="1">
+            <a:schemeClr val="accent1"/>
+          </a:lnRef>
+          <a:fillRef idx="3">
+            <a:schemeClr val="accent1"/>
+          </a:fillRef>
+          <a:effectRef idx="2">
+            <a:schemeClr val="accent1"/>
+          </a:effectRef>
+          <a:fontRef idx="minor">
+            <a:schemeClr val="lt1"/>
+          </a:fontRef>
+        </p:style>
+        <p:txBody>
+          <a:bodyPr rtlCol="0" anchor="ctr" lIns="73152"/>
+          <a:lstStyle/>
+          <a:p>
+            <a:pPr algn="ctr"/>
+            <a:r>
+              <a:rPr b="1" sz="850">
+                <a:solidFill>
+                  <a:srgbClr val="334155"/>
+                </a:solidFill>
+              </a:rPr>
+              <a:t>UVC Distortion-Free 120° FOV Lens</a:t>
+            </a:r>
+          </a:p>
+        </p:txBody>
+      </p:sp>
+      <p:sp>
+        <p:nvSpPr>
+          <p:cNvPr id="31" name="TextBox 30"/>
+          <p:cNvSpPr txBox="1"/>
+          <p:nvPr/>
+        </p:nvSpPr>
+        <p:spPr>
+          <a:xfrm>
+            <a:off x="6867144" y="1856232"/>
+            <a:ext cx="2130552" cy="795528"/>
+          </a:xfrm>
+          <a:prstGeom prst="rect">
+            <a:avLst/>
+          </a:prstGeom>
+          <a:noFill/>
+        </p:spPr>
+        <p:txBody>
+          <a:bodyPr wrap="square" lIns="0" rIns="0" tIns="0" bIns="0">
+            <a:spAutoFit/>
+          </a:bodyPr>
+          <a:lstStyle/>
+          <a:p>
+            <a:r>
+              <a:rPr sz="950">
+                <a:solidFill>
+                  <a:srgbClr val="334155"/>
+                </a:solidFill>
+              </a:rPr>
+              <a:t>Captures high-resolution structural edge contours, survivor clothing colors, and physical hazard perimeters.</a:t>
+            </a:r>
+          </a:p>
+        </p:txBody>
+      </p:sp>
+      <p:sp>
+        <p:nvSpPr>
+          <p:cNvPr id="32" name="Rounded Rectangle 31"/>
+          <p:cNvSpPr/>
+          <p:nvPr/>
+        </p:nvSpPr>
+        <p:spPr>
+          <a:xfrm>
+            <a:off x="9326880" y="1051560"/>
+            <a:ext cx="2423160" cy="1664208"/>
+          </a:xfrm>
+          <a:prstGeom prst="roundRect">
+            <a:avLst/>
+          </a:prstGeom>
+          <a:solidFill>
             <a:srgbClr val="FFFFFF"/>
           </a:solidFill>
-          <a:ln w="15240">
+          <a:ln w="12700">
             <a:solidFill>
               <a:srgbClr val="E2E8F0"/>
             </a:solidFill>
@@ -10909,59 +14045,29 @@
           </a:fontRef>
         </p:style>
         <p:txBody>
-          <a:bodyPr rtlCol="0" anchor="t" lIns="182880" rIns="182880" tIns="868680"/>
-          <a:lstStyle/>
-          <a:p>
-            <a:pPr algn="ctr"/>
-            <a:r>
-              <a:rPr b="1" sz="1100">
-                <a:solidFill>
-                  <a:srgbClr val="0F172A"/>
-                </a:solidFill>
-              </a:rPr>
-              <a:t>3. 37°C THERMAL LOCK
-</a:t>
-            </a:r>
-          </a:p>
-          <a:p>
-            <a:r>
-              <a:rPr b="1" sz="950">
-                <a:solidFill>
-                  <a:srgbClr val="7C3AED"/>
-                </a:solidFill>
-              </a:rPr>
-              <a:t>Qualcomm NPU (&lt; 5W)
-</a:t>
-            </a:r>
-          </a:p>
-          <a:p>
-            <a:r>
-              <a:rPr sz="950">
-                <a:solidFill>
-                  <a:srgbClr val="475569"/>
-                </a:solidFill>
-              </a:rPr>
-              <a:t>Quantized INT8 YOLO model fuses daylight contours with radiometric 8-14μm body heat, spotting trapped survivors.</a:t>
-            </a:r>
-          </a:p>
-        </p:txBody>
-      </p:sp>
-      <p:sp>
-        <p:nvSpPr>
-          <p:cNvPr id="14" name="Rounded Rectangle 13"/>
-          <p:cNvSpPr/>
-          <p:nvPr/>
-        </p:nvSpPr>
-        <p:spPr>
-          <a:xfrm>
-            <a:off x="5047486" y="1143000"/>
-            <a:ext cx="2084831" cy="73152"/>
+          <a:bodyPr rtlCol="0" anchor="ctr"/>
+          <a:lstStyle/>
+          <a:p>
+            <a:pPr algn="ctr"/>
+          </a:p>
+        </p:txBody>
+      </p:sp>
+      <p:sp>
+        <p:nvSpPr>
+          <p:cNvPr id="33" name="Rounded Rectangle 32"/>
+          <p:cNvSpPr/>
+          <p:nvPr/>
+        </p:nvSpPr>
+        <p:spPr>
+          <a:xfrm>
+            <a:off x="9326880" y="1051560"/>
+            <a:ext cx="73152" cy="1664208"/>
           </a:xfrm>
           <a:prstGeom prst="roundRect">
             <a:avLst/>
           </a:prstGeom>
           <a:solidFill>
-            <a:srgbClr val="7C3AED"/>
+            <a:srgbClr val="EA580C"/>
           </a:solidFill>
           <a:ln>
             <a:noFill/>
@@ -10991,22 +14097,22 @@
       </p:sp>
       <p:sp>
         <p:nvSpPr>
-          <p:cNvPr id="15" name="Oval 14"/>
-          <p:cNvSpPr/>
-          <p:nvPr/>
-        </p:nvSpPr>
-        <p:spPr>
-          <a:xfrm>
-            <a:off x="5230366" y="1371600"/>
-            <a:ext cx="475488" cy="475488"/>
+          <p:cNvPr id="34" name="Oval 33"/>
+          <p:cNvSpPr/>
+          <p:nvPr/>
+        </p:nvSpPr>
+        <p:spPr>
+          <a:xfrm>
+            <a:off x="9473184" y="1179576"/>
+            <a:ext cx="310896" cy="310896"/>
           </a:xfrm>
           <a:prstGeom prst="ellipse">
             <a:avLst/>
           </a:prstGeom>
           <a:solidFill>
-            <a:srgbClr val="7C3AED"/>
-          </a:solidFill>
-          <a:ln w="19050">
+            <a:srgbClr val="EA580C"/>
+          </a:solidFill>
+          <a:ln w="12700">
             <a:solidFill>
               <a:srgbClr val="FFFFFF"/>
             </a:solidFill>
@@ -11032,34 +14138,153 @@
           <a:p>
             <a:pPr algn="ctr"/>
             <a:r>
-              <a:rPr b="1" sz="1300">
+              <a:rPr b="1" sz="1100">
                 <a:solidFill>
                   <a:srgbClr val="FFFFFF"/>
                 </a:solidFill>
               </a:rPr>
-              <a:t>03</a:t>
-            </a:r>
-          </a:p>
-        </p:txBody>
-      </p:sp>
-      <p:sp>
-        <p:nvSpPr>
-          <p:cNvPr id="16" name="Rounded Rectangle 15"/>
-          <p:cNvSpPr/>
-          <p:nvPr/>
-        </p:nvSpPr>
-        <p:spPr>
-          <a:xfrm>
-            <a:off x="7296909" y="1143000"/>
-            <a:ext cx="2084831" cy="5120640"/>
+              <a:t>2</a:t>
+            </a:r>
+          </a:p>
+        </p:txBody>
+      </p:sp>
+      <p:sp>
+        <p:nvSpPr>
+          <p:cNvPr id="35" name="TextBox 34"/>
+          <p:cNvSpPr txBox="1"/>
+          <p:nvPr/>
+        </p:nvSpPr>
+        <p:spPr>
+          <a:xfrm>
+            <a:off x="9857232" y="1161288"/>
+            <a:ext cx="1801368" cy="347472"/>
+          </a:xfrm>
+          <a:prstGeom prst="rect">
+            <a:avLst/>
+          </a:prstGeom>
+          <a:noFill/>
+        </p:spPr>
+        <p:txBody>
+          <a:bodyPr wrap="none" lIns="0" rIns="0" tIns="0" bIns="0">
+            <a:spAutoFit/>
+          </a:bodyPr>
+          <a:lstStyle/>
+          <a:p>
+            <a:r>
+              <a:rPr b="1" sz="1100">
+                <a:solidFill>
+                  <a:srgbClr val="0F172A"/>
+                </a:solidFill>
+              </a:rPr>
+              <a:t>Radiometric LWIR Sensor</a:t>
+            </a:r>
+          </a:p>
+        </p:txBody>
+      </p:sp>
+      <p:sp>
+        <p:nvSpPr>
+          <p:cNvPr id="36" name="Rounded Rectangle 35"/>
+          <p:cNvSpPr/>
+          <p:nvPr/>
+        </p:nvSpPr>
+        <p:spPr>
+          <a:xfrm>
+            <a:off x="9473184" y="1554480"/>
+            <a:ext cx="2130552" cy="237744"/>
           </a:xfrm>
           <a:prstGeom prst="roundRect">
             <a:avLst/>
           </a:prstGeom>
           <a:solidFill>
+            <a:srgbClr val="F1F5F9"/>
+          </a:solidFill>
+          <a:ln w="6350">
+            <a:solidFill>
+              <a:srgbClr val="E2E8F0"/>
+            </a:solidFill>
+          </a:ln>
+        </p:spPr>
+        <p:style>
+          <a:lnRef idx="1">
+            <a:schemeClr val="accent1"/>
+          </a:lnRef>
+          <a:fillRef idx="3">
+            <a:schemeClr val="accent1"/>
+          </a:fillRef>
+          <a:effectRef idx="2">
+            <a:schemeClr val="accent1"/>
+          </a:effectRef>
+          <a:fontRef idx="minor">
+            <a:schemeClr val="lt1"/>
+          </a:fontRef>
+        </p:style>
+        <p:txBody>
+          <a:bodyPr rtlCol="0" anchor="ctr" lIns="73152"/>
+          <a:lstStyle/>
+          <a:p>
+            <a:pPr algn="ctr"/>
+            <a:r>
+              <a:rPr b="1" sz="850">
+                <a:solidFill>
+                  <a:srgbClr val="334155"/>
+                </a:solidFill>
+              </a:rPr>
+              <a:t>8–14μm Spectral Band · NETD &lt; 50 mK</a:t>
+            </a:r>
+          </a:p>
+        </p:txBody>
+      </p:sp>
+      <p:sp>
+        <p:nvSpPr>
+          <p:cNvPr id="37" name="TextBox 36"/>
+          <p:cNvSpPr txBox="1"/>
+          <p:nvPr/>
+        </p:nvSpPr>
+        <p:spPr>
+          <a:xfrm>
+            <a:off x="9473184" y="1856232"/>
+            <a:ext cx="2130552" cy="795528"/>
+          </a:xfrm>
+          <a:prstGeom prst="rect">
+            <a:avLst/>
+          </a:prstGeom>
+          <a:noFill/>
+        </p:spPr>
+        <p:txBody>
+          <a:bodyPr wrap="square" lIns="0" rIns="0" tIns="0" bIns="0">
+            <a:spAutoFit/>
+          </a:bodyPr>
+          <a:lstStyle/>
+          <a:p>
+            <a:r>
+              <a:rPr sz="950">
+                <a:solidFill>
+                  <a:srgbClr val="334155"/>
+                </a:solidFill>
+              </a:rPr>
+              <a:t>Captures biological body heat through dust, fog, and nighttime darkness. Calibrated for 36.5°C–37.5°C human lock.</a:t>
+            </a:r>
+          </a:p>
+        </p:txBody>
+      </p:sp>
+      <p:sp>
+        <p:nvSpPr>
+          <p:cNvPr id="38" name="Rounded Rectangle 37"/>
+          <p:cNvSpPr/>
+          <p:nvPr/>
+        </p:nvSpPr>
+        <p:spPr>
+          <a:xfrm>
+            <a:off x="6720840" y="2880360"/>
+            <a:ext cx="2423160" cy="1664208"/>
+          </a:xfrm>
+          <a:prstGeom prst="roundRect">
+            <a:avLst/>
+          </a:prstGeom>
+          <a:solidFill>
             <a:srgbClr val="FFFFFF"/>
           </a:solidFill>
-          <a:ln w="15240">
+          <a:ln w="12700">
             <a:solidFill>
               <a:srgbClr val="E2E8F0"/>
             </a:solidFill>
@@ -11087,59 +14312,29 @@
           </a:fontRef>
         </p:style>
         <p:txBody>
-          <a:bodyPr rtlCol="0" anchor="t" lIns="182880" rIns="182880" tIns="868680"/>
-          <a:lstStyle/>
-          <a:p>
-            <a:pPr algn="ctr"/>
-            <a:r>
-              <a:rPr b="1" sz="1100">
-                <a:solidFill>
-                  <a:srgbClr val="0F172A"/>
-                </a:solidFill>
-              </a:rPr>
-              <a:t>4. 17-BYTE LORA BURST
-</a:t>
-            </a:r>
-          </a:p>
-          <a:p>
-            <a:r>
-              <a:rPr b="1" sz="950">
-                <a:solidFill>
-                  <a:srgbClr val="0284C7"/>
-                </a:solidFill>
-              </a:rPr>
-              <a:t>Souli et al. (Elsevier 2024)
-</a:t>
-            </a:r>
-          </a:p>
-          <a:p>
-            <a:r>
-              <a:rPr sz="950">
-                <a:solidFill>
-                  <a:srgbClr val="475569"/>
-                </a:solidFill>
-              </a:rPr>
-              <a:t>Tait-Bryan ray-caster projects pixel to WGS-84 pin. Lat/Long/Temp compressed into 17-byte HMAC-SHA256 packet.</a:t>
-            </a:r>
-          </a:p>
-        </p:txBody>
-      </p:sp>
-      <p:sp>
-        <p:nvSpPr>
-          <p:cNvPr id="17" name="Rounded Rectangle 16"/>
-          <p:cNvSpPr/>
-          <p:nvPr/>
-        </p:nvSpPr>
-        <p:spPr>
-          <a:xfrm>
-            <a:off x="7296909" y="1143000"/>
-            <a:ext cx="2084831" cy="73152"/>
+          <a:bodyPr rtlCol="0" anchor="ctr"/>
+          <a:lstStyle/>
+          <a:p>
+            <a:pPr algn="ctr"/>
+          </a:p>
+        </p:txBody>
+      </p:sp>
+      <p:sp>
+        <p:nvSpPr>
+          <p:cNvPr id="39" name="Rounded Rectangle 38"/>
+          <p:cNvSpPr/>
+          <p:nvPr/>
+        </p:nvSpPr>
+        <p:spPr>
+          <a:xfrm>
+            <a:off x="6720840" y="2880360"/>
+            <a:ext cx="73152" cy="1664208"/>
           </a:xfrm>
           <a:prstGeom prst="roundRect">
             <a:avLst/>
           </a:prstGeom>
           <a:solidFill>
-            <a:srgbClr val="0284C7"/>
+            <a:srgbClr val="EA580C"/>
           </a:solidFill>
           <a:ln>
             <a:noFill/>
@@ -11169,22 +14364,22 @@
       </p:sp>
       <p:sp>
         <p:nvSpPr>
-          <p:cNvPr id="18" name="Oval 17"/>
-          <p:cNvSpPr/>
-          <p:nvPr/>
-        </p:nvSpPr>
-        <p:spPr>
-          <a:xfrm>
-            <a:off x="7479789" y="1371600"/>
-            <a:ext cx="475488" cy="475488"/>
+          <p:cNvPr id="40" name="Oval 39"/>
+          <p:cNvSpPr/>
+          <p:nvPr/>
+        </p:nvSpPr>
+        <p:spPr>
+          <a:xfrm>
+            <a:off x="6867144" y="3008376"/>
+            <a:ext cx="310896" cy="310896"/>
           </a:xfrm>
           <a:prstGeom prst="ellipse">
             <a:avLst/>
           </a:prstGeom>
           <a:solidFill>
-            <a:srgbClr val="0284C7"/>
-          </a:solidFill>
-          <a:ln w="19050">
+            <a:srgbClr val="EA580C"/>
+          </a:solidFill>
+          <a:ln w="12700">
             <a:solidFill>
               <a:srgbClr val="FFFFFF"/>
             </a:solidFill>
@@ -11210,34 +14405,153 @@
           <a:p>
             <a:pPr algn="ctr"/>
             <a:r>
-              <a:rPr b="1" sz="1300">
+              <a:rPr b="1" sz="1100">
                 <a:solidFill>
                   <a:srgbClr val="FFFFFF"/>
                 </a:solidFill>
               </a:rPr>
-              <a:t>04</a:t>
-            </a:r>
-          </a:p>
-        </p:txBody>
-      </p:sp>
-      <p:sp>
-        <p:nvSpPr>
-          <p:cNvPr id="19" name="Rounded Rectangle 18"/>
-          <p:cNvSpPr/>
-          <p:nvPr/>
-        </p:nvSpPr>
-        <p:spPr>
-          <a:xfrm>
-            <a:off x="9546332" y="1143000"/>
-            <a:ext cx="2084831" cy="5120640"/>
+              <a:t>3</a:t>
+            </a:r>
+          </a:p>
+        </p:txBody>
+      </p:sp>
+      <p:sp>
+        <p:nvSpPr>
+          <p:cNvPr id="41" name="TextBox 40"/>
+          <p:cNvSpPr txBox="1"/>
+          <p:nvPr/>
+        </p:nvSpPr>
+        <p:spPr>
+          <a:xfrm>
+            <a:off x="7251192" y="2990088"/>
+            <a:ext cx="1801368" cy="347472"/>
+          </a:xfrm>
+          <a:prstGeom prst="rect">
+            <a:avLst/>
+          </a:prstGeom>
+          <a:noFill/>
+        </p:spPr>
+        <p:txBody>
+          <a:bodyPr wrap="none" lIns="0" rIns="0" tIns="0" bIns="0">
+            <a:spAutoFit/>
+          </a:bodyPr>
+          <a:lstStyle/>
+          <a:p>
+            <a:r>
+              <a:rPr b="1" sz="1100">
+                <a:solidFill>
+                  <a:srgbClr val="0F172A"/>
+                </a:solidFill>
+              </a:rPr>
+              <a:t>Anti-Reflective Germanium Lens</a:t>
+            </a:r>
+          </a:p>
+        </p:txBody>
+      </p:sp>
+      <p:sp>
+        <p:nvSpPr>
+          <p:cNvPr id="42" name="Rounded Rectangle 41"/>
+          <p:cNvSpPr/>
+          <p:nvPr/>
+        </p:nvSpPr>
+        <p:spPr>
+          <a:xfrm>
+            <a:off x="6867144" y="3383280"/>
+            <a:ext cx="2130552" cy="237744"/>
           </a:xfrm>
           <a:prstGeom prst="roundRect">
             <a:avLst/>
           </a:prstGeom>
           <a:solidFill>
+            <a:srgbClr val="F1F5F9"/>
+          </a:solidFill>
+          <a:ln w="6350">
+            <a:solidFill>
+              <a:srgbClr val="E2E8F0"/>
+            </a:solidFill>
+          </a:ln>
+        </p:spPr>
+        <p:style>
+          <a:lnRef idx="1">
+            <a:schemeClr val="accent1"/>
+          </a:lnRef>
+          <a:fillRef idx="3">
+            <a:schemeClr val="accent1"/>
+          </a:fillRef>
+          <a:effectRef idx="2">
+            <a:schemeClr val="accent1"/>
+          </a:effectRef>
+          <a:fontRef idx="minor">
+            <a:schemeClr val="lt1"/>
+          </a:fontRef>
+        </p:style>
+        <p:txBody>
+          <a:bodyPr rtlCol="0" anchor="ctr" lIns="73152"/>
+          <a:lstStyle/>
+          <a:p>
+            <a:pPr algn="ctr"/>
+            <a:r>
+              <a:rPr b="1" sz="850">
+                <a:solidFill>
+                  <a:srgbClr val="334155"/>
+                </a:solidFill>
+              </a:rPr>
+              <a:t>High Infrared Optical Transmittance</a:t>
+            </a:r>
+          </a:p>
+        </p:txBody>
+      </p:sp>
+      <p:sp>
+        <p:nvSpPr>
+          <p:cNvPr id="43" name="TextBox 42"/>
+          <p:cNvSpPr txBox="1"/>
+          <p:nvPr/>
+        </p:nvSpPr>
+        <p:spPr>
+          <a:xfrm>
+            <a:off x="6867144" y="3685032"/>
+            <a:ext cx="2130552" cy="795528"/>
+          </a:xfrm>
+          <a:prstGeom prst="rect">
+            <a:avLst/>
+          </a:prstGeom>
+          <a:noFill/>
+        </p:spPr>
+        <p:txBody>
+          <a:bodyPr wrap="square" lIns="0" rIns="0" tIns="0" bIns="0">
+            <a:spAutoFit/>
+          </a:bodyPr>
+          <a:lstStyle/>
+          <a:p>
+            <a:r>
+              <a:rPr sz="950">
+                <a:solidFill>
+                  <a:srgbClr val="334155"/>
+                </a:solidFill>
+              </a:rPr>
+              <a:t>Precision coated germanium element eliminates solar glare reflections off corrugated tin roofs and wet mud.</a:t>
+            </a:r>
+          </a:p>
+        </p:txBody>
+      </p:sp>
+      <p:sp>
+        <p:nvSpPr>
+          <p:cNvPr id="44" name="Rounded Rectangle 43"/>
+          <p:cNvSpPr/>
+          <p:nvPr/>
+        </p:nvSpPr>
+        <p:spPr>
+          <a:xfrm>
+            <a:off x="9326880" y="2880360"/>
+            <a:ext cx="2423160" cy="1664208"/>
+          </a:xfrm>
+          <a:prstGeom prst="roundRect">
+            <a:avLst/>
+          </a:prstGeom>
+          <a:solidFill>
             <a:srgbClr val="FFFFFF"/>
           </a:solidFill>
-          <a:ln w="15240">
+          <a:ln w="12700">
             <a:solidFill>
               <a:srgbClr val="E2E8F0"/>
             </a:solidFill>
@@ -11265,53 +14579,23 @@
           </a:fontRef>
         </p:style>
         <p:txBody>
-          <a:bodyPr rtlCol="0" anchor="t" lIns="182880" rIns="182880" tIns="868680"/>
-          <a:lstStyle/>
-          <a:p>
-            <a:pPr algn="ctr"/>
-            <a:r>
-              <a:rPr b="1" sz="1100">
-                <a:solidFill>
-                  <a:srgbClr val="0F172A"/>
-                </a:solidFill>
-              </a:rPr>
-              <a:t>5. SAFE ROUTE EXTRACTION
-</a:t>
-            </a:r>
-          </a:p>
-          <a:p>
-            <a:r>
-              <a:rPr b="1" sz="950">
-                <a:solidFill>
-                  <a:srgbClr val="0D9488"/>
-                </a:solidFill>
-              </a:rPr>
-              <a:t>Hazard-Aware Dijkstra
-</a:t>
-            </a:r>
-          </a:p>
-          <a:p>
-            <a:r>
-              <a:rPr sz="950">
-                <a:solidFill>
-                  <a:srgbClr val="475569"/>
-                </a:solidFill>
-              </a:rPr>
-              <a:t>Offline Ground Station instantly charts safe walking corridor bypassing 11kV wires directly to casualty.</a:t>
-            </a:r>
-          </a:p>
-        </p:txBody>
-      </p:sp>
-      <p:sp>
-        <p:nvSpPr>
-          <p:cNvPr id="20" name="Rounded Rectangle 19"/>
-          <p:cNvSpPr/>
-          <p:nvPr/>
-        </p:nvSpPr>
-        <p:spPr>
-          <a:xfrm>
-            <a:off x="9546332" y="1143000"/>
-            <a:ext cx="2084831" cy="73152"/>
+          <a:bodyPr rtlCol="0" anchor="ctr"/>
+          <a:lstStyle/>
+          <a:p>
+            <a:pPr algn="ctr"/>
+          </a:p>
+        </p:txBody>
+      </p:sp>
+      <p:sp>
+        <p:nvSpPr>
+          <p:cNvPr id="45" name="Rounded Rectangle 44"/>
+          <p:cNvSpPr/>
+          <p:nvPr/>
+        </p:nvSpPr>
+        <p:spPr>
+          <a:xfrm>
+            <a:off x="9326880" y="2880360"/>
+            <a:ext cx="73152" cy="1664208"/>
           </a:xfrm>
           <a:prstGeom prst="roundRect">
             <a:avLst/>
@@ -11347,14 +14631,14 @@
       </p:sp>
       <p:sp>
         <p:nvSpPr>
-          <p:cNvPr id="21" name="Oval 20"/>
-          <p:cNvSpPr/>
-          <p:nvPr/>
-        </p:nvSpPr>
-        <p:spPr>
-          <a:xfrm>
-            <a:off x="9729212" y="1371600"/>
-            <a:ext cx="475488" cy="475488"/>
+          <p:cNvPr id="46" name="Oval 45"/>
+          <p:cNvSpPr/>
+          <p:nvPr/>
+        </p:nvSpPr>
+        <p:spPr>
+          <a:xfrm>
+            <a:off x="9473184" y="3008376"/>
+            <a:ext cx="310896" cy="310896"/>
           </a:xfrm>
           <a:prstGeom prst="ellipse">
             <a:avLst/>
@@ -11362,7 +14646,7 @@
           <a:solidFill>
             <a:srgbClr val="0D9488"/>
           </a:solidFill>
-          <a:ln w="19050">
+          <a:ln w="12700">
             <a:solidFill>
               <a:srgbClr val="FFFFFF"/>
             </a:solidFill>
@@ -11388,12 +14672,665 @@
           <a:p>
             <a:pPr algn="ctr"/>
             <a:r>
-              <a:rPr b="1" sz="1300">
+              <a:rPr b="1" sz="1100">
                 <a:solidFill>
                   <a:srgbClr val="FFFFFF"/>
                 </a:solidFill>
               </a:rPr>
-              <a:t>05</a:t>
+              <a:t>4</a:t>
+            </a:r>
+          </a:p>
+        </p:txBody>
+      </p:sp>
+      <p:sp>
+        <p:nvSpPr>
+          <p:cNvPr id="47" name="TextBox 46"/>
+          <p:cNvSpPr txBox="1"/>
+          <p:nvPr/>
+        </p:nvSpPr>
+        <p:spPr>
+          <a:xfrm>
+            <a:off x="9857232" y="2990088"/>
+            <a:ext cx="1801368" cy="347472"/>
+          </a:xfrm>
+          <a:prstGeom prst="rect">
+            <a:avLst/>
+          </a:prstGeom>
+          <a:noFill/>
+        </p:spPr>
+        <p:txBody>
+          <a:bodyPr wrap="none" lIns="0" rIns="0" tIns="0" bIns="0">
+            <a:spAutoFit/>
+          </a:bodyPr>
+          <a:lstStyle/>
+          <a:p>
+            <a:r>
+              <a:rPr b="1" sz="1100">
+                <a:solidFill>
+                  <a:srgbClr val="0F172A"/>
+                </a:solidFill>
+              </a:rPr>
+              <a:t>1D ToF Laser Altimeter Aperture</a:t>
+            </a:r>
+          </a:p>
+        </p:txBody>
+      </p:sp>
+      <p:sp>
+        <p:nvSpPr>
+          <p:cNvPr id="48" name="Rounded Rectangle 47"/>
+          <p:cNvSpPr/>
+          <p:nvPr/>
+        </p:nvSpPr>
+        <p:spPr>
+          <a:xfrm>
+            <a:off x="9473184" y="3383280"/>
+            <a:ext cx="2130552" cy="237744"/>
+          </a:xfrm>
+          <a:prstGeom prst="roundRect">
+            <a:avLst/>
+          </a:prstGeom>
+          <a:solidFill>
+            <a:srgbClr val="F1F5F9"/>
+          </a:solidFill>
+          <a:ln w="6350">
+            <a:solidFill>
+              <a:srgbClr val="E2E8F0"/>
+            </a:solidFill>
+          </a:ln>
+        </p:spPr>
+        <p:style>
+          <a:lnRef idx="1">
+            <a:schemeClr val="accent1"/>
+          </a:lnRef>
+          <a:fillRef idx="3">
+            <a:schemeClr val="accent1"/>
+          </a:fillRef>
+          <a:effectRef idx="2">
+            <a:schemeClr val="accent1"/>
+          </a:effectRef>
+          <a:fontRef idx="minor">
+            <a:schemeClr val="lt1"/>
+          </a:fontRef>
+        </p:style>
+        <p:txBody>
+          <a:bodyPr rtlCol="0" anchor="ctr" lIns="73152"/>
+          <a:lstStyle/>
+          <a:p>
+            <a:pPr algn="ctr"/>
+            <a:r>
+              <a:rPr b="1" sz="850">
+                <a:solidFill>
+                  <a:srgbClr val="334155"/>
+                </a:solidFill>
+              </a:rPr>
+              <a:t>VL53L1X Rangefinder (Sub-cm Accuracy)</a:t>
+            </a:r>
+          </a:p>
+        </p:txBody>
+      </p:sp>
+      <p:sp>
+        <p:nvSpPr>
+          <p:cNvPr id="49" name="TextBox 48"/>
+          <p:cNvSpPr txBox="1"/>
+          <p:nvPr/>
+        </p:nvSpPr>
+        <p:spPr>
+          <a:xfrm>
+            <a:off x="9473184" y="3685032"/>
+            <a:ext cx="2130552" cy="795528"/>
+          </a:xfrm>
+          <a:prstGeom prst="rect">
+            <a:avLst/>
+          </a:prstGeom>
+          <a:noFill/>
+        </p:spPr>
+        <p:txBody>
+          <a:bodyPr wrap="square" lIns="0" rIns="0" tIns="0" bIns="0">
+            <a:spAutoFit/>
+          </a:bodyPr>
+          <a:lstStyle/>
+          <a:p>
+            <a:r>
+              <a:rPr sz="950">
+                <a:solidFill>
+                  <a:srgbClr val="334155"/>
+                </a:solidFill>
+              </a:rPr>
+              <a:t>Fires downward laser pulse to measure true AGL ground clearance, eliminating barometric pressure drift on slopes.</a:t>
+            </a:r>
+          </a:p>
+        </p:txBody>
+      </p:sp>
+      <p:sp>
+        <p:nvSpPr>
+          <p:cNvPr id="50" name="Rounded Rectangle 49"/>
+          <p:cNvSpPr/>
+          <p:nvPr/>
+        </p:nvSpPr>
+        <p:spPr>
+          <a:xfrm>
+            <a:off x="6720840" y="4709160"/>
+            <a:ext cx="2423160" cy="1664208"/>
+          </a:xfrm>
+          <a:prstGeom prst="roundRect">
+            <a:avLst/>
+          </a:prstGeom>
+          <a:solidFill>
+            <a:srgbClr val="FFFFFF"/>
+          </a:solidFill>
+          <a:ln w="12700">
+            <a:solidFill>
+              <a:srgbClr val="E2E8F0"/>
+            </a:solidFill>
+          </a:ln>
+          <a:effectLst>
+            <a:outerShdw blurRad="101600" dist="25400" dir="5400000" algn="t" rotWithShape="0">
+              <a:srgbClr val="0F172A">
+                <a:alpha val="10000"/>
+              </a:srgbClr>
+            </a:outerShdw>
+          </a:effectLst>
+        </p:spPr>
+        <p:style>
+          <a:lnRef idx="1">
+            <a:schemeClr val="accent1"/>
+          </a:lnRef>
+          <a:fillRef idx="3">
+            <a:schemeClr val="accent1"/>
+          </a:fillRef>
+          <a:effectRef idx="2">
+            <a:schemeClr val="accent1"/>
+          </a:effectRef>
+          <a:fontRef idx="minor">
+            <a:schemeClr val="lt1"/>
+          </a:fontRef>
+        </p:style>
+        <p:txBody>
+          <a:bodyPr rtlCol="0" anchor="ctr"/>
+          <a:lstStyle/>
+          <a:p>
+            <a:pPr algn="ctr"/>
+          </a:p>
+        </p:txBody>
+      </p:sp>
+      <p:sp>
+        <p:nvSpPr>
+          <p:cNvPr id="51" name="Rounded Rectangle 50"/>
+          <p:cNvSpPr/>
+          <p:nvPr/>
+        </p:nvSpPr>
+        <p:spPr>
+          <a:xfrm>
+            <a:off x="6720840" y="4709160"/>
+            <a:ext cx="73152" cy="1664208"/>
+          </a:xfrm>
+          <a:prstGeom prst="roundRect">
+            <a:avLst/>
+          </a:prstGeom>
+          <a:solidFill>
+            <a:srgbClr val="7C3AED"/>
+          </a:solidFill>
+          <a:ln>
+            <a:noFill/>
+          </a:ln>
+        </p:spPr>
+        <p:style>
+          <a:lnRef idx="1">
+            <a:schemeClr val="accent1"/>
+          </a:lnRef>
+          <a:fillRef idx="3">
+            <a:schemeClr val="accent1"/>
+          </a:fillRef>
+          <a:effectRef idx="2">
+            <a:schemeClr val="accent1"/>
+          </a:effectRef>
+          <a:fontRef idx="minor">
+            <a:schemeClr val="lt1"/>
+          </a:fontRef>
+        </p:style>
+        <p:txBody>
+          <a:bodyPr rtlCol="0" anchor="ctr"/>
+          <a:lstStyle/>
+          <a:p>
+            <a:pPr algn="ctr"/>
+          </a:p>
+        </p:txBody>
+      </p:sp>
+      <p:sp>
+        <p:nvSpPr>
+          <p:cNvPr id="52" name="Oval 51"/>
+          <p:cNvSpPr/>
+          <p:nvPr/>
+        </p:nvSpPr>
+        <p:spPr>
+          <a:xfrm>
+            <a:off x="6867144" y="4837176"/>
+            <a:ext cx="310896" cy="310896"/>
+          </a:xfrm>
+          <a:prstGeom prst="ellipse">
+            <a:avLst/>
+          </a:prstGeom>
+          <a:solidFill>
+            <a:srgbClr val="7C3AED"/>
+          </a:solidFill>
+          <a:ln w="12700">
+            <a:solidFill>
+              <a:srgbClr val="FFFFFF"/>
+            </a:solidFill>
+          </a:ln>
+        </p:spPr>
+        <p:style>
+          <a:lnRef idx="1">
+            <a:schemeClr val="accent1"/>
+          </a:lnRef>
+          <a:fillRef idx="3">
+            <a:schemeClr val="accent1"/>
+          </a:fillRef>
+          <a:effectRef idx="2">
+            <a:schemeClr val="accent1"/>
+          </a:effectRef>
+          <a:fontRef idx="minor">
+            <a:schemeClr val="lt1"/>
+          </a:fontRef>
+        </p:style>
+        <p:txBody>
+          <a:bodyPr rtlCol="0" anchor="ctr"/>
+          <a:lstStyle/>
+          <a:p>
+            <a:pPr algn="ctr"/>
+            <a:r>
+              <a:rPr b="1" sz="1100">
+                <a:solidFill>
+                  <a:srgbClr val="FFFFFF"/>
+                </a:solidFill>
+              </a:rPr>
+              <a:t>5</a:t>
+            </a:r>
+          </a:p>
+        </p:txBody>
+      </p:sp>
+      <p:sp>
+        <p:nvSpPr>
+          <p:cNvPr id="53" name="TextBox 52"/>
+          <p:cNvSpPr txBox="1"/>
+          <p:nvPr/>
+        </p:nvSpPr>
+        <p:spPr>
+          <a:xfrm>
+            <a:off x="7251192" y="4818888"/>
+            <a:ext cx="1801368" cy="347472"/>
+          </a:xfrm>
+          <a:prstGeom prst="rect">
+            <a:avLst/>
+          </a:prstGeom>
+          <a:noFill/>
+        </p:spPr>
+        <p:txBody>
+          <a:bodyPr wrap="none" lIns="0" rIns="0" tIns="0" bIns="0">
+            <a:spAutoFit/>
+          </a:bodyPr>
+          <a:lstStyle/>
+          <a:p>
+            <a:r>
+              <a:rPr b="1" sz="1100">
+                <a:solidFill>
+                  <a:srgbClr val="0F172A"/>
+                </a:solidFill>
+              </a:rPr>
+              <a:t>2-Axis Brushless Gimbal Motors</a:t>
+            </a:r>
+          </a:p>
+        </p:txBody>
+      </p:sp>
+      <p:sp>
+        <p:nvSpPr>
+          <p:cNvPr id="54" name="Rounded Rectangle 53"/>
+          <p:cNvSpPr/>
+          <p:nvPr/>
+        </p:nvSpPr>
+        <p:spPr>
+          <a:xfrm>
+            <a:off x="6867144" y="5212080"/>
+            <a:ext cx="2130552" cy="237744"/>
+          </a:xfrm>
+          <a:prstGeom prst="roundRect">
+            <a:avLst/>
+          </a:prstGeom>
+          <a:solidFill>
+            <a:srgbClr val="F1F5F9"/>
+          </a:solidFill>
+          <a:ln w="6350">
+            <a:solidFill>
+              <a:srgbClr val="E2E8F0"/>
+            </a:solidFill>
+          </a:ln>
+        </p:spPr>
+        <p:style>
+          <a:lnRef idx="1">
+            <a:schemeClr val="accent1"/>
+          </a:lnRef>
+          <a:fillRef idx="3">
+            <a:schemeClr val="accent1"/>
+          </a:fillRef>
+          <a:effectRef idx="2">
+            <a:schemeClr val="accent1"/>
+          </a:effectRef>
+          <a:fontRef idx="minor">
+            <a:schemeClr val="lt1"/>
+          </a:fontRef>
+        </p:style>
+        <p:txBody>
+          <a:bodyPr rtlCol="0" anchor="ctr" lIns="73152"/>
+          <a:lstStyle/>
+          <a:p>
+            <a:pPr algn="ctr"/>
+            <a:r>
+              <a:rPr b="1" sz="850">
+                <a:solidFill>
+                  <a:srgbClr val="334155"/>
+                </a:solidFill>
+              </a:rPr>
+              <a:t>Active Pitch &amp; Roll Compensation</a:t>
+            </a:r>
+          </a:p>
+        </p:txBody>
+      </p:sp>
+      <p:sp>
+        <p:nvSpPr>
+          <p:cNvPr id="55" name="TextBox 54"/>
+          <p:cNvSpPr txBox="1"/>
+          <p:nvPr/>
+        </p:nvSpPr>
+        <p:spPr>
+          <a:xfrm>
+            <a:off x="6867144" y="5513832"/>
+            <a:ext cx="2130552" cy="795528"/>
+          </a:xfrm>
+          <a:prstGeom prst="rect">
+            <a:avLst/>
+          </a:prstGeom>
+          <a:noFill/>
+        </p:spPr>
+        <p:txBody>
+          <a:bodyPr wrap="square" lIns="0" rIns="0" tIns="0" bIns="0">
+            <a:spAutoFit/>
+          </a:bodyPr>
+          <a:lstStyle/>
+          <a:p>
+            <a:r>
+              <a:rPr sz="950">
+                <a:solidFill>
+                  <a:srgbClr val="334155"/>
+                </a:solidFill>
+              </a:rPr>
+              <a:t>Isolates the camera optical axis from UAV flight maneuvers, ensuring stable bounding-box tracking during gusts.</a:t>
+            </a:r>
+          </a:p>
+        </p:txBody>
+      </p:sp>
+      <p:sp>
+        <p:nvSpPr>
+          <p:cNvPr id="56" name="Rounded Rectangle 55"/>
+          <p:cNvSpPr/>
+          <p:nvPr/>
+        </p:nvSpPr>
+        <p:spPr>
+          <a:xfrm>
+            <a:off x="9326880" y="4709160"/>
+            <a:ext cx="2423160" cy="1664208"/>
+          </a:xfrm>
+          <a:prstGeom prst="roundRect">
+            <a:avLst/>
+          </a:prstGeom>
+          <a:solidFill>
+            <a:srgbClr val="FFFFFF"/>
+          </a:solidFill>
+          <a:ln w="12700">
+            <a:solidFill>
+              <a:srgbClr val="E2E8F0"/>
+            </a:solidFill>
+          </a:ln>
+          <a:effectLst>
+            <a:outerShdw blurRad="101600" dist="25400" dir="5400000" algn="t" rotWithShape="0">
+              <a:srgbClr val="0F172A">
+                <a:alpha val="10000"/>
+              </a:srgbClr>
+            </a:outerShdw>
+          </a:effectLst>
+        </p:spPr>
+        <p:style>
+          <a:lnRef idx="1">
+            <a:schemeClr val="accent1"/>
+          </a:lnRef>
+          <a:fillRef idx="3">
+            <a:schemeClr val="accent1"/>
+          </a:fillRef>
+          <a:effectRef idx="2">
+            <a:schemeClr val="accent1"/>
+          </a:effectRef>
+          <a:fontRef idx="minor">
+            <a:schemeClr val="lt1"/>
+          </a:fontRef>
+        </p:style>
+        <p:txBody>
+          <a:bodyPr rtlCol="0" anchor="ctr"/>
+          <a:lstStyle/>
+          <a:p>
+            <a:pPr algn="ctr"/>
+          </a:p>
+        </p:txBody>
+      </p:sp>
+      <p:sp>
+        <p:nvSpPr>
+          <p:cNvPr id="57" name="Rounded Rectangle 56"/>
+          <p:cNvSpPr/>
+          <p:nvPr/>
+        </p:nvSpPr>
+        <p:spPr>
+          <a:xfrm>
+            <a:off x="9326880" y="4709160"/>
+            <a:ext cx="73152" cy="1664208"/>
+          </a:xfrm>
+          <a:prstGeom prst="roundRect">
+            <a:avLst/>
+          </a:prstGeom>
+          <a:solidFill>
+            <a:srgbClr val="0284C7"/>
+          </a:solidFill>
+          <a:ln>
+            <a:noFill/>
+          </a:ln>
+        </p:spPr>
+        <p:style>
+          <a:lnRef idx="1">
+            <a:schemeClr val="accent1"/>
+          </a:lnRef>
+          <a:fillRef idx="3">
+            <a:schemeClr val="accent1"/>
+          </a:fillRef>
+          <a:effectRef idx="2">
+            <a:schemeClr val="accent1"/>
+          </a:effectRef>
+          <a:fontRef idx="minor">
+            <a:schemeClr val="lt1"/>
+          </a:fontRef>
+        </p:style>
+        <p:txBody>
+          <a:bodyPr rtlCol="0" anchor="ctr"/>
+          <a:lstStyle/>
+          <a:p>
+            <a:pPr algn="ctr"/>
+          </a:p>
+        </p:txBody>
+      </p:sp>
+      <p:sp>
+        <p:nvSpPr>
+          <p:cNvPr id="58" name="Oval 57"/>
+          <p:cNvSpPr/>
+          <p:nvPr/>
+        </p:nvSpPr>
+        <p:spPr>
+          <a:xfrm>
+            <a:off x="9473184" y="4837176"/>
+            <a:ext cx="310896" cy="310896"/>
+          </a:xfrm>
+          <a:prstGeom prst="ellipse">
+            <a:avLst/>
+          </a:prstGeom>
+          <a:solidFill>
+            <a:srgbClr val="0284C7"/>
+          </a:solidFill>
+          <a:ln w="12700">
+            <a:solidFill>
+              <a:srgbClr val="FFFFFF"/>
+            </a:solidFill>
+          </a:ln>
+        </p:spPr>
+        <p:style>
+          <a:lnRef idx="1">
+            <a:schemeClr val="accent1"/>
+          </a:lnRef>
+          <a:fillRef idx="3">
+            <a:schemeClr val="accent1"/>
+          </a:fillRef>
+          <a:effectRef idx="2">
+            <a:schemeClr val="accent1"/>
+          </a:effectRef>
+          <a:fontRef idx="minor">
+            <a:schemeClr val="lt1"/>
+          </a:fontRef>
+        </p:style>
+        <p:txBody>
+          <a:bodyPr rtlCol="0" anchor="ctr"/>
+          <a:lstStyle/>
+          <a:p>
+            <a:pPr algn="ctr"/>
+            <a:r>
+              <a:rPr b="1" sz="1100">
+                <a:solidFill>
+                  <a:srgbClr val="FFFFFF"/>
+                </a:solidFill>
+              </a:rPr>
+              <a:t>6</a:t>
+            </a:r>
+          </a:p>
+        </p:txBody>
+      </p:sp>
+      <p:sp>
+        <p:nvSpPr>
+          <p:cNvPr id="59" name="TextBox 58"/>
+          <p:cNvSpPr txBox="1"/>
+          <p:nvPr/>
+        </p:nvSpPr>
+        <p:spPr>
+          <a:xfrm>
+            <a:off x="9857232" y="4818888"/>
+            <a:ext cx="1801368" cy="347472"/>
+          </a:xfrm>
+          <a:prstGeom prst="rect">
+            <a:avLst/>
+          </a:prstGeom>
+          <a:noFill/>
+        </p:spPr>
+        <p:txBody>
+          <a:bodyPr wrap="none" lIns="0" rIns="0" tIns="0" bIns="0">
+            <a:spAutoFit/>
+          </a:bodyPr>
+          <a:lstStyle/>
+          <a:p>
+            <a:r>
+              <a:rPr b="1" sz="1100">
+                <a:solidFill>
+                  <a:srgbClr val="0F172A"/>
+                </a:solidFill>
+              </a:rPr>
+              <a:t>Tait-Bryan 6-DOF DCM Geodetics</a:t>
+            </a:r>
+          </a:p>
+        </p:txBody>
+      </p:sp>
+      <p:sp>
+        <p:nvSpPr>
+          <p:cNvPr id="60" name="Rounded Rectangle 59"/>
+          <p:cNvSpPr/>
+          <p:nvPr/>
+        </p:nvSpPr>
+        <p:spPr>
+          <a:xfrm>
+            <a:off x="9473184" y="5212080"/>
+            <a:ext cx="2130552" cy="237744"/>
+          </a:xfrm>
+          <a:prstGeom prst="roundRect">
+            <a:avLst/>
+          </a:prstGeom>
+          <a:solidFill>
+            <a:srgbClr val="F1F5F9"/>
+          </a:solidFill>
+          <a:ln w="6350">
+            <a:solidFill>
+              <a:srgbClr val="E2E8F0"/>
+            </a:solidFill>
+          </a:ln>
+        </p:spPr>
+        <p:style>
+          <a:lnRef idx="1">
+            <a:schemeClr val="accent1"/>
+          </a:lnRef>
+          <a:fillRef idx="3">
+            <a:schemeClr val="accent1"/>
+          </a:fillRef>
+          <a:effectRef idx="2">
+            <a:schemeClr val="accent1"/>
+          </a:effectRef>
+          <a:fontRef idx="minor">
+            <a:schemeClr val="lt1"/>
+          </a:fontRef>
+        </p:style>
+        <p:txBody>
+          <a:bodyPr rtlCol="0" anchor="ctr" lIns="73152"/>
+          <a:lstStyle/>
+          <a:p>
+            <a:pPr algn="ctr"/>
+            <a:r>
+              <a:rPr b="1" sz="850">
+                <a:solidFill>
+                  <a:srgbClr val="334155"/>
+                </a:solidFill>
+              </a:rPr>
+              <a:t>Camera Pixel ➔ WGS-84 (±2.1m SEP)</a:t>
+            </a:r>
+          </a:p>
+        </p:txBody>
+      </p:sp>
+      <p:sp>
+        <p:nvSpPr>
+          <p:cNvPr id="61" name="TextBox 60"/>
+          <p:cNvSpPr txBox="1"/>
+          <p:nvPr/>
+        </p:nvSpPr>
+        <p:spPr>
+          <a:xfrm>
+            <a:off x="9473184" y="5513832"/>
+            <a:ext cx="2130552" cy="795528"/>
+          </a:xfrm>
+          <a:prstGeom prst="rect">
+            <a:avLst/>
+          </a:prstGeom>
+          <a:noFill/>
+        </p:spPr>
+        <p:txBody>
+          <a:bodyPr wrap="square" lIns="0" rIns="0" tIns="0" bIns="0">
+            <a:spAutoFit/>
+          </a:bodyPr>
+          <a:lstStyle/>
+          <a:p>
+            <a:r>
+              <a:rPr sz="950">
+                <a:solidFill>
+                  <a:srgbClr val="334155"/>
+                </a:solidFill>
+              </a:rPr>
+              <a:t>Projects camera line-of-sight vector down to local DEM terrain grid without requiring dangerous overhead hover.</a:t>
             </a:r>
           </a:p>
         </p:txBody>
@@ -11542,7 +15479,7 @@
                 </a:solidFill>
                 <a:latin typeface="Calibri"/>
               </a:rPr>
-              <a:t>INCIDENT COMMAND &amp; GIS ROUTING · FIRST RESPONDER INTEGRATION</a:t>
+              <a:t>REAL-TIME TARGET ACQUISITION · ZERO-VISIBILITY RECONNAISSANCE</a:t>
             </a:r>
           </a:p>
         </p:txBody>
@@ -11576,7 +15513,7 @@
                 </a:solidFill>
                 <a:latin typeface="Calibri"/>
               </a:rPr>
-              <a:t>From Airborne Detection to Boots-on-Ground Extraction in &lt; 5 Minutes</a:t>
+              <a:t>How Phoenix X Detects Living Survivors Through Dense Smoke &amp; Debris</a:t>
             </a:r>
           </a:p>
         </p:txBody>
@@ -11596,11 +15533,11 @@
             <a:avLst/>
           </a:prstGeom>
           <a:solidFill>
-            <a:srgbClr val="F0FDFA"/>
+            <a:srgbClr val="FFF7ED"/>
           </a:solidFill>
           <a:ln w="12700">
             <a:solidFill>
-              <a:srgbClr val="0D9488"/>
+              <a:srgbClr val="FED7AA"/>
             </a:solidFill>
           </a:ln>
         </p:spPr>
@@ -11626,11 +15563,11 @@
             <a:r>
               <a:rPr sz="950" b="1">
                 <a:solidFill>
-                  <a:srgbClr val="0D9488"/>
+                  <a:srgbClr val="EA580C"/>
                 </a:solidFill>
                 <a:latin typeface="Calibri"/>
               </a:rPr>
-              <a:t>TACTICAL RESCUE GCS</a:t>
+              <a:t>DUAL-BEAM TACTICAL HUD</a:t>
             </a:r>
           </a:p>
         </p:txBody>
@@ -11689,7 +15626,7 @@
       </p:sp>
       <p:pic>
         <p:nvPicPr>
-          <p:cNvPr id="8" name="Picture 7" descr="tactical_gcs_safe_route_tablet.jpg"/>
+          <p:cNvPr id="8" name="Picture 7" descr="phoenix_drone_dual_beam_action.jpg"/>
           <p:cNvPicPr>
             <a:picLocks noChangeAspect="1"/>
           </p:cNvPicPr>
@@ -11766,7 +15703,7 @@
                   <a:srgbClr val="0F172A"/>
                 </a:solidFill>
               </a:rPr>
-              <a:t>1. 17-BYTE LORA PACKET INGESTION
+              <a:t>1. DUAL-SPECTRAL CONICAL SENSING
 </a:t>
             </a:r>
           </a:p>
@@ -11777,8 +15714,8 @@
                   <a:srgbClr val="0284C7"/>
                 </a:solidFill>
               </a:rPr>
-              <a:t>Zero Cloud / Zero Internet Architecture
-Air-Gapped Local Tactical Mesh (868 MHz)
+              <a:t>Cyan Beam: 1080p Optical Geometry
+Orange Beam: 8–14μm Radiometric LWIR
 </a:t>
             </a:r>
           </a:p>
@@ -11789,7 +15726,7 @@
                   <a:srgbClr val="475569"/>
                 </a:solidFill>
               </a:rPr>
-              <a:t>Incoming telemetry packets unpack victim coordinates, biological body temperature (37.0°C), and triage status directly into the offline Leaflet GIS dashboard in milliseconds without commercial cellular service.</a:t>
+              <a:t>Standard RGB cameras blind at dusk and in smoke plumes. Phoenix X projects co-registered optical and thermal fields-of-view, continuously scanning rubble crevices for human infrared emissions.</a:t>
             </a:r>
           </a:p>
         </p:txBody>
@@ -11892,7 +15829,7 @@
                   <a:srgbClr val="0F172A"/>
                 </a:solidFill>
               </a:rPr>
-              <a:t>2. HAZARD-AWARE DIJKSTRA ROUTING
+              <a:t>2. RADIOMETRIC CORE HEAT FILTER
 </a:t>
             </a:r>
           </a:p>
@@ -11900,11 +15837,11 @@
             <a:r>
               <a:rPr b="1" sz="850">
                 <a:solidFill>
-                  <a:srgbClr val="E11D48"/>
-                </a:solidFill>
-              </a:rPr>
-              <a:t>Dynamic Obstacle &amp; Danger Buffers
-Avoids: 11kV Severed Wires, Landslides, Fires
+                  <a:srgbClr val="EA580C"/>
+                </a:solidFill>
+              </a:rPr>
+              <a:t>Gated Detection: 36.5°C to 37.5°C
+Noise Equivalent Temp Diff: NETD &lt; 50 mK
 </a:t>
             </a:r>
           </a:p>
@@ -11915,7 +15852,7 @@
                   <a:srgbClr val="475569"/>
                 </a:solidFill>
               </a:rPr>
-              <a:t>Rescuers walking blindly into disaster zones suffer secondary casualties. Phoenix X plots an automated, hazard-weighted pedestrian extraction path navigating safely around verified hazards.</a:t>
+              <a:t>Solar radiation heats tin roofs, wet mud, and rocks to over 45°C. Phoenix X isolates true biological core temperature profiles, instantly discarding thermal false alarms before passing tensors to the NPU.</a:t>
             </a:r>
           </a:p>
         </p:txBody>
@@ -11935,7 +15872,7 @@
             <a:avLst/>
           </a:prstGeom>
           <a:solidFill>
-            <a:srgbClr val="E11D48"/>
+            <a:srgbClr val="EA580C"/>
           </a:solidFill>
           <a:ln>
             <a:noFill/>
@@ -12018,7 +15955,7 @@
                   <a:srgbClr val="0F172A"/>
                 </a:solidFill>
               </a:rPr>
-              <a:t>3. 5-MINUTE TACTICAL CYCLE
+              <a:t>3. 6-DOF TAIT-BRYAN RAY-CASTING
 </a:t>
             </a:r>
           </a:p>
@@ -12029,8 +15966,8 @@
                   <a:srgbClr val="0D9488"/>
                 </a:solidFill>
               </a:rPr>
-              <a:t>Golden 72 Hours Response Compression
-Instant Triage Priority for NDRF / SDRF
+              <a:t>Optical-to-Ground Vector Projection
+Accuracy: WGS-84 within ±2.1m SEP
 </a:t>
             </a:r>
           </a:p>
@@ -12041,7 +15978,7 @@
                   <a:srgbClr val="475569"/>
                 </a:solidFill>
               </a:rPr>
-              <a:t>What traditionally takes hours of agonizing, dangerous foot searches across square kilometers of debris is compressed into a rapid sub-5-minute autonomous sortie from unboxing to casualty recovery.</a:t>
+              <a:t>Hovering overhead puts drones at risk of collision. The drone flies at an oblique standoff angle; its onboard NPU projects camera bounding-box pixels directly onto a local DEM elevation grid in &lt; 60 ms.</a:t>
             </a:r>
           </a:p>
         </p:txBody>
@@ -12233,7 +16170,7 @@
                 </a:solidFill>
                 <a:latin typeface="Calibri"/>
               </a:rPr>
-              <a:t>TACTICAL PARADIGM SHIFT · FIRST RESPONDER RESILIENCE</a:t>
+              <a:t>INCIDENT COMMAND &amp; GIS ROUTING · FIRST RESPONDER INTEGRATION</a:t>
             </a:r>
           </a:p>
         </p:txBody>
@@ -12267,7 +16204,7 @@
                 </a:solidFill>
                 <a:latin typeface="Calibri"/>
               </a:rPr>
-              <a:t>Traditional Foot Search vs. Project Phoenix X Autonomous Triage</a:t>
+              <a:t>From Airborne Detection to Boots-on-Ground Extraction in &lt; 5 Minutes</a:t>
             </a:r>
           </a:p>
         </p:txBody>
@@ -12287,11 +16224,11 @@
             <a:avLst/>
           </a:prstGeom>
           <a:solidFill>
-            <a:srgbClr val="FFF7ED"/>
+            <a:srgbClr val="F0FDFA"/>
           </a:solidFill>
           <a:ln w="12700">
             <a:solidFill>
-              <a:srgbClr val="FED7AA"/>
+              <a:srgbClr val="0D9488"/>
             </a:solidFill>
           </a:ln>
         </p:spPr>
@@ -12317,11 +16254,11 @@
             <a:r>
               <a:rPr sz="950" b="1">
                 <a:solidFill>
-                  <a:srgbClr val="EA580C"/>
+                  <a:srgbClr val="0D9488"/>
                 </a:solidFill>
                 <a:latin typeface="Calibri"/>
               </a:rPr>
-              <a:t>OPERATIONAL IMPACT</a:t>
+              <a:t>TACTICAL RESCUE GCS</a:t>
             </a:r>
           </a:p>
         </p:txBody>
@@ -12334,8 +16271,8 @@
         </p:nvSpPr>
         <p:spPr>
           <a:xfrm>
-            <a:off x="548640" y="1143000"/>
-            <a:ext cx="5349240" cy="5120640"/>
+            <a:off x="548640" y="1051560"/>
+            <a:ext cx="7132320" cy="5349240"/>
           </a:xfrm>
           <a:prstGeom prst="roundRect">
             <a:avLst/>
@@ -12343,9 +16280,9 @@
           <a:solidFill>
             <a:srgbClr val="FFFFFF"/>
           </a:solidFill>
-          <a:ln w="19050">
+          <a:ln w="15240">
             <a:solidFill>
-              <a:srgbClr val="FFF1F2"/>
+              <a:srgbClr val="E2E8F0"/>
             </a:solidFill>
           </a:ln>
           <a:effectLst>
@@ -12371,172 +16308,57 @@
           </a:fontRef>
         </p:style>
         <p:txBody>
-          <a:bodyPr rtlCol="0" anchor="t" lIns="320040" rIns="320040" tIns="274320"/>
-          <a:lstStyle/>
-          <a:p>
-            <a:pPr algn="ctr"/>
-            <a:r>
-              <a:rPr b="1" sz="1300">
-                <a:solidFill>
-                  <a:srgbClr val="E11D48"/>
-                </a:solidFill>
-              </a:rPr>
-              <a:t>TRADITIONAL DISASTER RECONNAISSANCE
-</a:t>
-            </a:r>
-          </a:p>
-          <a:p>
-            <a:r>
-              <a:rPr sz="1000">
-                <a:solidFill>
-                  <a:srgbClr val="64748B"/>
-                </a:solidFill>
-              </a:rPr>
-              <a:t>Manual Foot Sweeps &amp; Standard Visual Cameras
-</a:t>
-            </a:r>
-          </a:p>
-          <a:p>
-            <a:r>
-              <a:rPr b="1" sz="1000">
-                <a:solidFill>
-                  <a:srgbClr val="0F172A"/>
-                </a:solidFill>
-              </a:rPr>
-              <a:t>❌ Blind Foot Patrols:</a:t>
-            </a:r>
-            <a:r>
-              <a:rPr sz="1000">
-                <a:solidFill>
-                  <a:srgbClr val="475569"/>
-                </a:solidFill>
-              </a:rPr>
-              <a:t> Rescuers sweep unstable terrain on foot across square kilometers; takes 4 to 8 hours per sector.
-</a:t>
-            </a:r>
-          </a:p>
-          <a:p>
-            <a:r>
-              <a:rPr b="1" sz="1000">
-                <a:solidFill>
-                  <a:srgbClr val="0F172A"/>
-                </a:solidFill>
-              </a:rPr>
-              <a:t>❌ Darkness &amp; Smoke Blockade:</a:t>
-            </a:r>
-            <a:r>
-              <a:rPr sz="1000">
-                <a:solidFill>
-                  <a:srgbClr val="475569"/>
-                </a:solidFill>
-              </a:rPr>
-              <a:t> Operations halt at sunset; dust and thick smoke plumes completely blind standard optical cameras.
-</a:t>
-            </a:r>
-          </a:p>
-          <a:p>
-            <a:r>
-              <a:rPr b="1" sz="1000">
-                <a:solidFill>
-                  <a:srgbClr val="0F172A"/>
-                </a:solidFill>
-              </a:rPr>
-              <a:t>❌ Rescuer Secondary Casualties:</a:t>
-            </a:r>
-            <a:r>
-              <a:rPr sz="1000">
-                <a:solidFill>
-                  <a:srgbClr val="475569"/>
-                </a:solidFill>
-              </a:rPr>
-              <a:t> Crews step blindly into severed 11kV live powerlines, gas leaks, and secondary mudslide slip planes.
-</a:t>
-            </a:r>
-          </a:p>
-          <a:p>
-            <a:r>
-              <a:rPr b="1" sz="1000">
-                <a:solidFill>
-                  <a:srgbClr val="0F172A"/>
-                </a:solidFill>
-              </a:rPr>
-              <a:t>❌ Cellular Infrastructure Collapse:</a:t>
-            </a:r>
-            <a:r>
-              <a:rPr sz="1000">
-                <a:solidFill>
-                  <a:srgbClr val="475569"/>
-                </a:solidFill>
-              </a:rPr>
-              <a:t> Drones relying on 4G/5G mobile towers or Wi-Fi stream fail instantly when towers collapse.
-</a:t>
-            </a:r>
-          </a:p>
-        </p:txBody>
-      </p:sp>
-      <p:sp>
-        <p:nvSpPr>
-          <p:cNvPr id="8" name="Rounded Rectangle 7"/>
-          <p:cNvSpPr/>
-          <p:nvPr/>
-        </p:nvSpPr>
-        <p:spPr>
-          <a:xfrm>
-            <a:off x="548640" y="1143000"/>
-            <a:ext cx="5349240" cy="73152"/>
+          <a:bodyPr rtlCol="0" anchor="ctr"/>
+          <a:lstStyle/>
+          <a:p>
+            <a:pPr algn="ctr"/>
+          </a:p>
+        </p:txBody>
+      </p:sp>
+      <p:pic>
+        <p:nvPicPr>
+          <p:cNvPr id="8" name="Picture 7" descr="tactical_gcs_safe_route_tablet.jpg"/>
+          <p:cNvPicPr>
+            <a:picLocks noChangeAspect="1"/>
+          </p:cNvPicPr>
+          <p:nvPr/>
+        </p:nvPicPr>
+        <p:blipFill>
+          <a:blip r:embed="rId2"/>
+          <a:stretch>
+            <a:fillRect/>
+          </a:stretch>
+        </p:blipFill>
+        <p:spPr>
+          <a:xfrm>
+            <a:off x="685800" y="1188720"/>
+            <a:ext cx="6858000" cy="5074920"/>
+          </a:xfrm>
+          <a:prstGeom prst="rect">
+            <a:avLst/>
+          </a:prstGeom>
+        </p:spPr>
+      </p:pic>
+      <p:sp>
+        <p:nvSpPr>
+          <p:cNvPr id="9" name="Rounded Rectangle 8"/>
+          <p:cNvSpPr/>
+          <p:nvPr/>
+        </p:nvSpPr>
+        <p:spPr>
+          <a:xfrm>
+            <a:off x="7909560" y="1051560"/>
+            <a:ext cx="3730752" cy="1664208"/>
           </a:xfrm>
           <a:prstGeom prst="roundRect">
             <a:avLst/>
           </a:prstGeom>
           <a:solidFill>
-            <a:srgbClr val="E11D48"/>
-          </a:solidFill>
-          <a:ln>
-            <a:noFill/>
-          </a:ln>
-        </p:spPr>
-        <p:style>
-          <a:lnRef idx="1">
-            <a:schemeClr val="accent1"/>
-          </a:lnRef>
-          <a:fillRef idx="3">
-            <a:schemeClr val="accent1"/>
-          </a:fillRef>
-          <a:effectRef idx="2">
-            <a:schemeClr val="accent1"/>
-          </a:effectRef>
-          <a:fontRef idx="minor">
-            <a:schemeClr val="lt1"/>
-          </a:fontRef>
-        </p:style>
-        <p:txBody>
-          <a:bodyPr rtlCol="0" anchor="ctr"/>
-          <a:lstStyle/>
-          <a:p>
-            <a:pPr algn="ctr"/>
-          </a:p>
-        </p:txBody>
-      </p:sp>
-      <p:sp>
-        <p:nvSpPr>
-          <p:cNvPr id="9" name="Rounded Rectangle 8"/>
-          <p:cNvSpPr/>
-          <p:nvPr/>
-        </p:nvSpPr>
-        <p:spPr>
-          <a:xfrm>
-            <a:off x="6291072" y="1143000"/>
-            <a:ext cx="5349240" cy="5120640"/>
-          </a:xfrm>
-          <a:prstGeom prst="roundRect">
-            <a:avLst/>
-          </a:prstGeom>
-          <a:solidFill>
             <a:srgbClr val="FFFFFF"/>
           </a:solidFill>
-          <a:ln w="19050">
+          <a:ln w="12700">
             <a:solidFill>
-              <a:srgbClr val="F0FDFA"/>
+              <a:srgbClr val="E2E8F0"/>
             </a:solidFill>
           </a:ln>
           <a:effectLst>
@@ -12562,105 +16384,40 @@
           </a:fontRef>
         </p:style>
         <p:txBody>
-          <a:bodyPr rtlCol="0" anchor="t" lIns="320040" rIns="320040" tIns="274320"/>
-          <a:lstStyle/>
-          <a:p>
-            <a:pPr algn="ctr"/>
-            <a:r>
-              <a:rPr b="1" sz="1300">
-                <a:solidFill>
-                  <a:srgbClr val="0D9488"/>
-                </a:solidFill>
-              </a:rPr>
-              <a:t>PROJECT PHOENIX X AUTONOMOUS TRIAGE
+          <a:bodyPr rtlCol="0" anchor="t" lIns="201168" rIns="182880" tIns="128016"/>
+          <a:lstStyle/>
+          <a:p>
+            <a:pPr algn="ctr"/>
+            <a:r>
+              <a:rPr b="1" sz="1100">
+                <a:solidFill>
+                  <a:srgbClr val="0F172A"/>
+                </a:solidFill>
+              </a:rPr>
+              <a:t>1. 17-BYTE LORA PACKET INGESTION
 </a:t>
             </a:r>
           </a:p>
           <a:p>
             <a:r>
-              <a:rPr sz="1000">
-                <a:solidFill>
-                  <a:srgbClr val="64748B"/>
-                </a:solidFill>
-              </a:rPr>
-              <a:t>Dual-Brain Tactical Edge AI &amp; Long-Range Telemetry
+              <a:rPr b="1" sz="850">
+                <a:solidFill>
+                  <a:srgbClr val="0284C7"/>
+                </a:solidFill>
+              </a:rPr>
+              <a:t>Zero Cloud / Zero Internet Architecture
+Air-Gapped Local Tactical Mesh (868 MHz)
 </a:t>
             </a:r>
           </a:p>
           <a:p>
             <a:r>
-              <a:rPr b="1" sz="1000">
-                <a:solidFill>
-                  <a:srgbClr val="0F172A"/>
-                </a:solidFill>
-              </a:rPr>
-              <a:t>✓ Rapid Aerial Grid Sweep:</a:t>
-            </a:r>
-            <a:r>
-              <a:rPr sz="1000">
+              <a:rPr sz="950">
                 <a:solidFill>
                   <a:srgbClr val="475569"/>
                 </a:solidFill>
               </a:rPr>
-              <a:t> Covers 2.0 km² in &lt;15 minutes. Launches from backpack in under 3 minutes without infrastructure.
-</a:t>
-            </a:r>
-          </a:p>
-          <a:p>
-            <a:r>
-              <a:rPr b="1" sz="1000">
-                <a:solidFill>
-                  <a:srgbClr val="0F172A"/>
-                </a:solidFill>
-              </a:rPr>
-              <a:t>✓ 24/7 Radiometric Thermal Lock:</a:t>
-            </a:r>
-            <a:r>
-              <a:rPr sz="1000">
-                <a:solidFill>
-                  <a:srgbClr val="475569"/>
-                </a:solidFill>
-              </a:rPr>
-              <a:t> Penetrates fog and darkness; locks living 37°C body heat through crevices using NETD &lt; 50 mK LWIR.
-</a:t>
-            </a:r>
-          </a:p>
-          <a:p>
-            <a:r>
-              <a:rPr b="1" sz="1000">
-                <a:solidFill>
-                  <a:srgbClr val="0F172A"/>
-                </a:solidFill>
-              </a:rPr>
-              <a:t>✓ Automated Safe-Path Routing:</a:t>
-            </a:r>
-            <a:r>
-              <a:rPr sz="1000">
-                <a:solidFill>
-                  <a:srgbClr val="475569"/>
-                </a:solidFill>
-              </a:rPr>
-              <a:t> Hazard-aware Dijkstra pathfinding calculates pedestrian extraction route avoiding live 11kV lines.
-</a:t>
-            </a:r>
-          </a:p>
-          <a:p>
-            <a:r>
-              <a:rPr b="1" sz="1000">
-                <a:solidFill>
-                  <a:srgbClr val="0F172A"/>
-                </a:solidFill>
-              </a:rPr>
-              <a:t>✓ 100% Offline 868 MHz LoRa Link:</a:t>
-            </a:r>
-            <a:r>
-              <a:rPr sz="1000">
-                <a:solidFill>
-                  <a:srgbClr val="475569"/>
-                </a:solidFill>
-              </a:rPr>
-              <a:t> Souli et al. (Elsevier 2024) 17-byte binary bit-packing beams coordinates across 3–5 km reliably.
-</a:t>
+              <a:t>Incoming telemetry packets unpack victim coordinates, biological body temperature (37.0°C), and triage status directly into the offline Leaflet GIS dashboard in milliseconds without commercial cellular service.</a:t>
             </a:r>
           </a:p>
         </p:txBody>
@@ -12673,14 +16430,14 @@
         </p:nvSpPr>
         <p:spPr>
           <a:xfrm>
-            <a:off x="6291072" y="1143000"/>
-            <a:ext cx="5349240" cy="73152"/>
+            <a:off x="7909560" y="1051560"/>
+            <a:ext cx="73152" cy="1664208"/>
           </a:xfrm>
           <a:prstGeom prst="roundRect">
             <a:avLst/>
           </a:prstGeom>
           <a:solidFill>
-            <a:srgbClr val="0D9488"/>
+            <a:srgbClr val="0284C7"/>
           </a:solidFill>
           <a:ln>
             <a:noFill/>
@@ -12705,6 +16462,1385 @@
           <a:lstStyle/>
           <a:p>
             <a:pPr algn="ctr"/>
+          </a:p>
+        </p:txBody>
+      </p:sp>
+      <p:sp>
+        <p:nvSpPr>
+          <p:cNvPr id="11" name="Rounded Rectangle 10"/>
+          <p:cNvSpPr/>
+          <p:nvPr/>
+        </p:nvSpPr>
+        <p:spPr>
+          <a:xfrm>
+            <a:off x="7909560" y="2889504"/>
+            <a:ext cx="3730752" cy="1664208"/>
+          </a:xfrm>
+          <a:prstGeom prst="roundRect">
+            <a:avLst/>
+          </a:prstGeom>
+          <a:solidFill>
+            <a:srgbClr val="FFFFFF"/>
+          </a:solidFill>
+          <a:ln w="12700">
+            <a:solidFill>
+              <a:srgbClr val="E2E8F0"/>
+            </a:solidFill>
+          </a:ln>
+          <a:effectLst>
+            <a:outerShdw blurRad="101600" dist="25400" dir="5400000" algn="t" rotWithShape="0">
+              <a:srgbClr val="0F172A">
+                <a:alpha val="10000"/>
+              </a:srgbClr>
+            </a:outerShdw>
+          </a:effectLst>
+        </p:spPr>
+        <p:style>
+          <a:lnRef idx="1">
+            <a:schemeClr val="accent1"/>
+          </a:lnRef>
+          <a:fillRef idx="3">
+            <a:schemeClr val="accent1"/>
+          </a:fillRef>
+          <a:effectRef idx="2">
+            <a:schemeClr val="accent1"/>
+          </a:effectRef>
+          <a:fontRef idx="minor">
+            <a:schemeClr val="lt1"/>
+          </a:fontRef>
+        </p:style>
+        <p:txBody>
+          <a:bodyPr rtlCol="0" anchor="t" lIns="201168" rIns="182880" tIns="128016"/>
+          <a:lstStyle/>
+          <a:p>
+            <a:pPr algn="ctr"/>
+            <a:r>
+              <a:rPr b="1" sz="1100">
+                <a:solidFill>
+                  <a:srgbClr val="0F172A"/>
+                </a:solidFill>
+              </a:rPr>
+              <a:t>2. HAZARD-AWARE DIJKSTRA ROUTING
+</a:t>
+            </a:r>
+          </a:p>
+          <a:p>
+            <a:r>
+              <a:rPr b="1" sz="850">
+                <a:solidFill>
+                  <a:srgbClr val="E11D48"/>
+                </a:solidFill>
+              </a:rPr>
+              <a:t>Dynamic Obstacle &amp; Danger Buffers
+Avoids: 11kV Severed Wires, Landslides, Fires
+</a:t>
+            </a:r>
+          </a:p>
+          <a:p>
+            <a:r>
+              <a:rPr sz="950">
+                <a:solidFill>
+                  <a:srgbClr val="475569"/>
+                </a:solidFill>
+              </a:rPr>
+              <a:t>Rescuers walking blindly into disaster zones suffer secondary casualties. Phoenix X plots an automated, hazard-weighted pedestrian extraction path navigating safely around verified hazards.</a:t>
+            </a:r>
+          </a:p>
+        </p:txBody>
+      </p:sp>
+      <p:sp>
+        <p:nvSpPr>
+          <p:cNvPr id="12" name="Rounded Rectangle 11"/>
+          <p:cNvSpPr/>
+          <p:nvPr/>
+        </p:nvSpPr>
+        <p:spPr>
+          <a:xfrm>
+            <a:off x="7909560" y="2889504"/>
+            <a:ext cx="73152" cy="1664208"/>
+          </a:xfrm>
+          <a:prstGeom prst="roundRect">
+            <a:avLst/>
+          </a:prstGeom>
+          <a:solidFill>
+            <a:srgbClr val="E11D48"/>
+          </a:solidFill>
+          <a:ln>
+            <a:noFill/>
+          </a:ln>
+        </p:spPr>
+        <p:style>
+          <a:lnRef idx="1">
+            <a:schemeClr val="accent1"/>
+          </a:lnRef>
+          <a:fillRef idx="3">
+            <a:schemeClr val="accent1"/>
+          </a:fillRef>
+          <a:effectRef idx="2">
+            <a:schemeClr val="accent1"/>
+          </a:effectRef>
+          <a:fontRef idx="minor">
+            <a:schemeClr val="lt1"/>
+          </a:fontRef>
+        </p:style>
+        <p:txBody>
+          <a:bodyPr rtlCol="0" anchor="ctr"/>
+          <a:lstStyle/>
+          <a:p>
+            <a:pPr algn="ctr"/>
+          </a:p>
+        </p:txBody>
+      </p:sp>
+      <p:sp>
+        <p:nvSpPr>
+          <p:cNvPr id="13" name="Rounded Rectangle 12"/>
+          <p:cNvSpPr/>
+          <p:nvPr/>
+        </p:nvSpPr>
+        <p:spPr>
+          <a:xfrm>
+            <a:off x="7909560" y="4727448"/>
+            <a:ext cx="3730752" cy="1664208"/>
+          </a:xfrm>
+          <a:prstGeom prst="roundRect">
+            <a:avLst/>
+          </a:prstGeom>
+          <a:solidFill>
+            <a:srgbClr val="FFFFFF"/>
+          </a:solidFill>
+          <a:ln w="12700">
+            <a:solidFill>
+              <a:srgbClr val="E2E8F0"/>
+            </a:solidFill>
+          </a:ln>
+          <a:effectLst>
+            <a:outerShdw blurRad="101600" dist="25400" dir="5400000" algn="t" rotWithShape="0">
+              <a:srgbClr val="0F172A">
+                <a:alpha val="10000"/>
+              </a:srgbClr>
+            </a:outerShdw>
+          </a:effectLst>
+        </p:spPr>
+        <p:style>
+          <a:lnRef idx="1">
+            <a:schemeClr val="accent1"/>
+          </a:lnRef>
+          <a:fillRef idx="3">
+            <a:schemeClr val="accent1"/>
+          </a:fillRef>
+          <a:effectRef idx="2">
+            <a:schemeClr val="accent1"/>
+          </a:effectRef>
+          <a:fontRef idx="minor">
+            <a:schemeClr val="lt1"/>
+          </a:fontRef>
+        </p:style>
+        <p:txBody>
+          <a:bodyPr rtlCol="0" anchor="t" lIns="201168" rIns="182880" tIns="128016"/>
+          <a:lstStyle/>
+          <a:p>
+            <a:pPr algn="ctr"/>
+            <a:r>
+              <a:rPr b="1" sz="1100">
+                <a:solidFill>
+                  <a:srgbClr val="0F172A"/>
+                </a:solidFill>
+              </a:rPr>
+              <a:t>3. 5-MINUTE TACTICAL CYCLE
+</a:t>
+            </a:r>
+          </a:p>
+          <a:p>
+            <a:r>
+              <a:rPr b="1" sz="850">
+                <a:solidFill>
+                  <a:srgbClr val="0D9488"/>
+                </a:solidFill>
+              </a:rPr>
+              <a:t>Golden 72 Hours Response Compression
+Instant Triage Priority for NDRF / SDRF
+</a:t>
+            </a:r>
+          </a:p>
+          <a:p>
+            <a:r>
+              <a:rPr sz="950">
+                <a:solidFill>
+                  <a:srgbClr val="475569"/>
+                </a:solidFill>
+              </a:rPr>
+              <a:t>What traditionally takes hours of agonizing, dangerous foot searches across square kilometers of debris is compressed into a rapid sub-5-minute autonomous sortie from unboxing to casualty recovery.</a:t>
+            </a:r>
+          </a:p>
+        </p:txBody>
+      </p:sp>
+      <p:sp>
+        <p:nvSpPr>
+          <p:cNvPr id="14" name="Rounded Rectangle 13"/>
+          <p:cNvSpPr/>
+          <p:nvPr/>
+        </p:nvSpPr>
+        <p:spPr>
+          <a:xfrm>
+            <a:off x="7909560" y="4727448"/>
+            <a:ext cx="73152" cy="1664208"/>
+          </a:xfrm>
+          <a:prstGeom prst="roundRect">
+            <a:avLst/>
+          </a:prstGeom>
+          <a:solidFill>
+            <a:srgbClr val="0D9488"/>
+          </a:solidFill>
+          <a:ln>
+            <a:noFill/>
+          </a:ln>
+        </p:spPr>
+        <p:style>
+          <a:lnRef idx="1">
+            <a:schemeClr val="accent1"/>
+          </a:lnRef>
+          <a:fillRef idx="3">
+            <a:schemeClr val="accent1"/>
+          </a:fillRef>
+          <a:effectRef idx="2">
+            <a:schemeClr val="accent1"/>
+          </a:effectRef>
+          <a:fontRef idx="minor">
+            <a:schemeClr val="lt1"/>
+          </a:fontRef>
+        </p:style>
+        <p:txBody>
+          <a:bodyPr rtlCol="0" anchor="ctr"/>
+          <a:lstStyle/>
+          <a:p>
+            <a:pPr algn="ctr"/>
+          </a:p>
+        </p:txBody>
+      </p:sp>
+    </p:spTree>
+  </p:cSld>
+  <p:clrMapOvr>
+    <a:masterClrMapping/>
+  </p:clrMapOvr>
+</p:sld>
+</file>
+
+<file path=ppt/slides/slide8.xml><?xml version="1.0" encoding="utf-8"?>
+<p:sld xmlns:a="http://schemas.openxmlformats.org/drawingml/2006/main" xmlns:p="http://schemas.openxmlformats.org/presentationml/2006/main" xmlns:r="http://schemas.openxmlformats.org/officeDocument/2006/relationships">
+  <p:cSld>
+    <p:spTree>
+      <p:nvGrpSpPr>
+        <p:cNvPr id="1" name=""/>
+        <p:cNvGrpSpPr/>
+        <p:nvPr/>
+      </p:nvGrpSpPr>
+      <p:grpSpPr/>
+      <p:sp>
+        <p:nvSpPr>
+          <p:cNvPr id="2" name="Rectangle 1"/>
+          <p:cNvSpPr/>
+          <p:nvPr/>
+        </p:nvSpPr>
+        <p:spPr>
+          <a:xfrm>
+            <a:off x="0" y="0"/>
+            <a:ext cx="12191695" cy="6858000"/>
+          </a:xfrm>
+          <a:prstGeom prst="rect">
+            <a:avLst/>
+          </a:prstGeom>
+          <a:solidFill>
+            <a:srgbClr val="F8FAFC"/>
+          </a:solidFill>
+          <a:ln>
+            <a:noFill/>
+          </a:ln>
+        </p:spPr>
+        <p:style>
+          <a:lnRef idx="1">
+            <a:schemeClr val="accent1"/>
+          </a:lnRef>
+          <a:fillRef idx="3">
+            <a:schemeClr val="accent1"/>
+          </a:fillRef>
+          <a:effectRef idx="2">
+            <a:schemeClr val="accent1"/>
+          </a:effectRef>
+          <a:fontRef idx="minor">
+            <a:schemeClr val="lt1"/>
+          </a:fontRef>
+        </p:style>
+        <p:txBody>
+          <a:bodyPr rtlCol="0" anchor="ctr"/>
+          <a:lstStyle/>
+          <a:p>
+            <a:pPr algn="ctr"/>
+          </a:p>
+        </p:txBody>
+      </p:sp>
+      <p:sp>
+        <p:nvSpPr>
+          <p:cNvPr id="3" name="Rounded Rectangle 2"/>
+          <p:cNvSpPr/>
+          <p:nvPr/>
+        </p:nvSpPr>
+        <p:spPr>
+          <a:xfrm>
+            <a:off x="548640" y="274320"/>
+            <a:ext cx="1691640" cy="384048"/>
+          </a:xfrm>
+          <a:prstGeom prst="roundRect">
+            <a:avLst/>
+          </a:prstGeom>
+          <a:solidFill>
+            <a:srgbClr val="FFFFFF"/>
+          </a:solidFill>
+          <a:ln w="12700">
+            <a:solidFill>
+              <a:srgbClr val="E2E8F0"/>
+            </a:solidFill>
+          </a:ln>
+        </p:spPr>
+        <p:style>
+          <a:lnRef idx="1">
+            <a:schemeClr val="accent1"/>
+          </a:lnRef>
+          <a:fillRef idx="3">
+            <a:schemeClr val="accent1"/>
+          </a:fillRef>
+          <a:effectRef idx="2">
+            <a:schemeClr val="accent1"/>
+          </a:effectRef>
+          <a:fontRef idx="minor">
+            <a:schemeClr val="lt1"/>
+          </a:fontRef>
+        </p:style>
+        <p:txBody>
+          <a:bodyPr rtlCol="0" anchor="ctr"/>
+          <a:lstStyle/>
+          <a:p>
+            <a:pPr algn="ctr"/>
+            <a:r>
+              <a:rPr sz="950" b="1">
+                <a:solidFill>
+                  <a:srgbClr val="1E293B"/>
+                </a:solidFill>
+                <a:latin typeface="Calibri"/>
+              </a:rPr>
+              <a:t>PHOENIX X · SIH26177</a:t>
+            </a:r>
+          </a:p>
+        </p:txBody>
+      </p:sp>
+      <p:sp>
+        <p:nvSpPr>
+          <p:cNvPr id="4" name="TextBox 3"/>
+          <p:cNvSpPr txBox="1"/>
+          <p:nvPr/>
+        </p:nvSpPr>
+        <p:spPr>
+          <a:xfrm>
+            <a:off x="2377440" y="219456"/>
+            <a:ext cx="6949440" cy="219456"/>
+          </a:xfrm>
+          <a:prstGeom prst="rect">
+            <a:avLst/>
+          </a:prstGeom>
+          <a:noFill/>
+        </p:spPr>
+        <p:txBody>
+          <a:bodyPr wrap="none" lIns="0" rIns="0" tIns="0" bIns="0">
+            <a:spAutoFit/>
+          </a:bodyPr>
+          <a:lstStyle/>
+          <a:p>
+            <a:r>
+              <a:rPr sz="950" b="1">
+                <a:solidFill>
+                  <a:srgbClr val="EA580C"/>
+                </a:solidFill>
+                <a:latin typeface="Calibri"/>
+              </a:rPr>
+              <a:t>OPERATIONAL PIPELINE · ZERO-CONNECTIVITY RECONNAISSANCE</a:t>
+            </a:r>
+          </a:p>
+        </p:txBody>
+      </p:sp>
+      <p:sp>
+        <p:nvSpPr>
+          <p:cNvPr id="5" name="TextBox 4"/>
+          <p:cNvSpPr txBox="1"/>
+          <p:nvPr/>
+        </p:nvSpPr>
+        <p:spPr>
+          <a:xfrm>
+            <a:off x="2377440" y="438912"/>
+            <a:ext cx="6949440" cy="411480"/>
+          </a:xfrm>
+          <a:prstGeom prst="rect">
+            <a:avLst/>
+          </a:prstGeom>
+          <a:noFill/>
+        </p:spPr>
+        <p:txBody>
+          <a:bodyPr wrap="none" lIns="0" rIns="0" tIns="0" bIns="0">
+            <a:spAutoFit/>
+          </a:bodyPr>
+          <a:lstStyle/>
+          <a:p>
+            <a:r>
+              <a:rPr sz="1700" b="1">
+                <a:solidFill>
+                  <a:srgbClr val="0F172A"/>
+                </a:solidFill>
+                <a:latin typeface="Calibri"/>
+              </a:rPr>
+              <a:t>End-to-End Autonomous Reconnaissance &amp; Survivor Extraction Flow</a:t>
+            </a:r>
+          </a:p>
+        </p:txBody>
+      </p:sp>
+      <p:sp>
+        <p:nvSpPr>
+          <p:cNvPr id="6" name="Rounded Rectangle 5"/>
+          <p:cNvSpPr/>
+          <p:nvPr/>
+        </p:nvSpPr>
+        <p:spPr>
+          <a:xfrm>
+            <a:off x="9418320" y="274320"/>
+            <a:ext cx="2194560" cy="384048"/>
+          </a:xfrm>
+          <a:prstGeom prst="roundRect">
+            <a:avLst/>
+          </a:prstGeom>
+          <a:solidFill>
+            <a:srgbClr val="FFF7ED"/>
+          </a:solidFill>
+          <a:ln w="12700">
+            <a:solidFill>
+              <a:srgbClr val="FED7AA"/>
+            </a:solidFill>
+          </a:ln>
+        </p:spPr>
+        <p:style>
+          <a:lnRef idx="1">
+            <a:schemeClr val="accent1"/>
+          </a:lnRef>
+          <a:fillRef idx="3">
+            <a:schemeClr val="accent1"/>
+          </a:fillRef>
+          <a:effectRef idx="2">
+            <a:schemeClr val="accent1"/>
+          </a:effectRef>
+          <a:fontRef idx="minor">
+            <a:schemeClr val="lt1"/>
+          </a:fontRef>
+        </p:style>
+        <p:txBody>
+          <a:bodyPr rtlCol="0" anchor="ctr"/>
+          <a:lstStyle/>
+          <a:p>
+            <a:pPr algn="ctr"/>
+            <a:r>
+              <a:rPr sz="950" b="1">
+                <a:solidFill>
+                  <a:srgbClr val="EA580C"/>
+                </a:solidFill>
+                <a:latin typeface="Calibri"/>
+              </a:rPr>
+              <a:t>RAPID SORTIE PIPELINE</a:t>
+            </a:r>
+          </a:p>
+        </p:txBody>
+      </p:sp>
+      <p:sp>
+        <p:nvSpPr>
+          <p:cNvPr id="7" name="Rounded Rectangle 6"/>
+          <p:cNvSpPr/>
+          <p:nvPr/>
+        </p:nvSpPr>
+        <p:spPr>
+          <a:xfrm>
+            <a:off x="548640" y="1143000"/>
+            <a:ext cx="2084831" cy="5120640"/>
+          </a:xfrm>
+          <a:prstGeom prst="roundRect">
+            <a:avLst/>
+          </a:prstGeom>
+          <a:solidFill>
+            <a:srgbClr val="FFFFFF"/>
+          </a:solidFill>
+          <a:ln w="15240">
+            <a:solidFill>
+              <a:srgbClr val="E2E8F0"/>
+            </a:solidFill>
+          </a:ln>
+          <a:effectLst>
+            <a:outerShdw blurRad="101600" dist="25400" dir="5400000" algn="t" rotWithShape="0">
+              <a:srgbClr val="0F172A">
+                <a:alpha val="10000"/>
+              </a:srgbClr>
+            </a:outerShdw>
+          </a:effectLst>
+        </p:spPr>
+        <p:style>
+          <a:lnRef idx="1">
+            <a:schemeClr val="accent1"/>
+          </a:lnRef>
+          <a:fillRef idx="3">
+            <a:schemeClr val="accent1"/>
+          </a:fillRef>
+          <a:effectRef idx="2">
+            <a:schemeClr val="accent1"/>
+          </a:effectRef>
+          <a:fontRef idx="minor">
+            <a:schemeClr val="lt1"/>
+          </a:fontRef>
+        </p:style>
+        <p:txBody>
+          <a:bodyPr rtlCol="0" anchor="t" lIns="182880" rIns="182880" tIns="868680"/>
+          <a:lstStyle/>
+          <a:p>
+            <a:pPr algn="ctr"/>
+            <a:r>
+              <a:rPr b="1" sz="1100">
+                <a:solidFill>
+                  <a:srgbClr val="0F172A"/>
+                </a:solidFill>
+              </a:rPr>
+              <a:t>1. RAPID SORTIE LAUNCH
+</a:t>
+            </a:r>
+          </a:p>
+          <a:p>
+            <a:r>
+              <a:rPr b="1" sz="950">
+                <a:solidFill>
+                  <a:srgbClr val="EA580C"/>
+                </a:solidFill>
+              </a:rPr>
+              <a:t>&lt; 3 Minutes Deployment
+</a:t>
+            </a:r>
+          </a:p>
+          <a:p>
+            <a:r>
+              <a:rPr sz="950">
+                <a:solidFill>
+                  <a:srgbClr val="475569"/>
+                </a:solidFill>
+              </a:rPr>
+              <a:t>Operator outlines 2 km² search polygon on offline tablet. UAV unboxes from rugged backpack and auto-launches.</a:t>
+            </a:r>
+          </a:p>
+        </p:txBody>
+      </p:sp>
+      <p:sp>
+        <p:nvSpPr>
+          <p:cNvPr id="8" name="Rounded Rectangle 7"/>
+          <p:cNvSpPr/>
+          <p:nvPr/>
+        </p:nvSpPr>
+        <p:spPr>
+          <a:xfrm>
+            <a:off x="548640" y="1143000"/>
+            <a:ext cx="2084831" cy="73152"/>
+          </a:xfrm>
+          <a:prstGeom prst="roundRect">
+            <a:avLst/>
+          </a:prstGeom>
+          <a:solidFill>
+            <a:srgbClr val="EA580C"/>
+          </a:solidFill>
+          <a:ln>
+            <a:noFill/>
+          </a:ln>
+        </p:spPr>
+        <p:style>
+          <a:lnRef idx="1">
+            <a:schemeClr val="accent1"/>
+          </a:lnRef>
+          <a:fillRef idx="3">
+            <a:schemeClr val="accent1"/>
+          </a:fillRef>
+          <a:effectRef idx="2">
+            <a:schemeClr val="accent1"/>
+          </a:effectRef>
+          <a:fontRef idx="minor">
+            <a:schemeClr val="lt1"/>
+          </a:fontRef>
+        </p:style>
+        <p:txBody>
+          <a:bodyPr rtlCol="0" anchor="ctr"/>
+          <a:lstStyle/>
+          <a:p>
+            <a:pPr algn="ctr"/>
+          </a:p>
+        </p:txBody>
+      </p:sp>
+      <p:sp>
+        <p:nvSpPr>
+          <p:cNvPr id="9" name="Oval 8"/>
+          <p:cNvSpPr/>
+          <p:nvPr/>
+        </p:nvSpPr>
+        <p:spPr>
+          <a:xfrm>
+            <a:off x="731520" y="1371600"/>
+            <a:ext cx="475488" cy="475488"/>
+          </a:xfrm>
+          <a:prstGeom prst="ellipse">
+            <a:avLst/>
+          </a:prstGeom>
+          <a:solidFill>
+            <a:srgbClr val="EA580C"/>
+          </a:solidFill>
+          <a:ln w="19050">
+            <a:solidFill>
+              <a:srgbClr val="FFFFFF"/>
+            </a:solidFill>
+          </a:ln>
+        </p:spPr>
+        <p:style>
+          <a:lnRef idx="1">
+            <a:schemeClr val="accent1"/>
+          </a:lnRef>
+          <a:fillRef idx="3">
+            <a:schemeClr val="accent1"/>
+          </a:fillRef>
+          <a:effectRef idx="2">
+            <a:schemeClr val="accent1"/>
+          </a:effectRef>
+          <a:fontRef idx="minor">
+            <a:schemeClr val="lt1"/>
+          </a:fontRef>
+        </p:style>
+        <p:txBody>
+          <a:bodyPr rtlCol="0" anchor="ctr"/>
+          <a:lstStyle/>
+          <a:p>
+            <a:pPr algn="ctr"/>
+            <a:r>
+              <a:rPr b="1" sz="1300">
+                <a:solidFill>
+                  <a:srgbClr val="FFFFFF"/>
+                </a:solidFill>
+              </a:rPr>
+              <a:t>01</a:t>
+            </a:r>
+          </a:p>
+        </p:txBody>
+      </p:sp>
+      <p:sp>
+        <p:nvSpPr>
+          <p:cNvPr id="10" name="Rounded Rectangle 9"/>
+          <p:cNvSpPr/>
+          <p:nvPr/>
+        </p:nvSpPr>
+        <p:spPr>
+          <a:xfrm>
+            <a:off x="2798063" y="1143000"/>
+            <a:ext cx="2084831" cy="5120640"/>
+          </a:xfrm>
+          <a:prstGeom prst="roundRect">
+            <a:avLst/>
+          </a:prstGeom>
+          <a:solidFill>
+            <a:srgbClr val="FFFFFF"/>
+          </a:solidFill>
+          <a:ln w="15240">
+            <a:solidFill>
+              <a:srgbClr val="E2E8F0"/>
+            </a:solidFill>
+          </a:ln>
+          <a:effectLst>
+            <a:outerShdw blurRad="101600" dist="25400" dir="5400000" algn="t" rotWithShape="0">
+              <a:srgbClr val="0F172A">
+                <a:alpha val="10000"/>
+              </a:srgbClr>
+            </a:outerShdw>
+          </a:effectLst>
+        </p:spPr>
+        <p:style>
+          <a:lnRef idx="1">
+            <a:schemeClr val="accent1"/>
+          </a:lnRef>
+          <a:fillRef idx="3">
+            <a:schemeClr val="accent1"/>
+          </a:fillRef>
+          <a:effectRef idx="2">
+            <a:schemeClr val="accent1"/>
+          </a:effectRef>
+          <a:fontRef idx="minor">
+            <a:schemeClr val="lt1"/>
+          </a:fontRef>
+        </p:style>
+        <p:txBody>
+          <a:bodyPr rtlCol="0" anchor="t" lIns="182880" rIns="182880" tIns="868680"/>
+          <a:lstStyle/>
+          <a:p>
+            <a:pPr algn="ctr"/>
+            <a:r>
+              <a:rPr b="1" sz="1100">
+                <a:solidFill>
+                  <a:srgbClr val="0F172A"/>
+                </a:solidFill>
+              </a:rPr>
+              <a:t>2. BOUSTROPHEDON SWEEP
+</a:t>
+            </a:r>
+          </a:p>
+          <a:p>
+            <a:r>
+              <a:rPr b="1" sz="950">
+                <a:solidFill>
+                  <a:srgbClr val="0284C7"/>
+                </a:solidFill>
+              </a:rPr>
+              <a:t>STM32U5 @ 250 Hz Loop
+</a:t>
+            </a:r>
+          </a:p>
+          <a:p>
+            <a:r>
+              <a:rPr sz="950">
+                <a:solidFill>
+                  <a:srgbClr val="475569"/>
+                </a:solidFill>
+              </a:rPr>
+              <a:t>Autonomous lawnmower search trajectory at 25-30m AGL. 1D ToF laser altimeter maintains terrain contour following.</a:t>
+            </a:r>
+          </a:p>
+        </p:txBody>
+      </p:sp>
+      <p:sp>
+        <p:nvSpPr>
+          <p:cNvPr id="11" name="Rounded Rectangle 10"/>
+          <p:cNvSpPr/>
+          <p:nvPr/>
+        </p:nvSpPr>
+        <p:spPr>
+          <a:xfrm>
+            <a:off x="2798063" y="1143000"/>
+            <a:ext cx="2084831" cy="73152"/>
+          </a:xfrm>
+          <a:prstGeom prst="roundRect">
+            <a:avLst/>
+          </a:prstGeom>
+          <a:solidFill>
+            <a:srgbClr val="0284C7"/>
+          </a:solidFill>
+          <a:ln>
+            <a:noFill/>
+          </a:ln>
+        </p:spPr>
+        <p:style>
+          <a:lnRef idx="1">
+            <a:schemeClr val="accent1"/>
+          </a:lnRef>
+          <a:fillRef idx="3">
+            <a:schemeClr val="accent1"/>
+          </a:fillRef>
+          <a:effectRef idx="2">
+            <a:schemeClr val="accent1"/>
+          </a:effectRef>
+          <a:fontRef idx="minor">
+            <a:schemeClr val="lt1"/>
+          </a:fontRef>
+        </p:style>
+        <p:txBody>
+          <a:bodyPr rtlCol="0" anchor="ctr"/>
+          <a:lstStyle/>
+          <a:p>
+            <a:pPr algn="ctr"/>
+          </a:p>
+        </p:txBody>
+      </p:sp>
+      <p:sp>
+        <p:nvSpPr>
+          <p:cNvPr id="12" name="Oval 11"/>
+          <p:cNvSpPr/>
+          <p:nvPr/>
+        </p:nvSpPr>
+        <p:spPr>
+          <a:xfrm>
+            <a:off x="2980943" y="1371600"/>
+            <a:ext cx="475488" cy="475488"/>
+          </a:xfrm>
+          <a:prstGeom prst="ellipse">
+            <a:avLst/>
+          </a:prstGeom>
+          <a:solidFill>
+            <a:srgbClr val="0284C7"/>
+          </a:solidFill>
+          <a:ln w="19050">
+            <a:solidFill>
+              <a:srgbClr val="FFFFFF"/>
+            </a:solidFill>
+          </a:ln>
+        </p:spPr>
+        <p:style>
+          <a:lnRef idx="1">
+            <a:schemeClr val="accent1"/>
+          </a:lnRef>
+          <a:fillRef idx="3">
+            <a:schemeClr val="accent1"/>
+          </a:fillRef>
+          <a:effectRef idx="2">
+            <a:schemeClr val="accent1"/>
+          </a:effectRef>
+          <a:fontRef idx="minor">
+            <a:schemeClr val="lt1"/>
+          </a:fontRef>
+        </p:style>
+        <p:txBody>
+          <a:bodyPr rtlCol="0" anchor="ctr"/>
+          <a:lstStyle/>
+          <a:p>
+            <a:pPr algn="ctr"/>
+            <a:r>
+              <a:rPr b="1" sz="1300">
+                <a:solidFill>
+                  <a:srgbClr val="FFFFFF"/>
+                </a:solidFill>
+              </a:rPr>
+              <a:t>02</a:t>
+            </a:r>
+          </a:p>
+        </p:txBody>
+      </p:sp>
+      <p:sp>
+        <p:nvSpPr>
+          <p:cNvPr id="13" name="Rounded Rectangle 12"/>
+          <p:cNvSpPr/>
+          <p:nvPr/>
+        </p:nvSpPr>
+        <p:spPr>
+          <a:xfrm>
+            <a:off x="5047486" y="1143000"/>
+            <a:ext cx="2084831" cy="5120640"/>
+          </a:xfrm>
+          <a:prstGeom prst="roundRect">
+            <a:avLst/>
+          </a:prstGeom>
+          <a:solidFill>
+            <a:srgbClr val="FFFFFF"/>
+          </a:solidFill>
+          <a:ln w="15240">
+            <a:solidFill>
+              <a:srgbClr val="E2E8F0"/>
+            </a:solidFill>
+          </a:ln>
+          <a:effectLst>
+            <a:outerShdw blurRad="101600" dist="25400" dir="5400000" algn="t" rotWithShape="0">
+              <a:srgbClr val="0F172A">
+                <a:alpha val="10000"/>
+              </a:srgbClr>
+            </a:outerShdw>
+          </a:effectLst>
+        </p:spPr>
+        <p:style>
+          <a:lnRef idx="1">
+            <a:schemeClr val="accent1"/>
+          </a:lnRef>
+          <a:fillRef idx="3">
+            <a:schemeClr val="accent1"/>
+          </a:fillRef>
+          <a:effectRef idx="2">
+            <a:schemeClr val="accent1"/>
+          </a:effectRef>
+          <a:fontRef idx="minor">
+            <a:schemeClr val="lt1"/>
+          </a:fontRef>
+        </p:style>
+        <p:txBody>
+          <a:bodyPr rtlCol="0" anchor="t" lIns="182880" rIns="182880" tIns="868680"/>
+          <a:lstStyle/>
+          <a:p>
+            <a:pPr algn="ctr"/>
+            <a:r>
+              <a:rPr b="1" sz="1100">
+                <a:solidFill>
+                  <a:srgbClr val="0F172A"/>
+                </a:solidFill>
+              </a:rPr>
+              <a:t>3. 37°C THERMAL LOCK
+</a:t>
+            </a:r>
+          </a:p>
+          <a:p>
+            <a:r>
+              <a:rPr b="1" sz="950">
+                <a:solidFill>
+                  <a:srgbClr val="7C3AED"/>
+                </a:solidFill>
+              </a:rPr>
+              <a:t>Qualcomm NPU (&lt; 5W)
+</a:t>
+            </a:r>
+          </a:p>
+          <a:p>
+            <a:r>
+              <a:rPr sz="950">
+                <a:solidFill>
+                  <a:srgbClr val="475569"/>
+                </a:solidFill>
+              </a:rPr>
+              <a:t>Quantized INT8 YOLO model fuses daylight contours with radiometric 8-14μm body heat, spotting trapped survivors.</a:t>
+            </a:r>
+          </a:p>
+        </p:txBody>
+      </p:sp>
+      <p:sp>
+        <p:nvSpPr>
+          <p:cNvPr id="14" name="Rounded Rectangle 13"/>
+          <p:cNvSpPr/>
+          <p:nvPr/>
+        </p:nvSpPr>
+        <p:spPr>
+          <a:xfrm>
+            <a:off x="5047486" y="1143000"/>
+            <a:ext cx="2084831" cy="73152"/>
+          </a:xfrm>
+          <a:prstGeom prst="roundRect">
+            <a:avLst/>
+          </a:prstGeom>
+          <a:solidFill>
+            <a:srgbClr val="7C3AED"/>
+          </a:solidFill>
+          <a:ln>
+            <a:noFill/>
+          </a:ln>
+        </p:spPr>
+        <p:style>
+          <a:lnRef idx="1">
+            <a:schemeClr val="accent1"/>
+          </a:lnRef>
+          <a:fillRef idx="3">
+            <a:schemeClr val="accent1"/>
+          </a:fillRef>
+          <a:effectRef idx="2">
+            <a:schemeClr val="accent1"/>
+          </a:effectRef>
+          <a:fontRef idx="minor">
+            <a:schemeClr val="lt1"/>
+          </a:fontRef>
+        </p:style>
+        <p:txBody>
+          <a:bodyPr rtlCol="0" anchor="ctr"/>
+          <a:lstStyle/>
+          <a:p>
+            <a:pPr algn="ctr"/>
+          </a:p>
+        </p:txBody>
+      </p:sp>
+      <p:sp>
+        <p:nvSpPr>
+          <p:cNvPr id="15" name="Oval 14"/>
+          <p:cNvSpPr/>
+          <p:nvPr/>
+        </p:nvSpPr>
+        <p:spPr>
+          <a:xfrm>
+            <a:off x="5230366" y="1371600"/>
+            <a:ext cx="475488" cy="475488"/>
+          </a:xfrm>
+          <a:prstGeom prst="ellipse">
+            <a:avLst/>
+          </a:prstGeom>
+          <a:solidFill>
+            <a:srgbClr val="7C3AED"/>
+          </a:solidFill>
+          <a:ln w="19050">
+            <a:solidFill>
+              <a:srgbClr val="FFFFFF"/>
+            </a:solidFill>
+          </a:ln>
+        </p:spPr>
+        <p:style>
+          <a:lnRef idx="1">
+            <a:schemeClr val="accent1"/>
+          </a:lnRef>
+          <a:fillRef idx="3">
+            <a:schemeClr val="accent1"/>
+          </a:fillRef>
+          <a:effectRef idx="2">
+            <a:schemeClr val="accent1"/>
+          </a:effectRef>
+          <a:fontRef idx="minor">
+            <a:schemeClr val="lt1"/>
+          </a:fontRef>
+        </p:style>
+        <p:txBody>
+          <a:bodyPr rtlCol="0" anchor="ctr"/>
+          <a:lstStyle/>
+          <a:p>
+            <a:pPr algn="ctr"/>
+            <a:r>
+              <a:rPr b="1" sz="1300">
+                <a:solidFill>
+                  <a:srgbClr val="FFFFFF"/>
+                </a:solidFill>
+              </a:rPr>
+              <a:t>03</a:t>
+            </a:r>
+          </a:p>
+        </p:txBody>
+      </p:sp>
+      <p:sp>
+        <p:nvSpPr>
+          <p:cNvPr id="16" name="Rounded Rectangle 15"/>
+          <p:cNvSpPr/>
+          <p:nvPr/>
+        </p:nvSpPr>
+        <p:spPr>
+          <a:xfrm>
+            <a:off x="7296909" y="1143000"/>
+            <a:ext cx="2084831" cy="5120640"/>
+          </a:xfrm>
+          <a:prstGeom prst="roundRect">
+            <a:avLst/>
+          </a:prstGeom>
+          <a:solidFill>
+            <a:srgbClr val="FFFFFF"/>
+          </a:solidFill>
+          <a:ln w="15240">
+            <a:solidFill>
+              <a:srgbClr val="E2E8F0"/>
+            </a:solidFill>
+          </a:ln>
+          <a:effectLst>
+            <a:outerShdw blurRad="101600" dist="25400" dir="5400000" algn="t" rotWithShape="0">
+              <a:srgbClr val="0F172A">
+                <a:alpha val="10000"/>
+              </a:srgbClr>
+            </a:outerShdw>
+          </a:effectLst>
+        </p:spPr>
+        <p:style>
+          <a:lnRef idx="1">
+            <a:schemeClr val="accent1"/>
+          </a:lnRef>
+          <a:fillRef idx="3">
+            <a:schemeClr val="accent1"/>
+          </a:fillRef>
+          <a:effectRef idx="2">
+            <a:schemeClr val="accent1"/>
+          </a:effectRef>
+          <a:fontRef idx="minor">
+            <a:schemeClr val="lt1"/>
+          </a:fontRef>
+        </p:style>
+        <p:txBody>
+          <a:bodyPr rtlCol="0" anchor="t" lIns="182880" rIns="182880" tIns="868680"/>
+          <a:lstStyle/>
+          <a:p>
+            <a:pPr algn="ctr"/>
+            <a:r>
+              <a:rPr b="1" sz="1100">
+                <a:solidFill>
+                  <a:srgbClr val="0F172A"/>
+                </a:solidFill>
+              </a:rPr>
+              <a:t>4. 17-BYTE LORA BURST
+</a:t>
+            </a:r>
+          </a:p>
+          <a:p>
+            <a:r>
+              <a:rPr b="1" sz="950">
+                <a:solidFill>
+                  <a:srgbClr val="0284C7"/>
+                </a:solidFill>
+              </a:rPr>
+              <a:t>Souli et al. (Elsevier 2024)
+</a:t>
+            </a:r>
+          </a:p>
+          <a:p>
+            <a:r>
+              <a:rPr sz="950">
+                <a:solidFill>
+                  <a:srgbClr val="475569"/>
+                </a:solidFill>
+              </a:rPr>
+              <a:t>Tait-Bryan ray-caster projects pixel to WGS-84 pin. Lat/Long/Temp compressed into 17-byte HMAC-SHA256 packet.</a:t>
+            </a:r>
+          </a:p>
+        </p:txBody>
+      </p:sp>
+      <p:sp>
+        <p:nvSpPr>
+          <p:cNvPr id="17" name="Rounded Rectangle 16"/>
+          <p:cNvSpPr/>
+          <p:nvPr/>
+        </p:nvSpPr>
+        <p:spPr>
+          <a:xfrm>
+            <a:off x="7296909" y="1143000"/>
+            <a:ext cx="2084831" cy="73152"/>
+          </a:xfrm>
+          <a:prstGeom prst="roundRect">
+            <a:avLst/>
+          </a:prstGeom>
+          <a:solidFill>
+            <a:srgbClr val="0284C7"/>
+          </a:solidFill>
+          <a:ln>
+            <a:noFill/>
+          </a:ln>
+        </p:spPr>
+        <p:style>
+          <a:lnRef idx="1">
+            <a:schemeClr val="accent1"/>
+          </a:lnRef>
+          <a:fillRef idx="3">
+            <a:schemeClr val="accent1"/>
+          </a:fillRef>
+          <a:effectRef idx="2">
+            <a:schemeClr val="accent1"/>
+          </a:effectRef>
+          <a:fontRef idx="minor">
+            <a:schemeClr val="lt1"/>
+          </a:fontRef>
+        </p:style>
+        <p:txBody>
+          <a:bodyPr rtlCol="0" anchor="ctr"/>
+          <a:lstStyle/>
+          <a:p>
+            <a:pPr algn="ctr"/>
+          </a:p>
+        </p:txBody>
+      </p:sp>
+      <p:sp>
+        <p:nvSpPr>
+          <p:cNvPr id="18" name="Oval 17"/>
+          <p:cNvSpPr/>
+          <p:nvPr/>
+        </p:nvSpPr>
+        <p:spPr>
+          <a:xfrm>
+            <a:off x="7479789" y="1371600"/>
+            <a:ext cx="475488" cy="475488"/>
+          </a:xfrm>
+          <a:prstGeom prst="ellipse">
+            <a:avLst/>
+          </a:prstGeom>
+          <a:solidFill>
+            <a:srgbClr val="0284C7"/>
+          </a:solidFill>
+          <a:ln w="19050">
+            <a:solidFill>
+              <a:srgbClr val="FFFFFF"/>
+            </a:solidFill>
+          </a:ln>
+        </p:spPr>
+        <p:style>
+          <a:lnRef idx="1">
+            <a:schemeClr val="accent1"/>
+          </a:lnRef>
+          <a:fillRef idx="3">
+            <a:schemeClr val="accent1"/>
+          </a:fillRef>
+          <a:effectRef idx="2">
+            <a:schemeClr val="accent1"/>
+          </a:effectRef>
+          <a:fontRef idx="minor">
+            <a:schemeClr val="lt1"/>
+          </a:fontRef>
+        </p:style>
+        <p:txBody>
+          <a:bodyPr rtlCol="0" anchor="ctr"/>
+          <a:lstStyle/>
+          <a:p>
+            <a:pPr algn="ctr"/>
+            <a:r>
+              <a:rPr b="1" sz="1300">
+                <a:solidFill>
+                  <a:srgbClr val="FFFFFF"/>
+                </a:solidFill>
+              </a:rPr>
+              <a:t>04</a:t>
+            </a:r>
+          </a:p>
+        </p:txBody>
+      </p:sp>
+      <p:sp>
+        <p:nvSpPr>
+          <p:cNvPr id="19" name="Rounded Rectangle 18"/>
+          <p:cNvSpPr/>
+          <p:nvPr/>
+        </p:nvSpPr>
+        <p:spPr>
+          <a:xfrm>
+            <a:off x="9546332" y="1143000"/>
+            <a:ext cx="2084831" cy="5120640"/>
+          </a:xfrm>
+          <a:prstGeom prst="roundRect">
+            <a:avLst/>
+          </a:prstGeom>
+          <a:solidFill>
+            <a:srgbClr val="FFFFFF"/>
+          </a:solidFill>
+          <a:ln w="15240">
+            <a:solidFill>
+              <a:srgbClr val="E2E8F0"/>
+            </a:solidFill>
+          </a:ln>
+          <a:effectLst>
+            <a:outerShdw blurRad="101600" dist="25400" dir="5400000" algn="t" rotWithShape="0">
+              <a:srgbClr val="0F172A">
+                <a:alpha val="10000"/>
+              </a:srgbClr>
+            </a:outerShdw>
+          </a:effectLst>
+        </p:spPr>
+        <p:style>
+          <a:lnRef idx="1">
+            <a:schemeClr val="accent1"/>
+          </a:lnRef>
+          <a:fillRef idx="3">
+            <a:schemeClr val="accent1"/>
+          </a:fillRef>
+          <a:effectRef idx="2">
+            <a:schemeClr val="accent1"/>
+          </a:effectRef>
+          <a:fontRef idx="minor">
+            <a:schemeClr val="lt1"/>
+          </a:fontRef>
+        </p:style>
+        <p:txBody>
+          <a:bodyPr rtlCol="0" anchor="t" lIns="182880" rIns="182880" tIns="868680"/>
+          <a:lstStyle/>
+          <a:p>
+            <a:pPr algn="ctr"/>
+            <a:r>
+              <a:rPr b="1" sz="1100">
+                <a:solidFill>
+                  <a:srgbClr val="0F172A"/>
+                </a:solidFill>
+              </a:rPr>
+              <a:t>5. SAFE ROUTE EXTRACTION
+</a:t>
+            </a:r>
+          </a:p>
+          <a:p>
+            <a:r>
+              <a:rPr b="1" sz="950">
+                <a:solidFill>
+                  <a:srgbClr val="0D9488"/>
+                </a:solidFill>
+              </a:rPr>
+              <a:t>Hazard-Aware Dijkstra
+</a:t>
+            </a:r>
+          </a:p>
+          <a:p>
+            <a:r>
+              <a:rPr sz="950">
+                <a:solidFill>
+                  <a:srgbClr val="475569"/>
+                </a:solidFill>
+              </a:rPr>
+              <a:t>Offline Ground Station instantly charts safe walking corridor bypassing 11kV wires directly to casualty.</a:t>
+            </a:r>
+          </a:p>
+        </p:txBody>
+      </p:sp>
+      <p:sp>
+        <p:nvSpPr>
+          <p:cNvPr id="20" name="Rounded Rectangle 19"/>
+          <p:cNvSpPr/>
+          <p:nvPr/>
+        </p:nvSpPr>
+        <p:spPr>
+          <a:xfrm>
+            <a:off x="9546332" y="1143000"/>
+            <a:ext cx="2084831" cy="73152"/>
+          </a:xfrm>
+          <a:prstGeom prst="roundRect">
+            <a:avLst/>
+          </a:prstGeom>
+          <a:solidFill>
+            <a:srgbClr val="0D9488"/>
+          </a:solidFill>
+          <a:ln>
+            <a:noFill/>
+          </a:ln>
+        </p:spPr>
+        <p:style>
+          <a:lnRef idx="1">
+            <a:schemeClr val="accent1"/>
+          </a:lnRef>
+          <a:fillRef idx="3">
+            <a:schemeClr val="accent1"/>
+          </a:fillRef>
+          <a:effectRef idx="2">
+            <a:schemeClr val="accent1"/>
+          </a:effectRef>
+          <a:fontRef idx="minor">
+            <a:schemeClr val="lt1"/>
+          </a:fontRef>
+        </p:style>
+        <p:txBody>
+          <a:bodyPr rtlCol="0" anchor="ctr"/>
+          <a:lstStyle/>
+          <a:p>
+            <a:pPr algn="ctr"/>
+          </a:p>
+        </p:txBody>
+      </p:sp>
+      <p:sp>
+        <p:nvSpPr>
+          <p:cNvPr id="21" name="Oval 20"/>
+          <p:cNvSpPr/>
+          <p:nvPr/>
+        </p:nvSpPr>
+        <p:spPr>
+          <a:xfrm>
+            <a:off x="9729212" y="1371600"/>
+            <a:ext cx="475488" cy="475488"/>
+          </a:xfrm>
+          <a:prstGeom prst="ellipse">
+            <a:avLst/>
+          </a:prstGeom>
+          <a:solidFill>
+            <a:srgbClr val="0D9488"/>
+          </a:solidFill>
+          <a:ln w="19050">
+            <a:solidFill>
+              <a:srgbClr val="FFFFFF"/>
+            </a:solidFill>
+          </a:ln>
+        </p:spPr>
+        <p:style>
+          <a:lnRef idx="1">
+            <a:schemeClr val="accent1"/>
+          </a:lnRef>
+          <a:fillRef idx="3">
+            <a:schemeClr val="accent1"/>
+          </a:fillRef>
+          <a:effectRef idx="2">
+            <a:schemeClr val="accent1"/>
+          </a:effectRef>
+          <a:fontRef idx="minor">
+            <a:schemeClr val="lt1"/>
+          </a:fontRef>
+        </p:style>
+        <p:txBody>
+          <a:bodyPr rtlCol="0" anchor="ctr"/>
+          <a:lstStyle/>
+          <a:p>
+            <a:pPr algn="ctr"/>
+            <a:r>
+              <a:rPr b="1" sz="1300">
+                <a:solidFill>
+                  <a:srgbClr val="FFFFFF"/>
+                </a:solidFill>
+              </a:rPr>
+              <a:t>05</a:t>
+            </a:r>
           </a:p>
         </p:txBody>
       </p:sp>
